--- a/docs/plots/carbo/jx_carbo_linsubhr_ratio_hosp1.pptx
+++ b/docs/plots/carbo/jx_carbo_linsubhr_ratio_hosp1.pptx
@@ -3003,548 +3003,530 @@
           <p:spPr>
             <a:xfrm>
               <a:off x="817517" y="1896563"/>
-              <a:ext cx="7370972" cy="3579294"/>
+              <a:ext cx="7370972" cy="3612551"/>
             </a:xfrm>
             <a:custGeom>
               <a:avLst/>
               <a:pathLst>
-                <a:path w="7370972" h="3579294">
+                <a:path w="7370972" h="3612551">
                   <a:moveTo>
-                    <a:pt x="1073845" y="0"/>
+                    <a:pt x="1528089" y="0"/>
                   </a:moveTo>
                   <a:lnTo>
-                    <a:pt x="1082615" y="20251"/>
-                  </a:lnTo>
-                  <a:lnTo>
-                    <a:pt x="1160249" y="191104"/>
-                  </a:lnTo>
-                  <a:lnTo>
-                    <a:pt x="1237883" y="353920"/>
-                  </a:lnTo>
-                  <a:lnTo>
-                    <a:pt x="1315517" y="509078"/>
-                  </a:lnTo>
-                  <a:lnTo>
-                    <a:pt x="1393151" y="656938"/>
-                  </a:lnTo>
-                  <a:lnTo>
-                    <a:pt x="1470785" y="797843"/>
-                  </a:lnTo>
-                  <a:lnTo>
-                    <a:pt x="1548419" y="932121"/>
-                  </a:lnTo>
-                  <a:lnTo>
-                    <a:pt x="1626053" y="1060083"/>
-                  </a:lnTo>
-                  <a:lnTo>
-                    <a:pt x="1703687" y="1182026"/>
-                  </a:lnTo>
-                  <a:lnTo>
-                    <a:pt x="1781321" y="1298234"/>
-                  </a:lnTo>
-                  <a:lnTo>
-                    <a:pt x="1858955" y="1408975"/>
-                  </a:lnTo>
-                  <a:lnTo>
-                    <a:pt x="1936589" y="1514508"/>
-                  </a:lnTo>
-                  <a:lnTo>
-                    <a:pt x="2014223" y="1615077"/>
-                  </a:lnTo>
-                  <a:lnTo>
-                    <a:pt x="2091857" y="1710915"/>
-                  </a:lnTo>
-                  <a:lnTo>
-                    <a:pt x="2169491" y="1802246"/>
-                  </a:lnTo>
-                  <a:lnTo>
-                    <a:pt x="2247125" y="1889281"/>
-                  </a:lnTo>
-                  <a:lnTo>
-                    <a:pt x="2324759" y="1972222"/>
-                  </a:lnTo>
-                  <a:lnTo>
-                    <a:pt x="2402393" y="2051262"/>
-                  </a:lnTo>
-                  <a:lnTo>
-                    <a:pt x="2480027" y="2126584"/>
-                  </a:lnTo>
-                  <a:lnTo>
-                    <a:pt x="2557661" y="2198363"/>
-                  </a:lnTo>
-                  <a:lnTo>
-                    <a:pt x="2635295" y="2266767"/>
-                  </a:lnTo>
-                  <a:lnTo>
-                    <a:pt x="2712930" y="2331952"/>
-                  </a:lnTo>
-                  <a:lnTo>
-                    <a:pt x="2790564" y="2394072"/>
-                  </a:lnTo>
-                  <a:lnTo>
-                    <a:pt x="2868198" y="2453270"/>
-                  </a:lnTo>
-                  <a:lnTo>
-                    <a:pt x="2945832" y="2509683"/>
-                  </a:lnTo>
-                  <a:lnTo>
-                    <a:pt x="3023466" y="2563443"/>
-                  </a:lnTo>
-                  <a:lnTo>
-                    <a:pt x="3101100" y="2614675"/>
-                  </a:lnTo>
-                  <a:lnTo>
-                    <a:pt x="3178734" y="2663496"/>
-                  </a:lnTo>
-                  <a:lnTo>
-                    <a:pt x="3256368" y="2710022"/>
-                  </a:lnTo>
-                  <a:lnTo>
-                    <a:pt x="3334002" y="2754359"/>
-                  </a:lnTo>
-                  <a:lnTo>
-                    <a:pt x="3411636" y="2781804"/>
-                  </a:lnTo>
-                  <a:lnTo>
-                    <a:pt x="3489270" y="2778254"/>
-                  </a:lnTo>
-                  <a:lnTo>
-                    <a:pt x="3566904" y="2774690"/>
-                  </a:lnTo>
-                  <a:lnTo>
-                    <a:pt x="3644538" y="2771111"/>
-                  </a:lnTo>
-                  <a:lnTo>
-                    <a:pt x="3722172" y="2767518"/>
-                  </a:lnTo>
-                  <a:lnTo>
-                    <a:pt x="3799806" y="2763910"/>
-                  </a:lnTo>
-                  <a:lnTo>
-                    <a:pt x="3877440" y="2760287"/>
-                  </a:lnTo>
-                  <a:lnTo>
-                    <a:pt x="3955074" y="2756649"/>
-                  </a:lnTo>
-                  <a:lnTo>
-                    <a:pt x="4032708" y="2752997"/>
-                  </a:lnTo>
-                  <a:lnTo>
-                    <a:pt x="4110342" y="2749330"/>
-                  </a:lnTo>
-                  <a:lnTo>
-                    <a:pt x="4187976" y="2745647"/>
-                  </a:lnTo>
-                  <a:lnTo>
-                    <a:pt x="4265610" y="2741950"/>
-                  </a:lnTo>
-                  <a:lnTo>
-                    <a:pt x="4343244" y="2738238"/>
-                  </a:lnTo>
-                  <a:lnTo>
-                    <a:pt x="4420879" y="2734510"/>
-                  </a:lnTo>
-                  <a:lnTo>
-                    <a:pt x="4498513" y="2730768"/>
-                  </a:lnTo>
-                  <a:lnTo>
-                    <a:pt x="4576147" y="2727010"/>
-                  </a:lnTo>
-                  <a:lnTo>
-                    <a:pt x="4653781" y="2723236"/>
-                  </a:lnTo>
-                  <a:lnTo>
-                    <a:pt x="4731415" y="2719448"/>
-                  </a:lnTo>
-                  <a:lnTo>
-                    <a:pt x="4809049" y="2715644"/>
-                  </a:lnTo>
-                  <a:lnTo>
-                    <a:pt x="4886683" y="2711824"/>
-                  </a:lnTo>
-                  <a:lnTo>
-                    <a:pt x="4964317" y="2707989"/>
-                  </a:lnTo>
-                  <a:lnTo>
-                    <a:pt x="5041951" y="2704138"/>
-                  </a:lnTo>
-                  <a:lnTo>
-                    <a:pt x="5119585" y="2700272"/>
-                  </a:lnTo>
-                  <a:lnTo>
-                    <a:pt x="5197219" y="2696390"/>
-                  </a:lnTo>
-                  <a:lnTo>
-                    <a:pt x="5274853" y="2692492"/>
-                  </a:lnTo>
-                  <a:lnTo>
-                    <a:pt x="5352487" y="2688578"/>
-                  </a:lnTo>
-                  <a:lnTo>
-                    <a:pt x="5430121" y="2684648"/>
-                  </a:lnTo>
-                  <a:lnTo>
-                    <a:pt x="5507755" y="2680702"/>
-                  </a:lnTo>
-                  <a:lnTo>
-                    <a:pt x="5585389" y="2676740"/>
-                  </a:lnTo>
-                  <a:lnTo>
-                    <a:pt x="5663023" y="2672762"/>
-                  </a:lnTo>
-                  <a:lnTo>
-                    <a:pt x="5740657" y="2668767"/>
-                  </a:lnTo>
-                  <a:lnTo>
-                    <a:pt x="5818291" y="2664757"/>
-                  </a:lnTo>
-                  <a:lnTo>
-                    <a:pt x="5895925" y="2660730"/>
-                  </a:lnTo>
-                  <a:lnTo>
-                    <a:pt x="5973559" y="2656686"/>
-                  </a:lnTo>
-                  <a:lnTo>
-                    <a:pt x="6051193" y="2652627"/>
-                  </a:lnTo>
-                  <a:lnTo>
-                    <a:pt x="6128827" y="2648550"/>
-                  </a:lnTo>
-                  <a:lnTo>
-                    <a:pt x="6206462" y="2644457"/>
-                  </a:lnTo>
-                  <a:lnTo>
-                    <a:pt x="6284096" y="2640347"/>
-                  </a:lnTo>
-                  <a:lnTo>
-                    <a:pt x="6361730" y="2636221"/>
-                  </a:lnTo>
-                  <a:lnTo>
-                    <a:pt x="6439364" y="2632078"/>
-                  </a:lnTo>
-                  <a:lnTo>
-                    <a:pt x="6516998" y="2627917"/>
-                  </a:lnTo>
-                  <a:lnTo>
-                    <a:pt x="6594632" y="2623740"/>
-                  </a:lnTo>
-                  <a:lnTo>
-                    <a:pt x="6672266" y="2619546"/>
-                  </a:lnTo>
-                  <a:lnTo>
-                    <a:pt x="6749900" y="2615335"/>
-                  </a:lnTo>
-                  <a:lnTo>
-                    <a:pt x="6827534" y="2611106"/>
-                  </a:lnTo>
-                  <a:lnTo>
-                    <a:pt x="6905168" y="2606861"/>
-                  </a:lnTo>
-                  <a:lnTo>
-                    <a:pt x="6982802" y="2602598"/>
-                  </a:lnTo>
-                  <a:lnTo>
-                    <a:pt x="7060436" y="2598317"/>
-                  </a:lnTo>
-                  <a:lnTo>
-                    <a:pt x="7138070" y="2594019"/>
-                  </a:lnTo>
-                  <a:lnTo>
-                    <a:pt x="7215704" y="2589704"/>
-                  </a:lnTo>
-                  <a:lnTo>
-                    <a:pt x="7293338" y="2585371"/>
-                  </a:lnTo>
-                  <a:lnTo>
-                    <a:pt x="7370972" y="2581020"/>
-                  </a:lnTo>
-                  <a:lnTo>
-                    <a:pt x="7370972" y="3579294"/>
-                  </a:lnTo>
-                  <a:lnTo>
-                    <a:pt x="7293338" y="3575674"/>
-                  </a:lnTo>
-                  <a:lnTo>
-                    <a:pt x="7215704" y="3571874"/>
-                  </a:lnTo>
-                  <a:lnTo>
-                    <a:pt x="7138070" y="3567888"/>
-                  </a:lnTo>
-                  <a:lnTo>
-                    <a:pt x="7060436" y="3563705"/>
-                  </a:lnTo>
-                  <a:lnTo>
-                    <a:pt x="6982802" y="3559315"/>
-                  </a:lnTo>
-                  <a:lnTo>
-                    <a:pt x="6905168" y="3554708"/>
-                  </a:lnTo>
-                  <a:lnTo>
-                    <a:pt x="6827534" y="3549875"/>
-                  </a:lnTo>
-                  <a:lnTo>
-                    <a:pt x="6749900" y="3544802"/>
-                  </a:lnTo>
-                  <a:lnTo>
-                    <a:pt x="6672266" y="3539480"/>
-                  </a:lnTo>
-                  <a:lnTo>
-                    <a:pt x="6594632" y="3533894"/>
-                  </a:lnTo>
-                  <a:lnTo>
-                    <a:pt x="6516998" y="3528033"/>
-                  </a:lnTo>
-                  <a:lnTo>
-                    <a:pt x="6439364" y="3521882"/>
-                  </a:lnTo>
-                  <a:lnTo>
-                    <a:pt x="6361730" y="3515428"/>
-                  </a:lnTo>
-                  <a:lnTo>
-                    <a:pt x="6284096" y="3508656"/>
-                  </a:lnTo>
-                  <a:lnTo>
-                    <a:pt x="6206462" y="3501549"/>
-                  </a:lnTo>
-                  <a:lnTo>
-                    <a:pt x="6128827" y="3494091"/>
-                  </a:lnTo>
-                  <a:lnTo>
-                    <a:pt x="6051193" y="3486266"/>
-                  </a:lnTo>
-                  <a:lnTo>
-                    <a:pt x="5973559" y="3478054"/>
-                  </a:lnTo>
-                  <a:lnTo>
-                    <a:pt x="5895925" y="3469437"/>
-                  </a:lnTo>
-                  <a:lnTo>
-                    <a:pt x="5818291" y="3460394"/>
-                  </a:lnTo>
-                  <a:lnTo>
-                    <a:pt x="5740657" y="3450905"/>
-                  </a:lnTo>
-                  <a:lnTo>
-                    <a:pt x="5663023" y="3440948"/>
-                  </a:lnTo>
-                  <a:lnTo>
-                    <a:pt x="5585389" y="3430499"/>
-                  </a:lnTo>
-                  <a:lnTo>
-                    <a:pt x="5507755" y="3419535"/>
-                  </a:lnTo>
-                  <a:lnTo>
-                    <a:pt x="5430121" y="3408029"/>
-                  </a:lnTo>
-                  <a:lnTo>
-                    <a:pt x="5352487" y="3395955"/>
-                  </a:lnTo>
-                  <a:lnTo>
-                    <a:pt x="5274853" y="3383286"/>
-                  </a:lnTo>
-                  <a:lnTo>
-                    <a:pt x="5197219" y="3369991"/>
-                  </a:lnTo>
-                  <a:lnTo>
-                    <a:pt x="5119585" y="3356040"/>
-                  </a:lnTo>
-                  <a:lnTo>
-                    <a:pt x="5041951" y="3341401"/>
-                  </a:lnTo>
-                  <a:lnTo>
-                    <a:pt x="4964317" y="3326039"/>
-                  </a:lnTo>
-                  <a:lnTo>
-                    <a:pt x="4886683" y="3309918"/>
-                  </a:lnTo>
-                  <a:lnTo>
-                    <a:pt x="4809049" y="3293002"/>
-                  </a:lnTo>
-                  <a:lnTo>
-                    <a:pt x="4731415" y="3275251"/>
-                  </a:lnTo>
-                  <a:lnTo>
-                    <a:pt x="4653781" y="3256624"/>
-                  </a:lnTo>
-                  <a:lnTo>
-                    <a:pt x="4576147" y="3237078"/>
-                  </a:lnTo>
-                  <a:lnTo>
-                    <a:pt x="4498513" y="3216567"/>
-                  </a:lnTo>
-                  <a:lnTo>
-                    <a:pt x="4420879" y="3195043"/>
-                  </a:lnTo>
-                  <a:lnTo>
-                    <a:pt x="4343244" y="3172457"/>
-                  </a:lnTo>
-                  <a:lnTo>
-                    <a:pt x="4265610" y="3148756"/>
-                  </a:lnTo>
-                  <a:lnTo>
-                    <a:pt x="4187976" y="3123886"/>
-                  </a:lnTo>
-                  <a:lnTo>
-                    <a:pt x="4110342" y="3097788"/>
-                  </a:lnTo>
-                  <a:lnTo>
-                    <a:pt x="4032708" y="3070402"/>
-                  </a:lnTo>
-                  <a:lnTo>
-                    <a:pt x="3955074" y="3041664"/>
-                  </a:lnTo>
-                  <a:lnTo>
-                    <a:pt x="3877440" y="3011507"/>
-                  </a:lnTo>
-                  <a:lnTo>
-                    <a:pt x="3799806" y="2979863"/>
-                  </a:lnTo>
-                  <a:lnTo>
-                    <a:pt x="3722172" y="2946656"/>
-                  </a:lnTo>
-                  <a:lnTo>
-                    <a:pt x="3644538" y="2911810"/>
-                  </a:lnTo>
-                  <a:lnTo>
-                    <a:pt x="3566904" y="2875245"/>
-                  </a:lnTo>
-                  <a:lnTo>
-                    <a:pt x="3489270" y="2836874"/>
-                  </a:lnTo>
-                  <a:lnTo>
-                    <a:pt x="3411636" y="2796610"/>
-                  </a:lnTo>
-                  <a:lnTo>
-                    <a:pt x="3334002" y="2785340"/>
-                  </a:lnTo>
-                  <a:lnTo>
-                    <a:pt x="3256368" y="2788861"/>
-                  </a:lnTo>
-                  <a:lnTo>
-                    <a:pt x="3178734" y="2792368"/>
-                  </a:lnTo>
-                  <a:lnTo>
-                    <a:pt x="3101100" y="2795860"/>
-                  </a:lnTo>
-                  <a:lnTo>
-                    <a:pt x="3023466" y="2799339"/>
-                  </a:lnTo>
-                  <a:lnTo>
-                    <a:pt x="2945832" y="2802803"/>
-                  </a:lnTo>
-                  <a:lnTo>
-                    <a:pt x="2868198" y="2806253"/>
-                  </a:lnTo>
-                  <a:lnTo>
-                    <a:pt x="2790564" y="2809689"/>
-                  </a:lnTo>
-                  <a:lnTo>
-                    <a:pt x="2712930" y="2813111"/>
-                  </a:lnTo>
-                  <a:lnTo>
-                    <a:pt x="2635295" y="2816520"/>
-                  </a:lnTo>
-                  <a:lnTo>
-                    <a:pt x="2557661" y="2819914"/>
-                  </a:lnTo>
-                  <a:lnTo>
-                    <a:pt x="2480027" y="2823295"/>
-                  </a:lnTo>
-                  <a:lnTo>
-                    <a:pt x="2402393" y="2826662"/>
-                  </a:lnTo>
-                  <a:lnTo>
-                    <a:pt x="2324759" y="2830015"/>
-                  </a:lnTo>
-                  <a:lnTo>
-                    <a:pt x="2247125" y="2833355"/>
-                  </a:lnTo>
-                  <a:lnTo>
-                    <a:pt x="2169491" y="2836681"/>
-                  </a:lnTo>
-                  <a:lnTo>
-                    <a:pt x="2091857" y="2839994"/>
-                  </a:lnTo>
-                  <a:lnTo>
-                    <a:pt x="2014223" y="2843293"/>
-                  </a:lnTo>
-                  <a:lnTo>
-                    <a:pt x="1936589" y="2846579"/>
-                  </a:lnTo>
-                  <a:lnTo>
-                    <a:pt x="1858955" y="2849851"/>
-                  </a:lnTo>
-                  <a:lnTo>
-                    <a:pt x="1781321" y="2853111"/>
-                  </a:lnTo>
-                  <a:lnTo>
-                    <a:pt x="1703687" y="2856357"/>
-                  </a:lnTo>
-                  <a:lnTo>
-                    <a:pt x="1626053" y="2859589"/>
-                  </a:lnTo>
-                  <a:lnTo>
-                    <a:pt x="1548419" y="2862809"/>
-                  </a:lnTo>
-                  <a:lnTo>
-                    <a:pt x="1470785" y="2866016"/>
-                  </a:lnTo>
-                  <a:lnTo>
-                    <a:pt x="1393151" y="2869209"/>
-                  </a:lnTo>
-                  <a:lnTo>
-                    <a:pt x="1315517" y="2872390"/>
-                  </a:lnTo>
-                  <a:lnTo>
-                    <a:pt x="1237883" y="2875557"/>
-                  </a:lnTo>
-                  <a:lnTo>
-                    <a:pt x="1160249" y="2878712"/>
-                  </a:lnTo>
-                  <a:lnTo>
-                    <a:pt x="1082615" y="2881854"/>
-                  </a:lnTo>
-                  <a:lnTo>
-                    <a:pt x="1004981" y="2884984"/>
-                  </a:lnTo>
-                  <a:lnTo>
-                    <a:pt x="927346" y="2888100"/>
-                  </a:lnTo>
-                  <a:lnTo>
-                    <a:pt x="849712" y="2891204"/>
-                  </a:lnTo>
-                  <a:lnTo>
-                    <a:pt x="772078" y="2894295"/>
-                  </a:lnTo>
-                  <a:lnTo>
-                    <a:pt x="694444" y="2897374"/>
-                  </a:lnTo>
-                  <a:lnTo>
-                    <a:pt x="616810" y="2900440"/>
-                  </a:lnTo>
-                  <a:lnTo>
-                    <a:pt x="539176" y="2903494"/>
-                  </a:lnTo>
-                  <a:lnTo>
-                    <a:pt x="461542" y="2906536"/>
-                  </a:lnTo>
-                  <a:lnTo>
-                    <a:pt x="383908" y="2909565"/>
-                  </a:lnTo>
-                  <a:lnTo>
-                    <a:pt x="306274" y="2912581"/>
-                  </a:lnTo>
-                  <a:lnTo>
-                    <a:pt x="228640" y="2915586"/>
-                  </a:lnTo>
-                  <a:lnTo>
-                    <a:pt x="151006" y="2918578"/>
-                  </a:lnTo>
-                  <a:lnTo>
-                    <a:pt x="73372" y="2921558"/>
-                  </a:lnTo>
-                  <a:lnTo>
-                    <a:pt x="0" y="2924363"/>
+                    <a:pt x="1548419" y="58152"/>
+                  </a:lnTo>
+                  <a:lnTo>
+                    <a:pt x="1626053" y="267297"/>
+                  </a:lnTo>
+                  <a:lnTo>
+                    <a:pt x="1703687" y="464273"/>
+                  </a:lnTo>
+                  <a:lnTo>
+                    <a:pt x="1781321" y="649788"/>
+                  </a:lnTo>
+                  <a:lnTo>
+                    <a:pt x="1858955" y="824509"/>
+                  </a:lnTo>
+                  <a:lnTo>
+                    <a:pt x="1936589" y="989064"/>
+                  </a:lnTo>
+                  <a:lnTo>
+                    <a:pt x="2014223" y="1144044"/>
+                  </a:lnTo>
+                  <a:lnTo>
+                    <a:pt x="2091857" y="1290006"/>
+                  </a:lnTo>
+                  <a:lnTo>
+                    <a:pt x="2169491" y="1427476"/>
+                  </a:lnTo>
+                  <a:lnTo>
+                    <a:pt x="2247125" y="1556947"/>
+                  </a:lnTo>
+                  <a:lnTo>
+                    <a:pt x="2324759" y="1678885"/>
+                  </a:lnTo>
+                  <a:lnTo>
+                    <a:pt x="2402393" y="1793728"/>
+                  </a:lnTo>
+                  <a:lnTo>
+                    <a:pt x="2480027" y="1901889"/>
+                  </a:lnTo>
+                  <a:lnTo>
+                    <a:pt x="2557661" y="2003756"/>
+                  </a:lnTo>
+                  <a:lnTo>
+                    <a:pt x="2635295" y="2099697"/>
+                  </a:lnTo>
+                  <a:lnTo>
+                    <a:pt x="2712930" y="2190055"/>
+                  </a:lnTo>
+                  <a:lnTo>
+                    <a:pt x="2790564" y="2275155"/>
+                  </a:lnTo>
+                  <a:lnTo>
+                    <a:pt x="2868198" y="2355304"/>
+                  </a:lnTo>
+                  <a:lnTo>
+                    <a:pt x="2945832" y="2430790"/>
+                  </a:lnTo>
+                  <a:lnTo>
+                    <a:pt x="3023466" y="2501883"/>
+                  </a:lnTo>
+                  <a:lnTo>
+                    <a:pt x="3101100" y="2568840"/>
+                  </a:lnTo>
+                  <a:lnTo>
+                    <a:pt x="3178734" y="2631901"/>
+                  </a:lnTo>
+                  <a:lnTo>
+                    <a:pt x="3256368" y="2691293"/>
+                  </a:lnTo>
+                  <a:lnTo>
+                    <a:pt x="3334002" y="2747229"/>
+                  </a:lnTo>
+                  <a:lnTo>
+                    <a:pt x="3411636" y="2779927"/>
+                  </a:lnTo>
+                  <a:lnTo>
+                    <a:pt x="3489270" y="2770602"/>
+                  </a:lnTo>
+                  <a:lnTo>
+                    <a:pt x="3566904" y="2761177"/>
+                  </a:lnTo>
+                  <a:lnTo>
+                    <a:pt x="3644538" y="2751651"/>
+                  </a:lnTo>
+                  <a:lnTo>
+                    <a:pt x="3722172" y="2742024"/>
+                  </a:lnTo>
+                  <a:lnTo>
+                    <a:pt x="3799806" y="2732293"/>
+                  </a:lnTo>
+                  <a:lnTo>
+                    <a:pt x="3877440" y="2722459"/>
+                  </a:lnTo>
+                  <a:lnTo>
+                    <a:pt x="3955074" y="2712520"/>
+                  </a:lnTo>
+                  <a:lnTo>
+                    <a:pt x="4032708" y="2702474"/>
+                  </a:lnTo>
+                  <a:lnTo>
+                    <a:pt x="4110342" y="2692321"/>
+                  </a:lnTo>
+                  <a:lnTo>
+                    <a:pt x="4187976" y="2682060"/>
+                  </a:lnTo>
+                  <a:lnTo>
+                    <a:pt x="4265610" y="2671689"/>
+                  </a:lnTo>
+                  <a:lnTo>
+                    <a:pt x="4343244" y="2661207"/>
+                  </a:lnTo>
+                  <a:lnTo>
+                    <a:pt x="4420879" y="2650613"/>
+                  </a:lnTo>
+                  <a:lnTo>
+                    <a:pt x="4498513" y="2639906"/>
+                  </a:lnTo>
+                  <a:lnTo>
+                    <a:pt x="4576147" y="2629084"/>
+                  </a:lnTo>
+                  <a:lnTo>
+                    <a:pt x="4653781" y="2618147"/>
+                  </a:lnTo>
+                  <a:lnTo>
+                    <a:pt x="4731415" y="2607093"/>
+                  </a:lnTo>
+                  <a:lnTo>
+                    <a:pt x="4809049" y="2595921"/>
+                  </a:lnTo>
+                  <a:lnTo>
+                    <a:pt x="4886683" y="2584629"/>
+                  </a:lnTo>
+                  <a:lnTo>
+                    <a:pt x="4964317" y="2573217"/>
+                  </a:lnTo>
+                  <a:lnTo>
+                    <a:pt x="5041951" y="2561683"/>
+                  </a:lnTo>
+                  <a:lnTo>
+                    <a:pt x="5119585" y="2550026"/>
+                  </a:lnTo>
+                  <a:lnTo>
+                    <a:pt x="5197219" y="2538244"/>
+                  </a:lnTo>
+                  <a:lnTo>
+                    <a:pt x="5274853" y="2526336"/>
+                  </a:lnTo>
+                  <a:lnTo>
+                    <a:pt x="5352487" y="2514301"/>
+                  </a:lnTo>
+                  <a:lnTo>
+                    <a:pt x="5430121" y="2502138"/>
+                  </a:lnTo>
+                  <a:lnTo>
+                    <a:pt x="5507755" y="2489844"/>
+                  </a:lnTo>
+                  <a:lnTo>
+                    <a:pt x="5585389" y="2477419"/>
+                  </a:lnTo>
+                  <a:lnTo>
+                    <a:pt x="5663023" y="2464861"/>
+                  </a:lnTo>
+                  <a:lnTo>
+                    <a:pt x="5740657" y="2452169"/>
+                  </a:lnTo>
+                  <a:lnTo>
+                    <a:pt x="5818291" y="2439342"/>
+                  </a:lnTo>
+                  <a:lnTo>
+                    <a:pt x="5895925" y="2426377"/>
+                  </a:lnTo>
+                  <a:lnTo>
+                    <a:pt x="5973559" y="2413274"/>
+                  </a:lnTo>
+                  <a:lnTo>
+                    <a:pt x="6051193" y="2400031"/>
+                  </a:lnTo>
+                  <a:lnTo>
+                    <a:pt x="6128827" y="2386646"/>
+                  </a:lnTo>
+                  <a:lnTo>
+                    <a:pt x="6206462" y="2373119"/>
+                  </a:lnTo>
+                  <a:lnTo>
+                    <a:pt x="6284096" y="2359446"/>
+                  </a:lnTo>
+                  <a:lnTo>
+                    <a:pt x="6361730" y="2345628"/>
+                  </a:lnTo>
+                  <a:lnTo>
+                    <a:pt x="6439364" y="2331662"/>
+                  </a:lnTo>
+                  <a:lnTo>
+                    <a:pt x="6516998" y="2317547"/>
+                  </a:lnTo>
+                  <a:lnTo>
+                    <a:pt x="6594632" y="2303281"/>
+                  </a:lnTo>
+                  <a:lnTo>
+                    <a:pt x="6672266" y="2288862"/>
+                  </a:lnTo>
+                  <a:lnTo>
+                    <a:pt x="6749900" y="2274290"/>
+                  </a:lnTo>
+                  <a:lnTo>
+                    <a:pt x="6827534" y="2259562"/>
+                  </a:lnTo>
+                  <a:lnTo>
+                    <a:pt x="6905168" y="2244676"/>
+                  </a:lnTo>
+                  <a:lnTo>
+                    <a:pt x="6982802" y="2229631"/>
+                  </a:lnTo>
+                  <a:lnTo>
+                    <a:pt x="7060436" y="2214426"/>
+                  </a:lnTo>
+                  <a:lnTo>
+                    <a:pt x="7138070" y="2199058"/>
+                  </a:lnTo>
+                  <a:lnTo>
+                    <a:pt x="7215704" y="2183526"/>
+                  </a:lnTo>
+                  <a:lnTo>
+                    <a:pt x="7293338" y="2167828"/>
+                  </a:lnTo>
+                  <a:lnTo>
+                    <a:pt x="7370972" y="2151962"/>
+                  </a:lnTo>
+                  <a:lnTo>
+                    <a:pt x="7370972" y="3612551"/>
+                  </a:lnTo>
+                  <a:lnTo>
+                    <a:pt x="7293338" y="3610074"/>
+                  </a:lnTo>
+                  <a:lnTo>
+                    <a:pt x="7215704" y="3607444"/>
+                  </a:lnTo>
+                  <a:lnTo>
+                    <a:pt x="7138070" y="3604652"/>
+                  </a:lnTo>
+                  <a:lnTo>
+                    <a:pt x="7060436" y="3601687"/>
+                  </a:lnTo>
+                  <a:lnTo>
+                    <a:pt x="6982802" y="3598539"/>
+                  </a:lnTo>
+                  <a:lnTo>
+                    <a:pt x="6905168" y="3595196"/>
+                  </a:lnTo>
+                  <a:lnTo>
+                    <a:pt x="6827534" y="3591647"/>
+                  </a:lnTo>
+                  <a:lnTo>
+                    <a:pt x="6749900" y="3587879"/>
+                  </a:lnTo>
+                  <a:lnTo>
+                    <a:pt x="6672266" y="3583878"/>
+                  </a:lnTo>
+                  <a:lnTo>
+                    <a:pt x="6594632" y="3579630"/>
+                  </a:lnTo>
+                  <a:lnTo>
+                    <a:pt x="6516998" y="3575119"/>
+                  </a:lnTo>
+                  <a:lnTo>
+                    <a:pt x="6439364" y="3570329"/>
+                  </a:lnTo>
+                  <a:lnTo>
+                    <a:pt x="6361730" y="3565244"/>
+                  </a:lnTo>
+                  <a:lnTo>
+                    <a:pt x="6284096" y="3559845"/>
+                  </a:lnTo>
+                  <a:lnTo>
+                    <a:pt x="6206462" y="3554112"/>
+                  </a:lnTo>
+                  <a:lnTo>
+                    <a:pt x="6128827" y="3548024"/>
+                  </a:lnTo>
+                  <a:lnTo>
+                    <a:pt x="6051193" y="3541561"/>
+                  </a:lnTo>
+                  <a:lnTo>
+                    <a:pt x="5973559" y="3534698"/>
+                  </a:lnTo>
+                  <a:lnTo>
+                    <a:pt x="5895925" y="3527412"/>
+                  </a:lnTo>
+                  <a:lnTo>
+                    <a:pt x="5818291" y="3519675"/>
+                  </a:lnTo>
+                  <a:lnTo>
+                    <a:pt x="5740657" y="3511460"/>
+                  </a:lnTo>
+                  <a:lnTo>
+                    <a:pt x="5663023" y="3502738"/>
+                  </a:lnTo>
+                  <a:lnTo>
+                    <a:pt x="5585389" y="3493477"/>
+                  </a:lnTo>
+                  <a:lnTo>
+                    <a:pt x="5507755" y="3483644"/>
+                  </a:lnTo>
+                  <a:lnTo>
+                    <a:pt x="5430121" y="3473203"/>
+                  </a:lnTo>
+                  <a:lnTo>
+                    <a:pt x="5352487" y="3462117"/>
+                  </a:lnTo>
+                  <a:lnTo>
+                    <a:pt x="5274853" y="3450347"/>
+                  </a:lnTo>
+                  <a:lnTo>
+                    <a:pt x="5197219" y="3437849"/>
+                  </a:lnTo>
+                  <a:lnTo>
+                    <a:pt x="5119585" y="3424579"/>
+                  </a:lnTo>
+                  <a:lnTo>
+                    <a:pt x="5041951" y="3410489"/>
+                  </a:lnTo>
+                  <a:lnTo>
+                    <a:pt x="4964317" y="3395529"/>
+                  </a:lnTo>
+                  <a:lnTo>
+                    <a:pt x="4886683" y="3379645"/>
+                  </a:lnTo>
+                  <a:lnTo>
+                    <a:pt x="4809049" y="3362779"/>
+                  </a:lnTo>
+                  <a:lnTo>
+                    <a:pt x="4731415" y="3344871"/>
+                  </a:lnTo>
+                  <a:lnTo>
+                    <a:pt x="4653781" y="3325857"/>
+                  </a:lnTo>
+                  <a:lnTo>
+                    <a:pt x="4576147" y="3305669"/>
+                  </a:lnTo>
+                  <a:lnTo>
+                    <a:pt x="4498513" y="3284233"/>
+                  </a:lnTo>
+                  <a:lnTo>
+                    <a:pt x="4420879" y="3261472"/>
+                  </a:lnTo>
+                  <a:lnTo>
+                    <a:pt x="4343244" y="3237306"/>
+                  </a:lnTo>
+                  <a:lnTo>
+                    <a:pt x="4265610" y="3211647"/>
+                  </a:lnTo>
+                  <a:lnTo>
+                    <a:pt x="4187976" y="3184402"/>
+                  </a:lnTo>
+                  <a:lnTo>
+                    <a:pt x="4110342" y="3155475"/>
+                  </a:lnTo>
+                  <a:lnTo>
+                    <a:pt x="4032708" y="3124760"/>
+                  </a:lnTo>
+                  <a:lnTo>
+                    <a:pt x="3955074" y="3092147"/>
+                  </a:lnTo>
+                  <a:lnTo>
+                    <a:pt x="3877440" y="3057520"/>
+                  </a:lnTo>
+                  <a:lnTo>
+                    <a:pt x="3799806" y="3020754"/>
+                  </a:lnTo>
+                  <a:lnTo>
+                    <a:pt x="3722172" y="2981716"/>
+                  </a:lnTo>
+                  <a:lnTo>
+                    <a:pt x="3644538" y="2940266"/>
+                  </a:lnTo>
+                  <a:lnTo>
+                    <a:pt x="3566904" y="2896256"/>
+                  </a:lnTo>
+                  <a:lnTo>
+                    <a:pt x="3489270" y="2849527"/>
+                  </a:lnTo>
+                  <a:lnTo>
+                    <a:pt x="3411636" y="2799910"/>
+                  </a:lnTo>
+                  <a:lnTo>
+                    <a:pt x="3334002" y="2789154"/>
+                  </a:lnTo>
+                  <a:lnTo>
+                    <a:pt x="3256368" y="2798283"/>
+                  </a:lnTo>
+                  <a:lnTo>
+                    <a:pt x="3178734" y="2807316"/>
+                  </a:lnTo>
+                  <a:lnTo>
+                    <a:pt x="3101100" y="2816253"/>
+                  </a:lnTo>
+                  <a:lnTo>
+                    <a:pt x="3023466" y="2825095"/>
+                  </a:lnTo>
+                  <a:lnTo>
+                    <a:pt x="2945832" y="2833845"/>
+                  </a:lnTo>
+                  <a:lnTo>
+                    <a:pt x="2868198" y="2842501"/>
+                  </a:lnTo>
+                  <a:lnTo>
+                    <a:pt x="2790564" y="2851066"/>
+                  </a:lnTo>
+                  <a:lnTo>
+                    <a:pt x="2712930" y="2859541"/>
+                  </a:lnTo>
+                  <a:lnTo>
+                    <a:pt x="2635295" y="2867926"/>
+                  </a:lnTo>
+                  <a:lnTo>
+                    <a:pt x="2557661" y="2876222"/>
+                  </a:lnTo>
+                  <a:lnTo>
+                    <a:pt x="2480027" y="2884431"/>
+                  </a:lnTo>
+                  <a:lnTo>
+                    <a:pt x="2402393" y="2892553"/>
+                  </a:lnTo>
+                  <a:lnTo>
+                    <a:pt x="2324759" y="2900589"/>
+                  </a:lnTo>
+                  <a:lnTo>
+                    <a:pt x="2247125" y="2908540"/>
+                  </a:lnTo>
+                  <a:lnTo>
+                    <a:pt x="2169491" y="2916407"/>
+                  </a:lnTo>
+                  <a:lnTo>
+                    <a:pt x="2091857" y="2924191"/>
+                  </a:lnTo>
+                  <a:lnTo>
+                    <a:pt x="2014223" y="2931892"/>
+                  </a:lnTo>
+                  <a:lnTo>
+                    <a:pt x="1936589" y="2939512"/>
+                  </a:lnTo>
+                  <a:lnTo>
+                    <a:pt x="1858955" y="2947052"/>
+                  </a:lnTo>
+                  <a:lnTo>
+                    <a:pt x="1781321" y="2954512"/>
+                  </a:lnTo>
+                  <a:lnTo>
+                    <a:pt x="1703687" y="2961893"/>
+                  </a:lnTo>
+                  <a:lnTo>
+                    <a:pt x="1626053" y="2969195"/>
+                  </a:lnTo>
+                  <a:lnTo>
+                    <a:pt x="1548419" y="2976421"/>
+                  </a:lnTo>
+                  <a:lnTo>
+                    <a:pt x="1470785" y="2983570"/>
+                  </a:lnTo>
+                  <a:lnTo>
+                    <a:pt x="1393151" y="2990644"/>
+                  </a:lnTo>
+                  <a:lnTo>
+                    <a:pt x="1315517" y="2997643"/>
+                  </a:lnTo>
+                  <a:lnTo>
+                    <a:pt x="1237883" y="3004568"/>
+                  </a:lnTo>
+                  <a:lnTo>
+                    <a:pt x="1160249" y="3011420"/>
+                  </a:lnTo>
+                  <a:lnTo>
+                    <a:pt x="1082615" y="3018199"/>
+                  </a:lnTo>
+                  <a:lnTo>
+                    <a:pt x="1004981" y="3024907"/>
+                  </a:lnTo>
+                  <a:lnTo>
+                    <a:pt x="927346" y="3031543"/>
+                  </a:lnTo>
+                  <a:lnTo>
+                    <a:pt x="849712" y="3038110"/>
+                  </a:lnTo>
+                  <a:lnTo>
+                    <a:pt x="772078" y="3044607"/>
+                  </a:lnTo>
+                  <a:lnTo>
+                    <a:pt x="694444" y="3051035"/>
+                  </a:lnTo>
+                  <a:lnTo>
+                    <a:pt x="616810" y="3057396"/>
+                  </a:lnTo>
+                  <a:lnTo>
+                    <a:pt x="539176" y="3063689"/>
+                  </a:lnTo>
+                  <a:lnTo>
+                    <a:pt x="461542" y="3069916"/>
+                  </a:lnTo>
+                  <a:lnTo>
+                    <a:pt x="383908" y="3076077"/>
+                  </a:lnTo>
+                  <a:lnTo>
+                    <a:pt x="306274" y="3082172"/>
+                  </a:lnTo>
+                  <a:lnTo>
+                    <a:pt x="228640" y="3088204"/>
+                  </a:lnTo>
+                  <a:lnTo>
+                    <a:pt x="151006" y="3094171"/>
+                  </a:lnTo>
+                  <a:lnTo>
+                    <a:pt x="73372" y="3100075"/>
+                  </a:lnTo>
+                  <a:lnTo>
+                    <a:pt x="0" y="3105597"/>
                   </a:lnTo>
                   <a:close/>
                 </a:path>
@@ -3570,261 +3552,243 @@
           </p:nvSpPr>
           <p:spPr>
             <a:xfrm>
-              <a:off x="1891363" y="1896563"/>
-              <a:ext cx="6297127" cy="2781804"/>
+              <a:off x="2345607" y="1896563"/>
+              <a:ext cx="5842883" cy="2779927"/>
             </a:xfrm>
             <a:custGeom>
               <a:avLst/>
               <a:pathLst>
-                <a:path w="6297127" h="2781804">
+                <a:path w="5842883" h="2779927">
                   <a:moveTo>
                     <a:pt x="0" y="0"/>
                   </a:moveTo>
                   <a:lnTo>
-                    <a:pt x="8769" y="20251"/>
-                  </a:lnTo>
-                  <a:lnTo>
-                    <a:pt x="86403" y="191104"/>
-                  </a:lnTo>
-                  <a:lnTo>
-                    <a:pt x="164037" y="353920"/>
-                  </a:lnTo>
-                  <a:lnTo>
-                    <a:pt x="241671" y="509078"/>
-                  </a:lnTo>
-                  <a:lnTo>
-                    <a:pt x="319305" y="656938"/>
-                  </a:lnTo>
-                  <a:lnTo>
-                    <a:pt x="396939" y="797843"/>
-                  </a:lnTo>
-                  <a:lnTo>
-                    <a:pt x="474573" y="932121"/>
-                  </a:lnTo>
-                  <a:lnTo>
-                    <a:pt x="552207" y="1060083"/>
-                  </a:lnTo>
-                  <a:lnTo>
-                    <a:pt x="629841" y="1182026"/>
-                  </a:lnTo>
-                  <a:lnTo>
-                    <a:pt x="707475" y="1298234"/>
-                  </a:lnTo>
-                  <a:lnTo>
-                    <a:pt x="785109" y="1408975"/>
-                  </a:lnTo>
-                  <a:lnTo>
-                    <a:pt x="862743" y="1514508"/>
-                  </a:lnTo>
-                  <a:lnTo>
-                    <a:pt x="940378" y="1615077"/>
-                  </a:lnTo>
-                  <a:lnTo>
-                    <a:pt x="1018012" y="1710915"/>
-                  </a:lnTo>
-                  <a:lnTo>
-                    <a:pt x="1095646" y="1802246"/>
-                  </a:lnTo>
-                  <a:lnTo>
-                    <a:pt x="1173280" y="1889281"/>
-                  </a:lnTo>
-                  <a:lnTo>
-                    <a:pt x="1250914" y="1972222"/>
-                  </a:lnTo>
-                  <a:lnTo>
-                    <a:pt x="1328548" y="2051262"/>
-                  </a:lnTo>
-                  <a:lnTo>
-                    <a:pt x="1406182" y="2126584"/>
-                  </a:lnTo>
-                  <a:lnTo>
-                    <a:pt x="1483816" y="2198363"/>
-                  </a:lnTo>
-                  <a:lnTo>
-                    <a:pt x="1561450" y="2266767"/>
-                  </a:lnTo>
-                  <a:lnTo>
-                    <a:pt x="1639084" y="2331952"/>
-                  </a:lnTo>
-                  <a:lnTo>
-                    <a:pt x="1716718" y="2394072"/>
-                  </a:lnTo>
-                  <a:lnTo>
-                    <a:pt x="1794352" y="2453270"/>
-                  </a:lnTo>
-                  <a:lnTo>
-                    <a:pt x="1871986" y="2509683"/>
-                  </a:lnTo>
-                  <a:lnTo>
-                    <a:pt x="1949620" y="2563443"/>
-                  </a:lnTo>
-                  <a:lnTo>
-                    <a:pt x="2027254" y="2614675"/>
-                  </a:lnTo>
-                  <a:lnTo>
-                    <a:pt x="2104888" y="2663496"/>
-                  </a:lnTo>
-                  <a:lnTo>
-                    <a:pt x="2182522" y="2710022"/>
-                  </a:lnTo>
-                  <a:lnTo>
-                    <a:pt x="2260156" y="2754359"/>
-                  </a:lnTo>
-                  <a:lnTo>
-                    <a:pt x="2337790" y="2781804"/>
-                  </a:lnTo>
-                  <a:lnTo>
-                    <a:pt x="2415424" y="2778254"/>
-                  </a:lnTo>
-                  <a:lnTo>
-                    <a:pt x="2493058" y="2774690"/>
-                  </a:lnTo>
-                  <a:lnTo>
-                    <a:pt x="2570692" y="2771111"/>
-                  </a:lnTo>
-                  <a:lnTo>
-                    <a:pt x="2648326" y="2767518"/>
-                  </a:lnTo>
-                  <a:lnTo>
-                    <a:pt x="2725961" y="2763910"/>
-                  </a:lnTo>
-                  <a:lnTo>
-                    <a:pt x="2803595" y="2760287"/>
-                  </a:lnTo>
-                  <a:lnTo>
-                    <a:pt x="2881229" y="2756649"/>
-                  </a:lnTo>
-                  <a:lnTo>
-                    <a:pt x="2958863" y="2752997"/>
-                  </a:lnTo>
-                  <a:lnTo>
-                    <a:pt x="3036497" y="2749330"/>
-                  </a:lnTo>
-                  <a:lnTo>
-                    <a:pt x="3114131" y="2745647"/>
-                  </a:lnTo>
-                  <a:lnTo>
-                    <a:pt x="3191765" y="2741950"/>
-                  </a:lnTo>
-                  <a:lnTo>
-                    <a:pt x="3269399" y="2738238"/>
-                  </a:lnTo>
-                  <a:lnTo>
-                    <a:pt x="3347033" y="2734510"/>
-                  </a:lnTo>
-                  <a:lnTo>
-                    <a:pt x="3424667" y="2730768"/>
-                  </a:lnTo>
-                  <a:lnTo>
-                    <a:pt x="3502301" y="2727010"/>
-                  </a:lnTo>
-                  <a:lnTo>
-                    <a:pt x="3579935" y="2723236"/>
-                  </a:lnTo>
-                  <a:lnTo>
-                    <a:pt x="3657569" y="2719448"/>
-                  </a:lnTo>
-                  <a:lnTo>
-                    <a:pt x="3735203" y="2715644"/>
-                  </a:lnTo>
-                  <a:lnTo>
-                    <a:pt x="3812837" y="2711824"/>
-                  </a:lnTo>
-                  <a:lnTo>
-                    <a:pt x="3890471" y="2707989"/>
-                  </a:lnTo>
-                  <a:lnTo>
-                    <a:pt x="3968105" y="2704138"/>
-                  </a:lnTo>
-                  <a:lnTo>
-                    <a:pt x="4045739" y="2700272"/>
-                  </a:lnTo>
-                  <a:lnTo>
-                    <a:pt x="4123373" y="2696390"/>
-                  </a:lnTo>
-                  <a:lnTo>
-                    <a:pt x="4201007" y="2692492"/>
-                  </a:lnTo>
-                  <a:lnTo>
-                    <a:pt x="4278641" y="2688578"/>
-                  </a:lnTo>
-                  <a:lnTo>
-                    <a:pt x="4356275" y="2684648"/>
-                  </a:lnTo>
-                  <a:lnTo>
-                    <a:pt x="4433910" y="2680702"/>
-                  </a:lnTo>
-                  <a:lnTo>
-                    <a:pt x="4511544" y="2676740"/>
-                  </a:lnTo>
-                  <a:lnTo>
-                    <a:pt x="4589178" y="2672762"/>
-                  </a:lnTo>
-                  <a:lnTo>
-                    <a:pt x="4666812" y="2668767"/>
-                  </a:lnTo>
-                  <a:lnTo>
-                    <a:pt x="4744446" y="2664757"/>
-                  </a:lnTo>
-                  <a:lnTo>
-                    <a:pt x="4822080" y="2660730"/>
-                  </a:lnTo>
-                  <a:lnTo>
-                    <a:pt x="4899714" y="2656686"/>
-                  </a:lnTo>
-                  <a:lnTo>
-                    <a:pt x="4977348" y="2652627"/>
-                  </a:lnTo>
-                  <a:lnTo>
-                    <a:pt x="5054982" y="2648550"/>
-                  </a:lnTo>
-                  <a:lnTo>
-                    <a:pt x="5132616" y="2644457"/>
-                  </a:lnTo>
-                  <a:lnTo>
-                    <a:pt x="5210250" y="2640347"/>
-                  </a:lnTo>
-                  <a:lnTo>
-                    <a:pt x="5287884" y="2636221"/>
-                  </a:lnTo>
-                  <a:lnTo>
-                    <a:pt x="5365518" y="2632078"/>
-                  </a:lnTo>
-                  <a:lnTo>
-                    <a:pt x="5443152" y="2627917"/>
-                  </a:lnTo>
-                  <a:lnTo>
-                    <a:pt x="5520786" y="2623740"/>
-                  </a:lnTo>
-                  <a:lnTo>
-                    <a:pt x="5598420" y="2619546"/>
-                  </a:lnTo>
-                  <a:lnTo>
-                    <a:pt x="5676054" y="2615335"/>
-                  </a:lnTo>
-                  <a:lnTo>
-                    <a:pt x="5753688" y="2611106"/>
-                  </a:lnTo>
-                  <a:lnTo>
-                    <a:pt x="5831322" y="2606861"/>
-                  </a:lnTo>
-                  <a:lnTo>
-                    <a:pt x="5908956" y="2602598"/>
-                  </a:lnTo>
-                  <a:lnTo>
-                    <a:pt x="5986590" y="2598317"/>
-                  </a:lnTo>
-                  <a:lnTo>
-                    <a:pt x="6064224" y="2594019"/>
-                  </a:lnTo>
-                  <a:lnTo>
-                    <a:pt x="6141859" y="2589704"/>
-                  </a:lnTo>
-                  <a:lnTo>
-                    <a:pt x="6219493" y="2585371"/>
-                  </a:lnTo>
-                  <a:lnTo>
-                    <a:pt x="6297127" y="2581020"/>
+                    <a:pt x="20330" y="58152"/>
+                  </a:lnTo>
+                  <a:lnTo>
+                    <a:pt x="97964" y="267297"/>
+                  </a:lnTo>
+                  <a:lnTo>
+                    <a:pt x="175598" y="464273"/>
+                  </a:lnTo>
+                  <a:lnTo>
+                    <a:pt x="253232" y="649788"/>
+                  </a:lnTo>
+                  <a:lnTo>
+                    <a:pt x="330866" y="824509"/>
+                  </a:lnTo>
+                  <a:lnTo>
+                    <a:pt x="408500" y="989064"/>
+                  </a:lnTo>
+                  <a:lnTo>
+                    <a:pt x="486134" y="1144044"/>
+                  </a:lnTo>
+                  <a:lnTo>
+                    <a:pt x="563768" y="1290006"/>
+                  </a:lnTo>
+                  <a:lnTo>
+                    <a:pt x="641402" y="1427476"/>
+                  </a:lnTo>
+                  <a:lnTo>
+                    <a:pt x="719036" y="1556947"/>
+                  </a:lnTo>
+                  <a:lnTo>
+                    <a:pt x="796670" y="1678885"/>
+                  </a:lnTo>
+                  <a:lnTo>
+                    <a:pt x="874304" y="1793728"/>
+                  </a:lnTo>
+                  <a:lnTo>
+                    <a:pt x="951938" y="1901889"/>
+                  </a:lnTo>
+                  <a:lnTo>
+                    <a:pt x="1029572" y="2003756"/>
+                  </a:lnTo>
+                  <a:lnTo>
+                    <a:pt x="1107206" y="2099697"/>
+                  </a:lnTo>
+                  <a:lnTo>
+                    <a:pt x="1184840" y="2190055"/>
+                  </a:lnTo>
+                  <a:lnTo>
+                    <a:pt x="1262474" y="2275155"/>
+                  </a:lnTo>
+                  <a:lnTo>
+                    <a:pt x="1340108" y="2355304"/>
+                  </a:lnTo>
+                  <a:lnTo>
+                    <a:pt x="1417742" y="2430790"/>
+                  </a:lnTo>
+                  <a:lnTo>
+                    <a:pt x="1495376" y="2501883"/>
+                  </a:lnTo>
+                  <a:lnTo>
+                    <a:pt x="1573010" y="2568840"/>
+                  </a:lnTo>
+                  <a:lnTo>
+                    <a:pt x="1650645" y="2631901"/>
+                  </a:lnTo>
+                  <a:lnTo>
+                    <a:pt x="1728279" y="2691293"/>
+                  </a:lnTo>
+                  <a:lnTo>
+                    <a:pt x="1805913" y="2747229"/>
+                  </a:lnTo>
+                  <a:lnTo>
+                    <a:pt x="1883547" y="2779927"/>
+                  </a:lnTo>
+                  <a:lnTo>
+                    <a:pt x="1961181" y="2770602"/>
+                  </a:lnTo>
+                  <a:lnTo>
+                    <a:pt x="2038815" y="2761177"/>
+                  </a:lnTo>
+                  <a:lnTo>
+                    <a:pt x="2116449" y="2751651"/>
+                  </a:lnTo>
+                  <a:lnTo>
+                    <a:pt x="2194083" y="2742024"/>
+                  </a:lnTo>
+                  <a:lnTo>
+                    <a:pt x="2271717" y="2732293"/>
+                  </a:lnTo>
+                  <a:lnTo>
+                    <a:pt x="2349351" y="2722459"/>
+                  </a:lnTo>
+                  <a:lnTo>
+                    <a:pt x="2426985" y="2712520"/>
+                  </a:lnTo>
+                  <a:lnTo>
+                    <a:pt x="2504619" y="2702474"/>
+                  </a:lnTo>
+                  <a:lnTo>
+                    <a:pt x="2582253" y="2692321"/>
+                  </a:lnTo>
+                  <a:lnTo>
+                    <a:pt x="2659887" y="2682060"/>
+                  </a:lnTo>
+                  <a:lnTo>
+                    <a:pt x="2737521" y="2671689"/>
+                  </a:lnTo>
+                  <a:lnTo>
+                    <a:pt x="2815155" y="2661207"/>
+                  </a:lnTo>
+                  <a:lnTo>
+                    <a:pt x="2892789" y="2650613"/>
+                  </a:lnTo>
+                  <a:lnTo>
+                    <a:pt x="2970423" y="2639906"/>
+                  </a:lnTo>
+                  <a:lnTo>
+                    <a:pt x="3048057" y="2629084"/>
+                  </a:lnTo>
+                  <a:lnTo>
+                    <a:pt x="3125691" y="2618147"/>
+                  </a:lnTo>
+                  <a:lnTo>
+                    <a:pt x="3203325" y="2607093"/>
+                  </a:lnTo>
+                  <a:lnTo>
+                    <a:pt x="3280959" y="2595921"/>
+                  </a:lnTo>
+                  <a:lnTo>
+                    <a:pt x="3358594" y="2584629"/>
+                  </a:lnTo>
+                  <a:lnTo>
+                    <a:pt x="3436228" y="2573217"/>
+                  </a:lnTo>
+                  <a:lnTo>
+                    <a:pt x="3513862" y="2561683"/>
+                  </a:lnTo>
+                  <a:lnTo>
+                    <a:pt x="3591496" y="2550026"/>
+                  </a:lnTo>
+                  <a:lnTo>
+                    <a:pt x="3669130" y="2538244"/>
+                  </a:lnTo>
+                  <a:lnTo>
+                    <a:pt x="3746764" y="2526336"/>
+                  </a:lnTo>
+                  <a:lnTo>
+                    <a:pt x="3824398" y="2514301"/>
+                  </a:lnTo>
+                  <a:lnTo>
+                    <a:pt x="3902032" y="2502138"/>
+                  </a:lnTo>
+                  <a:lnTo>
+                    <a:pt x="3979666" y="2489844"/>
+                  </a:lnTo>
+                  <a:lnTo>
+                    <a:pt x="4057300" y="2477419"/>
+                  </a:lnTo>
+                  <a:lnTo>
+                    <a:pt x="4134934" y="2464861"/>
+                  </a:lnTo>
+                  <a:lnTo>
+                    <a:pt x="4212568" y="2452169"/>
+                  </a:lnTo>
+                  <a:lnTo>
+                    <a:pt x="4290202" y="2439342"/>
+                  </a:lnTo>
+                  <a:lnTo>
+                    <a:pt x="4367836" y="2426377"/>
+                  </a:lnTo>
+                  <a:lnTo>
+                    <a:pt x="4445470" y="2413274"/>
+                  </a:lnTo>
+                  <a:lnTo>
+                    <a:pt x="4523104" y="2400031"/>
+                  </a:lnTo>
+                  <a:lnTo>
+                    <a:pt x="4600738" y="2386646"/>
+                  </a:lnTo>
+                  <a:lnTo>
+                    <a:pt x="4678372" y="2373119"/>
+                  </a:lnTo>
+                  <a:lnTo>
+                    <a:pt x="4756006" y="2359446"/>
+                  </a:lnTo>
+                  <a:lnTo>
+                    <a:pt x="4833640" y="2345628"/>
+                  </a:lnTo>
+                  <a:lnTo>
+                    <a:pt x="4911274" y="2331662"/>
+                  </a:lnTo>
+                  <a:lnTo>
+                    <a:pt x="4988908" y="2317547"/>
+                  </a:lnTo>
+                  <a:lnTo>
+                    <a:pt x="5066542" y="2303281"/>
+                  </a:lnTo>
+                  <a:lnTo>
+                    <a:pt x="5144177" y="2288862"/>
+                  </a:lnTo>
+                  <a:lnTo>
+                    <a:pt x="5221811" y="2274290"/>
+                  </a:lnTo>
+                  <a:lnTo>
+                    <a:pt x="5299445" y="2259562"/>
+                  </a:lnTo>
+                  <a:lnTo>
+                    <a:pt x="5377079" y="2244676"/>
+                  </a:lnTo>
+                  <a:lnTo>
+                    <a:pt x="5454713" y="2229631"/>
+                  </a:lnTo>
+                  <a:lnTo>
+                    <a:pt x="5532347" y="2214426"/>
+                  </a:lnTo>
+                  <a:lnTo>
+                    <a:pt x="5609981" y="2199058"/>
+                  </a:lnTo>
+                  <a:lnTo>
+                    <a:pt x="5687615" y="2183526"/>
+                  </a:lnTo>
+                  <a:lnTo>
+                    <a:pt x="5765249" y="2167828"/>
+                  </a:lnTo>
+                  <a:lnTo>
+                    <a:pt x="5842883" y="2151962"/>
                   </a:lnTo>
                 </a:path>
               </a:pathLst>
@@ -3844,300 +3808,300 @@
           </p:nvSpPr>
           <p:spPr>
             <a:xfrm>
-              <a:off x="817517" y="4681903"/>
-              <a:ext cx="7370972" cy="793954"/>
+              <a:off x="817517" y="4685717"/>
+              <a:ext cx="7370972" cy="823397"/>
             </a:xfrm>
             <a:custGeom>
               <a:avLst/>
               <a:pathLst>
-                <a:path w="7370972" h="793954">
+                <a:path w="7370972" h="823397">
                   <a:moveTo>
-                    <a:pt x="7370972" y="793954"/>
+                    <a:pt x="7370972" y="823397"/>
                   </a:moveTo>
                   <a:lnTo>
-                    <a:pt x="7293338" y="790333"/>
-                  </a:lnTo>
-                  <a:lnTo>
-                    <a:pt x="7215704" y="786534"/>
-                  </a:lnTo>
-                  <a:lnTo>
-                    <a:pt x="7138070" y="782548"/>
-                  </a:lnTo>
-                  <a:lnTo>
-                    <a:pt x="7060436" y="778365"/>
-                  </a:lnTo>
-                  <a:lnTo>
-                    <a:pt x="6982802" y="773975"/>
-                  </a:lnTo>
-                  <a:lnTo>
-                    <a:pt x="6905168" y="769368"/>
-                  </a:lnTo>
-                  <a:lnTo>
-                    <a:pt x="6827534" y="764534"/>
-                  </a:lnTo>
-                  <a:lnTo>
-                    <a:pt x="6749900" y="759462"/>
-                  </a:lnTo>
-                  <a:lnTo>
-                    <a:pt x="6672266" y="754139"/>
-                  </a:lnTo>
-                  <a:lnTo>
-                    <a:pt x="6594632" y="748554"/>
-                  </a:lnTo>
-                  <a:lnTo>
-                    <a:pt x="6516998" y="742693"/>
-                  </a:lnTo>
-                  <a:lnTo>
-                    <a:pt x="6439364" y="736542"/>
-                  </a:lnTo>
-                  <a:lnTo>
-                    <a:pt x="6361730" y="730088"/>
-                  </a:lnTo>
-                  <a:lnTo>
-                    <a:pt x="6284096" y="723316"/>
-                  </a:lnTo>
-                  <a:lnTo>
-                    <a:pt x="6206462" y="716209"/>
-                  </a:lnTo>
-                  <a:lnTo>
-                    <a:pt x="6128827" y="708751"/>
-                  </a:lnTo>
-                  <a:lnTo>
-                    <a:pt x="6051193" y="700926"/>
-                  </a:lnTo>
-                  <a:lnTo>
-                    <a:pt x="5973559" y="692714"/>
-                  </a:lnTo>
-                  <a:lnTo>
-                    <a:pt x="5895925" y="684096"/>
-                  </a:lnTo>
-                  <a:lnTo>
-                    <a:pt x="5818291" y="675054"/>
-                  </a:lnTo>
-                  <a:lnTo>
-                    <a:pt x="5740657" y="665565"/>
-                  </a:lnTo>
-                  <a:lnTo>
-                    <a:pt x="5663023" y="655608"/>
-                  </a:lnTo>
-                  <a:lnTo>
-                    <a:pt x="5585389" y="645159"/>
-                  </a:lnTo>
-                  <a:lnTo>
-                    <a:pt x="5507755" y="634194"/>
-                  </a:lnTo>
-                  <a:lnTo>
-                    <a:pt x="5430121" y="622689"/>
-                  </a:lnTo>
-                  <a:lnTo>
-                    <a:pt x="5352487" y="610615"/>
-                  </a:lnTo>
-                  <a:lnTo>
-                    <a:pt x="5274853" y="597946"/>
-                  </a:lnTo>
-                  <a:lnTo>
-                    <a:pt x="5197219" y="584651"/>
-                  </a:lnTo>
-                  <a:lnTo>
-                    <a:pt x="5119585" y="570700"/>
-                  </a:lnTo>
-                  <a:lnTo>
-                    <a:pt x="5041951" y="556061"/>
-                  </a:lnTo>
-                  <a:lnTo>
-                    <a:pt x="4964317" y="540698"/>
-                  </a:lnTo>
-                  <a:lnTo>
-                    <a:pt x="4886683" y="524578"/>
-                  </a:lnTo>
-                  <a:lnTo>
-                    <a:pt x="4809049" y="507662"/>
-                  </a:lnTo>
-                  <a:lnTo>
-                    <a:pt x="4731415" y="489911"/>
-                  </a:lnTo>
-                  <a:lnTo>
-                    <a:pt x="4653781" y="471284"/>
-                  </a:lnTo>
-                  <a:lnTo>
-                    <a:pt x="4576147" y="451738"/>
-                  </a:lnTo>
-                  <a:lnTo>
-                    <a:pt x="4498513" y="431226"/>
-                  </a:lnTo>
-                  <a:lnTo>
-                    <a:pt x="4420879" y="409703"/>
-                  </a:lnTo>
-                  <a:lnTo>
-                    <a:pt x="4343244" y="387117"/>
-                  </a:lnTo>
-                  <a:lnTo>
-                    <a:pt x="4265610" y="363416"/>
-                  </a:lnTo>
-                  <a:lnTo>
-                    <a:pt x="4187976" y="338546"/>
-                  </a:lnTo>
-                  <a:lnTo>
-                    <a:pt x="4110342" y="312448"/>
-                  </a:lnTo>
-                  <a:lnTo>
-                    <a:pt x="4032708" y="285061"/>
-                  </a:lnTo>
-                  <a:lnTo>
-                    <a:pt x="3955074" y="256324"/>
-                  </a:lnTo>
-                  <a:lnTo>
-                    <a:pt x="3877440" y="226167"/>
-                  </a:lnTo>
-                  <a:lnTo>
-                    <a:pt x="3799806" y="194522"/>
-                  </a:lnTo>
-                  <a:lnTo>
-                    <a:pt x="3722172" y="161316"/>
-                  </a:lnTo>
-                  <a:lnTo>
-                    <a:pt x="3644538" y="126470"/>
-                  </a:lnTo>
-                  <a:lnTo>
-                    <a:pt x="3566904" y="89905"/>
-                  </a:lnTo>
-                  <a:lnTo>
-                    <a:pt x="3489270" y="51534"/>
-                  </a:lnTo>
-                  <a:lnTo>
-                    <a:pt x="3411636" y="11270"/>
+                    <a:pt x="7293338" y="820920"/>
+                  </a:lnTo>
+                  <a:lnTo>
+                    <a:pt x="7215704" y="818290"/>
+                  </a:lnTo>
+                  <a:lnTo>
+                    <a:pt x="7138070" y="815498"/>
+                  </a:lnTo>
+                  <a:lnTo>
+                    <a:pt x="7060436" y="812533"/>
+                  </a:lnTo>
+                  <a:lnTo>
+                    <a:pt x="6982802" y="809385"/>
+                  </a:lnTo>
+                  <a:lnTo>
+                    <a:pt x="6905168" y="806042"/>
+                  </a:lnTo>
+                  <a:lnTo>
+                    <a:pt x="6827534" y="802493"/>
+                  </a:lnTo>
+                  <a:lnTo>
+                    <a:pt x="6749900" y="798725"/>
+                  </a:lnTo>
+                  <a:lnTo>
+                    <a:pt x="6672266" y="794724"/>
+                  </a:lnTo>
+                  <a:lnTo>
+                    <a:pt x="6594632" y="790475"/>
+                  </a:lnTo>
+                  <a:lnTo>
+                    <a:pt x="6516998" y="785965"/>
+                  </a:lnTo>
+                  <a:lnTo>
+                    <a:pt x="6439364" y="781175"/>
+                  </a:lnTo>
+                  <a:lnTo>
+                    <a:pt x="6361730" y="776090"/>
+                  </a:lnTo>
+                  <a:lnTo>
+                    <a:pt x="6284096" y="770690"/>
+                  </a:lnTo>
+                  <a:lnTo>
+                    <a:pt x="6206462" y="764957"/>
+                  </a:lnTo>
+                  <a:lnTo>
+                    <a:pt x="6128827" y="758870"/>
+                  </a:lnTo>
+                  <a:lnTo>
+                    <a:pt x="6051193" y="752407"/>
+                  </a:lnTo>
+                  <a:lnTo>
+                    <a:pt x="5973559" y="745544"/>
+                  </a:lnTo>
+                  <a:lnTo>
+                    <a:pt x="5895925" y="738258"/>
+                  </a:lnTo>
+                  <a:lnTo>
+                    <a:pt x="5818291" y="730521"/>
+                  </a:lnTo>
+                  <a:lnTo>
+                    <a:pt x="5740657" y="722306"/>
+                  </a:lnTo>
+                  <a:lnTo>
+                    <a:pt x="5663023" y="713584"/>
+                  </a:lnTo>
+                  <a:lnTo>
+                    <a:pt x="5585389" y="704323"/>
+                  </a:lnTo>
+                  <a:lnTo>
+                    <a:pt x="5507755" y="694490"/>
+                  </a:lnTo>
+                  <a:lnTo>
+                    <a:pt x="5430121" y="684049"/>
+                  </a:lnTo>
+                  <a:lnTo>
+                    <a:pt x="5352487" y="672963"/>
+                  </a:lnTo>
+                  <a:lnTo>
+                    <a:pt x="5274853" y="661192"/>
+                  </a:lnTo>
+                  <a:lnTo>
+                    <a:pt x="5197219" y="648695"/>
+                  </a:lnTo>
+                  <a:lnTo>
+                    <a:pt x="5119585" y="635425"/>
+                  </a:lnTo>
+                  <a:lnTo>
+                    <a:pt x="5041951" y="621335"/>
+                  </a:lnTo>
+                  <a:lnTo>
+                    <a:pt x="4964317" y="606375"/>
+                  </a:lnTo>
+                  <a:lnTo>
+                    <a:pt x="4886683" y="590491"/>
+                  </a:lnTo>
+                  <a:lnTo>
+                    <a:pt x="4809049" y="573625"/>
+                  </a:lnTo>
+                  <a:lnTo>
+                    <a:pt x="4731415" y="555717"/>
+                  </a:lnTo>
+                  <a:lnTo>
+                    <a:pt x="4653781" y="536703"/>
+                  </a:lnTo>
+                  <a:lnTo>
+                    <a:pt x="4576147" y="516514"/>
+                  </a:lnTo>
+                  <a:lnTo>
+                    <a:pt x="4498513" y="495079"/>
+                  </a:lnTo>
+                  <a:lnTo>
+                    <a:pt x="4420879" y="472318"/>
+                  </a:lnTo>
+                  <a:lnTo>
+                    <a:pt x="4343244" y="448152"/>
+                  </a:lnTo>
+                  <a:lnTo>
+                    <a:pt x="4265610" y="422493"/>
+                  </a:lnTo>
+                  <a:lnTo>
+                    <a:pt x="4187976" y="395248"/>
+                  </a:lnTo>
+                  <a:lnTo>
+                    <a:pt x="4110342" y="366320"/>
+                  </a:lnTo>
+                  <a:lnTo>
+                    <a:pt x="4032708" y="335605"/>
+                  </a:lnTo>
+                  <a:lnTo>
+                    <a:pt x="3955074" y="302993"/>
+                  </a:lnTo>
+                  <a:lnTo>
+                    <a:pt x="3877440" y="268366"/>
+                  </a:lnTo>
+                  <a:lnTo>
+                    <a:pt x="3799806" y="231599"/>
+                  </a:lnTo>
+                  <a:lnTo>
+                    <a:pt x="3722172" y="192562"/>
+                  </a:lnTo>
+                  <a:lnTo>
+                    <a:pt x="3644538" y="151112"/>
+                  </a:lnTo>
+                  <a:lnTo>
+                    <a:pt x="3566904" y="107102"/>
+                  </a:lnTo>
+                  <a:lnTo>
+                    <a:pt x="3489270" y="60372"/>
+                  </a:lnTo>
+                  <a:lnTo>
+                    <a:pt x="3411636" y="10756"/>
                   </a:lnTo>
                   <a:lnTo>
                     <a:pt x="3334002" y="0"/>
                   </a:lnTo>
                   <a:lnTo>
-                    <a:pt x="3256368" y="3521"/>
-                  </a:lnTo>
-                  <a:lnTo>
-                    <a:pt x="3178734" y="7027"/>
-                  </a:lnTo>
-                  <a:lnTo>
-                    <a:pt x="3101100" y="10520"/>
-                  </a:lnTo>
-                  <a:lnTo>
-                    <a:pt x="3023466" y="13998"/>
-                  </a:lnTo>
-                  <a:lnTo>
-                    <a:pt x="2945832" y="17463"/>
-                  </a:lnTo>
-                  <a:lnTo>
-                    <a:pt x="2868198" y="20913"/>
-                  </a:lnTo>
-                  <a:lnTo>
-                    <a:pt x="2790564" y="24349"/>
-                  </a:lnTo>
-                  <a:lnTo>
-                    <a:pt x="2712930" y="27771"/>
-                  </a:lnTo>
-                  <a:lnTo>
-                    <a:pt x="2635295" y="31180"/>
-                  </a:lnTo>
-                  <a:lnTo>
-                    <a:pt x="2557661" y="34574"/>
-                  </a:lnTo>
-                  <a:lnTo>
-                    <a:pt x="2480027" y="37955"/>
-                  </a:lnTo>
-                  <a:lnTo>
-                    <a:pt x="2402393" y="41322"/>
-                  </a:lnTo>
-                  <a:lnTo>
-                    <a:pt x="2324759" y="44675"/>
-                  </a:lnTo>
-                  <a:lnTo>
-                    <a:pt x="2247125" y="48015"/>
-                  </a:lnTo>
-                  <a:lnTo>
-                    <a:pt x="2169491" y="51341"/>
-                  </a:lnTo>
-                  <a:lnTo>
-                    <a:pt x="2091857" y="54654"/>
-                  </a:lnTo>
-                  <a:lnTo>
-                    <a:pt x="2014223" y="57953"/>
-                  </a:lnTo>
-                  <a:lnTo>
-                    <a:pt x="1936589" y="61239"/>
-                  </a:lnTo>
-                  <a:lnTo>
-                    <a:pt x="1858955" y="64511"/>
-                  </a:lnTo>
-                  <a:lnTo>
-                    <a:pt x="1781321" y="67770"/>
-                  </a:lnTo>
-                  <a:lnTo>
-                    <a:pt x="1703687" y="71016"/>
-                  </a:lnTo>
-                  <a:lnTo>
-                    <a:pt x="1626053" y="74249"/>
-                  </a:lnTo>
-                  <a:lnTo>
-                    <a:pt x="1548419" y="77469"/>
-                  </a:lnTo>
-                  <a:lnTo>
-                    <a:pt x="1470785" y="80675"/>
-                  </a:lnTo>
-                  <a:lnTo>
-                    <a:pt x="1393151" y="83869"/>
-                  </a:lnTo>
-                  <a:lnTo>
-                    <a:pt x="1315517" y="87050"/>
-                  </a:lnTo>
-                  <a:lnTo>
-                    <a:pt x="1237883" y="90217"/>
-                  </a:lnTo>
-                  <a:lnTo>
-                    <a:pt x="1160249" y="93372"/>
-                  </a:lnTo>
-                  <a:lnTo>
-                    <a:pt x="1082615" y="96514"/>
-                  </a:lnTo>
-                  <a:lnTo>
-                    <a:pt x="1004981" y="99643"/>
-                  </a:lnTo>
-                  <a:lnTo>
-                    <a:pt x="927346" y="102760"/>
-                  </a:lnTo>
-                  <a:lnTo>
-                    <a:pt x="849712" y="105864"/>
-                  </a:lnTo>
-                  <a:lnTo>
-                    <a:pt x="772078" y="108955"/>
-                  </a:lnTo>
-                  <a:lnTo>
-                    <a:pt x="694444" y="112034"/>
-                  </a:lnTo>
-                  <a:lnTo>
-                    <a:pt x="616810" y="115100"/>
-                  </a:lnTo>
-                  <a:lnTo>
-                    <a:pt x="539176" y="118154"/>
-                  </a:lnTo>
-                  <a:lnTo>
-                    <a:pt x="461542" y="121195"/>
-                  </a:lnTo>
-                  <a:lnTo>
-                    <a:pt x="383908" y="124224"/>
-                  </a:lnTo>
-                  <a:lnTo>
-                    <a:pt x="306274" y="127241"/>
-                  </a:lnTo>
-                  <a:lnTo>
-                    <a:pt x="228640" y="130246"/>
-                  </a:lnTo>
-                  <a:lnTo>
-                    <a:pt x="151006" y="133238"/>
-                  </a:lnTo>
-                  <a:lnTo>
-                    <a:pt x="73372" y="136218"/>
-                  </a:lnTo>
-                  <a:lnTo>
-                    <a:pt x="0" y="139023"/>
+                    <a:pt x="3256368" y="9129"/>
+                  </a:lnTo>
+                  <a:lnTo>
+                    <a:pt x="3178734" y="18161"/>
+                  </a:lnTo>
+                  <a:lnTo>
+                    <a:pt x="3101100" y="27098"/>
+                  </a:lnTo>
+                  <a:lnTo>
+                    <a:pt x="3023466" y="35941"/>
+                  </a:lnTo>
+                  <a:lnTo>
+                    <a:pt x="2945832" y="44690"/>
+                  </a:lnTo>
+                  <a:lnTo>
+                    <a:pt x="2868198" y="53347"/>
+                  </a:lnTo>
+                  <a:lnTo>
+                    <a:pt x="2790564" y="61912"/>
+                  </a:lnTo>
+                  <a:lnTo>
+                    <a:pt x="2712930" y="70387"/>
+                  </a:lnTo>
+                  <a:lnTo>
+                    <a:pt x="2635295" y="78772"/>
+                  </a:lnTo>
+                  <a:lnTo>
+                    <a:pt x="2557661" y="87068"/>
+                  </a:lnTo>
+                  <a:lnTo>
+                    <a:pt x="2480027" y="95277"/>
+                  </a:lnTo>
+                  <a:lnTo>
+                    <a:pt x="2402393" y="103399"/>
+                  </a:lnTo>
+                  <a:lnTo>
+                    <a:pt x="2324759" y="111435"/>
+                  </a:lnTo>
+                  <a:lnTo>
+                    <a:pt x="2247125" y="119386"/>
+                  </a:lnTo>
+                  <a:lnTo>
+                    <a:pt x="2169491" y="127253"/>
+                  </a:lnTo>
+                  <a:lnTo>
+                    <a:pt x="2091857" y="135036"/>
+                  </a:lnTo>
+                  <a:lnTo>
+                    <a:pt x="2014223" y="142738"/>
+                  </a:lnTo>
+                  <a:lnTo>
+                    <a:pt x="1936589" y="150358"/>
+                  </a:lnTo>
+                  <a:lnTo>
+                    <a:pt x="1858955" y="157898"/>
+                  </a:lnTo>
+                  <a:lnTo>
+                    <a:pt x="1781321" y="165357"/>
+                  </a:lnTo>
+                  <a:lnTo>
+                    <a:pt x="1703687" y="172738"/>
+                  </a:lnTo>
+                  <a:lnTo>
+                    <a:pt x="1626053" y="180041"/>
+                  </a:lnTo>
+                  <a:lnTo>
+                    <a:pt x="1548419" y="187267"/>
+                  </a:lnTo>
+                  <a:lnTo>
+                    <a:pt x="1470785" y="194416"/>
+                  </a:lnTo>
+                  <a:lnTo>
+                    <a:pt x="1393151" y="201490"/>
+                  </a:lnTo>
+                  <a:lnTo>
+                    <a:pt x="1315517" y="208489"/>
+                  </a:lnTo>
+                  <a:lnTo>
+                    <a:pt x="1237883" y="215414"/>
+                  </a:lnTo>
+                  <a:lnTo>
+                    <a:pt x="1160249" y="222266"/>
+                  </a:lnTo>
+                  <a:lnTo>
+                    <a:pt x="1082615" y="229045"/>
+                  </a:lnTo>
+                  <a:lnTo>
+                    <a:pt x="1004981" y="235752"/>
+                  </a:lnTo>
+                  <a:lnTo>
+                    <a:pt x="927346" y="242389"/>
+                  </a:lnTo>
+                  <a:lnTo>
+                    <a:pt x="849712" y="248956"/>
+                  </a:lnTo>
+                  <a:lnTo>
+                    <a:pt x="772078" y="255453"/>
+                  </a:lnTo>
+                  <a:lnTo>
+                    <a:pt x="694444" y="261881"/>
+                  </a:lnTo>
+                  <a:lnTo>
+                    <a:pt x="616810" y="268242"/>
+                  </a:lnTo>
+                  <a:lnTo>
+                    <a:pt x="539176" y="274535"/>
+                  </a:lnTo>
+                  <a:lnTo>
+                    <a:pt x="461542" y="280762"/>
+                  </a:lnTo>
+                  <a:lnTo>
+                    <a:pt x="383908" y="286922"/>
+                  </a:lnTo>
+                  <a:lnTo>
+                    <a:pt x="306274" y="293018"/>
+                  </a:lnTo>
+                  <a:lnTo>
+                    <a:pt x="228640" y="299049"/>
+                  </a:lnTo>
+                  <a:lnTo>
+                    <a:pt x="151006" y="305017"/>
+                  </a:lnTo>
+                  <a:lnTo>
+                    <a:pt x="73372" y="310921"/>
+                  </a:lnTo>
+                  <a:lnTo>
+                    <a:pt x="0" y="316443"/>
                   </a:lnTo>
                 </a:path>
               </a:pathLst>
@@ -4157,300 +4121,300 @@
           </p:nvSpPr>
           <p:spPr>
             <a:xfrm>
-              <a:off x="817517" y="3273374"/>
-              <a:ext cx="7370972" cy="1995470"/>
+              <a:off x="817517" y="2999642"/>
+              <a:ext cx="7370972" cy="2304277"/>
             </a:xfrm>
             <a:custGeom>
               <a:avLst/>
               <a:pathLst>
-                <a:path w="7370972" h="1995470">
+                <a:path w="7370972" h="2304277">
                   <a:moveTo>
                     <a:pt x="0" y="0"/>
                   </a:moveTo>
                   <a:lnTo>
-                    <a:pt x="73372" y="46975"/>
-                  </a:lnTo>
-                  <a:lnTo>
-                    <a:pt x="151006" y="95594"/>
-                  </a:lnTo>
-                  <a:lnTo>
-                    <a:pt x="228640" y="143152"/>
-                  </a:lnTo>
-                  <a:lnTo>
-                    <a:pt x="306274" y="189673"/>
-                  </a:lnTo>
-                  <a:lnTo>
-                    <a:pt x="383908" y="235180"/>
-                  </a:lnTo>
-                  <a:lnTo>
-                    <a:pt x="461542" y="279694"/>
-                  </a:lnTo>
-                  <a:lnTo>
-                    <a:pt x="539176" y="323236"/>
-                  </a:lnTo>
-                  <a:lnTo>
-                    <a:pt x="616810" y="365829"/>
-                  </a:lnTo>
-                  <a:lnTo>
-                    <a:pt x="694444" y="407493"/>
-                  </a:lnTo>
-                  <a:lnTo>
-                    <a:pt x="772078" y="448248"/>
-                  </a:lnTo>
-                  <a:lnTo>
-                    <a:pt x="849712" y="488114"/>
-                  </a:lnTo>
-                  <a:lnTo>
-                    <a:pt x="927346" y="527111"/>
-                  </a:lnTo>
-                  <a:lnTo>
-                    <a:pt x="1004981" y="565256"/>
-                  </a:lnTo>
-                  <a:lnTo>
-                    <a:pt x="1082615" y="602570"/>
-                  </a:lnTo>
-                  <a:lnTo>
-                    <a:pt x="1160249" y="639070"/>
-                  </a:lnTo>
-                  <a:lnTo>
-                    <a:pt x="1237883" y="674773"/>
-                  </a:lnTo>
-                  <a:lnTo>
-                    <a:pt x="1315517" y="709698"/>
-                  </a:lnTo>
-                  <a:lnTo>
-                    <a:pt x="1393151" y="743861"/>
-                  </a:lnTo>
-                  <a:lnTo>
-                    <a:pt x="1470785" y="777278"/>
-                  </a:lnTo>
-                  <a:lnTo>
-                    <a:pt x="1548419" y="809967"/>
-                  </a:lnTo>
-                  <a:lnTo>
-                    <a:pt x="1626053" y="841943"/>
-                  </a:lnTo>
-                  <a:lnTo>
-                    <a:pt x="1703687" y="873221"/>
-                  </a:lnTo>
-                  <a:lnTo>
-                    <a:pt x="1781321" y="903817"/>
-                  </a:lnTo>
-                  <a:lnTo>
-                    <a:pt x="1858955" y="933745"/>
-                  </a:lnTo>
-                  <a:lnTo>
-                    <a:pt x="1936589" y="963021"/>
-                  </a:lnTo>
-                  <a:lnTo>
-                    <a:pt x="2014223" y="991658"/>
-                  </a:lnTo>
-                  <a:lnTo>
-                    <a:pt x="2091857" y="1019670"/>
-                  </a:lnTo>
-                  <a:lnTo>
-                    <a:pt x="2169491" y="1047071"/>
-                  </a:lnTo>
-                  <a:lnTo>
-                    <a:pt x="2247125" y="1073875"/>
-                  </a:lnTo>
-                  <a:lnTo>
-                    <a:pt x="2324759" y="1100094"/>
-                  </a:lnTo>
-                  <a:lnTo>
-                    <a:pt x="2402393" y="1125741"/>
-                  </a:lnTo>
-                  <a:lnTo>
-                    <a:pt x="2480027" y="1150828"/>
-                  </a:lnTo>
-                  <a:lnTo>
-                    <a:pt x="2557661" y="1175369"/>
-                  </a:lnTo>
-                  <a:lnTo>
-                    <a:pt x="2635295" y="1199373"/>
-                  </a:lnTo>
-                  <a:lnTo>
-                    <a:pt x="2712930" y="1222855"/>
-                  </a:lnTo>
-                  <a:lnTo>
-                    <a:pt x="2790564" y="1245824"/>
-                  </a:lnTo>
-                  <a:lnTo>
-                    <a:pt x="2868198" y="1268292"/>
-                  </a:lnTo>
-                  <a:lnTo>
-                    <a:pt x="2945832" y="1290270"/>
-                  </a:lnTo>
-                  <a:lnTo>
-                    <a:pt x="3023466" y="1311769"/>
-                  </a:lnTo>
-                  <a:lnTo>
-                    <a:pt x="3101100" y="1332798"/>
-                  </a:lnTo>
-                  <a:lnTo>
-                    <a:pt x="3178734" y="1353369"/>
-                  </a:lnTo>
-                  <a:lnTo>
-                    <a:pt x="3256368" y="1373491"/>
-                  </a:lnTo>
-                  <a:lnTo>
-                    <a:pt x="3334002" y="1393174"/>
-                  </a:lnTo>
-                  <a:lnTo>
-                    <a:pt x="3411636" y="1412428"/>
-                  </a:lnTo>
-                  <a:lnTo>
-                    <a:pt x="3489270" y="1431262"/>
-                  </a:lnTo>
-                  <a:lnTo>
-                    <a:pt x="3566904" y="1449685"/>
-                  </a:lnTo>
-                  <a:lnTo>
-                    <a:pt x="3644538" y="1467706"/>
-                  </a:lnTo>
-                  <a:lnTo>
-                    <a:pt x="3722172" y="1485334"/>
-                  </a:lnTo>
-                  <a:lnTo>
-                    <a:pt x="3799806" y="1502578"/>
-                  </a:lnTo>
-                  <a:lnTo>
-                    <a:pt x="3877440" y="1519445"/>
-                  </a:lnTo>
-                  <a:lnTo>
-                    <a:pt x="3955074" y="1535945"/>
-                  </a:lnTo>
-                  <a:lnTo>
-                    <a:pt x="4032708" y="1552084"/>
-                  </a:lnTo>
-                  <a:lnTo>
-                    <a:pt x="4110342" y="1567872"/>
-                  </a:lnTo>
-                  <a:lnTo>
-                    <a:pt x="4187976" y="1583315"/>
-                  </a:lnTo>
-                  <a:lnTo>
-                    <a:pt x="4265610" y="1598421"/>
-                  </a:lnTo>
-                  <a:lnTo>
-                    <a:pt x="4343244" y="1613198"/>
-                  </a:lnTo>
-                  <a:lnTo>
-                    <a:pt x="4420879" y="1627652"/>
-                  </a:lnTo>
-                  <a:lnTo>
-                    <a:pt x="4498513" y="1641791"/>
-                  </a:lnTo>
-                  <a:lnTo>
-                    <a:pt x="4576147" y="1655622"/>
-                  </a:lnTo>
-                  <a:lnTo>
-                    <a:pt x="4653781" y="1669151"/>
-                  </a:lnTo>
-                  <a:lnTo>
-                    <a:pt x="4731415" y="1682385"/>
-                  </a:lnTo>
-                  <a:lnTo>
-                    <a:pt x="4809049" y="1695330"/>
-                  </a:lnTo>
-                  <a:lnTo>
-                    <a:pt x="4886683" y="1707993"/>
-                  </a:lnTo>
-                  <a:lnTo>
-                    <a:pt x="4964317" y="1720379"/>
-                  </a:lnTo>
-                  <a:lnTo>
-                    <a:pt x="5041951" y="1732496"/>
-                  </a:lnTo>
-                  <a:lnTo>
-                    <a:pt x="5119585" y="1744348"/>
-                  </a:lnTo>
-                  <a:lnTo>
-                    <a:pt x="5197219" y="1755941"/>
-                  </a:lnTo>
-                  <a:lnTo>
-                    <a:pt x="5274853" y="1767282"/>
-                  </a:lnTo>
-                  <a:lnTo>
-                    <a:pt x="5352487" y="1778375"/>
-                  </a:lnTo>
-                  <a:lnTo>
-                    <a:pt x="5430121" y="1789226"/>
-                  </a:lnTo>
-                  <a:lnTo>
-                    <a:pt x="5507755" y="1799841"/>
-                  </a:lnTo>
-                  <a:lnTo>
-                    <a:pt x="5585389" y="1810224"/>
-                  </a:lnTo>
-                  <a:lnTo>
-                    <a:pt x="5663023" y="1820381"/>
-                  </a:lnTo>
-                  <a:lnTo>
-                    <a:pt x="5740657" y="1830316"/>
-                  </a:lnTo>
-                  <a:lnTo>
-                    <a:pt x="5818291" y="1840034"/>
-                  </a:lnTo>
-                  <a:lnTo>
-                    <a:pt x="5895925" y="1849540"/>
-                  </a:lnTo>
-                  <a:lnTo>
-                    <a:pt x="5973559" y="1858839"/>
-                  </a:lnTo>
-                  <a:lnTo>
-                    <a:pt x="6051193" y="1867935"/>
-                  </a:lnTo>
-                  <a:lnTo>
-                    <a:pt x="6128827" y="1876833"/>
-                  </a:lnTo>
-                  <a:lnTo>
-                    <a:pt x="6206462" y="1885536"/>
-                  </a:lnTo>
-                  <a:lnTo>
-                    <a:pt x="6284096" y="1894050"/>
-                  </a:lnTo>
-                  <a:lnTo>
-                    <a:pt x="6361730" y="1902378"/>
-                  </a:lnTo>
-                  <a:lnTo>
-                    <a:pt x="6439364" y="1910524"/>
-                  </a:lnTo>
-                  <a:lnTo>
-                    <a:pt x="6516998" y="1918493"/>
-                  </a:lnTo>
-                  <a:lnTo>
-                    <a:pt x="6594632" y="1926288"/>
-                  </a:lnTo>
-                  <a:lnTo>
-                    <a:pt x="6672266" y="1933913"/>
-                  </a:lnTo>
-                  <a:lnTo>
-                    <a:pt x="6749900" y="1941371"/>
-                  </a:lnTo>
-                  <a:lnTo>
-                    <a:pt x="6827534" y="1948667"/>
-                  </a:lnTo>
-                  <a:lnTo>
-                    <a:pt x="6905168" y="1955804"/>
-                  </a:lnTo>
-                  <a:lnTo>
-                    <a:pt x="6982802" y="1962784"/>
-                  </a:lnTo>
-                  <a:lnTo>
-                    <a:pt x="7060436" y="1969613"/>
-                  </a:lnTo>
-                  <a:lnTo>
-                    <a:pt x="7138070" y="1976293"/>
-                  </a:lnTo>
-                  <a:lnTo>
-                    <a:pt x="7215704" y="1982827"/>
-                  </a:lnTo>
-                  <a:lnTo>
-                    <a:pt x="7293338" y="1989218"/>
-                  </a:lnTo>
-                  <a:lnTo>
-                    <a:pt x="7370972" y="1995470"/>
+                    <a:pt x="73372" y="58770"/>
+                  </a:lnTo>
+                  <a:lnTo>
+                    <a:pt x="151006" y="119439"/>
+                  </a:lnTo>
+                  <a:lnTo>
+                    <a:pt x="228640" y="178630"/>
+                  </a:lnTo>
+                  <a:lnTo>
+                    <a:pt x="306274" y="236379"/>
+                  </a:lnTo>
+                  <a:lnTo>
+                    <a:pt x="383908" y="292722"/>
+                  </a:lnTo>
+                  <a:lnTo>
+                    <a:pt x="461542" y="347692"/>
+                  </a:lnTo>
+                  <a:lnTo>
+                    <a:pt x="539176" y="401324"/>
+                  </a:lnTo>
+                  <a:lnTo>
+                    <a:pt x="616810" y="453649"/>
+                  </a:lnTo>
+                  <a:lnTo>
+                    <a:pt x="694444" y="504700"/>
+                  </a:lnTo>
+                  <a:lnTo>
+                    <a:pt x="772078" y="554507"/>
+                  </a:lnTo>
+                  <a:lnTo>
+                    <a:pt x="849712" y="603101"/>
+                  </a:lnTo>
+                  <a:lnTo>
+                    <a:pt x="927346" y="650512"/>
+                  </a:lnTo>
+                  <a:lnTo>
+                    <a:pt x="1004981" y="696768"/>
+                  </a:lnTo>
+                  <a:lnTo>
+                    <a:pt x="1082615" y="741897"/>
+                  </a:lnTo>
+                  <a:lnTo>
+                    <a:pt x="1160249" y="785926"/>
+                  </a:lnTo>
+                  <a:lnTo>
+                    <a:pt x="1237883" y="828884"/>
+                  </a:lnTo>
+                  <a:lnTo>
+                    <a:pt x="1315517" y="870795"/>
+                  </a:lnTo>
+                  <a:lnTo>
+                    <a:pt x="1393151" y="911685"/>
+                  </a:lnTo>
+                  <a:lnTo>
+                    <a:pt x="1470785" y="951579"/>
+                  </a:lnTo>
+                  <a:lnTo>
+                    <a:pt x="1548419" y="990502"/>
+                  </a:lnTo>
+                  <a:lnTo>
+                    <a:pt x="1626053" y="1028476"/>
+                  </a:lnTo>
+                  <a:lnTo>
+                    <a:pt x="1703687" y="1065526"/>
+                  </a:lnTo>
+                  <a:lnTo>
+                    <a:pt x="1781321" y="1101673"/>
+                  </a:lnTo>
+                  <a:lnTo>
+                    <a:pt x="1858955" y="1136939"/>
+                  </a:lnTo>
+                  <a:lnTo>
+                    <a:pt x="1936589" y="1171347"/>
+                  </a:lnTo>
+                  <a:lnTo>
+                    <a:pt x="2014223" y="1204917"/>
+                  </a:lnTo>
+                  <a:lnTo>
+                    <a:pt x="2091857" y="1237669"/>
+                  </a:lnTo>
+                  <a:lnTo>
+                    <a:pt x="2169491" y="1269623"/>
+                  </a:lnTo>
+                  <a:lnTo>
+                    <a:pt x="2247125" y="1300799"/>
+                  </a:lnTo>
+                  <a:lnTo>
+                    <a:pt x="2324759" y="1331215"/>
+                  </a:lnTo>
+                  <a:lnTo>
+                    <a:pt x="2402393" y="1360891"/>
+                  </a:lnTo>
+                  <a:lnTo>
+                    <a:pt x="2480027" y="1389844"/>
+                  </a:lnTo>
+                  <a:lnTo>
+                    <a:pt x="2557661" y="1418091"/>
+                  </a:lnTo>
+                  <a:lnTo>
+                    <a:pt x="2635295" y="1445651"/>
+                  </a:lnTo>
+                  <a:lnTo>
+                    <a:pt x="2712930" y="1472539"/>
+                  </a:lnTo>
+                  <a:lnTo>
+                    <a:pt x="2790564" y="1498772"/>
+                  </a:lnTo>
+                  <a:lnTo>
+                    <a:pt x="2868198" y="1524367"/>
+                  </a:lnTo>
+                  <a:lnTo>
+                    <a:pt x="2945832" y="1549338"/>
+                  </a:lnTo>
+                  <a:lnTo>
+                    <a:pt x="3023466" y="1573701"/>
+                  </a:lnTo>
+                  <a:lnTo>
+                    <a:pt x="3101100" y="1597470"/>
+                  </a:lnTo>
+                  <a:lnTo>
+                    <a:pt x="3178734" y="1620660"/>
+                  </a:lnTo>
+                  <a:lnTo>
+                    <a:pt x="3256368" y="1643286"/>
+                  </a:lnTo>
+                  <a:lnTo>
+                    <a:pt x="3334002" y="1665360"/>
+                  </a:lnTo>
+                  <a:lnTo>
+                    <a:pt x="3411636" y="1686897"/>
+                  </a:lnTo>
+                  <a:lnTo>
+                    <a:pt x="3489270" y="1707909"/>
+                  </a:lnTo>
+                  <a:lnTo>
+                    <a:pt x="3566904" y="1728410"/>
+                  </a:lnTo>
+                  <a:lnTo>
+                    <a:pt x="3644538" y="1748411"/>
+                  </a:lnTo>
+                  <a:lnTo>
+                    <a:pt x="3722172" y="1767925"/>
+                  </a:lnTo>
+                  <a:lnTo>
+                    <a:pt x="3799806" y="1786963"/>
+                  </a:lnTo>
+                  <a:lnTo>
+                    <a:pt x="3877440" y="1805538"/>
+                  </a:lnTo>
+                  <a:lnTo>
+                    <a:pt x="3955074" y="1823660"/>
+                  </a:lnTo>
+                  <a:lnTo>
+                    <a:pt x="4032708" y="1841341"/>
+                  </a:lnTo>
+                  <a:lnTo>
+                    <a:pt x="4110342" y="1858592"/>
+                  </a:lnTo>
+                  <a:lnTo>
+                    <a:pt x="4187976" y="1875422"/>
+                  </a:lnTo>
+                  <a:lnTo>
+                    <a:pt x="4265610" y="1891842"/>
+                  </a:lnTo>
+                  <a:lnTo>
+                    <a:pt x="4343244" y="1907863"/>
+                  </a:lnTo>
+                  <a:lnTo>
+                    <a:pt x="4420879" y="1923493"/>
+                  </a:lnTo>
+                  <a:lnTo>
+                    <a:pt x="4498513" y="1938742"/>
+                  </a:lnTo>
+                  <a:lnTo>
+                    <a:pt x="4576147" y="1953620"/>
+                  </a:lnTo>
+                  <a:lnTo>
+                    <a:pt x="4653781" y="1968136"/>
+                  </a:lnTo>
+                  <a:lnTo>
+                    <a:pt x="4731415" y="1982298"/>
+                  </a:lnTo>
+                  <a:lnTo>
+                    <a:pt x="4809049" y="1996115"/>
+                  </a:lnTo>
+                  <a:lnTo>
+                    <a:pt x="4886683" y="2009595"/>
+                  </a:lnTo>
+                  <a:lnTo>
+                    <a:pt x="4964317" y="2022747"/>
+                  </a:lnTo>
+                  <a:lnTo>
+                    <a:pt x="5041951" y="2035579"/>
+                  </a:lnTo>
+                  <a:lnTo>
+                    <a:pt x="5119585" y="2048098"/>
+                  </a:lnTo>
+                  <a:lnTo>
+                    <a:pt x="5197219" y="2060313"/>
+                  </a:lnTo>
+                  <a:lnTo>
+                    <a:pt x="5274853" y="2072229"/>
+                  </a:lnTo>
+                  <a:lnTo>
+                    <a:pt x="5352487" y="2083856"/>
+                  </a:lnTo>
+                  <a:lnTo>
+                    <a:pt x="5430121" y="2095199"/>
+                  </a:lnTo>
+                  <a:lnTo>
+                    <a:pt x="5507755" y="2106266"/>
+                  </a:lnTo>
+                  <a:lnTo>
+                    <a:pt x="5585389" y="2117064"/>
+                  </a:lnTo>
+                  <a:lnTo>
+                    <a:pt x="5663023" y="2127598"/>
+                  </a:lnTo>
+                  <a:lnTo>
+                    <a:pt x="5740657" y="2137876"/>
+                  </a:lnTo>
+                  <a:lnTo>
+                    <a:pt x="5818291" y="2147904"/>
+                  </a:lnTo>
+                  <a:lnTo>
+                    <a:pt x="5895925" y="2157687"/>
+                  </a:lnTo>
+                  <a:lnTo>
+                    <a:pt x="5973559" y="2167232"/>
+                  </a:lnTo>
+                  <a:lnTo>
+                    <a:pt x="6051193" y="2176545"/>
+                  </a:lnTo>
+                  <a:lnTo>
+                    <a:pt x="6128827" y="2185631"/>
+                  </a:lnTo>
+                  <a:lnTo>
+                    <a:pt x="6206462" y="2194495"/>
+                  </a:lnTo>
+                  <a:lnTo>
+                    <a:pt x="6284096" y="2203143"/>
+                  </a:lnTo>
+                  <a:lnTo>
+                    <a:pt x="6361730" y="2211581"/>
+                  </a:lnTo>
+                  <a:lnTo>
+                    <a:pt x="6439364" y="2219814"/>
+                  </a:lnTo>
+                  <a:lnTo>
+                    <a:pt x="6516998" y="2227845"/>
+                  </a:lnTo>
+                  <a:lnTo>
+                    <a:pt x="6594632" y="2235682"/>
+                  </a:lnTo>
+                  <a:lnTo>
+                    <a:pt x="6672266" y="2243327"/>
+                  </a:lnTo>
+                  <a:lnTo>
+                    <a:pt x="6749900" y="2250786"/>
+                  </a:lnTo>
+                  <a:lnTo>
+                    <a:pt x="6827534" y="2258063"/>
+                  </a:lnTo>
+                  <a:lnTo>
+                    <a:pt x="6905168" y="2265164"/>
+                  </a:lnTo>
+                  <a:lnTo>
+                    <a:pt x="6982802" y="2272091"/>
+                  </a:lnTo>
+                  <a:lnTo>
+                    <a:pt x="7060436" y="2278849"/>
+                  </a:lnTo>
+                  <a:lnTo>
+                    <a:pt x="7138070" y="2285443"/>
+                  </a:lnTo>
+                  <a:lnTo>
+                    <a:pt x="7215704" y="2291876"/>
+                  </a:lnTo>
+                  <a:lnTo>
+                    <a:pt x="7293338" y="2298153"/>
+                  </a:lnTo>
+                  <a:lnTo>
+                    <a:pt x="7370972" y="2304277"/>
                   </a:lnTo>
                 </a:path>
               </a:pathLst>

--- a/docs/plots/carbo/jx_carbo_linsubhr_ratio_hosp1.pptx
+++ b/docs/plots/carbo/jx_carbo_linsubhr_ratio_hosp1.pptx
@@ -3003,530 +3003,530 @@
           <p:spPr>
             <a:xfrm>
               <a:off x="817517" y="1896563"/>
-              <a:ext cx="7370972" cy="3612551"/>
+              <a:ext cx="7370972" cy="3608957"/>
             </a:xfrm>
             <a:custGeom>
               <a:avLst/>
               <a:pathLst>
-                <a:path w="7370972" h="3612551">
+                <a:path w="7370972" h="3608957">
                   <a:moveTo>
-                    <a:pt x="1528089" y="0"/>
+                    <a:pt x="1474397" y="0"/>
                   </a:moveTo>
                   <a:lnTo>
-                    <a:pt x="1548419" y="58152"/>
-                  </a:lnTo>
-                  <a:lnTo>
-                    <a:pt x="1626053" y="267297"/>
-                  </a:lnTo>
-                  <a:lnTo>
-                    <a:pt x="1703687" y="464273"/>
-                  </a:lnTo>
-                  <a:lnTo>
-                    <a:pt x="1781321" y="649788"/>
-                  </a:lnTo>
-                  <a:lnTo>
-                    <a:pt x="1858955" y="824509"/>
-                  </a:lnTo>
-                  <a:lnTo>
-                    <a:pt x="1936589" y="989064"/>
-                  </a:lnTo>
-                  <a:lnTo>
-                    <a:pt x="2014223" y="1144044"/>
-                  </a:lnTo>
-                  <a:lnTo>
-                    <a:pt x="2091857" y="1290006"/>
-                  </a:lnTo>
-                  <a:lnTo>
-                    <a:pt x="2169491" y="1427476"/>
-                  </a:lnTo>
-                  <a:lnTo>
-                    <a:pt x="2247125" y="1556947"/>
-                  </a:lnTo>
-                  <a:lnTo>
-                    <a:pt x="2324759" y="1678885"/>
-                  </a:lnTo>
-                  <a:lnTo>
-                    <a:pt x="2402393" y="1793728"/>
-                  </a:lnTo>
-                  <a:lnTo>
-                    <a:pt x="2480027" y="1901889"/>
-                  </a:lnTo>
-                  <a:lnTo>
-                    <a:pt x="2557661" y="2003756"/>
-                  </a:lnTo>
-                  <a:lnTo>
-                    <a:pt x="2635295" y="2099697"/>
-                  </a:lnTo>
-                  <a:lnTo>
-                    <a:pt x="2712930" y="2190055"/>
-                  </a:lnTo>
-                  <a:lnTo>
-                    <a:pt x="2790564" y="2275155"/>
-                  </a:lnTo>
-                  <a:lnTo>
-                    <a:pt x="2868198" y="2355304"/>
-                  </a:lnTo>
-                  <a:lnTo>
-                    <a:pt x="2945832" y="2430790"/>
-                  </a:lnTo>
-                  <a:lnTo>
-                    <a:pt x="3023466" y="2501883"/>
-                  </a:lnTo>
-                  <a:lnTo>
-                    <a:pt x="3101100" y="2568840"/>
-                  </a:lnTo>
-                  <a:lnTo>
-                    <a:pt x="3178734" y="2631901"/>
-                  </a:lnTo>
-                  <a:lnTo>
-                    <a:pt x="3256368" y="2691293"/>
-                  </a:lnTo>
-                  <a:lnTo>
-                    <a:pt x="3334002" y="2747229"/>
-                  </a:lnTo>
-                  <a:lnTo>
-                    <a:pt x="3411636" y="2779927"/>
-                  </a:lnTo>
-                  <a:lnTo>
-                    <a:pt x="3489270" y="2770602"/>
-                  </a:lnTo>
-                  <a:lnTo>
-                    <a:pt x="3566904" y="2761177"/>
-                  </a:lnTo>
-                  <a:lnTo>
-                    <a:pt x="3644538" y="2751651"/>
-                  </a:lnTo>
-                  <a:lnTo>
-                    <a:pt x="3722172" y="2742024"/>
-                  </a:lnTo>
-                  <a:lnTo>
-                    <a:pt x="3799806" y="2732293"/>
-                  </a:lnTo>
-                  <a:lnTo>
-                    <a:pt x="3877440" y="2722459"/>
-                  </a:lnTo>
-                  <a:lnTo>
-                    <a:pt x="3955074" y="2712520"/>
-                  </a:lnTo>
-                  <a:lnTo>
-                    <a:pt x="4032708" y="2702474"/>
-                  </a:lnTo>
-                  <a:lnTo>
-                    <a:pt x="4110342" y="2692321"/>
-                  </a:lnTo>
-                  <a:lnTo>
-                    <a:pt x="4187976" y="2682060"/>
-                  </a:lnTo>
-                  <a:lnTo>
-                    <a:pt x="4265610" y="2671689"/>
-                  </a:lnTo>
-                  <a:lnTo>
-                    <a:pt x="4343244" y="2661207"/>
-                  </a:lnTo>
-                  <a:lnTo>
-                    <a:pt x="4420879" y="2650613"/>
-                  </a:lnTo>
-                  <a:lnTo>
-                    <a:pt x="4498513" y="2639906"/>
-                  </a:lnTo>
-                  <a:lnTo>
-                    <a:pt x="4576147" y="2629084"/>
-                  </a:lnTo>
-                  <a:lnTo>
-                    <a:pt x="4653781" y="2618147"/>
-                  </a:lnTo>
-                  <a:lnTo>
-                    <a:pt x="4731415" y="2607093"/>
-                  </a:lnTo>
-                  <a:lnTo>
-                    <a:pt x="4809049" y="2595921"/>
-                  </a:lnTo>
-                  <a:lnTo>
-                    <a:pt x="4886683" y="2584629"/>
-                  </a:lnTo>
-                  <a:lnTo>
-                    <a:pt x="4964317" y="2573217"/>
-                  </a:lnTo>
-                  <a:lnTo>
-                    <a:pt x="5041951" y="2561683"/>
-                  </a:lnTo>
-                  <a:lnTo>
-                    <a:pt x="5119585" y="2550026"/>
-                  </a:lnTo>
-                  <a:lnTo>
-                    <a:pt x="5197219" y="2538244"/>
-                  </a:lnTo>
-                  <a:lnTo>
-                    <a:pt x="5274853" y="2526336"/>
-                  </a:lnTo>
-                  <a:lnTo>
-                    <a:pt x="5352487" y="2514301"/>
-                  </a:lnTo>
-                  <a:lnTo>
-                    <a:pt x="5430121" y="2502138"/>
-                  </a:lnTo>
-                  <a:lnTo>
-                    <a:pt x="5507755" y="2489844"/>
-                  </a:lnTo>
-                  <a:lnTo>
-                    <a:pt x="5585389" y="2477419"/>
-                  </a:lnTo>
-                  <a:lnTo>
-                    <a:pt x="5663023" y="2464861"/>
-                  </a:lnTo>
-                  <a:lnTo>
-                    <a:pt x="5740657" y="2452169"/>
-                  </a:lnTo>
-                  <a:lnTo>
-                    <a:pt x="5818291" y="2439342"/>
-                  </a:lnTo>
-                  <a:lnTo>
-                    <a:pt x="5895925" y="2426377"/>
-                  </a:lnTo>
-                  <a:lnTo>
-                    <a:pt x="5973559" y="2413274"/>
-                  </a:lnTo>
-                  <a:lnTo>
-                    <a:pt x="6051193" y="2400031"/>
-                  </a:lnTo>
-                  <a:lnTo>
-                    <a:pt x="6128827" y="2386646"/>
-                  </a:lnTo>
-                  <a:lnTo>
-                    <a:pt x="6206462" y="2373119"/>
-                  </a:lnTo>
-                  <a:lnTo>
-                    <a:pt x="6284096" y="2359446"/>
-                  </a:lnTo>
-                  <a:lnTo>
-                    <a:pt x="6361730" y="2345628"/>
-                  </a:lnTo>
-                  <a:lnTo>
-                    <a:pt x="6439364" y="2331662"/>
-                  </a:lnTo>
-                  <a:lnTo>
-                    <a:pt x="6516998" y="2317547"/>
-                  </a:lnTo>
-                  <a:lnTo>
-                    <a:pt x="6594632" y="2303281"/>
-                  </a:lnTo>
-                  <a:lnTo>
-                    <a:pt x="6672266" y="2288862"/>
-                  </a:lnTo>
-                  <a:lnTo>
-                    <a:pt x="6749900" y="2274290"/>
-                  </a:lnTo>
-                  <a:lnTo>
-                    <a:pt x="6827534" y="2259562"/>
-                  </a:lnTo>
-                  <a:lnTo>
-                    <a:pt x="6905168" y="2244676"/>
-                  </a:lnTo>
-                  <a:lnTo>
-                    <a:pt x="6982802" y="2229631"/>
-                  </a:lnTo>
-                  <a:lnTo>
-                    <a:pt x="7060436" y="2214426"/>
-                  </a:lnTo>
-                  <a:lnTo>
-                    <a:pt x="7138070" y="2199058"/>
-                  </a:lnTo>
-                  <a:lnTo>
-                    <a:pt x="7215704" y="2183526"/>
-                  </a:lnTo>
-                  <a:lnTo>
-                    <a:pt x="7293338" y="2167828"/>
-                  </a:lnTo>
-                  <a:lnTo>
-                    <a:pt x="7370972" y="2151962"/>
-                  </a:lnTo>
-                  <a:lnTo>
-                    <a:pt x="7370972" y="3612551"/>
-                  </a:lnTo>
-                  <a:lnTo>
-                    <a:pt x="7293338" y="3610074"/>
-                  </a:lnTo>
-                  <a:lnTo>
-                    <a:pt x="7215704" y="3607444"/>
-                  </a:lnTo>
-                  <a:lnTo>
-                    <a:pt x="7138070" y="3604652"/>
-                  </a:lnTo>
-                  <a:lnTo>
-                    <a:pt x="7060436" y="3601687"/>
-                  </a:lnTo>
-                  <a:lnTo>
-                    <a:pt x="6982802" y="3598539"/>
-                  </a:lnTo>
-                  <a:lnTo>
-                    <a:pt x="6905168" y="3595196"/>
-                  </a:lnTo>
-                  <a:lnTo>
-                    <a:pt x="6827534" y="3591647"/>
-                  </a:lnTo>
-                  <a:lnTo>
-                    <a:pt x="6749900" y="3587879"/>
-                  </a:lnTo>
-                  <a:lnTo>
-                    <a:pt x="6672266" y="3583878"/>
-                  </a:lnTo>
-                  <a:lnTo>
-                    <a:pt x="6594632" y="3579630"/>
-                  </a:lnTo>
-                  <a:lnTo>
-                    <a:pt x="6516998" y="3575119"/>
-                  </a:lnTo>
-                  <a:lnTo>
-                    <a:pt x="6439364" y="3570329"/>
-                  </a:lnTo>
-                  <a:lnTo>
-                    <a:pt x="6361730" y="3565244"/>
-                  </a:lnTo>
-                  <a:lnTo>
-                    <a:pt x="6284096" y="3559845"/>
-                  </a:lnTo>
-                  <a:lnTo>
-                    <a:pt x="6206462" y="3554112"/>
-                  </a:lnTo>
-                  <a:lnTo>
-                    <a:pt x="6128827" y="3548024"/>
-                  </a:lnTo>
-                  <a:lnTo>
-                    <a:pt x="6051193" y="3541561"/>
-                  </a:lnTo>
-                  <a:lnTo>
-                    <a:pt x="5973559" y="3534698"/>
-                  </a:lnTo>
-                  <a:lnTo>
-                    <a:pt x="5895925" y="3527412"/>
-                  </a:lnTo>
-                  <a:lnTo>
-                    <a:pt x="5818291" y="3519675"/>
-                  </a:lnTo>
-                  <a:lnTo>
-                    <a:pt x="5740657" y="3511460"/>
-                  </a:lnTo>
-                  <a:lnTo>
-                    <a:pt x="5663023" y="3502738"/>
-                  </a:lnTo>
-                  <a:lnTo>
-                    <a:pt x="5585389" y="3493477"/>
-                  </a:lnTo>
-                  <a:lnTo>
-                    <a:pt x="5507755" y="3483644"/>
-                  </a:lnTo>
-                  <a:lnTo>
-                    <a:pt x="5430121" y="3473203"/>
-                  </a:lnTo>
-                  <a:lnTo>
-                    <a:pt x="5352487" y="3462117"/>
-                  </a:lnTo>
-                  <a:lnTo>
-                    <a:pt x="5274853" y="3450347"/>
-                  </a:lnTo>
-                  <a:lnTo>
-                    <a:pt x="5197219" y="3437849"/>
-                  </a:lnTo>
-                  <a:lnTo>
-                    <a:pt x="5119585" y="3424579"/>
-                  </a:lnTo>
-                  <a:lnTo>
-                    <a:pt x="5041951" y="3410489"/>
-                  </a:lnTo>
-                  <a:lnTo>
-                    <a:pt x="4964317" y="3395529"/>
-                  </a:lnTo>
-                  <a:lnTo>
-                    <a:pt x="4886683" y="3379645"/>
-                  </a:lnTo>
-                  <a:lnTo>
-                    <a:pt x="4809049" y="3362779"/>
-                  </a:lnTo>
-                  <a:lnTo>
-                    <a:pt x="4731415" y="3344871"/>
-                  </a:lnTo>
-                  <a:lnTo>
-                    <a:pt x="4653781" y="3325857"/>
-                  </a:lnTo>
-                  <a:lnTo>
-                    <a:pt x="4576147" y="3305669"/>
-                  </a:lnTo>
-                  <a:lnTo>
-                    <a:pt x="4498513" y="3284233"/>
-                  </a:lnTo>
-                  <a:lnTo>
-                    <a:pt x="4420879" y="3261472"/>
-                  </a:lnTo>
-                  <a:lnTo>
-                    <a:pt x="4343244" y="3237306"/>
-                  </a:lnTo>
-                  <a:lnTo>
-                    <a:pt x="4265610" y="3211647"/>
-                  </a:lnTo>
-                  <a:lnTo>
-                    <a:pt x="4187976" y="3184402"/>
-                  </a:lnTo>
-                  <a:lnTo>
-                    <a:pt x="4110342" y="3155475"/>
-                  </a:lnTo>
-                  <a:lnTo>
-                    <a:pt x="4032708" y="3124760"/>
-                  </a:lnTo>
-                  <a:lnTo>
-                    <a:pt x="3955074" y="3092147"/>
-                  </a:lnTo>
-                  <a:lnTo>
-                    <a:pt x="3877440" y="3057520"/>
-                  </a:lnTo>
-                  <a:lnTo>
-                    <a:pt x="3799806" y="3020754"/>
-                  </a:lnTo>
-                  <a:lnTo>
-                    <a:pt x="3722172" y="2981716"/>
-                  </a:lnTo>
-                  <a:lnTo>
-                    <a:pt x="3644538" y="2940266"/>
-                  </a:lnTo>
-                  <a:lnTo>
-                    <a:pt x="3566904" y="2896256"/>
-                  </a:lnTo>
-                  <a:lnTo>
-                    <a:pt x="3489270" y="2849527"/>
-                  </a:lnTo>
-                  <a:lnTo>
-                    <a:pt x="3411636" y="2799910"/>
-                  </a:lnTo>
-                  <a:lnTo>
-                    <a:pt x="3334002" y="2789154"/>
-                  </a:lnTo>
-                  <a:lnTo>
-                    <a:pt x="3256368" y="2798283"/>
-                  </a:lnTo>
-                  <a:lnTo>
-                    <a:pt x="3178734" y="2807316"/>
-                  </a:lnTo>
-                  <a:lnTo>
-                    <a:pt x="3101100" y="2816253"/>
-                  </a:lnTo>
-                  <a:lnTo>
-                    <a:pt x="3023466" y="2825095"/>
-                  </a:lnTo>
-                  <a:lnTo>
-                    <a:pt x="2945832" y="2833845"/>
-                  </a:lnTo>
-                  <a:lnTo>
-                    <a:pt x="2868198" y="2842501"/>
-                  </a:lnTo>
-                  <a:lnTo>
-                    <a:pt x="2790564" y="2851066"/>
-                  </a:lnTo>
-                  <a:lnTo>
-                    <a:pt x="2712930" y="2859541"/>
-                  </a:lnTo>
-                  <a:lnTo>
-                    <a:pt x="2635295" y="2867926"/>
-                  </a:lnTo>
-                  <a:lnTo>
-                    <a:pt x="2557661" y="2876222"/>
-                  </a:lnTo>
-                  <a:lnTo>
-                    <a:pt x="2480027" y="2884431"/>
-                  </a:lnTo>
-                  <a:lnTo>
-                    <a:pt x="2402393" y="2892553"/>
-                  </a:lnTo>
-                  <a:lnTo>
-                    <a:pt x="2324759" y="2900589"/>
-                  </a:lnTo>
-                  <a:lnTo>
-                    <a:pt x="2247125" y="2908540"/>
-                  </a:lnTo>
-                  <a:lnTo>
-                    <a:pt x="2169491" y="2916407"/>
-                  </a:lnTo>
-                  <a:lnTo>
-                    <a:pt x="2091857" y="2924191"/>
-                  </a:lnTo>
-                  <a:lnTo>
-                    <a:pt x="2014223" y="2931892"/>
-                  </a:lnTo>
-                  <a:lnTo>
-                    <a:pt x="1936589" y="2939512"/>
-                  </a:lnTo>
-                  <a:lnTo>
-                    <a:pt x="1858955" y="2947052"/>
-                  </a:lnTo>
-                  <a:lnTo>
-                    <a:pt x="1781321" y="2954512"/>
-                  </a:lnTo>
-                  <a:lnTo>
-                    <a:pt x="1703687" y="2961893"/>
-                  </a:lnTo>
-                  <a:lnTo>
-                    <a:pt x="1626053" y="2969195"/>
-                  </a:lnTo>
-                  <a:lnTo>
-                    <a:pt x="1548419" y="2976421"/>
-                  </a:lnTo>
-                  <a:lnTo>
-                    <a:pt x="1470785" y="2983570"/>
-                  </a:lnTo>
-                  <a:lnTo>
-                    <a:pt x="1393151" y="2990644"/>
-                  </a:lnTo>
-                  <a:lnTo>
-                    <a:pt x="1315517" y="2997643"/>
-                  </a:lnTo>
-                  <a:lnTo>
-                    <a:pt x="1237883" y="3004568"/>
-                  </a:lnTo>
-                  <a:lnTo>
-                    <a:pt x="1160249" y="3011420"/>
-                  </a:lnTo>
-                  <a:lnTo>
-                    <a:pt x="1082615" y="3018199"/>
-                  </a:lnTo>
-                  <a:lnTo>
-                    <a:pt x="1004981" y="3024907"/>
-                  </a:lnTo>
-                  <a:lnTo>
-                    <a:pt x="927346" y="3031543"/>
-                  </a:lnTo>
-                  <a:lnTo>
-                    <a:pt x="849712" y="3038110"/>
-                  </a:lnTo>
-                  <a:lnTo>
-                    <a:pt x="772078" y="3044607"/>
-                  </a:lnTo>
-                  <a:lnTo>
-                    <a:pt x="694444" y="3051035"/>
-                  </a:lnTo>
-                  <a:lnTo>
-                    <a:pt x="616810" y="3057396"/>
-                  </a:lnTo>
-                  <a:lnTo>
-                    <a:pt x="539176" y="3063689"/>
-                  </a:lnTo>
-                  <a:lnTo>
-                    <a:pt x="461542" y="3069916"/>
-                  </a:lnTo>
-                  <a:lnTo>
-                    <a:pt x="383908" y="3076077"/>
-                  </a:lnTo>
-                  <a:lnTo>
-                    <a:pt x="306274" y="3082172"/>
-                  </a:lnTo>
-                  <a:lnTo>
-                    <a:pt x="228640" y="3088204"/>
-                  </a:lnTo>
-                  <a:lnTo>
-                    <a:pt x="151006" y="3094171"/>
-                  </a:lnTo>
-                  <a:lnTo>
-                    <a:pt x="73372" y="3100075"/>
-                  </a:lnTo>
-                  <a:lnTo>
-                    <a:pt x="0" y="3105597"/>
+                    <a:pt x="1548419" y="197670"/>
+                  </a:lnTo>
+                  <a:lnTo>
+                    <a:pt x="1626053" y="393251"/>
+                  </a:lnTo>
+                  <a:lnTo>
+                    <a:pt x="1703687" y="577761"/>
+                  </a:lnTo>
+                  <a:lnTo>
+                    <a:pt x="1781321" y="751825"/>
+                  </a:lnTo>
+                  <a:lnTo>
+                    <a:pt x="1858955" y="916036"/>
+                  </a:lnTo>
+                  <a:lnTo>
+                    <a:pt x="1936589" y="1070952"/>
+                  </a:lnTo>
+                  <a:lnTo>
+                    <a:pt x="2014223" y="1217097"/>
+                  </a:lnTo>
+                  <a:lnTo>
+                    <a:pt x="2091857" y="1354970"/>
+                  </a:lnTo>
+                  <a:lnTo>
+                    <a:pt x="2169491" y="1485038"/>
+                  </a:lnTo>
+                  <a:lnTo>
+                    <a:pt x="2247125" y="1607743"/>
+                  </a:lnTo>
+                  <a:lnTo>
+                    <a:pt x="2324759" y="1723502"/>
+                  </a:lnTo>
+                  <a:lnTo>
+                    <a:pt x="2402393" y="1832707"/>
+                  </a:lnTo>
+                  <a:lnTo>
+                    <a:pt x="2480027" y="1935731"/>
+                  </a:lnTo>
+                  <a:lnTo>
+                    <a:pt x="2557661" y="2032923"/>
+                  </a:lnTo>
+                  <a:lnTo>
+                    <a:pt x="2635295" y="2124613"/>
+                  </a:lnTo>
+                  <a:lnTo>
+                    <a:pt x="2712930" y="2211113"/>
+                  </a:lnTo>
+                  <a:lnTo>
+                    <a:pt x="2790564" y="2292716"/>
+                  </a:lnTo>
+                  <a:lnTo>
+                    <a:pt x="2868198" y="2369699"/>
+                  </a:lnTo>
+                  <a:lnTo>
+                    <a:pt x="2945832" y="2442325"/>
+                  </a:lnTo>
+                  <a:lnTo>
+                    <a:pt x="3023466" y="2510839"/>
+                  </a:lnTo>
+                  <a:lnTo>
+                    <a:pt x="3101100" y="2575475"/>
+                  </a:lnTo>
+                  <a:lnTo>
+                    <a:pt x="3178734" y="2636452"/>
+                  </a:lnTo>
+                  <a:lnTo>
+                    <a:pt x="3256368" y="2693977"/>
+                  </a:lnTo>
+                  <a:lnTo>
+                    <a:pt x="3334002" y="2748246"/>
+                  </a:lnTo>
+                  <a:lnTo>
+                    <a:pt x="3411636" y="2778312"/>
+                  </a:lnTo>
+                  <a:lnTo>
+                    <a:pt x="3489270" y="2763976"/>
+                  </a:lnTo>
+                  <a:lnTo>
+                    <a:pt x="3566904" y="2749406"/>
+                  </a:lnTo>
+                  <a:lnTo>
+                    <a:pt x="3644538" y="2734597"/>
+                  </a:lnTo>
+                  <a:lnTo>
+                    <a:pt x="3722172" y="2719545"/>
+                  </a:lnTo>
+                  <a:lnTo>
+                    <a:pt x="3799806" y="2704246"/>
+                  </a:lnTo>
+                  <a:lnTo>
+                    <a:pt x="3877440" y="2688697"/>
+                  </a:lnTo>
+                  <a:lnTo>
+                    <a:pt x="3955074" y="2672892"/>
+                  </a:lnTo>
+                  <a:lnTo>
+                    <a:pt x="4032708" y="2656828"/>
+                  </a:lnTo>
+                  <a:lnTo>
+                    <a:pt x="4110342" y="2640501"/>
+                  </a:lnTo>
+                  <a:lnTo>
+                    <a:pt x="4187976" y="2623907"/>
+                  </a:lnTo>
+                  <a:lnTo>
+                    <a:pt x="4265610" y="2607040"/>
+                  </a:lnTo>
+                  <a:lnTo>
+                    <a:pt x="4343244" y="2589896"/>
+                  </a:lnTo>
+                  <a:lnTo>
+                    <a:pt x="4420879" y="2572472"/>
+                  </a:lnTo>
+                  <a:lnTo>
+                    <a:pt x="4498513" y="2554762"/>
+                  </a:lnTo>
+                  <a:lnTo>
+                    <a:pt x="4576147" y="2536761"/>
+                  </a:lnTo>
+                  <a:lnTo>
+                    <a:pt x="4653781" y="2518466"/>
+                  </a:lnTo>
+                  <a:lnTo>
+                    <a:pt x="4731415" y="2499870"/>
+                  </a:lnTo>
+                  <a:lnTo>
+                    <a:pt x="4809049" y="2480970"/>
+                  </a:lnTo>
+                  <a:lnTo>
+                    <a:pt x="4886683" y="2461759"/>
+                  </a:lnTo>
+                  <a:lnTo>
+                    <a:pt x="4964317" y="2442234"/>
+                  </a:lnTo>
+                  <a:lnTo>
+                    <a:pt x="5041951" y="2422388"/>
+                  </a:lnTo>
+                  <a:lnTo>
+                    <a:pt x="5119585" y="2402218"/>
+                  </a:lnTo>
+                  <a:lnTo>
+                    <a:pt x="5197219" y="2381716"/>
+                  </a:lnTo>
+                  <a:lnTo>
+                    <a:pt x="5274853" y="2360878"/>
+                  </a:lnTo>
+                  <a:lnTo>
+                    <a:pt x="5352487" y="2339699"/>
+                  </a:lnTo>
+                  <a:lnTo>
+                    <a:pt x="5430121" y="2318172"/>
+                  </a:lnTo>
+                  <a:lnTo>
+                    <a:pt x="5507755" y="2296293"/>
+                  </a:lnTo>
+                  <a:lnTo>
+                    <a:pt x="5585389" y="2274055"/>
+                  </a:lnTo>
+                  <a:lnTo>
+                    <a:pt x="5663023" y="2251452"/>
+                  </a:lnTo>
+                  <a:lnTo>
+                    <a:pt x="5740657" y="2228478"/>
+                  </a:lnTo>
+                  <a:lnTo>
+                    <a:pt x="5818291" y="2205128"/>
+                  </a:lnTo>
+                  <a:lnTo>
+                    <a:pt x="5895925" y="2181395"/>
+                  </a:lnTo>
+                  <a:lnTo>
+                    <a:pt x="5973559" y="2157273"/>
+                  </a:lnTo>
+                  <a:lnTo>
+                    <a:pt x="6051193" y="2132755"/>
+                  </a:lnTo>
+                  <a:lnTo>
+                    <a:pt x="6128827" y="2107836"/>
+                  </a:lnTo>
+                  <a:lnTo>
+                    <a:pt x="6206462" y="2082508"/>
+                  </a:lnTo>
+                  <a:lnTo>
+                    <a:pt x="6284096" y="2056764"/>
+                  </a:lnTo>
+                  <a:lnTo>
+                    <a:pt x="6361730" y="2030599"/>
+                  </a:lnTo>
+                  <a:lnTo>
+                    <a:pt x="6439364" y="2004004"/>
+                  </a:lnTo>
+                  <a:lnTo>
+                    <a:pt x="6516998" y="1976974"/>
+                  </a:lnTo>
+                  <a:lnTo>
+                    <a:pt x="6594632" y="1949500"/>
+                  </a:lnTo>
+                  <a:lnTo>
+                    <a:pt x="6672266" y="1921576"/>
+                  </a:lnTo>
+                  <a:lnTo>
+                    <a:pt x="6749900" y="1893194"/>
+                  </a:lnTo>
+                  <a:lnTo>
+                    <a:pt x="6827534" y="1864346"/>
+                  </a:lnTo>
+                  <a:lnTo>
+                    <a:pt x="6905168" y="1835026"/>
+                  </a:lnTo>
+                  <a:lnTo>
+                    <a:pt x="6982802" y="1805225"/>
+                  </a:lnTo>
+                  <a:lnTo>
+                    <a:pt x="7060436" y="1774935"/>
+                  </a:lnTo>
+                  <a:lnTo>
+                    <a:pt x="7138070" y="1744149"/>
+                  </a:lnTo>
+                  <a:lnTo>
+                    <a:pt x="7215704" y="1712858"/>
+                  </a:lnTo>
+                  <a:lnTo>
+                    <a:pt x="7293338" y="1681054"/>
+                  </a:lnTo>
+                  <a:lnTo>
+                    <a:pt x="7370972" y="1648728"/>
+                  </a:lnTo>
+                  <a:lnTo>
+                    <a:pt x="7370972" y="3608957"/>
+                  </a:lnTo>
+                  <a:lnTo>
+                    <a:pt x="7293338" y="3606336"/>
+                  </a:lnTo>
+                  <a:lnTo>
+                    <a:pt x="7215704" y="3603557"/>
+                  </a:lnTo>
+                  <a:lnTo>
+                    <a:pt x="7138070" y="3600612"/>
+                  </a:lnTo>
+                  <a:lnTo>
+                    <a:pt x="7060436" y="3597490"/>
+                  </a:lnTo>
+                  <a:lnTo>
+                    <a:pt x="6982802" y="3594180"/>
+                  </a:lnTo>
+                  <a:lnTo>
+                    <a:pt x="6905168" y="3590672"/>
+                  </a:lnTo>
+                  <a:lnTo>
+                    <a:pt x="6827534" y="3586954"/>
+                  </a:lnTo>
+                  <a:lnTo>
+                    <a:pt x="6749900" y="3583012"/>
+                  </a:lnTo>
+                  <a:lnTo>
+                    <a:pt x="6672266" y="3578834"/>
+                  </a:lnTo>
+                  <a:lnTo>
+                    <a:pt x="6594632" y="3574405"/>
+                  </a:lnTo>
+                  <a:lnTo>
+                    <a:pt x="6516998" y="3569710"/>
+                  </a:lnTo>
+                  <a:lnTo>
+                    <a:pt x="6439364" y="3564733"/>
+                  </a:lnTo>
+                  <a:lnTo>
+                    <a:pt x="6361730" y="3559458"/>
+                  </a:lnTo>
+                  <a:lnTo>
+                    <a:pt x="6284096" y="3553867"/>
+                  </a:lnTo>
+                  <a:lnTo>
+                    <a:pt x="6206462" y="3547940"/>
+                  </a:lnTo>
+                  <a:lnTo>
+                    <a:pt x="6128827" y="3541657"/>
+                  </a:lnTo>
+                  <a:lnTo>
+                    <a:pt x="6051193" y="3534997"/>
+                  </a:lnTo>
+                  <a:lnTo>
+                    <a:pt x="5973559" y="3527938"/>
+                  </a:lnTo>
+                  <a:lnTo>
+                    <a:pt x="5895925" y="3520455"/>
+                  </a:lnTo>
+                  <a:lnTo>
+                    <a:pt x="5818291" y="3512523"/>
+                  </a:lnTo>
+                  <a:lnTo>
+                    <a:pt x="5740657" y="3504115"/>
+                  </a:lnTo>
+                  <a:lnTo>
+                    <a:pt x="5663023" y="3495202"/>
+                  </a:lnTo>
+                  <a:lnTo>
+                    <a:pt x="5585389" y="3485755"/>
+                  </a:lnTo>
+                  <a:lnTo>
+                    <a:pt x="5507755" y="3475741"/>
+                  </a:lnTo>
+                  <a:lnTo>
+                    <a:pt x="5430121" y="3465126"/>
+                  </a:lnTo>
+                  <a:lnTo>
+                    <a:pt x="5352487" y="3453874"/>
+                  </a:lnTo>
+                  <a:lnTo>
+                    <a:pt x="5274853" y="3441946"/>
+                  </a:lnTo>
+                  <a:lnTo>
+                    <a:pt x="5197219" y="3429303"/>
+                  </a:lnTo>
+                  <a:lnTo>
+                    <a:pt x="5119585" y="3415902"/>
+                  </a:lnTo>
+                  <a:lnTo>
+                    <a:pt x="5041951" y="3401696"/>
+                  </a:lnTo>
+                  <a:lnTo>
+                    <a:pt x="4964317" y="3386638"/>
+                  </a:lnTo>
+                  <a:lnTo>
+                    <a:pt x="4886683" y="3370676"/>
+                  </a:lnTo>
+                  <a:lnTo>
+                    <a:pt x="4809049" y="3353757"/>
+                  </a:lnTo>
+                  <a:lnTo>
+                    <a:pt x="4731415" y="3335822"/>
+                  </a:lnTo>
+                  <a:lnTo>
+                    <a:pt x="4653781" y="3316811"/>
+                  </a:lnTo>
+                  <a:lnTo>
+                    <a:pt x="4576147" y="3296659"/>
+                  </a:lnTo>
+                  <a:lnTo>
+                    <a:pt x="4498513" y="3275298"/>
+                  </a:lnTo>
+                  <a:lnTo>
+                    <a:pt x="4420879" y="3252656"/>
+                  </a:lnTo>
+                  <a:lnTo>
+                    <a:pt x="4343244" y="3228654"/>
+                  </a:lnTo>
+                  <a:lnTo>
+                    <a:pt x="4265610" y="3203213"/>
+                  </a:lnTo>
+                  <a:lnTo>
+                    <a:pt x="4187976" y="3176244"/>
+                  </a:lnTo>
+                  <a:lnTo>
+                    <a:pt x="4110342" y="3147658"/>
+                  </a:lnTo>
+                  <a:lnTo>
+                    <a:pt x="4032708" y="3117356"/>
+                  </a:lnTo>
+                  <a:lnTo>
+                    <a:pt x="3955074" y="3085236"/>
+                  </a:lnTo>
+                  <a:lnTo>
+                    <a:pt x="3877440" y="3051188"/>
+                  </a:lnTo>
+                  <a:lnTo>
+                    <a:pt x="3799806" y="3015098"/>
+                  </a:lnTo>
+                  <a:lnTo>
+                    <a:pt x="3722172" y="2976842"/>
+                  </a:lnTo>
+                  <a:lnTo>
+                    <a:pt x="3644538" y="2936290"/>
+                  </a:lnTo>
+                  <a:lnTo>
+                    <a:pt x="3566904" y="2893305"/>
+                  </a:lnTo>
+                  <a:lnTo>
+                    <a:pt x="3489270" y="2847741"/>
+                  </a:lnTo>
+                  <a:lnTo>
+                    <a:pt x="3411636" y="2799442"/>
+                  </a:lnTo>
+                  <a:lnTo>
+                    <a:pt x="3334002" y="2792416"/>
+                  </a:lnTo>
+                  <a:lnTo>
+                    <a:pt x="3256368" y="2806292"/>
+                  </a:lnTo>
+                  <a:lnTo>
+                    <a:pt x="3178734" y="2819945"/>
+                  </a:lnTo>
+                  <a:lnTo>
+                    <a:pt x="3101100" y="2833377"/>
+                  </a:lnTo>
+                  <a:lnTo>
+                    <a:pt x="3023466" y="2846593"/>
+                  </a:lnTo>
+                  <a:lnTo>
+                    <a:pt x="2945832" y="2859596"/>
+                  </a:lnTo>
+                  <a:lnTo>
+                    <a:pt x="2868198" y="2872388"/>
+                  </a:lnTo>
+                  <a:lnTo>
+                    <a:pt x="2790564" y="2884975"/>
+                  </a:lnTo>
+                  <a:lnTo>
+                    <a:pt x="2712930" y="2897358"/>
+                  </a:lnTo>
+                  <a:lnTo>
+                    <a:pt x="2635295" y="2909542"/>
+                  </a:lnTo>
+                  <a:lnTo>
+                    <a:pt x="2557661" y="2921529"/>
+                  </a:lnTo>
+                  <a:lnTo>
+                    <a:pt x="2480027" y="2933323"/>
+                  </a:lnTo>
+                  <a:lnTo>
+                    <a:pt x="2402393" y="2944926"/>
+                  </a:lnTo>
+                  <a:lnTo>
+                    <a:pt x="2324759" y="2956342"/>
+                  </a:lnTo>
+                  <a:lnTo>
+                    <a:pt x="2247125" y="2967575"/>
+                  </a:lnTo>
+                  <a:lnTo>
+                    <a:pt x="2169491" y="2978626"/>
+                  </a:lnTo>
+                  <a:lnTo>
+                    <a:pt x="2091857" y="2989498"/>
+                  </a:lnTo>
+                  <a:lnTo>
+                    <a:pt x="2014223" y="3000196"/>
+                  </a:lnTo>
+                  <a:lnTo>
+                    <a:pt x="1936589" y="3010720"/>
+                  </a:lnTo>
+                  <a:lnTo>
+                    <a:pt x="1858955" y="3021075"/>
+                  </a:lnTo>
+                  <a:lnTo>
+                    <a:pt x="1781321" y="3031263"/>
+                  </a:lnTo>
+                  <a:lnTo>
+                    <a:pt x="1703687" y="3041287"/>
+                  </a:lnTo>
+                  <a:lnTo>
+                    <a:pt x="1626053" y="3051149"/>
+                  </a:lnTo>
+                  <a:lnTo>
+                    <a:pt x="1548419" y="3060852"/>
+                  </a:lnTo>
+                  <a:lnTo>
+                    <a:pt x="1470785" y="3070398"/>
+                  </a:lnTo>
+                  <a:lnTo>
+                    <a:pt x="1393151" y="3079790"/>
+                  </a:lnTo>
+                  <a:lnTo>
+                    <a:pt x="1315517" y="3089031"/>
+                  </a:lnTo>
+                  <a:lnTo>
+                    <a:pt x="1237883" y="3098123"/>
+                  </a:lnTo>
+                  <a:lnTo>
+                    <a:pt x="1160249" y="3107068"/>
+                  </a:lnTo>
+                  <a:lnTo>
+                    <a:pt x="1082615" y="3115869"/>
+                  </a:lnTo>
+                  <a:lnTo>
+                    <a:pt x="1004981" y="3124527"/>
+                  </a:lnTo>
+                  <a:lnTo>
+                    <a:pt x="927346" y="3133047"/>
+                  </a:lnTo>
+                  <a:lnTo>
+                    <a:pt x="849712" y="3141428"/>
+                  </a:lnTo>
+                  <a:lnTo>
+                    <a:pt x="772078" y="3149675"/>
+                  </a:lnTo>
+                  <a:lnTo>
+                    <a:pt x="694444" y="3157788"/>
+                  </a:lnTo>
+                  <a:lnTo>
+                    <a:pt x="616810" y="3165771"/>
+                  </a:lnTo>
+                  <a:lnTo>
+                    <a:pt x="539176" y="3173625"/>
+                  </a:lnTo>
+                  <a:lnTo>
+                    <a:pt x="461542" y="3181352"/>
+                  </a:lnTo>
+                  <a:lnTo>
+                    <a:pt x="383908" y="3188954"/>
+                  </a:lnTo>
+                  <a:lnTo>
+                    <a:pt x="306274" y="3196434"/>
+                  </a:lnTo>
+                  <a:lnTo>
+                    <a:pt x="228640" y="3203793"/>
+                  </a:lnTo>
+                  <a:lnTo>
+                    <a:pt x="151006" y="3211034"/>
+                  </a:lnTo>
+                  <a:lnTo>
+                    <a:pt x="73372" y="3218158"/>
+                  </a:lnTo>
+                  <a:lnTo>
+                    <a:pt x="0" y="3224782"/>
                   </a:lnTo>
                   <a:close/>
                 </a:path>
@@ -3552,243 +3552,243 @@
           </p:nvSpPr>
           <p:spPr>
             <a:xfrm>
-              <a:off x="2345607" y="1896563"/>
-              <a:ext cx="5842883" cy="2779927"/>
+              <a:off x="2291915" y="1896563"/>
+              <a:ext cx="5896575" cy="2778312"/>
             </a:xfrm>
             <a:custGeom>
               <a:avLst/>
               <a:pathLst>
-                <a:path w="5842883" h="2779927">
+                <a:path w="5896575" h="2778312">
                   <a:moveTo>
                     <a:pt x="0" y="0"/>
                   </a:moveTo>
                   <a:lnTo>
-                    <a:pt x="20330" y="58152"/>
-                  </a:lnTo>
-                  <a:lnTo>
-                    <a:pt x="97964" y="267297"/>
-                  </a:lnTo>
-                  <a:lnTo>
-                    <a:pt x="175598" y="464273"/>
-                  </a:lnTo>
-                  <a:lnTo>
-                    <a:pt x="253232" y="649788"/>
-                  </a:lnTo>
-                  <a:lnTo>
-                    <a:pt x="330866" y="824509"/>
-                  </a:lnTo>
-                  <a:lnTo>
-                    <a:pt x="408500" y="989064"/>
-                  </a:lnTo>
-                  <a:lnTo>
-                    <a:pt x="486134" y="1144044"/>
-                  </a:lnTo>
-                  <a:lnTo>
-                    <a:pt x="563768" y="1290006"/>
-                  </a:lnTo>
-                  <a:lnTo>
-                    <a:pt x="641402" y="1427476"/>
-                  </a:lnTo>
-                  <a:lnTo>
-                    <a:pt x="719036" y="1556947"/>
-                  </a:lnTo>
-                  <a:lnTo>
-                    <a:pt x="796670" y="1678885"/>
-                  </a:lnTo>
-                  <a:lnTo>
-                    <a:pt x="874304" y="1793728"/>
-                  </a:lnTo>
-                  <a:lnTo>
-                    <a:pt x="951938" y="1901889"/>
-                  </a:lnTo>
-                  <a:lnTo>
-                    <a:pt x="1029572" y="2003756"/>
-                  </a:lnTo>
-                  <a:lnTo>
-                    <a:pt x="1107206" y="2099697"/>
-                  </a:lnTo>
-                  <a:lnTo>
-                    <a:pt x="1184840" y="2190055"/>
-                  </a:lnTo>
-                  <a:lnTo>
-                    <a:pt x="1262474" y="2275155"/>
-                  </a:lnTo>
-                  <a:lnTo>
-                    <a:pt x="1340108" y="2355304"/>
-                  </a:lnTo>
-                  <a:lnTo>
-                    <a:pt x="1417742" y="2430790"/>
-                  </a:lnTo>
-                  <a:lnTo>
-                    <a:pt x="1495376" y="2501883"/>
-                  </a:lnTo>
-                  <a:lnTo>
-                    <a:pt x="1573010" y="2568840"/>
-                  </a:lnTo>
-                  <a:lnTo>
-                    <a:pt x="1650645" y="2631901"/>
-                  </a:lnTo>
-                  <a:lnTo>
-                    <a:pt x="1728279" y="2691293"/>
-                  </a:lnTo>
-                  <a:lnTo>
-                    <a:pt x="1805913" y="2747229"/>
-                  </a:lnTo>
-                  <a:lnTo>
-                    <a:pt x="1883547" y="2779927"/>
-                  </a:lnTo>
-                  <a:lnTo>
-                    <a:pt x="1961181" y="2770602"/>
-                  </a:lnTo>
-                  <a:lnTo>
-                    <a:pt x="2038815" y="2761177"/>
-                  </a:lnTo>
-                  <a:lnTo>
-                    <a:pt x="2116449" y="2751651"/>
-                  </a:lnTo>
-                  <a:lnTo>
-                    <a:pt x="2194083" y="2742024"/>
-                  </a:lnTo>
-                  <a:lnTo>
-                    <a:pt x="2271717" y="2732293"/>
-                  </a:lnTo>
-                  <a:lnTo>
-                    <a:pt x="2349351" y="2722459"/>
-                  </a:lnTo>
-                  <a:lnTo>
-                    <a:pt x="2426985" y="2712520"/>
-                  </a:lnTo>
-                  <a:lnTo>
-                    <a:pt x="2504619" y="2702474"/>
-                  </a:lnTo>
-                  <a:lnTo>
-                    <a:pt x="2582253" y="2692321"/>
-                  </a:lnTo>
-                  <a:lnTo>
-                    <a:pt x="2659887" y="2682060"/>
-                  </a:lnTo>
-                  <a:lnTo>
-                    <a:pt x="2737521" y="2671689"/>
-                  </a:lnTo>
-                  <a:lnTo>
-                    <a:pt x="2815155" y="2661207"/>
-                  </a:lnTo>
-                  <a:lnTo>
-                    <a:pt x="2892789" y="2650613"/>
-                  </a:lnTo>
-                  <a:lnTo>
-                    <a:pt x="2970423" y="2639906"/>
-                  </a:lnTo>
-                  <a:lnTo>
-                    <a:pt x="3048057" y="2629084"/>
-                  </a:lnTo>
-                  <a:lnTo>
-                    <a:pt x="3125691" y="2618147"/>
-                  </a:lnTo>
-                  <a:lnTo>
-                    <a:pt x="3203325" y="2607093"/>
-                  </a:lnTo>
-                  <a:lnTo>
-                    <a:pt x="3280959" y="2595921"/>
-                  </a:lnTo>
-                  <a:lnTo>
-                    <a:pt x="3358594" y="2584629"/>
-                  </a:lnTo>
-                  <a:lnTo>
-                    <a:pt x="3436228" y="2573217"/>
-                  </a:lnTo>
-                  <a:lnTo>
-                    <a:pt x="3513862" y="2561683"/>
-                  </a:lnTo>
-                  <a:lnTo>
-                    <a:pt x="3591496" y="2550026"/>
-                  </a:lnTo>
-                  <a:lnTo>
-                    <a:pt x="3669130" y="2538244"/>
-                  </a:lnTo>
-                  <a:lnTo>
-                    <a:pt x="3746764" y="2526336"/>
-                  </a:lnTo>
-                  <a:lnTo>
-                    <a:pt x="3824398" y="2514301"/>
-                  </a:lnTo>
-                  <a:lnTo>
-                    <a:pt x="3902032" y="2502138"/>
-                  </a:lnTo>
-                  <a:lnTo>
-                    <a:pt x="3979666" y="2489844"/>
-                  </a:lnTo>
-                  <a:lnTo>
-                    <a:pt x="4057300" y="2477419"/>
-                  </a:lnTo>
-                  <a:lnTo>
-                    <a:pt x="4134934" y="2464861"/>
-                  </a:lnTo>
-                  <a:lnTo>
-                    <a:pt x="4212568" y="2452169"/>
-                  </a:lnTo>
-                  <a:lnTo>
-                    <a:pt x="4290202" y="2439342"/>
-                  </a:lnTo>
-                  <a:lnTo>
-                    <a:pt x="4367836" y="2426377"/>
-                  </a:lnTo>
-                  <a:lnTo>
-                    <a:pt x="4445470" y="2413274"/>
-                  </a:lnTo>
-                  <a:lnTo>
-                    <a:pt x="4523104" y="2400031"/>
-                  </a:lnTo>
-                  <a:lnTo>
-                    <a:pt x="4600738" y="2386646"/>
-                  </a:lnTo>
-                  <a:lnTo>
-                    <a:pt x="4678372" y="2373119"/>
-                  </a:lnTo>
-                  <a:lnTo>
-                    <a:pt x="4756006" y="2359446"/>
-                  </a:lnTo>
-                  <a:lnTo>
-                    <a:pt x="4833640" y="2345628"/>
-                  </a:lnTo>
-                  <a:lnTo>
-                    <a:pt x="4911274" y="2331662"/>
-                  </a:lnTo>
-                  <a:lnTo>
-                    <a:pt x="4988908" y="2317547"/>
-                  </a:lnTo>
-                  <a:lnTo>
-                    <a:pt x="5066542" y="2303281"/>
-                  </a:lnTo>
-                  <a:lnTo>
-                    <a:pt x="5144177" y="2288862"/>
-                  </a:lnTo>
-                  <a:lnTo>
-                    <a:pt x="5221811" y="2274290"/>
-                  </a:lnTo>
-                  <a:lnTo>
-                    <a:pt x="5299445" y="2259562"/>
-                  </a:lnTo>
-                  <a:lnTo>
-                    <a:pt x="5377079" y="2244676"/>
-                  </a:lnTo>
-                  <a:lnTo>
-                    <a:pt x="5454713" y="2229631"/>
-                  </a:lnTo>
-                  <a:lnTo>
-                    <a:pt x="5532347" y="2214426"/>
-                  </a:lnTo>
-                  <a:lnTo>
-                    <a:pt x="5609981" y="2199058"/>
-                  </a:lnTo>
-                  <a:lnTo>
-                    <a:pt x="5687615" y="2183526"/>
-                  </a:lnTo>
-                  <a:lnTo>
-                    <a:pt x="5765249" y="2167828"/>
-                  </a:lnTo>
-                  <a:lnTo>
-                    <a:pt x="5842883" y="2151962"/>
+                    <a:pt x="74021" y="197670"/>
+                  </a:lnTo>
+                  <a:lnTo>
+                    <a:pt x="151655" y="393251"/>
+                  </a:lnTo>
+                  <a:lnTo>
+                    <a:pt x="229290" y="577761"/>
+                  </a:lnTo>
+                  <a:lnTo>
+                    <a:pt x="306924" y="751825"/>
+                  </a:lnTo>
+                  <a:lnTo>
+                    <a:pt x="384558" y="916036"/>
+                  </a:lnTo>
+                  <a:lnTo>
+                    <a:pt x="462192" y="1070952"/>
+                  </a:lnTo>
+                  <a:lnTo>
+                    <a:pt x="539826" y="1217097"/>
+                  </a:lnTo>
+                  <a:lnTo>
+                    <a:pt x="617460" y="1354970"/>
+                  </a:lnTo>
+                  <a:lnTo>
+                    <a:pt x="695094" y="1485038"/>
+                  </a:lnTo>
+                  <a:lnTo>
+                    <a:pt x="772728" y="1607743"/>
+                  </a:lnTo>
+                  <a:lnTo>
+                    <a:pt x="850362" y="1723502"/>
+                  </a:lnTo>
+                  <a:lnTo>
+                    <a:pt x="927996" y="1832707"/>
+                  </a:lnTo>
+                  <a:lnTo>
+                    <a:pt x="1005630" y="1935731"/>
+                  </a:lnTo>
+                  <a:lnTo>
+                    <a:pt x="1083264" y="2032923"/>
+                  </a:lnTo>
+                  <a:lnTo>
+                    <a:pt x="1160898" y="2124613"/>
+                  </a:lnTo>
+                  <a:lnTo>
+                    <a:pt x="1238532" y="2211113"/>
+                  </a:lnTo>
+                  <a:lnTo>
+                    <a:pt x="1316166" y="2292716"/>
+                  </a:lnTo>
+                  <a:lnTo>
+                    <a:pt x="1393800" y="2369699"/>
+                  </a:lnTo>
+                  <a:lnTo>
+                    <a:pt x="1471434" y="2442325"/>
+                  </a:lnTo>
+                  <a:lnTo>
+                    <a:pt x="1549068" y="2510839"/>
+                  </a:lnTo>
+                  <a:lnTo>
+                    <a:pt x="1626702" y="2575475"/>
+                  </a:lnTo>
+                  <a:lnTo>
+                    <a:pt x="1704336" y="2636452"/>
+                  </a:lnTo>
+                  <a:lnTo>
+                    <a:pt x="1781970" y="2693977"/>
+                  </a:lnTo>
+                  <a:lnTo>
+                    <a:pt x="1859604" y="2748246"/>
+                  </a:lnTo>
+                  <a:lnTo>
+                    <a:pt x="1937239" y="2778312"/>
+                  </a:lnTo>
+                  <a:lnTo>
+                    <a:pt x="2014873" y="2763976"/>
+                  </a:lnTo>
+                  <a:lnTo>
+                    <a:pt x="2092507" y="2749406"/>
+                  </a:lnTo>
+                  <a:lnTo>
+                    <a:pt x="2170141" y="2734597"/>
+                  </a:lnTo>
+                  <a:lnTo>
+                    <a:pt x="2247775" y="2719545"/>
+                  </a:lnTo>
+                  <a:lnTo>
+                    <a:pt x="2325409" y="2704246"/>
+                  </a:lnTo>
+                  <a:lnTo>
+                    <a:pt x="2403043" y="2688697"/>
+                  </a:lnTo>
+                  <a:lnTo>
+                    <a:pt x="2480677" y="2672892"/>
+                  </a:lnTo>
+                  <a:lnTo>
+                    <a:pt x="2558311" y="2656828"/>
+                  </a:lnTo>
+                  <a:lnTo>
+                    <a:pt x="2635945" y="2640501"/>
+                  </a:lnTo>
+                  <a:lnTo>
+                    <a:pt x="2713579" y="2623907"/>
+                  </a:lnTo>
+                  <a:lnTo>
+                    <a:pt x="2791213" y="2607040"/>
+                  </a:lnTo>
+                  <a:lnTo>
+                    <a:pt x="2868847" y="2589896"/>
+                  </a:lnTo>
+                  <a:lnTo>
+                    <a:pt x="2946481" y="2572472"/>
+                  </a:lnTo>
+                  <a:lnTo>
+                    <a:pt x="3024115" y="2554762"/>
+                  </a:lnTo>
+                  <a:lnTo>
+                    <a:pt x="3101749" y="2536761"/>
+                  </a:lnTo>
+                  <a:lnTo>
+                    <a:pt x="3179383" y="2518466"/>
+                  </a:lnTo>
+                  <a:lnTo>
+                    <a:pt x="3257017" y="2499870"/>
+                  </a:lnTo>
+                  <a:lnTo>
+                    <a:pt x="3334651" y="2480970"/>
+                  </a:lnTo>
+                  <a:lnTo>
+                    <a:pt x="3412285" y="2461759"/>
+                  </a:lnTo>
+                  <a:lnTo>
+                    <a:pt x="3489919" y="2442234"/>
+                  </a:lnTo>
+                  <a:lnTo>
+                    <a:pt x="3567553" y="2422388"/>
+                  </a:lnTo>
+                  <a:lnTo>
+                    <a:pt x="3645187" y="2402218"/>
+                  </a:lnTo>
+                  <a:lnTo>
+                    <a:pt x="3722822" y="2381716"/>
+                  </a:lnTo>
+                  <a:lnTo>
+                    <a:pt x="3800456" y="2360878"/>
+                  </a:lnTo>
+                  <a:lnTo>
+                    <a:pt x="3878090" y="2339699"/>
+                  </a:lnTo>
+                  <a:lnTo>
+                    <a:pt x="3955724" y="2318172"/>
+                  </a:lnTo>
+                  <a:lnTo>
+                    <a:pt x="4033358" y="2296293"/>
+                  </a:lnTo>
+                  <a:lnTo>
+                    <a:pt x="4110992" y="2274055"/>
+                  </a:lnTo>
+                  <a:lnTo>
+                    <a:pt x="4188626" y="2251452"/>
+                  </a:lnTo>
+                  <a:lnTo>
+                    <a:pt x="4266260" y="2228478"/>
+                  </a:lnTo>
+                  <a:lnTo>
+                    <a:pt x="4343894" y="2205128"/>
+                  </a:lnTo>
+                  <a:lnTo>
+                    <a:pt x="4421528" y="2181395"/>
+                  </a:lnTo>
+                  <a:lnTo>
+                    <a:pt x="4499162" y="2157273"/>
+                  </a:lnTo>
+                  <a:lnTo>
+                    <a:pt x="4576796" y="2132755"/>
+                  </a:lnTo>
+                  <a:lnTo>
+                    <a:pt x="4654430" y="2107836"/>
+                  </a:lnTo>
+                  <a:lnTo>
+                    <a:pt x="4732064" y="2082508"/>
+                  </a:lnTo>
+                  <a:lnTo>
+                    <a:pt x="4809698" y="2056764"/>
+                  </a:lnTo>
+                  <a:lnTo>
+                    <a:pt x="4887332" y="2030599"/>
+                  </a:lnTo>
+                  <a:lnTo>
+                    <a:pt x="4964966" y="2004004"/>
+                  </a:lnTo>
+                  <a:lnTo>
+                    <a:pt x="5042600" y="1976974"/>
+                  </a:lnTo>
+                  <a:lnTo>
+                    <a:pt x="5120234" y="1949500"/>
+                  </a:lnTo>
+                  <a:lnTo>
+                    <a:pt x="5197868" y="1921576"/>
+                  </a:lnTo>
+                  <a:lnTo>
+                    <a:pt x="5275502" y="1893194"/>
+                  </a:lnTo>
+                  <a:lnTo>
+                    <a:pt x="5353136" y="1864346"/>
+                  </a:lnTo>
+                  <a:lnTo>
+                    <a:pt x="5430771" y="1835026"/>
+                  </a:lnTo>
+                  <a:lnTo>
+                    <a:pt x="5508405" y="1805225"/>
+                  </a:lnTo>
+                  <a:lnTo>
+                    <a:pt x="5586039" y="1774935"/>
+                  </a:lnTo>
+                  <a:lnTo>
+                    <a:pt x="5663673" y="1744149"/>
+                  </a:lnTo>
+                  <a:lnTo>
+                    <a:pt x="5741307" y="1712858"/>
+                  </a:lnTo>
+                  <a:lnTo>
+                    <a:pt x="5818941" y="1681054"/>
+                  </a:lnTo>
+                  <a:lnTo>
+                    <a:pt x="5896575" y="1648728"/>
                   </a:lnTo>
                 </a:path>
               </a:pathLst>
@@ -3808,300 +3808,300 @@
           </p:nvSpPr>
           <p:spPr>
             <a:xfrm>
-              <a:off x="817517" y="4685717"/>
-              <a:ext cx="7370972" cy="823397"/>
+              <a:off x="817517" y="4688979"/>
+              <a:ext cx="7370972" cy="816541"/>
             </a:xfrm>
             <a:custGeom>
               <a:avLst/>
               <a:pathLst>
-                <a:path w="7370972" h="823397">
+                <a:path w="7370972" h="816541">
                   <a:moveTo>
-                    <a:pt x="7370972" y="823397"/>
+                    <a:pt x="7370972" y="816541"/>
                   </a:moveTo>
                   <a:lnTo>
-                    <a:pt x="7293338" y="820920"/>
-                  </a:lnTo>
-                  <a:lnTo>
-                    <a:pt x="7215704" y="818290"/>
-                  </a:lnTo>
-                  <a:lnTo>
-                    <a:pt x="7138070" y="815498"/>
-                  </a:lnTo>
-                  <a:lnTo>
-                    <a:pt x="7060436" y="812533"/>
-                  </a:lnTo>
-                  <a:lnTo>
-                    <a:pt x="6982802" y="809385"/>
-                  </a:lnTo>
-                  <a:lnTo>
-                    <a:pt x="6905168" y="806042"/>
-                  </a:lnTo>
-                  <a:lnTo>
-                    <a:pt x="6827534" y="802493"/>
-                  </a:lnTo>
-                  <a:lnTo>
-                    <a:pt x="6749900" y="798725"/>
-                  </a:lnTo>
-                  <a:lnTo>
-                    <a:pt x="6672266" y="794724"/>
-                  </a:lnTo>
-                  <a:lnTo>
-                    <a:pt x="6594632" y="790475"/>
-                  </a:lnTo>
-                  <a:lnTo>
-                    <a:pt x="6516998" y="785965"/>
-                  </a:lnTo>
-                  <a:lnTo>
-                    <a:pt x="6439364" y="781175"/>
-                  </a:lnTo>
-                  <a:lnTo>
-                    <a:pt x="6361730" y="776090"/>
-                  </a:lnTo>
-                  <a:lnTo>
-                    <a:pt x="6284096" y="770690"/>
-                  </a:lnTo>
-                  <a:lnTo>
-                    <a:pt x="6206462" y="764957"/>
-                  </a:lnTo>
-                  <a:lnTo>
-                    <a:pt x="6128827" y="758870"/>
-                  </a:lnTo>
-                  <a:lnTo>
-                    <a:pt x="6051193" y="752407"/>
-                  </a:lnTo>
-                  <a:lnTo>
-                    <a:pt x="5973559" y="745544"/>
-                  </a:lnTo>
-                  <a:lnTo>
-                    <a:pt x="5895925" y="738258"/>
-                  </a:lnTo>
-                  <a:lnTo>
-                    <a:pt x="5818291" y="730521"/>
-                  </a:lnTo>
-                  <a:lnTo>
-                    <a:pt x="5740657" y="722306"/>
-                  </a:lnTo>
-                  <a:lnTo>
-                    <a:pt x="5663023" y="713584"/>
-                  </a:lnTo>
-                  <a:lnTo>
-                    <a:pt x="5585389" y="704323"/>
-                  </a:lnTo>
-                  <a:lnTo>
-                    <a:pt x="5507755" y="694490"/>
-                  </a:lnTo>
-                  <a:lnTo>
-                    <a:pt x="5430121" y="684049"/>
-                  </a:lnTo>
-                  <a:lnTo>
-                    <a:pt x="5352487" y="672963"/>
-                  </a:lnTo>
-                  <a:lnTo>
-                    <a:pt x="5274853" y="661192"/>
-                  </a:lnTo>
-                  <a:lnTo>
-                    <a:pt x="5197219" y="648695"/>
-                  </a:lnTo>
-                  <a:lnTo>
-                    <a:pt x="5119585" y="635425"/>
-                  </a:lnTo>
-                  <a:lnTo>
-                    <a:pt x="5041951" y="621335"/>
-                  </a:lnTo>
-                  <a:lnTo>
-                    <a:pt x="4964317" y="606375"/>
-                  </a:lnTo>
-                  <a:lnTo>
-                    <a:pt x="4886683" y="590491"/>
-                  </a:lnTo>
-                  <a:lnTo>
-                    <a:pt x="4809049" y="573625"/>
-                  </a:lnTo>
-                  <a:lnTo>
-                    <a:pt x="4731415" y="555717"/>
-                  </a:lnTo>
-                  <a:lnTo>
-                    <a:pt x="4653781" y="536703"/>
-                  </a:lnTo>
-                  <a:lnTo>
-                    <a:pt x="4576147" y="516514"/>
-                  </a:lnTo>
-                  <a:lnTo>
-                    <a:pt x="4498513" y="495079"/>
-                  </a:lnTo>
-                  <a:lnTo>
-                    <a:pt x="4420879" y="472318"/>
-                  </a:lnTo>
-                  <a:lnTo>
-                    <a:pt x="4343244" y="448152"/>
-                  </a:lnTo>
-                  <a:lnTo>
-                    <a:pt x="4265610" y="422493"/>
-                  </a:lnTo>
-                  <a:lnTo>
-                    <a:pt x="4187976" y="395248"/>
-                  </a:lnTo>
-                  <a:lnTo>
-                    <a:pt x="4110342" y="366320"/>
-                  </a:lnTo>
-                  <a:lnTo>
-                    <a:pt x="4032708" y="335605"/>
-                  </a:lnTo>
-                  <a:lnTo>
-                    <a:pt x="3955074" y="302993"/>
-                  </a:lnTo>
-                  <a:lnTo>
-                    <a:pt x="3877440" y="268366"/>
-                  </a:lnTo>
-                  <a:lnTo>
-                    <a:pt x="3799806" y="231599"/>
-                  </a:lnTo>
-                  <a:lnTo>
-                    <a:pt x="3722172" y="192562"/>
-                  </a:lnTo>
-                  <a:lnTo>
-                    <a:pt x="3644538" y="151112"/>
-                  </a:lnTo>
-                  <a:lnTo>
-                    <a:pt x="3566904" y="107102"/>
-                  </a:lnTo>
-                  <a:lnTo>
-                    <a:pt x="3489270" y="60372"/>
-                  </a:lnTo>
-                  <a:lnTo>
-                    <a:pt x="3411636" y="10756"/>
+                    <a:pt x="7293338" y="813920"/>
+                  </a:lnTo>
+                  <a:lnTo>
+                    <a:pt x="7215704" y="811141"/>
+                  </a:lnTo>
+                  <a:lnTo>
+                    <a:pt x="7138070" y="808196"/>
+                  </a:lnTo>
+                  <a:lnTo>
+                    <a:pt x="7060436" y="805074"/>
+                  </a:lnTo>
+                  <a:lnTo>
+                    <a:pt x="6982802" y="801764"/>
+                  </a:lnTo>
+                  <a:lnTo>
+                    <a:pt x="6905168" y="798256"/>
+                  </a:lnTo>
+                  <a:lnTo>
+                    <a:pt x="6827534" y="794537"/>
+                  </a:lnTo>
+                  <a:lnTo>
+                    <a:pt x="6749900" y="790596"/>
+                  </a:lnTo>
+                  <a:lnTo>
+                    <a:pt x="6672266" y="786417"/>
+                  </a:lnTo>
+                  <a:lnTo>
+                    <a:pt x="6594632" y="781988"/>
+                  </a:lnTo>
+                  <a:lnTo>
+                    <a:pt x="6516998" y="777294"/>
+                  </a:lnTo>
+                  <a:lnTo>
+                    <a:pt x="6439364" y="772317"/>
+                  </a:lnTo>
+                  <a:lnTo>
+                    <a:pt x="6361730" y="767042"/>
+                  </a:lnTo>
+                  <a:lnTo>
+                    <a:pt x="6284096" y="761451"/>
+                  </a:lnTo>
+                  <a:lnTo>
+                    <a:pt x="6206462" y="755524"/>
+                  </a:lnTo>
+                  <a:lnTo>
+                    <a:pt x="6128827" y="749241"/>
+                  </a:lnTo>
+                  <a:lnTo>
+                    <a:pt x="6051193" y="742581"/>
+                  </a:lnTo>
+                  <a:lnTo>
+                    <a:pt x="5973559" y="735522"/>
+                  </a:lnTo>
+                  <a:lnTo>
+                    <a:pt x="5895925" y="728039"/>
+                  </a:lnTo>
+                  <a:lnTo>
+                    <a:pt x="5818291" y="720107"/>
+                  </a:lnTo>
+                  <a:lnTo>
+                    <a:pt x="5740657" y="711699"/>
+                  </a:lnTo>
+                  <a:lnTo>
+                    <a:pt x="5663023" y="702786"/>
+                  </a:lnTo>
+                  <a:lnTo>
+                    <a:pt x="5585389" y="693339"/>
+                  </a:lnTo>
+                  <a:lnTo>
+                    <a:pt x="5507755" y="683325"/>
+                  </a:lnTo>
+                  <a:lnTo>
+                    <a:pt x="5430121" y="672710"/>
+                  </a:lnTo>
+                  <a:lnTo>
+                    <a:pt x="5352487" y="661457"/>
+                  </a:lnTo>
+                  <a:lnTo>
+                    <a:pt x="5274853" y="649530"/>
+                  </a:lnTo>
+                  <a:lnTo>
+                    <a:pt x="5197219" y="636887"/>
+                  </a:lnTo>
+                  <a:lnTo>
+                    <a:pt x="5119585" y="623486"/>
+                  </a:lnTo>
+                  <a:lnTo>
+                    <a:pt x="5041951" y="609280"/>
+                  </a:lnTo>
+                  <a:lnTo>
+                    <a:pt x="4964317" y="594222"/>
+                  </a:lnTo>
+                  <a:lnTo>
+                    <a:pt x="4886683" y="578260"/>
+                  </a:lnTo>
+                  <a:lnTo>
+                    <a:pt x="4809049" y="561341"/>
+                  </a:lnTo>
+                  <a:lnTo>
+                    <a:pt x="4731415" y="543406"/>
+                  </a:lnTo>
+                  <a:lnTo>
+                    <a:pt x="4653781" y="524395"/>
+                  </a:lnTo>
+                  <a:lnTo>
+                    <a:pt x="4576147" y="504243"/>
+                  </a:lnTo>
+                  <a:lnTo>
+                    <a:pt x="4498513" y="482882"/>
+                  </a:lnTo>
+                  <a:lnTo>
+                    <a:pt x="4420879" y="460239"/>
+                  </a:lnTo>
+                  <a:lnTo>
+                    <a:pt x="4343244" y="436238"/>
+                  </a:lnTo>
+                  <a:lnTo>
+                    <a:pt x="4265610" y="410796"/>
+                  </a:lnTo>
+                  <a:lnTo>
+                    <a:pt x="4187976" y="383828"/>
+                  </a:lnTo>
+                  <a:lnTo>
+                    <a:pt x="4110342" y="355242"/>
+                  </a:lnTo>
+                  <a:lnTo>
+                    <a:pt x="4032708" y="324940"/>
+                  </a:lnTo>
+                  <a:lnTo>
+                    <a:pt x="3955074" y="292820"/>
+                  </a:lnTo>
+                  <a:lnTo>
+                    <a:pt x="3877440" y="258772"/>
+                  </a:lnTo>
+                  <a:lnTo>
+                    <a:pt x="3799806" y="222682"/>
+                  </a:lnTo>
+                  <a:lnTo>
+                    <a:pt x="3722172" y="184426"/>
+                  </a:lnTo>
+                  <a:lnTo>
+                    <a:pt x="3644538" y="143874"/>
+                  </a:lnTo>
+                  <a:lnTo>
+                    <a:pt x="3566904" y="100889"/>
+                  </a:lnTo>
+                  <a:lnTo>
+                    <a:pt x="3489270" y="55324"/>
+                  </a:lnTo>
+                  <a:lnTo>
+                    <a:pt x="3411636" y="7026"/>
                   </a:lnTo>
                   <a:lnTo>
                     <a:pt x="3334002" y="0"/>
                   </a:lnTo>
                   <a:lnTo>
-                    <a:pt x="3256368" y="9129"/>
-                  </a:lnTo>
-                  <a:lnTo>
-                    <a:pt x="3178734" y="18161"/>
-                  </a:lnTo>
-                  <a:lnTo>
-                    <a:pt x="3101100" y="27098"/>
-                  </a:lnTo>
-                  <a:lnTo>
-                    <a:pt x="3023466" y="35941"/>
-                  </a:lnTo>
-                  <a:lnTo>
-                    <a:pt x="2945832" y="44690"/>
-                  </a:lnTo>
-                  <a:lnTo>
-                    <a:pt x="2868198" y="53347"/>
-                  </a:lnTo>
-                  <a:lnTo>
-                    <a:pt x="2790564" y="61912"/>
-                  </a:lnTo>
-                  <a:lnTo>
-                    <a:pt x="2712930" y="70387"/>
-                  </a:lnTo>
-                  <a:lnTo>
-                    <a:pt x="2635295" y="78772"/>
-                  </a:lnTo>
-                  <a:lnTo>
-                    <a:pt x="2557661" y="87068"/>
-                  </a:lnTo>
-                  <a:lnTo>
-                    <a:pt x="2480027" y="95277"/>
-                  </a:lnTo>
-                  <a:lnTo>
-                    <a:pt x="2402393" y="103399"/>
-                  </a:lnTo>
-                  <a:lnTo>
-                    <a:pt x="2324759" y="111435"/>
-                  </a:lnTo>
-                  <a:lnTo>
-                    <a:pt x="2247125" y="119386"/>
-                  </a:lnTo>
-                  <a:lnTo>
-                    <a:pt x="2169491" y="127253"/>
-                  </a:lnTo>
-                  <a:lnTo>
-                    <a:pt x="2091857" y="135036"/>
-                  </a:lnTo>
-                  <a:lnTo>
-                    <a:pt x="2014223" y="142738"/>
-                  </a:lnTo>
-                  <a:lnTo>
-                    <a:pt x="1936589" y="150358"/>
-                  </a:lnTo>
-                  <a:lnTo>
-                    <a:pt x="1858955" y="157898"/>
-                  </a:lnTo>
-                  <a:lnTo>
-                    <a:pt x="1781321" y="165357"/>
-                  </a:lnTo>
-                  <a:lnTo>
-                    <a:pt x="1703687" y="172738"/>
-                  </a:lnTo>
-                  <a:lnTo>
-                    <a:pt x="1626053" y="180041"/>
-                  </a:lnTo>
-                  <a:lnTo>
-                    <a:pt x="1548419" y="187267"/>
-                  </a:lnTo>
-                  <a:lnTo>
-                    <a:pt x="1470785" y="194416"/>
-                  </a:lnTo>
-                  <a:lnTo>
-                    <a:pt x="1393151" y="201490"/>
-                  </a:lnTo>
-                  <a:lnTo>
-                    <a:pt x="1315517" y="208489"/>
-                  </a:lnTo>
-                  <a:lnTo>
-                    <a:pt x="1237883" y="215414"/>
-                  </a:lnTo>
-                  <a:lnTo>
-                    <a:pt x="1160249" y="222266"/>
-                  </a:lnTo>
-                  <a:lnTo>
-                    <a:pt x="1082615" y="229045"/>
-                  </a:lnTo>
-                  <a:lnTo>
-                    <a:pt x="1004981" y="235752"/>
-                  </a:lnTo>
-                  <a:lnTo>
-                    <a:pt x="927346" y="242389"/>
-                  </a:lnTo>
-                  <a:lnTo>
-                    <a:pt x="849712" y="248956"/>
-                  </a:lnTo>
-                  <a:lnTo>
-                    <a:pt x="772078" y="255453"/>
-                  </a:lnTo>
-                  <a:lnTo>
-                    <a:pt x="694444" y="261881"/>
-                  </a:lnTo>
-                  <a:lnTo>
-                    <a:pt x="616810" y="268242"/>
-                  </a:lnTo>
-                  <a:lnTo>
-                    <a:pt x="539176" y="274535"/>
-                  </a:lnTo>
-                  <a:lnTo>
-                    <a:pt x="461542" y="280762"/>
-                  </a:lnTo>
-                  <a:lnTo>
-                    <a:pt x="383908" y="286922"/>
-                  </a:lnTo>
-                  <a:lnTo>
-                    <a:pt x="306274" y="293018"/>
-                  </a:lnTo>
-                  <a:lnTo>
-                    <a:pt x="228640" y="299049"/>
-                  </a:lnTo>
-                  <a:lnTo>
-                    <a:pt x="151006" y="305017"/>
-                  </a:lnTo>
-                  <a:lnTo>
-                    <a:pt x="73372" y="310921"/>
-                  </a:lnTo>
-                  <a:lnTo>
-                    <a:pt x="0" y="316443"/>
+                    <a:pt x="3256368" y="13876"/>
+                  </a:lnTo>
+                  <a:lnTo>
+                    <a:pt x="3178734" y="27529"/>
+                  </a:lnTo>
+                  <a:lnTo>
+                    <a:pt x="3101100" y="40961"/>
+                  </a:lnTo>
+                  <a:lnTo>
+                    <a:pt x="3023466" y="54177"/>
+                  </a:lnTo>
+                  <a:lnTo>
+                    <a:pt x="2945832" y="67179"/>
+                  </a:lnTo>
+                  <a:lnTo>
+                    <a:pt x="2868198" y="79972"/>
+                  </a:lnTo>
+                  <a:lnTo>
+                    <a:pt x="2790564" y="92559"/>
+                  </a:lnTo>
+                  <a:lnTo>
+                    <a:pt x="2712930" y="104942"/>
+                  </a:lnTo>
+                  <a:lnTo>
+                    <a:pt x="2635295" y="117126"/>
+                  </a:lnTo>
+                  <a:lnTo>
+                    <a:pt x="2557661" y="129113"/>
+                  </a:lnTo>
+                  <a:lnTo>
+                    <a:pt x="2480027" y="140906"/>
+                  </a:lnTo>
+                  <a:lnTo>
+                    <a:pt x="2402393" y="152510"/>
+                  </a:lnTo>
+                  <a:lnTo>
+                    <a:pt x="2324759" y="163926"/>
+                  </a:lnTo>
+                  <a:lnTo>
+                    <a:pt x="2247125" y="175158"/>
+                  </a:lnTo>
+                  <a:lnTo>
+                    <a:pt x="2169491" y="186209"/>
+                  </a:lnTo>
+                  <a:lnTo>
+                    <a:pt x="2091857" y="197082"/>
+                  </a:lnTo>
+                  <a:lnTo>
+                    <a:pt x="2014223" y="207779"/>
+                  </a:lnTo>
+                  <a:lnTo>
+                    <a:pt x="1936589" y="218304"/>
+                  </a:lnTo>
+                  <a:lnTo>
+                    <a:pt x="1858955" y="228659"/>
+                  </a:lnTo>
+                  <a:lnTo>
+                    <a:pt x="1781321" y="238847"/>
+                  </a:lnTo>
+                  <a:lnTo>
+                    <a:pt x="1703687" y="248871"/>
+                  </a:lnTo>
+                  <a:lnTo>
+                    <a:pt x="1626053" y="258733"/>
+                  </a:lnTo>
+                  <a:lnTo>
+                    <a:pt x="1548419" y="268435"/>
+                  </a:lnTo>
+                  <a:lnTo>
+                    <a:pt x="1470785" y="277982"/>
+                  </a:lnTo>
+                  <a:lnTo>
+                    <a:pt x="1393151" y="287374"/>
+                  </a:lnTo>
+                  <a:lnTo>
+                    <a:pt x="1315517" y="296615"/>
+                  </a:lnTo>
+                  <a:lnTo>
+                    <a:pt x="1237883" y="305707"/>
+                  </a:lnTo>
+                  <a:lnTo>
+                    <a:pt x="1160249" y="314652"/>
+                  </a:lnTo>
+                  <a:lnTo>
+                    <a:pt x="1082615" y="323452"/>
+                  </a:lnTo>
+                  <a:lnTo>
+                    <a:pt x="1004981" y="332111"/>
+                  </a:lnTo>
+                  <a:lnTo>
+                    <a:pt x="927346" y="340630"/>
+                  </a:lnTo>
+                  <a:lnTo>
+                    <a:pt x="849712" y="349012"/>
+                  </a:lnTo>
+                  <a:lnTo>
+                    <a:pt x="772078" y="357259"/>
+                  </a:lnTo>
+                  <a:lnTo>
+                    <a:pt x="694444" y="365372"/>
+                  </a:lnTo>
+                  <a:lnTo>
+                    <a:pt x="616810" y="373355"/>
+                  </a:lnTo>
+                  <a:lnTo>
+                    <a:pt x="539176" y="381209"/>
+                  </a:lnTo>
+                  <a:lnTo>
+                    <a:pt x="461542" y="388936"/>
+                  </a:lnTo>
+                  <a:lnTo>
+                    <a:pt x="383908" y="396538"/>
+                  </a:lnTo>
+                  <a:lnTo>
+                    <a:pt x="306274" y="404018"/>
+                  </a:lnTo>
+                  <a:lnTo>
+                    <a:pt x="228640" y="411377"/>
+                  </a:lnTo>
+                  <a:lnTo>
+                    <a:pt x="151006" y="418618"/>
+                  </a:lnTo>
+                  <a:lnTo>
+                    <a:pt x="73372" y="425741"/>
+                  </a:lnTo>
+                  <a:lnTo>
+                    <a:pt x="0" y="432365"/>
                   </a:lnTo>
                 </a:path>
               </a:pathLst>
@@ -4121,300 +4121,300 @@
           </p:nvSpPr>
           <p:spPr>
             <a:xfrm>
-              <a:off x="817517" y="2999642"/>
-              <a:ext cx="7370972" cy="2304277"/>
+              <a:off x="817517" y="3375187"/>
+              <a:ext cx="7370972" cy="1878143"/>
             </a:xfrm>
             <a:custGeom>
               <a:avLst/>
               <a:pathLst>
-                <a:path w="7370972" h="2304277">
+                <a:path w="7370972" h="1878143">
                   <a:moveTo>
                     <a:pt x="0" y="0"/>
                   </a:moveTo>
                   <a:lnTo>
-                    <a:pt x="73372" y="58770"/>
-                  </a:lnTo>
-                  <a:lnTo>
-                    <a:pt x="151006" y="119439"/>
-                  </a:lnTo>
-                  <a:lnTo>
-                    <a:pt x="228640" y="178630"/>
-                  </a:lnTo>
-                  <a:lnTo>
-                    <a:pt x="306274" y="236379"/>
-                  </a:lnTo>
-                  <a:lnTo>
-                    <a:pt x="383908" y="292722"/>
-                  </a:lnTo>
-                  <a:lnTo>
-                    <a:pt x="461542" y="347692"/>
-                  </a:lnTo>
-                  <a:lnTo>
-                    <a:pt x="539176" y="401324"/>
-                  </a:lnTo>
-                  <a:lnTo>
-                    <a:pt x="616810" y="453649"/>
-                  </a:lnTo>
-                  <a:lnTo>
-                    <a:pt x="694444" y="504700"/>
-                  </a:lnTo>
-                  <a:lnTo>
-                    <a:pt x="772078" y="554507"/>
-                  </a:lnTo>
-                  <a:lnTo>
-                    <a:pt x="849712" y="603101"/>
-                  </a:lnTo>
-                  <a:lnTo>
-                    <a:pt x="927346" y="650512"/>
-                  </a:lnTo>
-                  <a:lnTo>
-                    <a:pt x="1004981" y="696768"/>
-                  </a:lnTo>
-                  <a:lnTo>
-                    <a:pt x="1082615" y="741897"/>
-                  </a:lnTo>
-                  <a:lnTo>
-                    <a:pt x="1160249" y="785926"/>
-                  </a:lnTo>
-                  <a:lnTo>
-                    <a:pt x="1237883" y="828884"/>
-                  </a:lnTo>
-                  <a:lnTo>
-                    <a:pt x="1315517" y="870795"/>
-                  </a:lnTo>
-                  <a:lnTo>
-                    <a:pt x="1393151" y="911685"/>
-                  </a:lnTo>
-                  <a:lnTo>
-                    <a:pt x="1470785" y="951579"/>
-                  </a:lnTo>
-                  <a:lnTo>
-                    <a:pt x="1548419" y="990502"/>
-                  </a:lnTo>
-                  <a:lnTo>
-                    <a:pt x="1626053" y="1028476"/>
-                  </a:lnTo>
-                  <a:lnTo>
-                    <a:pt x="1703687" y="1065526"/>
-                  </a:lnTo>
-                  <a:lnTo>
-                    <a:pt x="1781321" y="1101673"/>
-                  </a:lnTo>
-                  <a:lnTo>
-                    <a:pt x="1858955" y="1136939"/>
-                  </a:lnTo>
-                  <a:lnTo>
-                    <a:pt x="1936589" y="1171347"/>
-                  </a:lnTo>
-                  <a:lnTo>
-                    <a:pt x="2014223" y="1204917"/>
-                  </a:lnTo>
-                  <a:lnTo>
-                    <a:pt x="2091857" y="1237669"/>
-                  </a:lnTo>
-                  <a:lnTo>
-                    <a:pt x="2169491" y="1269623"/>
-                  </a:lnTo>
-                  <a:lnTo>
-                    <a:pt x="2247125" y="1300799"/>
-                  </a:lnTo>
-                  <a:lnTo>
-                    <a:pt x="2324759" y="1331215"/>
-                  </a:lnTo>
-                  <a:lnTo>
-                    <a:pt x="2402393" y="1360891"/>
-                  </a:lnTo>
-                  <a:lnTo>
-                    <a:pt x="2480027" y="1389844"/>
-                  </a:lnTo>
-                  <a:lnTo>
-                    <a:pt x="2557661" y="1418091"/>
-                  </a:lnTo>
-                  <a:lnTo>
-                    <a:pt x="2635295" y="1445651"/>
-                  </a:lnTo>
-                  <a:lnTo>
-                    <a:pt x="2712930" y="1472539"/>
-                  </a:lnTo>
-                  <a:lnTo>
-                    <a:pt x="2790564" y="1498772"/>
-                  </a:lnTo>
-                  <a:lnTo>
-                    <a:pt x="2868198" y="1524367"/>
-                  </a:lnTo>
-                  <a:lnTo>
-                    <a:pt x="2945832" y="1549338"/>
-                  </a:lnTo>
-                  <a:lnTo>
-                    <a:pt x="3023466" y="1573701"/>
-                  </a:lnTo>
-                  <a:lnTo>
-                    <a:pt x="3101100" y="1597470"/>
-                  </a:lnTo>
-                  <a:lnTo>
-                    <a:pt x="3178734" y="1620660"/>
-                  </a:lnTo>
-                  <a:lnTo>
-                    <a:pt x="3256368" y="1643286"/>
-                  </a:lnTo>
-                  <a:lnTo>
-                    <a:pt x="3334002" y="1665360"/>
-                  </a:lnTo>
-                  <a:lnTo>
-                    <a:pt x="3411636" y="1686897"/>
-                  </a:lnTo>
-                  <a:lnTo>
-                    <a:pt x="3489270" y="1707909"/>
-                  </a:lnTo>
-                  <a:lnTo>
-                    <a:pt x="3566904" y="1728410"/>
-                  </a:lnTo>
-                  <a:lnTo>
-                    <a:pt x="3644538" y="1748411"/>
-                  </a:lnTo>
-                  <a:lnTo>
-                    <a:pt x="3722172" y="1767925"/>
-                  </a:lnTo>
-                  <a:lnTo>
-                    <a:pt x="3799806" y="1786963"/>
-                  </a:lnTo>
-                  <a:lnTo>
-                    <a:pt x="3877440" y="1805538"/>
-                  </a:lnTo>
-                  <a:lnTo>
-                    <a:pt x="3955074" y="1823660"/>
-                  </a:lnTo>
-                  <a:lnTo>
-                    <a:pt x="4032708" y="1841341"/>
-                  </a:lnTo>
-                  <a:lnTo>
-                    <a:pt x="4110342" y="1858592"/>
-                  </a:lnTo>
-                  <a:lnTo>
-                    <a:pt x="4187976" y="1875422"/>
-                  </a:lnTo>
-                  <a:lnTo>
-                    <a:pt x="4265610" y="1891842"/>
-                  </a:lnTo>
-                  <a:lnTo>
-                    <a:pt x="4343244" y="1907863"/>
-                  </a:lnTo>
-                  <a:lnTo>
-                    <a:pt x="4420879" y="1923493"/>
-                  </a:lnTo>
-                  <a:lnTo>
-                    <a:pt x="4498513" y="1938742"/>
-                  </a:lnTo>
-                  <a:lnTo>
-                    <a:pt x="4576147" y="1953620"/>
-                  </a:lnTo>
-                  <a:lnTo>
-                    <a:pt x="4653781" y="1968136"/>
-                  </a:lnTo>
-                  <a:lnTo>
-                    <a:pt x="4731415" y="1982298"/>
-                  </a:lnTo>
-                  <a:lnTo>
-                    <a:pt x="4809049" y="1996115"/>
-                  </a:lnTo>
-                  <a:lnTo>
-                    <a:pt x="4886683" y="2009595"/>
-                  </a:lnTo>
-                  <a:lnTo>
-                    <a:pt x="4964317" y="2022747"/>
-                  </a:lnTo>
-                  <a:lnTo>
-                    <a:pt x="5041951" y="2035579"/>
-                  </a:lnTo>
-                  <a:lnTo>
-                    <a:pt x="5119585" y="2048098"/>
-                  </a:lnTo>
-                  <a:lnTo>
-                    <a:pt x="5197219" y="2060313"/>
-                  </a:lnTo>
-                  <a:lnTo>
-                    <a:pt x="5274853" y="2072229"/>
-                  </a:lnTo>
-                  <a:lnTo>
-                    <a:pt x="5352487" y="2083856"/>
-                  </a:lnTo>
-                  <a:lnTo>
-                    <a:pt x="5430121" y="2095199"/>
-                  </a:lnTo>
-                  <a:lnTo>
-                    <a:pt x="5507755" y="2106266"/>
-                  </a:lnTo>
-                  <a:lnTo>
-                    <a:pt x="5585389" y="2117064"/>
-                  </a:lnTo>
-                  <a:lnTo>
-                    <a:pt x="5663023" y="2127598"/>
-                  </a:lnTo>
-                  <a:lnTo>
-                    <a:pt x="5740657" y="2137876"/>
-                  </a:lnTo>
-                  <a:lnTo>
-                    <a:pt x="5818291" y="2147904"/>
-                  </a:lnTo>
-                  <a:lnTo>
-                    <a:pt x="5895925" y="2157687"/>
-                  </a:lnTo>
-                  <a:lnTo>
-                    <a:pt x="5973559" y="2167232"/>
-                  </a:lnTo>
-                  <a:lnTo>
-                    <a:pt x="6051193" y="2176545"/>
-                  </a:lnTo>
-                  <a:lnTo>
-                    <a:pt x="6128827" y="2185631"/>
-                  </a:lnTo>
-                  <a:lnTo>
-                    <a:pt x="6206462" y="2194495"/>
-                  </a:lnTo>
-                  <a:lnTo>
-                    <a:pt x="6284096" y="2203143"/>
-                  </a:lnTo>
-                  <a:lnTo>
-                    <a:pt x="6361730" y="2211581"/>
-                  </a:lnTo>
-                  <a:lnTo>
-                    <a:pt x="6439364" y="2219814"/>
-                  </a:lnTo>
-                  <a:lnTo>
-                    <a:pt x="6516998" y="2227845"/>
-                  </a:lnTo>
-                  <a:lnTo>
-                    <a:pt x="6594632" y="2235682"/>
-                  </a:lnTo>
-                  <a:lnTo>
-                    <a:pt x="6672266" y="2243327"/>
-                  </a:lnTo>
-                  <a:lnTo>
-                    <a:pt x="6749900" y="2250786"/>
-                  </a:lnTo>
-                  <a:lnTo>
-                    <a:pt x="6827534" y="2258063"/>
-                  </a:lnTo>
-                  <a:lnTo>
-                    <a:pt x="6905168" y="2265164"/>
-                  </a:lnTo>
-                  <a:lnTo>
-                    <a:pt x="6982802" y="2272091"/>
-                  </a:lnTo>
-                  <a:lnTo>
-                    <a:pt x="7060436" y="2278849"/>
-                  </a:lnTo>
-                  <a:lnTo>
-                    <a:pt x="7138070" y="2285443"/>
-                  </a:lnTo>
-                  <a:lnTo>
-                    <a:pt x="7215704" y="2291876"/>
-                  </a:lnTo>
-                  <a:lnTo>
-                    <a:pt x="7293338" y="2298153"/>
-                  </a:lnTo>
-                  <a:lnTo>
-                    <a:pt x="7370972" y="2304277"/>
+                    <a:pt x="73372" y="42758"/>
+                  </a:lnTo>
+                  <a:lnTo>
+                    <a:pt x="151006" y="87060"/>
+                  </a:lnTo>
+                  <a:lnTo>
+                    <a:pt x="228640" y="130440"/>
+                  </a:lnTo>
+                  <a:lnTo>
+                    <a:pt x="306274" y="172919"/>
+                  </a:lnTo>
+                  <a:lnTo>
+                    <a:pt x="383908" y="214515"/>
+                  </a:lnTo>
+                  <a:lnTo>
+                    <a:pt x="461542" y="255246"/>
+                  </a:lnTo>
+                  <a:lnTo>
+                    <a:pt x="539176" y="295131"/>
+                  </a:lnTo>
+                  <a:lnTo>
+                    <a:pt x="616810" y="334187"/>
+                  </a:lnTo>
+                  <a:lnTo>
+                    <a:pt x="694444" y="372430"/>
+                  </a:lnTo>
+                  <a:lnTo>
+                    <a:pt x="772078" y="409879"/>
+                  </a:lnTo>
+                  <a:lnTo>
+                    <a:pt x="849712" y="446549"/>
+                  </a:lnTo>
+                  <a:lnTo>
+                    <a:pt x="927346" y="482457"/>
+                  </a:lnTo>
+                  <a:lnTo>
+                    <a:pt x="1004981" y="517619"/>
+                  </a:lnTo>
+                  <a:lnTo>
+                    <a:pt x="1082615" y="552050"/>
+                  </a:lnTo>
+                  <a:lnTo>
+                    <a:pt x="1160249" y="585765"/>
+                  </a:lnTo>
+                  <a:lnTo>
+                    <a:pt x="1237883" y="618779"/>
+                  </a:lnTo>
+                  <a:lnTo>
+                    <a:pt x="1315517" y="651107"/>
+                  </a:lnTo>
+                  <a:lnTo>
+                    <a:pt x="1393151" y="682763"/>
+                  </a:lnTo>
+                  <a:lnTo>
+                    <a:pt x="1470785" y="713762"/>
+                  </a:lnTo>
+                  <a:lnTo>
+                    <a:pt x="1548419" y="744115"/>
+                  </a:lnTo>
+                  <a:lnTo>
+                    <a:pt x="1626053" y="773838"/>
+                  </a:lnTo>
+                  <a:lnTo>
+                    <a:pt x="1703687" y="802943"/>
+                  </a:lnTo>
+                  <a:lnTo>
+                    <a:pt x="1781321" y="831443"/>
+                  </a:lnTo>
+                  <a:lnTo>
+                    <a:pt x="1858955" y="859350"/>
+                  </a:lnTo>
+                  <a:lnTo>
+                    <a:pt x="1936589" y="886678"/>
+                  </a:lnTo>
+                  <a:lnTo>
+                    <a:pt x="2014223" y="913437"/>
+                  </a:lnTo>
+                  <a:lnTo>
+                    <a:pt x="2091857" y="939640"/>
+                  </a:lnTo>
+                  <a:lnTo>
+                    <a:pt x="2169491" y="965299"/>
+                  </a:lnTo>
+                  <a:lnTo>
+                    <a:pt x="2247125" y="990424"/>
+                  </a:lnTo>
+                  <a:lnTo>
+                    <a:pt x="2324759" y="1015027"/>
+                  </a:lnTo>
+                  <a:lnTo>
+                    <a:pt x="2402393" y="1039118"/>
+                  </a:lnTo>
+                  <a:lnTo>
+                    <a:pt x="2480027" y="1062709"/>
+                  </a:lnTo>
+                  <a:lnTo>
+                    <a:pt x="2557661" y="1085809"/>
+                  </a:lnTo>
+                  <a:lnTo>
+                    <a:pt x="2635295" y="1108429"/>
+                  </a:lnTo>
+                  <a:lnTo>
+                    <a:pt x="2712930" y="1130579"/>
+                  </a:lnTo>
+                  <a:lnTo>
+                    <a:pt x="2790564" y="1152268"/>
+                  </a:lnTo>
+                  <a:lnTo>
+                    <a:pt x="2868198" y="1173507"/>
+                  </a:lnTo>
+                  <a:lnTo>
+                    <a:pt x="2945832" y="1194304"/>
+                  </a:lnTo>
+                  <a:lnTo>
+                    <a:pt x="3023466" y="1214669"/>
+                  </a:lnTo>
+                  <a:lnTo>
+                    <a:pt x="3101100" y="1234611"/>
+                  </a:lnTo>
+                  <a:lnTo>
+                    <a:pt x="3178734" y="1254138"/>
+                  </a:lnTo>
+                  <a:lnTo>
+                    <a:pt x="3256368" y="1273259"/>
+                  </a:lnTo>
+                  <a:lnTo>
+                    <a:pt x="3334002" y="1291983"/>
+                  </a:lnTo>
+                  <a:lnTo>
+                    <a:pt x="3411636" y="1310317"/>
+                  </a:lnTo>
+                  <a:lnTo>
+                    <a:pt x="3489270" y="1328270"/>
+                  </a:lnTo>
+                  <a:lnTo>
+                    <a:pt x="3566904" y="1345851"/>
+                  </a:lnTo>
+                  <a:lnTo>
+                    <a:pt x="3644538" y="1363065"/>
+                  </a:lnTo>
+                  <a:lnTo>
+                    <a:pt x="3722172" y="1379922"/>
+                  </a:lnTo>
+                  <a:lnTo>
+                    <a:pt x="3799806" y="1396429"/>
+                  </a:lnTo>
+                  <a:lnTo>
+                    <a:pt x="3877440" y="1412592"/>
+                  </a:lnTo>
+                  <a:lnTo>
+                    <a:pt x="3955074" y="1428420"/>
+                  </a:lnTo>
+                  <a:lnTo>
+                    <a:pt x="4032708" y="1443918"/>
+                  </a:lnTo>
+                  <a:lnTo>
+                    <a:pt x="4110342" y="1459094"/>
+                  </a:lnTo>
+                  <a:lnTo>
+                    <a:pt x="4187976" y="1473955"/>
+                  </a:lnTo>
+                  <a:lnTo>
+                    <a:pt x="4265610" y="1488507"/>
+                  </a:lnTo>
+                  <a:lnTo>
+                    <a:pt x="4343244" y="1502756"/>
+                  </a:lnTo>
+                  <a:lnTo>
+                    <a:pt x="4420879" y="1516710"/>
+                  </a:lnTo>
+                  <a:lnTo>
+                    <a:pt x="4498513" y="1530373"/>
+                  </a:lnTo>
+                  <a:lnTo>
+                    <a:pt x="4576147" y="1543752"/>
+                  </a:lnTo>
+                  <a:lnTo>
+                    <a:pt x="4653781" y="1556853"/>
+                  </a:lnTo>
+                  <a:lnTo>
+                    <a:pt x="4731415" y="1569682"/>
+                  </a:lnTo>
+                  <a:lnTo>
+                    <a:pt x="4809049" y="1582244"/>
+                  </a:lnTo>
+                  <a:lnTo>
+                    <a:pt x="4886683" y="1594545"/>
+                  </a:lnTo>
+                  <a:lnTo>
+                    <a:pt x="4964317" y="1606590"/>
+                  </a:lnTo>
+                  <a:lnTo>
+                    <a:pt x="5041951" y="1618385"/>
+                  </a:lnTo>
+                  <a:lnTo>
+                    <a:pt x="5119585" y="1629935"/>
+                  </a:lnTo>
+                  <a:lnTo>
+                    <a:pt x="5197219" y="1641244"/>
+                  </a:lnTo>
+                  <a:lnTo>
+                    <a:pt x="5274853" y="1652319"/>
+                  </a:lnTo>
+                  <a:lnTo>
+                    <a:pt x="5352487" y="1663163"/>
+                  </a:lnTo>
+                  <a:lnTo>
+                    <a:pt x="5430121" y="1673782"/>
+                  </a:lnTo>
+                  <a:lnTo>
+                    <a:pt x="5507755" y="1684180"/>
+                  </a:lnTo>
+                  <a:lnTo>
+                    <a:pt x="5585389" y="1694362"/>
+                  </a:lnTo>
+                  <a:lnTo>
+                    <a:pt x="5663023" y="1704333"/>
+                  </a:lnTo>
+                  <a:lnTo>
+                    <a:pt x="5740657" y="1714096"/>
+                  </a:lnTo>
+                  <a:lnTo>
+                    <a:pt x="5818291" y="1723656"/>
+                  </a:lnTo>
+                  <a:lnTo>
+                    <a:pt x="5895925" y="1733018"/>
+                  </a:lnTo>
+                  <a:lnTo>
+                    <a:pt x="5973559" y="1742184"/>
+                  </a:lnTo>
+                  <a:lnTo>
+                    <a:pt x="6051193" y="1751161"/>
+                  </a:lnTo>
+                  <a:lnTo>
+                    <a:pt x="6128827" y="1759951"/>
+                  </a:lnTo>
+                  <a:lnTo>
+                    <a:pt x="6206462" y="1768558"/>
+                  </a:lnTo>
+                  <a:lnTo>
+                    <a:pt x="6284096" y="1776986"/>
+                  </a:lnTo>
+                  <a:lnTo>
+                    <a:pt x="6361730" y="1785239"/>
+                  </a:lnTo>
+                  <a:lnTo>
+                    <a:pt x="6439364" y="1793320"/>
+                  </a:lnTo>
+                  <a:lnTo>
+                    <a:pt x="6516998" y="1801233"/>
+                  </a:lnTo>
+                  <a:lnTo>
+                    <a:pt x="6594632" y="1808982"/>
+                  </a:lnTo>
+                  <a:lnTo>
+                    <a:pt x="6672266" y="1816570"/>
+                  </a:lnTo>
+                  <a:lnTo>
+                    <a:pt x="6749900" y="1824000"/>
+                  </a:lnTo>
+                  <a:lnTo>
+                    <a:pt x="6827534" y="1831276"/>
+                  </a:lnTo>
+                  <a:lnTo>
+                    <a:pt x="6905168" y="1838400"/>
+                  </a:lnTo>
+                  <a:lnTo>
+                    <a:pt x="6982802" y="1845377"/>
+                  </a:lnTo>
+                  <a:lnTo>
+                    <a:pt x="7060436" y="1852208"/>
+                  </a:lnTo>
+                  <a:lnTo>
+                    <a:pt x="7138070" y="1858897"/>
+                  </a:lnTo>
+                  <a:lnTo>
+                    <a:pt x="7215704" y="1865448"/>
+                  </a:lnTo>
+                  <a:lnTo>
+                    <a:pt x="7293338" y="1871862"/>
+                  </a:lnTo>
+                  <a:lnTo>
+                    <a:pt x="7370972" y="1878143"/>
                   </a:lnTo>
                 </a:path>
               </a:pathLst>

--- a/docs/plots/carbo/jx_carbo_linsubhr_ratio_hosp1.pptx
+++ b/docs/plots/carbo/jx_carbo_linsubhr_ratio_hosp1.pptx
@@ -3003,530 +3003,530 @@
           <p:spPr>
             <a:xfrm>
               <a:off x="817517" y="1896563"/>
-              <a:ext cx="7370972" cy="3608957"/>
+              <a:ext cx="7370972" cy="3612551"/>
             </a:xfrm>
             <a:custGeom>
               <a:avLst/>
               <a:pathLst>
-                <a:path w="7370972" h="3608957">
+                <a:path w="7370972" h="3612551">
                   <a:moveTo>
-                    <a:pt x="1474397" y="0"/>
+                    <a:pt x="1528089" y="0"/>
                   </a:moveTo>
                   <a:lnTo>
-                    <a:pt x="1548419" y="197670"/>
-                  </a:lnTo>
-                  <a:lnTo>
-                    <a:pt x="1626053" y="393251"/>
-                  </a:lnTo>
-                  <a:lnTo>
-                    <a:pt x="1703687" y="577761"/>
-                  </a:lnTo>
-                  <a:lnTo>
-                    <a:pt x="1781321" y="751825"/>
-                  </a:lnTo>
-                  <a:lnTo>
-                    <a:pt x="1858955" y="916036"/>
-                  </a:lnTo>
-                  <a:lnTo>
-                    <a:pt x="1936589" y="1070952"/>
-                  </a:lnTo>
-                  <a:lnTo>
-                    <a:pt x="2014223" y="1217097"/>
-                  </a:lnTo>
-                  <a:lnTo>
-                    <a:pt x="2091857" y="1354970"/>
-                  </a:lnTo>
-                  <a:lnTo>
-                    <a:pt x="2169491" y="1485038"/>
-                  </a:lnTo>
-                  <a:lnTo>
-                    <a:pt x="2247125" y="1607743"/>
-                  </a:lnTo>
-                  <a:lnTo>
-                    <a:pt x="2324759" y="1723502"/>
-                  </a:lnTo>
-                  <a:lnTo>
-                    <a:pt x="2402393" y="1832707"/>
-                  </a:lnTo>
-                  <a:lnTo>
-                    <a:pt x="2480027" y="1935731"/>
-                  </a:lnTo>
-                  <a:lnTo>
-                    <a:pt x="2557661" y="2032923"/>
-                  </a:lnTo>
-                  <a:lnTo>
-                    <a:pt x="2635295" y="2124613"/>
-                  </a:lnTo>
-                  <a:lnTo>
-                    <a:pt x="2712930" y="2211113"/>
-                  </a:lnTo>
-                  <a:lnTo>
-                    <a:pt x="2790564" y="2292716"/>
-                  </a:lnTo>
-                  <a:lnTo>
-                    <a:pt x="2868198" y="2369699"/>
-                  </a:lnTo>
-                  <a:lnTo>
-                    <a:pt x="2945832" y="2442325"/>
-                  </a:lnTo>
-                  <a:lnTo>
-                    <a:pt x="3023466" y="2510839"/>
-                  </a:lnTo>
-                  <a:lnTo>
-                    <a:pt x="3101100" y="2575475"/>
-                  </a:lnTo>
-                  <a:lnTo>
-                    <a:pt x="3178734" y="2636452"/>
-                  </a:lnTo>
-                  <a:lnTo>
-                    <a:pt x="3256368" y="2693977"/>
-                  </a:lnTo>
-                  <a:lnTo>
-                    <a:pt x="3334002" y="2748246"/>
-                  </a:lnTo>
-                  <a:lnTo>
-                    <a:pt x="3411636" y="2778312"/>
-                  </a:lnTo>
-                  <a:lnTo>
-                    <a:pt x="3489270" y="2763976"/>
-                  </a:lnTo>
-                  <a:lnTo>
-                    <a:pt x="3566904" y="2749406"/>
-                  </a:lnTo>
-                  <a:lnTo>
-                    <a:pt x="3644538" y="2734597"/>
-                  </a:lnTo>
-                  <a:lnTo>
-                    <a:pt x="3722172" y="2719545"/>
-                  </a:lnTo>
-                  <a:lnTo>
-                    <a:pt x="3799806" y="2704246"/>
-                  </a:lnTo>
-                  <a:lnTo>
-                    <a:pt x="3877440" y="2688697"/>
-                  </a:lnTo>
-                  <a:lnTo>
-                    <a:pt x="3955074" y="2672892"/>
-                  </a:lnTo>
-                  <a:lnTo>
-                    <a:pt x="4032708" y="2656828"/>
-                  </a:lnTo>
-                  <a:lnTo>
-                    <a:pt x="4110342" y="2640501"/>
-                  </a:lnTo>
-                  <a:lnTo>
-                    <a:pt x="4187976" y="2623907"/>
-                  </a:lnTo>
-                  <a:lnTo>
-                    <a:pt x="4265610" y="2607040"/>
-                  </a:lnTo>
-                  <a:lnTo>
-                    <a:pt x="4343244" y="2589896"/>
-                  </a:lnTo>
-                  <a:lnTo>
-                    <a:pt x="4420879" y="2572472"/>
-                  </a:lnTo>
-                  <a:lnTo>
-                    <a:pt x="4498513" y="2554762"/>
-                  </a:lnTo>
-                  <a:lnTo>
-                    <a:pt x="4576147" y="2536761"/>
-                  </a:lnTo>
-                  <a:lnTo>
-                    <a:pt x="4653781" y="2518466"/>
-                  </a:lnTo>
-                  <a:lnTo>
-                    <a:pt x="4731415" y="2499870"/>
-                  </a:lnTo>
-                  <a:lnTo>
-                    <a:pt x="4809049" y="2480970"/>
-                  </a:lnTo>
-                  <a:lnTo>
-                    <a:pt x="4886683" y="2461759"/>
-                  </a:lnTo>
-                  <a:lnTo>
-                    <a:pt x="4964317" y="2442234"/>
-                  </a:lnTo>
-                  <a:lnTo>
-                    <a:pt x="5041951" y="2422388"/>
-                  </a:lnTo>
-                  <a:lnTo>
-                    <a:pt x="5119585" y="2402218"/>
-                  </a:lnTo>
-                  <a:lnTo>
-                    <a:pt x="5197219" y="2381716"/>
-                  </a:lnTo>
-                  <a:lnTo>
-                    <a:pt x="5274853" y="2360878"/>
-                  </a:lnTo>
-                  <a:lnTo>
-                    <a:pt x="5352487" y="2339699"/>
-                  </a:lnTo>
-                  <a:lnTo>
-                    <a:pt x="5430121" y="2318172"/>
-                  </a:lnTo>
-                  <a:lnTo>
-                    <a:pt x="5507755" y="2296293"/>
-                  </a:lnTo>
-                  <a:lnTo>
-                    <a:pt x="5585389" y="2274055"/>
-                  </a:lnTo>
-                  <a:lnTo>
-                    <a:pt x="5663023" y="2251452"/>
-                  </a:lnTo>
-                  <a:lnTo>
-                    <a:pt x="5740657" y="2228478"/>
-                  </a:lnTo>
-                  <a:lnTo>
-                    <a:pt x="5818291" y="2205128"/>
-                  </a:lnTo>
-                  <a:lnTo>
-                    <a:pt x="5895925" y="2181395"/>
-                  </a:lnTo>
-                  <a:lnTo>
-                    <a:pt x="5973559" y="2157273"/>
-                  </a:lnTo>
-                  <a:lnTo>
-                    <a:pt x="6051193" y="2132755"/>
-                  </a:lnTo>
-                  <a:lnTo>
-                    <a:pt x="6128827" y="2107836"/>
-                  </a:lnTo>
-                  <a:lnTo>
-                    <a:pt x="6206462" y="2082508"/>
-                  </a:lnTo>
-                  <a:lnTo>
-                    <a:pt x="6284096" y="2056764"/>
-                  </a:lnTo>
-                  <a:lnTo>
-                    <a:pt x="6361730" y="2030599"/>
-                  </a:lnTo>
-                  <a:lnTo>
-                    <a:pt x="6439364" y="2004004"/>
-                  </a:lnTo>
-                  <a:lnTo>
-                    <a:pt x="6516998" y="1976974"/>
-                  </a:lnTo>
-                  <a:lnTo>
-                    <a:pt x="6594632" y="1949500"/>
-                  </a:lnTo>
-                  <a:lnTo>
-                    <a:pt x="6672266" y="1921576"/>
-                  </a:lnTo>
-                  <a:lnTo>
-                    <a:pt x="6749900" y="1893194"/>
-                  </a:lnTo>
-                  <a:lnTo>
-                    <a:pt x="6827534" y="1864346"/>
-                  </a:lnTo>
-                  <a:lnTo>
-                    <a:pt x="6905168" y="1835026"/>
-                  </a:lnTo>
-                  <a:lnTo>
-                    <a:pt x="6982802" y="1805225"/>
-                  </a:lnTo>
-                  <a:lnTo>
-                    <a:pt x="7060436" y="1774935"/>
-                  </a:lnTo>
-                  <a:lnTo>
-                    <a:pt x="7138070" y="1744149"/>
-                  </a:lnTo>
-                  <a:lnTo>
-                    <a:pt x="7215704" y="1712858"/>
-                  </a:lnTo>
-                  <a:lnTo>
-                    <a:pt x="7293338" y="1681054"/>
-                  </a:lnTo>
-                  <a:lnTo>
-                    <a:pt x="7370972" y="1648728"/>
-                  </a:lnTo>
-                  <a:lnTo>
-                    <a:pt x="7370972" y="3608957"/>
-                  </a:lnTo>
-                  <a:lnTo>
-                    <a:pt x="7293338" y="3606336"/>
-                  </a:lnTo>
-                  <a:lnTo>
-                    <a:pt x="7215704" y="3603557"/>
-                  </a:lnTo>
-                  <a:lnTo>
-                    <a:pt x="7138070" y="3600612"/>
-                  </a:lnTo>
-                  <a:lnTo>
-                    <a:pt x="7060436" y="3597490"/>
-                  </a:lnTo>
-                  <a:lnTo>
-                    <a:pt x="6982802" y="3594180"/>
-                  </a:lnTo>
-                  <a:lnTo>
-                    <a:pt x="6905168" y="3590672"/>
-                  </a:lnTo>
-                  <a:lnTo>
-                    <a:pt x="6827534" y="3586954"/>
-                  </a:lnTo>
-                  <a:lnTo>
-                    <a:pt x="6749900" y="3583012"/>
-                  </a:lnTo>
-                  <a:lnTo>
-                    <a:pt x="6672266" y="3578834"/>
-                  </a:lnTo>
-                  <a:lnTo>
-                    <a:pt x="6594632" y="3574405"/>
-                  </a:lnTo>
-                  <a:lnTo>
-                    <a:pt x="6516998" y="3569710"/>
-                  </a:lnTo>
-                  <a:lnTo>
-                    <a:pt x="6439364" y="3564733"/>
-                  </a:lnTo>
-                  <a:lnTo>
-                    <a:pt x="6361730" y="3559458"/>
-                  </a:lnTo>
-                  <a:lnTo>
-                    <a:pt x="6284096" y="3553867"/>
-                  </a:lnTo>
-                  <a:lnTo>
-                    <a:pt x="6206462" y="3547940"/>
-                  </a:lnTo>
-                  <a:lnTo>
-                    <a:pt x="6128827" y="3541657"/>
-                  </a:lnTo>
-                  <a:lnTo>
-                    <a:pt x="6051193" y="3534997"/>
-                  </a:lnTo>
-                  <a:lnTo>
-                    <a:pt x="5973559" y="3527938"/>
-                  </a:lnTo>
-                  <a:lnTo>
-                    <a:pt x="5895925" y="3520455"/>
-                  </a:lnTo>
-                  <a:lnTo>
-                    <a:pt x="5818291" y="3512523"/>
-                  </a:lnTo>
-                  <a:lnTo>
-                    <a:pt x="5740657" y="3504115"/>
-                  </a:lnTo>
-                  <a:lnTo>
-                    <a:pt x="5663023" y="3495202"/>
-                  </a:lnTo>
-                  <a:lnTo>
-                    <a:pt x="5585389" y="3485755"/>
-                  </a:lnTo>
-                  <a:lnTo>
-                    <a:pt x="5507755" y="3475741"/>
-                  </a:lnTo>
-                  <a:lnTo>
-                    <a:pt x="5430121" y="3465126"/>
-                  </a:lnTo>
-                  <a:lnTo>
-                    <a:pt x="5352487" y="3453874"/>
-                  </a:lnTo>
-                  <a:lnTo>
-                    <a:pt x="5274853" y="3441946"/>
-                  </a:lnTo>
-                  <a:lnTo>
-                    <a:pt x="5197219" y="3429303"/>
-                  </a:lnTo>
-                  <a:lnTo>
-                    <a:pt x="5119585" y="3415902"/>
-                  </a:lnTo>
-                  <a:lnTo>
-                    <a:pt x="5041951" y="3401696"/>
-                  </a:lnTo>
-                  <a:lnTo>
-                    <a:pt x="4964317" y="3386638"/>
-                  </a:lnTo>
-                  <a:lnTo>
-                    <a:pt x="4886683" y="3370676"/>
-                  </a:lnTo>
-                  <a:lnTo>
-                    <a:pt x="4809049" y="3353757"/>
-                  </a:lnTo>
-                  <a:lnTo>
-                    <a:pt x="4731415" y="3335822"/>
-                  </a:lnTo>
-                  <a:lnTo>
-                    <a:pt x="4653781" y="3316811"/>
-                  </a:lnTo>
-                  <a:lnTo>
-                    <a:pt x="4576147" y="3296659"/>
-                  </a:lnTo>
-                  <a:lnTo>
-                    <a:pt x="4498513" y="3275298"/>
-                  </a:lnTo>
-                  <a:lnTo>
-                    <a:pt x="4420879" y="3252656"/>
-                  </a:lnTo>
-                  <a:lnTo>
-                    <a:pt x="4343244" y="3228654"/>
-                  </a:lnTo>
-                  <a:lnTo>
-                    <a:pt x="4265610" y="3203213"/>
-                  </a:lnTo>
-                  <a:lnTo>
-                    <a:pt x="4187976" y="3176244"/>
-                  </a:lnTo>
-                  <a:lnTo>
-                    <a:pt x="4110342" y="3147658"/>
-                  </a:lnTo>
-                  <a:lnTo>
-                    <a:pt x="4032708" y="3117356"/>
-                  </a:lnTo>
-                  <a:lnTo>
-                    <a:pt x="3955074" y="3085236"/>
-                  </a:lnTo>
-                  <a:lnTo>
-                    <a:pt x="3877440" y="3051188"/>
-                  </a:lnTo>
-                  <a:lnTo>
-                    <a:pt x="3799806" y="3015098"/>
-                  </a:lnTo>
-                  <a:lnTo>
-                    <a:pt x="3722172" y="2976842"/>
-                  </a:lnTo>
-                  <a:lnTo>
-                    <a:pt x="3644538" y="2936290"/>
-                  </a:lnTo>
-                  <a:lnTo>
-                    <a:pt x="3566904" y="2893305"/>
-                  </a:lnTo>
-                  <a:lnTo>
-                    <a:pt x="3489270" y="2847741"/>
-                  </a:lnTo>
-                  <a:lnTo>
-                    <a:pt x="3411636" y="2799442"/>
-                  </a:lnTo>
-                  <a:lnTo>
-                    <a:pt x="3334002" y="2792416"/>
-                  </a:lnTo>
-                  <a:lnTo>
-                    <a:pt x="3256368" y="2806292"/>
-                  </a:lnTo>
-                  <a:lnTo>
-                    <a:pt x="3178734" y="2819945"/>
-                  </a:lnTo>
-                  <a:lnTo>
-                    <a:pt x="3101100" y="2833377"/>
-                  </a:lnTo>
-                  <a:lnTo>
-                    <a:pt x="3023466" y="2846593"/>
-                  </a:lnTo>
-                  <a:lnTo>
-                    <a:pt x="2945832" y="2859596"/>
-                  </a:lnTo>
-                  <a:lnTo>
-                    <a:pt x="2868198" y="2872388"/>
-                  </a:lnTo>
-                  <a:lnTo>
-                    <a:pt x="2790564" y="2884975"/>
-                  </a:lnTo>
-                  <a:lnTo>
-                    <a:pt x="2712930" y="2897358"/>
-                  </a:lnTo>
-                  <a:lnTo>
-                    <a:pt x="2635295" y="2909542"/>
-                  </a:lnTo>
-                  <a:lnTo>
-                    <a:pt x="2557661" y="2921529"/>
-                  </a:lnTo>
-                  <a:lnTo>
-                    <a:pt x="2480027" y="2933323"/>
-                  </a:lnTo>
-                  <a:lnTo>
-                    <a:pt x="2402393" y="2944926"/>
-                  </a:lnTo>
-                  <a:lnTo>
-                    <a:pt x="2324759" y="2956342"/>
-                  </a:lnTo>
-                  <a:lnTo>
-                    <a:pt x="2247125" y="2967575"/>
-                  </a:lnTo>
-                  <a:lnTo>
-                    <a:pt x="2169491" y="2978626"/>
-                  </a:lnTo>
-                  <a:lnTo>
-                    <a:pt x="2091857" y="2989498"/>
-                  </a:lnTo>
-                  <a:lnTo>
-                    <a:pt x="2014223" y="3000196"/>
-                  </a:lnTo>
-                  <a:lnTo>
-                    <a:pt x="1936589" y="3010720"/>
-                  </a:lnTo>
-                  <a:lnTo>
-                    <a:pt x="1858955" y="3021075"/>
-                  </a:lnTo>
-                  <a:lnTo>
-                    <a:pt x="1781321" y="3031263"/>
-                  </a:lnTo>
-                  <a:lnTo>
-                    <a:pt x="1703687" y="3041287"/>
-                  </a:lnTo>
-                  <a:lnTo>
-                    <a:pt x="1626053" y="3051149"/>
-                  </a:lnTo>
-                  <a:lnTo>
-                    <a:pt x="1548419" y="3060852"/>
-                  </a:lnTo>
-                  <a:lnTo>
-                    <a:pt x="1470785" y="3070398"/>
-                  </a:lnTo>
-                  <a:lnTo>
-                    <a:pt x="1393151" y="3079790"/>
-                  </a:lnTo>
-                  <a:lnTo>
-                    <a:pt x="1315517" y="3089031"/>
-                  </a:lnTo>
-                  <a:lnTo>
-                    <a:pt x="1237883" y="3098123"/>
-                  </a:lnTo>
-                  <a:lnTo>
-                    <a:pt x="1160249" y="3107068"/>
-                  </a:lnTo>
-                  <a:lnTo>
-                    <a:pt x="1082615" y="3115869"/>
-                  </a:lnTo>
-                  <a:lnTo>
-                    <a:pt x="1004981" y="3124527"/>
-                  </a:lnTo>
-                  <a:lnTo>
-                    <a:pt x="927346" y="3133047"/>
-                  </a:lnTo>
-                  <a:lnTo>
-                    <a:pt x="849712" y="3141428"/>
-                  </a:lnTo>
-                  <a:lnTo>
-                    <a:pt x="772078" y="3149675"/>
-                  </a:lnTo>
-                  <a:lnTo>
-                    <a:pt x="694444" y="3157788"/>
-                  </a:lnTo>
-                  <a:lnTo>
-                    <a:pt x="616810" y="3165771"/>
-                  </a:lnTo>
-                  <a:lnTo>
-                    <a:pt x="539176" y="3173625"/>
-                  </a:lnTo>
-                  <a:lnTo>
-                    <a:pt x="461542" y="3181352"/>
-                  </a:lnTo>
-                  <a:lnTo>
-                    <a:pt x="383908" y="3188954"/>
-                  </a:lnTo>
-                  <a:lnTo>
-                    <a:pt x="306274" y="3196434"/>
-                  </a:lnTo>
-                  <a:lnTo>
-                    <a:pt x="228640" y="3203793"/>
-                  </a:lnTo>
-                  <a:lnTo>
-                    <a:pt x="151006" y="3211034"/>
-                  </a:lnTo>
-                  <a:lnTo>
-                    <a:pt x="73372" y="3218158"/>
-                  </a:lnTo>
-                  <a:lnTo>
-                    <a:pt x="0" y="3224782"/>
+                    <a:pt x="1548419" y="58152"/>
+                  </a:lnTo>
+                  <a:lnTo>
+                    <a:pt x="1626053" y="267297"/>
+                  </a:lnTo>
+                  <a:lnTo>
+                    <a:pt x="1703687" y="464273"/>
+                  </a:lnTo>
+                  <a:lnTo>
+                    <a:pt x="1781321" y="649788"/>
+                  </a:lnTo>
+                  <a:lnTo>
+                    <a:pt x="1858955" y="824509"/>
+                  </a:lnTo>
+                  <a:lnTo>
+                    <a:pt x="1936589" y="989064"/>
+                  </a:lnTo>
+                  <a:lnTo>
+                    <a:pt x="2014223" y="1144044"/>
+                  </a:lnTo>
+                  <a:lnTo>
+                    <a:pt x="2091857" y="1290006"/>
+                  </a:lnTo>
+                  <a:lnTo>
+                    <a:pt x="2169491" y="1427476"/>
+                  </a:lnTo>
+                  <a:lnTo>
+                    <a:pt x="2247125" y="1556947"/>
+                  </a:lnTo>
+                  <a:lnTo>
+                    <a:pt x="2324759" y="1678885"/>
+                  </a:lnTo>
+                  <a:lnTo>
+                    <a:pt x="2402393" y="1793728"/>
+                  </a:lnTo>
+                  <a:lnTo>
+                    <a:pt x="2480027" y="1901889"/>
+                  </a:lnTo>
+                  <a:lnTo>
+                    <a:pt x="2557661" y="2003756"/>
+                  </a:lnTo>
+                  <a:lnTo>
+                    <a:pt x="2635295" y="2099697"/>
+                  </a:lnTo>
+                  <a:lnTo>
+                    <a:pt x="2712930" y="2190055"/>
+                  </a:lnTo>
+                  <a:lnTo>
+                    <a:pt x="2790564" y="2275155"/>
+                  </a:lnTo>
+                  <a:lnTo>
+                    <a:pt x="2868198" y="2355304"/>
+                  </a:lnTo>
+                  <a:lnTo>
+                    <a:pt x="2945832" y="2430790"/>
+                  </a:lnTo>
+                  <a:lnTo>
+                    <a:pt x="3023466" y="2501883"/>
+                  </a:lnTo>
+                  <a:lnTo>
+                    <a:pt x="3101100" y="2568840"/>
+                  </a:lnTo>
+                  <a:lnTo>
+                    <a:pt x="3178734" y="2631901"/>
+                  </a:lnTo>
+                  <a:lnTo>
+                    <a:pt x="3256368" y="2691293"/>
+                  </a:lnTo>
+                  <a:lnTo>
+                    <a:pt x="3334002" y="2747229"/>
+                  </a:lnTo>
+                  <a:lnTo>
+                    <a:pt x="3411636" y="2779927"/>
+                  </a:lnTo>
+                  <a:lnTo>
+                    <a:pt x="3489270" y="2770602"/>
+                  </a:lnTo>
+                  <a:lnTo>
+                    <a:pt x="3566904" y="2761177"/>
+                  </a:lnTo>
+                  <a:lnTo>
+                    <a:pt x="3644538" y="2751651"/>
+                  </a:lnTo>
+                  <a:lnTo>
+                    <a:pt x="3722172" y="2742024"/>
+                  </a:lnTo>
+                  <a:lnTo>
+                    <a:pt x="3799806" y="2732293"/>
+                  </a:lnTo>
+                  <a:lnTo>
+                    <a:pt x="3877440" y="2722459"/>
+                  </a:lnTo>
+                  <a:lnTo>
+                    <a:pt x="3955074" y="2712520"/>
+                  </a:lnTo>
+                  <a:lnTo>
+                    <a:pt x="4032708" y="2702474"/>
+                  </a:lnTo>
+                  <a:lnTo>
+                    <a:pt x="4110342" y="2692321"/>
+                  </a:lnTo>
+                  <a:lnTo>
+                    <a:pt x="4187976" y="2682060"/>
+                  </a:lnTo>
+                  <a:lnTo>
+                    <a:pt x="4265610" y="2671689"/>
+                  </a:lnTo>
+                  <a:lnTo>
+                    <a:pt x="4343244" y="2661207"/>
+                  </a:lnTo>
+                  <a:lnTo>
+                    <a:pt x="4420879" y="2650613"/>
+                  </a:lnTo>
+                  <a:lnTo>
+                    <a:pt x="4498513" y="2639906"/>
+                  </a:lnTo>
+                  <a:lnTo>
+                    <a:pt x="4576147" y="2629084"/>
+                  </a:lnTo>
+                  <a:lnTo>
+                    <a:pt x="4653781" y="2618147"/>
+                  </a:lnTo>
+                  <a:lnTo>
+                    <a:pt x="4731415" y="2607093"/>
+                  </a:lnTo>
+                  <a:lnTo>
+                    <a:pt x="4809049" y="2595921"/>
+                  </a:lnTo>
+                  <a:lnTo>
+                    <a:pt x="4886683" y="2584629"/>
+                  </a:lnTo>
+                  <a:lnTo>
+                    <a:pt x="4964317" y="2573217"/>
+                  </a:lnTo>
+                  <a:lnTo>
+                    <a:pt x="5041951" y="2561683"/>
+                  </a:lnTo>
+                  <a:lnTo>
+                    <a:pt x="5119585" y="2550026"/>
+                  </a:lnTo>
+                  <a:lnTo>
+                    <a:pt x="5197219" y="2538244"/>
+                  </a:lnTo>
+                  <a:lnTo>
+                    <a:pt x="5274853" y="2526336"/>
+                  </a:lnTo>
+                  <a:lnTo>
+                    <a:pt x="5352487" y="2514301"/>
+                  </a:lnTo>
+                  <a:lnTo>
+                    <a:pt x="5430121" y="2502138"/>
+                  </a:lnTo>
+                  <a:lnTo>
+                    <a:pt x="5507755" y="2489844"/>
+                  </a:lnTo>
+                  <a:lnTo>
+                    <a:pt x="5585389" y="2477419"/>
+                  </a:lnTo>
+                  <a:lnTo>
+                    <a:pt x="5663023" y="2464861"/>
+                  </a:lnTo>
+                  <a:lnTo>
+                    <a:pt x="5740657" y="2452169"/>
+                  </a:lnTo>
+                  <a:lnTo>
+                    <a:pt x="5818291" y="2439342"/>
+                  </a:lnTo>
+                  <a:lnTo>
+                    <a:pt x="5895925" y="2426377"/>
+                  </a:lnTo>
+                  <a:lnTo>
+                    <a:pt x="5973559" y="2413274"/>
+                  </a:lnTo>
+                  <a:lnTo>
+                    <a:pt x="6051193" y="2400031"/>
+                  </a:lnTo>
+                  <a:lnTo>
+                    <a:pt x="6128827" y="2386646"/>
+                  </a:lnTo>
+                  <a:lnTo>
+                    <a:pt x="6206462" y="2373119"/>
+                  </a:lnTo>
+                  <a:lnTo>
+                    <a:pt x="6284096" y="2359446"/>
+                  </a:lnTo>
+                  <a:lnTo>
+                    <a:pt x="6361730" y="2345628"/>
+                  </a:lnTo>
+                  <a:lnTo>
+                    <a:pt x="6439364" y="2331662"/>
+                  </a:lnTo>
+                  <a:lnTo>
+                    <a:pt x="6516998" y="2317547"/>
+                  </a:lnTo>
+                  <a:lnTo>
+                    <a:pt x="6594632" y="2303281"/>
+                  </a:lnTo>
+                  <a:lnTo>
+                    <a:pt x="6672266" y="2288862"/>
+                  </a:lnTo>
+                  <a:lnTo>
+                    <a:pt x="6749900" y="2274290"/>
+                  </a:lnTo>
+                  <a:lnTo>
+                    <a:pt x="6827534" y="2259562"/>
+                  </a:lnTo>
+                  <a:lnTo>
+                    <a:pt x="6905168" y="2244676"/>
+                  </a:lnTo>
+                  <a:lnTo>
+                    <a:pt x="6982802" y="2229631"/>
+                  </a:lnTo>
+                  <a:lnTo>
+                    <a:pt x="7060436" y="2214426"/>
+                  </a:lnTo>
+                  <a:lnTo>
+                    <a:pt x="7138070" y="2199058"/>
+                  </a:lnTo>
+                  <a:lnTo>
+                    <a:pt x="7215704" y="2183526"/>
+                  </a:lnTo>
+                  <a:lnTo>
+                    <a:pt x="7293338" y="2167828"/>
+                  </a:lnTo>
+                  <a:lnTo>
+                    <a:pt x="7370972" y="2151962"/>
+                  </a:lnTo>
+                  <a:lnTo>
+                    <a:pt x="7370972" y="3612551"/>
+                  </a:lnTo>
+                  <a:lnTo>
+                    <a:pt x="7293338" y="3610074"/>
+                  </a:lnTo>
+                  <a:lnTo>
+                    <a:pt x="7215704" y="3607444"/>
+                  </a:lnTo>
+                  <a:lnTo>
+                    <a:pt x="7138070" y="3604652"/>
+                  </a:lnTo>
+                  <a:lnTo>
+                    <a:pt x="7060436" y="3601687"/>
+                  </a:lnTo>
+                  <a:lnTo>
+                    <a:pt x="6982802" y="3598539"/>
+                  </a:lnTo>
+                  <a:lnTo>
+                    <a:pt x="6905168" y="3595196"/>
+                  </a:lnTo>
+                  <a:lnTo>
+                    <a:pt x="6827534" y="3591647"/>
+                  </a:lnTo>
+                  <a:lnTo>
+                    <a:pt x="6749900" y="3587879"/>
+                  </a:lnTo>
+                  <a:lnTo>
+                    <a:pt x="6672266" y="3583878"/>
+                  </a:lnTo>
+                  <a:lnTo>
+                    <a:pt x="6594632" y="3579630"/>
+                  </a:lnTo>
+                  <a:lnTo>
+                    <a:pt x="6516998" y="3575119"/>
+                  </a:lnTo>
+                  <a:lnTo>
+                    <a:pt x="6439364" y="3570329"/>
+                  </a:lnTo>
+                  <a:lnTo>
+                    <a:pt x="6361730" y="3565244"/>
+                  </a:lnTo>
+                  <a:lnTo>
+                    <a:pt x="6284096" y="3559845"/>
+                  </a:lnTo>
+                  <a:lnTo>
+                    <a:pt x="6206462" y="3554112"/>
+                  </a:lnTo>
+                  <a:lnTo>
+                    <a:pt x="6128827" y="3548024"/>
+                  </a:lnTo>
+                  <a:lnTo>
+                    <a:pt x="6051193" y="3541561"/>
+                  </a:lnTo>
+                  <a:lnTo>
+                    <a:pt x="5973559" y="3534698"/>
+                  </a:lnTo>
+                  <a:lnTo>
+                    <a:pt x="5895925" y="3527412"/>
+                  </a:lnTo>
+                  <a:lnTo>
+                    <a:pt x="5818291" y="3519675"/>
+                  </a:lnTo>
+                  <a:lnTo>
+                    <a:pt x="5740657" y="3511460"/>
+                  </a:lnTo>
+                  <a:lnTo>
+                    <a:pt x="5663023" y="3502738"/>
+                  </a:lnTo>
+                  <a:lnTo>
+                    <a:pt x="5585389" y="3493477"/>
+                  </a:lnTo>
+                  <a:lnTo>
+                    <a:pt x="5507755" y="3483644"/>
+                  </a:lnTo>
+                  <a:lnTo>
+                    <a:pt x="5430121" y="3473203"/>
+                  </a:lnTo>
+                  <a:lnTo>
+                    <a:pt x="5352487" y="3462117"/>
+                  </a:lnTo>
+                  <a:lnTo>
+                    <a:pt x="5274853" y="3450347"/>
+                  </a:lnTo>
+                  <a:lnTo>
+                    <a:pt x="5197219" y="3437849"/>
+                  </a:lnTo>
+                  <a:lnTo>
+                    <a:pt x="5119585" y="3424579"/>
+                  </a:lnTo>
+                  <a:lnTo>
+                    <a:pt x="5041951" y="3410489"/>
+                  </a:lnTo>
+                  <a:lnTo>
+                    <a:pt x="4964317" y="3395529"/>
+                  </a:lnTo>
+                  <a:lnTo>
+                    <a:pt x="4886683" y="3379645"/>
+                  </a:lnTo>
+                  <a:lnTo>
+                    <a:pt x="4809049" y="3362779"/>
+                  </a:lnTo>
+                  <a:lnTo>
+                    <a:pt x="4731415" y="3344871"/>
+                  </a:lnTo>
+                  <a:lnTo>
+                    <a:pt x="4653781" y="3325857"/>
+                  </a:lnTo>
+                  <a:lnTo>
+                    <a:pt x="4576147" y="3305669"/>
+                  </a:lnTo>
+                  <a:lnTo>
+                    <a:pt x="4498513" y="3284233"/>
+                  </a:lnTo>
+                  <a:lnTo>
+                    <a:pt x="4420879" y="3261472"/>
+                  </a:lnTo>
+                  <a:lnTo>
+                    <a:pt x="4343244" y="3237306"/>
+                  </a:lnTo>
+                  <a:lnTo>
+                    <a:pt x="4265610" y="3211647"/>
+                  </a:lnTo>
+                  <a:lnTo>
+                    <a:pt x="4187976" y="3184402"/>
+                  </a:lnTo>
+                  <a:lnTo>
+                    <a:pt x="4110342" y="3155475"/>
+                  </a:lnTo>
+                  <a:lnTo>
+                    <a:pt x="4032708" y="3124760"/>
+                  </a:lnTo>
+                  <a:lnTo>
+                    <a:pt x="3955074" y="3092147"/>
+                  </a:lnTo>
+                  <a:lnTo>
+                    <a:pt x="3877440" y="3057520"/>
+                  </a:lnTo>
+                  <a:lnTo>
+                    <a:pt x="3799806" y="3020754"/>
+                  </a:lnTo>
+                  <a:lnTo>
+                    <a:pt x="3722172" y="2981716"/>
+                  </a:lnTo>
+                  <a:lnTo>
+                    <a:pt x="3644538" y="2940266"/>
+                  </a:lnTo>
+                  <a:lnTo>
+                    <a:pt x="3566904" y="2896256"/>
+                  </a:lnTo>
+                  <a:lnTo>
+                    <a:pt x="3489270" y="2849527"/>
+                  </a:lnTo>
+                  <a:lnTo>
+                    <a:pt x="3411636" y="2799910"/>
+                  </a:lnTo>
+                  <a:lnTo>
+                    <a:pt x="3334002" y="2789154"/>
+                  </a:lnTo>
+                  <a:lnTo>
+                    <a:pt x="3256368" y="2798283"/>
+                  </a:lnTo>
+                  <a:lnTo>
+                    <a:pt x="3178734" y="2807316"/>
+                  </a:lnTo>
+                  <a:lnTo>
+                    <a:pt x="3101100" y="2816253"/>
+                  </a:lnTo>
+                  <a:lnTo>
+                    <a:pt x="3023466" y="2825095"/>
+                  </a:lnTo>
+                  <a:lnTo>
+                    <a:pt x="2945832" y="2833845"/>
+                  </a:lnTo>
+                  <a:lnTo>
+                    <a:pt x="2868198" y="2842501"/>
+                  </a:lnTo>
+                  <a:lnTo>
+                    <a:pt x="2790564" y="2851066"/>
+                  </a:lnTo>
+                  <a:lnTo>
+                    <a:pt x="2712930" y="2859541"/>
+                  </a:lnTo>
+                  <a:lnTo>
+                    <a:pt x="2635295" y="2867926"/>
+                  </a:lnTo>
+                  <a:lnTo>
+                    <a:pt x="2557661" y="2876222"/>
+                  </a:lnTo>
+                  <a:lnTo>
+                    <a:pt x="2480027" y="2884431"/>
+                  </a:lnTo>
+                  <a:lnTo>
+                    <a:pt x="2402393" y="2892553"/>
+                  </a:lnTo>
+                  <a:lnTo>
+                    <a:pt x="2324759" y="2900589"/>
+                  </a:lnTo>
+                  <a:lnTo>
+                    <a:pt x="2247125" y="2908540"/>
+                  </a:lnTo>
+                  <a:lnTo>
+                    <a:pt x="2169491" y="2916407"/>
+                  </a:lnTo>
+                  <a:lnTo>
+                    <a:pt x="2091857" y="2924191"/>
+                  </a:lnTo>
+                  <a:lnTo>
+                    <a:pt x="2014223" y="2931892"/>
+                  </a:lnTo>
+                  <a:lnTo>
+                    <a:pt x="1936589" y="2939512"/>
+                  </a:lnTo>
+                  <a:lnTo>
+                    <a:pt x="1858955" y="2947052"/>
+                  </a:lnTo>
+                  <a:lnTo>
+                    <a:pt x="1781321" y="2954512"/>
+                  </a:lnTo>
+                  <a:lnTo>
+                    <a:pt x="1703687" y="2961893"/>
+                  </a:lnTo>
+                  <a:lnTo>
+                    <a:pt x="1626053" y="2969195"/>
+                  </a:lnTo>
+                  <a:lnTo>
+                    <a:pt x="1548419" y="2976421"/>
+                  </a:lnTo>
+                  <a:lnTo>
+                    <a:pt x="1470785" y="2983570"/>
+                  </a:lnTo>
+                  <a:lnTo>
+                    <a:pt x="1393151" y="2990644"/>
+                  </a:lnTo>
+                  <a:lnTo>
+                    <a:pt x="1315517" y="2997643"/>
+                  </a:lnTo>
+                  <a:lnTo>
+                    <a:pt x="1237883" y="3004568"/>
+                  </a:lnTo>
+                  <a:lnTo>
+                    <a:pt x="1160249" y="3011420"/>
+                  </a:lnTo>
+                  <a:lnTo>
+                    <a:pt x="1082615" y="3018199"/>
+                  </a:lnTo>
+                  <a:lnTo>
+                    <a:pt x="1004981" y="3024907"/>
+                  </a:lnTo>
+                  <a:lnTo>
+                    <a:pt x="927346" y="3031543"/>
+                  </a:lnTo>
+                  <a:lnTo>
+                    <a:pt x="849712" y="3038110"/>
+                  </a:lnTo>
+                  <a:lnTo>
+                    <a:pt x="772078" y="3044607"/>
+                  </a:lnTo>
+                  <a:lnTo>
+                    <a:pt x="694444" y="3051035"/>
+                  </a:lnTo>
+                  <a:lnTo>
+                    <a:pt x="616810" y="3057396"/>
+                  </a:lnTo>
+                  <a:lnTo>
+                    <a:pt x="539176" y="3063689"/>
+                  </a:lnTo>
+                  <a:lnTo>
+                    <a:pt x="461542" y="3069916"/>
+                  </a:lnTo>
+                  <a:lnTo>
+                    <a:pt x="383908" y="3076077"/>
+                  </a:lnTo>
+                  <a:lnTo>
+                    <a:pt x="306274" y="3082172"/>
+                  </a:lnTo>
+                  <a:lnTo>
+                    <a:pt x="228640" y="3088204"/>
+                  </a:lnTo>
+                  <a:lnTo>
+                    <a:pt x="151006" y="3094171"/>
+                  </a:lnTo>
+                  <a:lnTo>
+                    <a:pt x="73372" y="3100075"/>
+                  </a:lnTo>
+                  <a:lnTo>
+                    <a:pt x="0" y="3105597"/>
                   </a:lnTo>
                   <a:close/>
                 </a:path>
@@ -3552,243 +3552,243 @@
           </p:nvSpPr>
           <p:spPr>
             <a:xfrm>
-              <a:off x="2291915" y="1896563"/>
-              <a:ext cx="5896575" cy="2778312"/>
+              <a:off x="2345607" y="1896563"/>
+              <a:ext cx="5842883" cy="2779927"/>
             </a:xfrm>
             <a:custGeom>
               <a:avLst/>
               <a:pathLst>
-                <a:path w="5896575" h="2778312">
+                <a:path w="5842883" h="2779927">
                   <a:moveTo>
                     <a:pt x="0" y="0"/>
                   </a:moveTo>
                   <a:lnTo>
-                    <a:pt x="74021" y="197670"/>
-                  </a:lnTo>
-                  <a:lnTo>
-                    <a:pt x="151655" y="393251"/>
-                  </a:lnTo>
-                  <a:lnTo>
-                    <a:pt x="229290" y="577761"/>
-                  </a:lnTo>
-                  <a:lnTo>
-                    <a:pt x="306924" y="751825"/>
-                  </a:lnTo>
-                  <a:lnTo>
-                    <a:pt x="384558" y="916036"/>
-                  </a:lnTo>
-                  <a:lnTo>
-                    <a:pt x="462192" y="1070952"/>
-                  </a:lnTo>
-                  <a:lnTo>
-                    <a:pt x="539826" y="1217097"/>
-                  </a:lnTo>
-                  <a:lnTo>
-                    <a:pt x="617460" y="1354970"/>
-                  </a:lnTo>
-                  <a:lnTo>
-                    <a:pt x="695094" y="1485038"/>
-                  </a:lnTo>
-                  <a:lnTo>
-                    <a:pt x="772728" y="1607743"/>
-                  </a:lnTo>
-                  <a:lnTo>
-                    <a:pt x="850362" y="1723502"/>
-                  </a:lnTo>
-                  <a:lnTo>
-                    <a:pt x="927996" y="1832707"/>
-                  </a:lnTo>
-                  <a:lnTo>
-                    <a:pt x="1005630" y="1935731"/>
-                  </a:lnTo>
-                  <a:lnTo>
-                    <a:pt x="1083264" y="2032923"/>
-                  </a:lnTo>
-                  <a:lnTo>
-                    <a:pt x="1160898" y="2124613"/>
-                  </a:lnTo>
-                  <a:lnTo>
-                    <a:pt x="1238532" y="2211113"/>
-                  </a:lnTo>
-                  <a:lnTo>
-                    <a:pt x="1316166" y="2292716"/>
-                  </a:lnTo>
-                  <a:lnTo>
-                    <a:pt x="1393800" y="2369699"/>
-                  </a:lnTo>
-                  <a:lnTo>
-                    <a:pt x="1471434" y="2442325"/>
-                  </a:lnTo>
-                  <a:lnTo>
-                    <a:pt x="1549068" y="2510839"/>
-                  </a:lnTo>
-                  <a:lnTo>
-                    <a:pt x="1626702" y="2575475"/>
-                  </a:lnTo>
-                  <a:lnTo>
-                    <a:pt x="1704336" y="2636452"/>
-                  </a:lnTo>
-                  <a:lnTo>
-                    <a:pt x="1781970" y="2693977"/>
-                  </a:lnTo>
-                  <a:lnTo>
-                    <a:pt x="1859604" y="2748246"/>
-                  </a:lnTo>
-                  <a:lnTo>
-                    <a:pt x="1937239" y="2778312"/>
-                  </a:lnTo>
-                  <a:lnTo>
-                    <a:pt x="2014873" y="2763976"/>
-                  </a:lnTo>
-                  <a:lnTo>
-                    <a:pt x="2092507" y="2749406"/>
-                  </a:lnTo>
-                  <a:lnTo>
-                    <a:pt x="2170141" y="2734597"/>
-                  </a:lnTo>
-                  <a:lnTo>
-                    <a:pt x="2247775" y="2719545"/>
-                  </a:lnTo>
-                  <a:lnTo>
-                    <a:pt x="2325409" y="2704246"/>
-                  </a:lnTo>
-                  <a:lnTo>
-                    <a:pt x="2403043" y="2688697"/>
-                  </a:lnTo>
-                  <a:lnTo>
-                    <a:pt x="2480677" y="2672892"/>
-                  </a:lnTo>
-                  <a:lnTo>
-                    <a:pt x="2558311" y="2656828"/>
-                  </a:lnTo>
-                  <a:lnTo>
-                    <a:pt x="2635945" y="2640501"/>
-                  </a:lnTo>
-                  <a:lnTo>
-                    <a:pt x="2713579" y="2623907"/>
-                  </a:lnTo>
-                  <a:lnTo>
-                    <a:pt x="2791213" y="2607040"/>
-                  </a:lnTo>
-                  <a:lnTo>
-                    <a:pt x="2868847" y="2589896"/>
-                  </a:lnTo>
-                  <a:lnTo>
-                    <a:pt x="2946481" y="2572472"/>
-                  </a:lnTo>
-                  <a:lnTo>
-                    <a:pt x="3024115" y="2554762"/>
-                  </a:lnTo>
-                  <a:lnTo>
-                    <a:pt x="3101749" y="2536761"/>
-                  </a:lnTo>
-                  <a:lnTo>
-                    <a:pt x="3179383" y="2518466"/>
-                  </a:lnTo>
-                  <a:lnTo>
-                    <a:pt x="3257017" y="2499870"/>
-                  </a:lnTo>
-                  <a:lnTo>
-                    <a:pt x="3334651" y="2480970"/>
-                  </a:lnTo>
-                  <a:lnTo>
-                    <a:pt x="3412285" y="2461759"/>
-                  </a:lnTo>
-                  <a:lnTo>
-                    <a:pt x="3489919" y="2442234"/>
-                  </a:lnTo>
-                  <a:lnTo>
-                    <a:pt x="3567553" y="2422388"/>
-                  </a:lnTo>
-                  <a:lnTo>
-                    <a:pt x="3645187" y="2402218"/>
-                  </a:lnTo>
-                  <a:lnTo>
-                    <a:pt x="3722822" y="2381716"/>
-                  </a:lnTo>
-                  <a:lnTo>
-                    <a:pt x="3800456" y="2360878"/>
-                  </a:lnTo>
-                  <a:lnTo>
-                    <a:pt x="3878090" y="2339699"/>
-                  </a:lnTo>
-                  <a:lnTo>
-                    <a:pt x="3955724" y="2318172"/>
-                  </a:lnTo>
-                  <a:lnTo>
-                    <a:pt x="4033358" y="2296293"/>
-                  </a:lnTo>
-                  <a:lnTo>
-                    <a:pt x="4110992" y="2274055"/>
-                  </a:lnTo>
-                  <a:lnTo>
-                    <a:pt x="4188626" y="2251452"/>
-                  </a:lnTo>
-                  <a:lnTo>
-                    <a:pt x="4266260" y="2228478"/>
-                  </a:lnTo>
-                  <a:lnTo>
-                    <a:pt x="4343894" y="2205128"/>
-                  </a:lnTo>
-                  <a:lnTo>
-                    <a:pt x="4421528" y="2181395"/>
-                  </a:lnTo>
-                  <a:lnTo>
-                    <a:pt x="4499162" y="2157273"/>
-                  </a:lnTo>
-                  <a:lnTo>
-                    <a:pt x="4576796" y="2132755"/>
-                  </a:lnTo>
-                  <a:lnTo>
-                    <a:pt x="4654430" y="2107836"/>
-                  </a:lnTo>
-                  <a:lnTo>
-                    <a:pt x="4732064" y="2082508"/>
-                  </a:lnTo>
-                  <a:lnTo>
-                    <a:pt x="4809698" y="2056764"/>
-                  </a:lnTo>
-                  <a:lnTo>
-                    <a:pt x="4887332" y="2030599"/>
-                  </a:lnTo>
-                  <a:lnTo>
-                    <a:pt x="4964966" y="2004004"/>
-                  </a:lnTo>
-                  <a:lnTo>
-                    <a:pt x="5042600" y="1976974"/>
-                  </a:lnTo>
-                  <a:lnTo>
-                    <a:pt x="5120234" y="1949500"/>
-                  </a:lnTo>
-                  <a:lnTo>
-                    <a:pt x="5197868" y="1921576"/>
-                  </a:lnTo>
-                  <a:lnTo>
-                    <a:pt x="5275502" y="1893194"/>
-                  </a:lnTo>
-                  <a:lnTo>
-                    <a:pt x="5353136" y="1864346"/>
-                  </a:lnTo>
-                  <a:lnTo>
-                    <a:pt x="5430771" y="1835026"/>
-                  </a:lnTo>
-                  <a:lnTo>
-                    <a:pt x="5508405" y="1805225"/>
-                  </a:lnTo>
-                  <a:lnTo>
-                    <a:pt x="5586039" y="1774935"/>
-                  </a:lnTo>
-                  <a:lnTo>
-                    <a:pt x="5663673" y="1744149"/>
-                  </a:lnTo>
-                  <a:lnTo>
-                    <a:pt x="5741307" y="1712858"/>
-                  </a:lnTo>
-                  <a:lnTo>
-                    <a:pt x="5818941" y="1681054"/>
-                  </a:lnTo>
-                  <a:lnTo>
-                    <a:pt x="5896575" y="1648728"/>
+                    <a:pt x="20330" y="58152"/>
+                  </a:lnTo>
+                  <a:lnTo>
+                    <a:pt x="97964" y="267297"/>
+                  </a:lnTo>
+                  <a:lnTo>
+                    <a:pt x="175598" y="464273"/>
+                  </a:lnTo>
+                  <a:lnTo>
+                    <a:pt x="253232" y="649788"/>
+                  </a:lnTo>
+                  <a:lnTo>
+                    <a:pt x="330866" y="824509"/>
+                  </a:lnTo>
+                  <a:lnTo>
+                    <a:pt x="408500" y="989064"/>
+                  </a:lnTo>
+                  <a:lnTo>
+                    <a:pt x="486134" y="1144044"/>
+                  </a:lnTo>
+                  <a:lnTo>
+                    <a:pt x="563768" y="1290006"/>
+                  </a:lnTo>
+                  <a:lnTo>
+                    <a:pt x="641402" y="1427476"/>
+                  </a:lnTo>
+                  <a:lnTo>
+                    <a:pt x="719036" y="1556947"/>
+                  </a:lnTo>
+                  <a:lnTo>
+                    <a:pt x="796670" y="1678885"/>
+                  </a:lnTo>
+                  <a:lnTo>
+                    <a:pt x="874304" y="1793728"/>
+                  </a:lnTo>
+                  <a:lnTo>
+                    <a:pt x="951938" y="1901889"/>
+                  </a:lnTo>
+                  <a:lnTo>
+                    <a:pt x="1029572" y="2003756"/>
+                  </a:lnTo>
+                  <a:lnTo>
+                    <a:pt x="1107206" y="2099697"/>
+                  </a:lnTo>
+                  <a:lnTo>
+                    <a:pt x="1184840" y="2190055"/>
+                  </a:lnTo>
+                  <a:lnTo>
+                    <a:pt x="1262474" y="2275155"/>
+                  </a:lnTo>
+                  <a:lnTo>
+                    <a:pt x="1340108" y="2355304"/>
+                  </a:lnTo>
+                  <a:lnTo>
+                    <a:pt x="1417742" y="2430790"/>
+                  </a:lnTo>
+                  <a:lnTo>
+                    <a:pt x="1495376" y="2501883"/>
+                  </a:lnTo>
+                  <a:lnTo>
+                    <a:pt x="1573010" y="2568840"/>
+                  </a:lnTo>
+                  <a:lnTo>
+                    <a:pt x="1650645" y="2631901"/>
+                  </a:lnTo>
+                  <a:lnTo>
+                    <a:pt x="1728279" y="2691293"/>
+                  </a:lnTo>
+                  <a:lnTo>
+                    <a:pt x="1805913" y="2747229"/>
+                  </a:lnTo>
+                  <a:lnTo>
+                    <a:pt x="1883547" y="2779927"/>
+                  </a:lnTo>
+                  <a:lnTo>
+                    <a:pt x="1961181" y="2770602"/>
+                  </a:lnTo>
+                  <a:lnTo>
+                    <a:pt x="2038815" y="2761177"/>
+                  </a:lnTo>
+                  <a:lnTo>
+                    <a:pt x="2116449" y="2751651"/>
+                  </a:lnTo>
+                  <a:lnTo>
+                    <a:pt x="2194083" y="2742024"/>
+                  </a:lnTo>
+                  <a:lnTo>
+                    <a:pt x="2271717" y="2732293"/>
+                  </a:lnTo>
+                  <a:lnTo>
+                    <a:pt x="2349351" y="2722459"/>
+                  </a:lnTo>
+                  <a:lnTo>
+                    <a:pt x="2426985" y="2712520"/>
+                  </a:lnTo>
+                  <a:lnTo>
+                    <a:pt x="2504619" y="2702474"/>
+                  </a:lnTo>
+                  <a:lnTo>
+                    <a:pt x="2582253" y="2692321"/>
+                  </a:lnTo>
+                  <a:lnTo>
+                    <a:pt x="2659887" y="2682060"/>
+                  </a:lnTo>
+                  <a:lnTo>
+                    <a:pt x="2737521" y="2671689"/>
+                  </a:lnTo>
+                  <a:lnTo>
+                    <a:pt x="2815155" y="2661207"/>
+                  </a:lnTo>
+                  <a:lnTo>
+                    <a:pt x="2892789" y="2650613"/>
+                  </a:lnTo>
+                  <a:lnTo>
+                    <a:pt x="2970423" y="2639906"/>
+                  </a:lnTo>
+                  <a:lnTo>
+                    <a:pt x="3048057" y="2629084"/>
+                  </a:lnTo>
+                  <a:lnTo>
+                    <a:pt x="3125691" y="2618147"/>
+                  </a:lnTo>
+                  <a:lnTo>
+                    <a:pt x="3203325" y="2607093"/>
+                  </a:lnTo>
+                  <a:lnTo>
+                    <a:pt x="3280959" y="2595921"/>
+                  </a:lnTo>
+                  <a:lnTo>
+                    <a:pt x="3358594" y="2584629"/>
+                  </a:lnTo>
+                  <a:lnTo>
+                    <a:pt x="3436228" y="2573217"/>
+                  </a:lnTo>
+                  <a:lnTo>
+                    <a:pt x="3513862" y="2561683"/>
+                  </a:lnTo>
+                  <a:lnTo>
+                    <a:pt x="3591496" y="2550026"/>
+                  </a:lnTo>
+                  <a:lnTo>
+                    <a:pt x="3669130" y="2538244"/>
+                  </a:lnTo>
+                  <a:lnTo>
+                    <a:pt x="3746764" y="2526336"/>
+                  </a:lnTo>
+                  <a:lnTo>
+                    <a:pt x="3824398" y="2514301"/>
+                  </a:lnTo>
+                  <a:lnTo>
+                    <a:pt x="3902032" y="2502138"/>
+                  </a:lnTo>
+                  <a:lnTo>
+                    <a:pt x="3979666" y="2489844"/>
+                  </a:lnTo>
+                  <a:lnTo>
+                    <a:pt x="4057300" y="2477419"/>
+                  </a:lnTo>
+                  <a:lnTo>
+                    <a:pt x="4134934" y="2464861"/>
+                  </a:lnTo>
+                  <a:lnTo>
+                    <a:pt x="4212568" y="2452169"/>
+                  </a:lnTo>
+                  <a:lnTo>
+                    <a:pt x="4290202" y="2439342"/>
+                  </a:lnTo>
+                  <a:lnTo>
+                    <a:pt x="4367836" y="2426377"/>
+                  </a:lnTo>
+                  <a:lnTo>
+                    <a:pt x="4445470" y="2413274"/>
+                  </a:lnTo>
+                  <a:lnTo>
+                    <a:pt x="4523104" y="2400031"/>
+                  </a:lnTo>
+                  <a:lnTo>
+                    <a:pt x="4600738" y="2386646"/>
+                  </a:lnTo>
+                  <a:lnTo>
+                    <a:pt x="4678372" y="2373119"/>
+                  </a:lnTo>
+                  <a:lnTo>
+                    <a:pt x="4756006" y="2359446"/>
+                  </a:lnTo>
+                  <a:lnTo>
+                    <a:pt x="4833640" y="2345628"/>
+                  </a:lnTo>
+                  <a:lnTo>
+                    <a:pt x="4911274" y="2331662"/>
+                  </a:lnTo>
+                  <a:lnTo>
+                    <a:pt x="4988908" y="2317547"/>
+                  </a:lnTo>
+                  <a:lnTo>
+                    <a:pt x="5066542" y="2303281"/>
+                  </a:lnTo>
+                  <a:lnTo>
+                    <a:pt x="5144177" y="2288862"/>
+                  </a:lnTo>
+                  <a:lnTo>
+                    <a:pt x="5221811" y="2274290"/>
+                  </a:lnTo>
+                  <a:lnTo>
+                    <a:pt x="5299445" y="2259562"/>
+                  </a:lnTo>
+                  <a:lnTo>
+                    <a:pt x="5377079" y="2244676"/>
+                  </a:lnTo>
+                  <a:lnTo>
+                    <a:pt x="5454713" y="2229631"/>
+                  </a:lnTo>
+                  <a:lnTo>
+                    <a:pt x="5532347" y="2214426"/>
+                  </a:lnTo>
+                  <a:lnTo>
+                    <a:pt x="5609981" y="2199058"/>
+                  </a:lnTo>
+                  <a:lnTo>
+                    <a:pt x="5687615" y="2183526"/>
+                  </a:lnTo>
+                  <a:lnTo>
+                    <a:pt x="5765249" y="2167828"/>
+                  </a:lnTo>
+                  <a:lnTo>
+                    <a:pt x="5842883" y="2151962"/>
                   </a:lnTo>
                 </a:path>
               </a:pathLst>
@@ -3808,300 +3808,300 @@
           </p:nvSpPr>
           <p:spPr>
             <a:xfrm>
-              <a:off x="817517" y="4688979"/>
-              <a:ext cx="7370972" cy="816541"/>
+              <a:off x="817517" y="4685717"/>
+              <a:ext cx="7370972" cy="823397"/>
             </a:xfrm>
             <a:custGeom>
               <a:avLst/>
               <a:pathLst>
-                <a:path w="7370972" h="816541">
+                <a:path w="7370972" h="823397">
                   <a:moveTo>
-                    <a:pt x="7370972" y="816541"/>
+                    <a:pt x="7370972" y="823397"/>
                   </a:moveTo>
                   <a:lnTo>
-                    <a:pt x="7293338" y="813920"/>
-                  </a:lnTo>
-                  <a:lnTo>
-                    <a:pt x="7215704" y="811141"/>
-                  </a:lnTo>
-                  <a:lnTo>
-                    <a:pt x="7138070" y="808196"/>
-                  </a:lnTo>
-                  <a:lnTo>
-                    <a:pt x="7060436" y="805074"/>
-                  </a:lnTo>
-                  <a:lnTo>
-                    <a:pt x="6982802" y="801764"/>
-                  </a:lnTo>
-                  <a:lnTo>
-                    <a:pt x="6905168" y="798256"/>
-                  </a:lnTo>
-                  <a:lnTo>
-                    <a:pt x="6827534" y="794537"/>
-                  </a:lnTo>
-                  <a:lnTo>
-                    <a:pt x="6749900" y="790596"/>
-                  </a:lnTo>
-                  <a:lnTo>
-                    <a:pt x="6672266" y="786417"/>
-                  </a:lnTo>
-                  <a:lnTo>
-                    <a:pt x="6594632" y="781988"/>
-                  </a:lnTo>
-                  <a:lnTo>
-                    <a:pt x="6516998" y="777294"/>
-                  </a:lnTo>
-                  <a:lnTo>
-                    <a:pt x="6439364" y="772317"/>
-                  </a:lnTo>
-                  <a:lnTo>
-                    <a:pt x="6361730" y="767042"/>
-                  </a:lnTo>
-                  <a:lnTo>
-                    <a:pt x="6284096" y="761451"/>
-                  </a:lnTo>
-                  <a:lnTo>
-                    <a:pt x="6206462" y="755524"/>
-                  </a:lnTo>
-                  <a:lnTo>
-                    <a:pt x="6128827" y="749241"/>
-                  </a:lnTo>
-                  <a:lnTo>
-                    <a:pt x="6051193" y="742581"/>
-                  </a:lnTo>
-                  <a:lnTo>
-                    <a:pt x="5973559" y="735522"/>
-                  </a:lnTo>
-                  <a:lnTo>
-                    <a:pt x="5895925" y="728039"/>
-                  </a:lnTo>
-                  <a:lnTo>
-                    <a:pt x="5818291" y="720107"/>
-                  </a:lnTo>
-                  <a:lnTo>
-                    <a:pt x="5740657" y="711699"/>
-                  </a:lnTo>
-                  <a:lnTo>
-                    <a:pt x="5663023" y="702786"/>
-                  </a:lnTo>
-                  <a:lnTo>
-                    <a:pt x="5585389" y="693339"/>
-                  </a:lnTo>
-                  <a:lnTo>
-                    <a:pt x="5507755" y="683325"/>
-                  </a:lnTo>
-                  <a:lnTo>
-                    <a:pt x="5430121" y="672710"/>
-                  </a:lnTo>
-                  <a:lnTo>
-                    <a:pt x="5352487" y="661457"/>
-                  </a:lnTo>
-                  <a:lnTo>
-                    <a:pt x="5274853" y="649530"/>
-                  </a:lnTo>
-                  <a:lnTo>
-                    <a:pt x="5197219" y="636887"/>
-                  </a:lnTo>
-                  <a:lnTo>
-                    <a:pt x="5119585" y="623486"/>
-                  </a:lnTo>
-                  <a:lnTo>
-                    <a:pt x="5041951" y="609280"/>
-                  </a:lnTo>
-                  <a:lnTo>
-                    <a:pt x="4964317" y="594222"/>
-                  </a:lnTo>
-                  <a:lnTo>
-                    <a:pt x="4886683" y="578260"/>
-                  </a:lnTo>
-                  <a:lnTo>
-                    <a:pt x="4809049" y="561341"/>
-                  </a:lnTo>
-                  <a:lnTo>
-                    <a:pt x="4731415" y="543406"/>
-                  </a:lnTo>
-                  <a:lnTo>
-                    <a:pt x="4653781" y="524395"/>
-                  </a:lnTo>
-                  <a:lnTo>
-                    <a:pt x="4576147" y="504243"/>
-                  </a:lnTo>
-                  <a:lnTo>
-                    <a:pt x="4498513" y="482882"/>
-                  </a:lnTo>
-                  <a:lnTo>
-                    <a:pt x="4420879" y="460239"/>
-                  </a:lnTo>
-                  <a:lnTo>
-                    <a:pt x="4343244" y="436238"/>
-                  </a:lnTo>
-                  <a:lnTo>
-                    <a:pt x="4265610" y="410796"/>
-                  </a:lnTo>
-                  <a:lnTo>
-                    <a:pt x="4187976" y="383828"/>
-                  </a:lnTo>
-                  <a:lnTo>
-                    <a:pt x="4110342" y="355242"/>
-                  </a:lnTo>
-                  <a:lnTo>
-                    <a:pt x="4032708" y="324940"/>
-                  </a:lnTo>
-                  <a:lnTo>
-                    <a:pt x="3955074" y="292820"/>
-                  </a:lnTo>
-                  <a:lnTo>
-                    <a:pt x="3877440" y="258772"/>
-                  </a:lnTo>
-                  <a:lnTo>
-                    <a:pt x="3799806" y="222682"/>
-                  </a:lnTo>
-                  <a:lnTo>
-                    <a:pt x="3722172" y="184426"/>
-                  </a:lnTo>
-                  <a:lnTo>
-                    <a:pt x="3644538" y="143874"/>
-                  </a:lnTo>
-                  <a:lnTo>
-                    <a:pt x="3566904" y="100889"/>
-                  </a:lnTo>
-                  <a:lnTo>
-                    <a:pt x="3489270" y="55324"/>
-                  </a:lnTo>
-                  <a:lnTo>
-                    <a:pt x="3411636" y="7026"/>
+                    <a:pt x="7293338" y="820920"/>
+                  </a:lnTo>
+                  <a:lnTo>
+                    <a:pt x="7215704" y="818290"/>
+                  </a:lnTo>
+                  <a:lnTo>
+                    <a:pt x="7138070" y="815498"/>
+                  </a:lnTo>
+                  <a:lnTo>
+                    <a:pt x="7060436" y="812533"/>
+                  </a:lnTo>
+                  <a:lnTo>
+                    <a:pt x="6982802" y="809385"/>
+                  </a:lnTo>
+                  <a:lnTo>
+                    <a:pt x="6905168" y="806042"/>
+                  </a:lnTo>
+                  <a:lnTo>
+                    <a:pt x="6827534" y="802493"/>
+                  </a:lnTo>
+                  <a:lnTo>
+                    <a:pt x="6749900" y="798725"/>
+                  </a:lnTo>
+                  <a:lnTo>
+                    <a:pt x="6672266" y="794724"/>
+                  </a:lnTo>
+                  <a:lnTo>
+                    <a:pt x="6594632" y="790475"/>
+                  </a:lnTo>
+                  <a:lnTo>
+                    <a:pt x="6516998" y="785965"/>
+                  </a:lnTo>
+                  <a:lnTo>
+                    <a:pt x="6439364" y="781175"/>
+                  </a:lnTo>
+                  <a:lnTo>
+                    <a:pt x="6361730" y="776090"/>
+                  </a:lnTo>
+                  <a:lnTo>
+                    <a:pt x="6284096" y="770690"/>
+                  </a:lnTo>
+                  <a:lnTo>
+                    <a:pt x="6206462" y="764957"/>
+                  </a:lnTo>
+                  <a:lnTo>
+                    <a:pt x="6128827" y="758870"/>
+                  </a:lnTo>
+                  <a:lnTo>
+                    <a:pt x="6051193" y="752407"/>
+                  </a:lnTo>
+                  <a:lnTo>
+                    <a:pt x="5973559" y="745544"/>
+                  </a:lnTo>
+                  <a:lnTo>
+                    <a:pt x="5895925" y="738258"/>
+                  </a:lnTo>
+                  <a:lnTo>
+                    <a:pt x="5818291" y="730521"/>
+                  </a:lnTo>
+                  <a:lnTo>
+                    <a:pt x="5740657" y="722306"/>
+                  </a:lnTo>
+                  <a:lnTo>
+                    <a:pt x="5663023" y="713584"/>
+                  </a:lnTo>
+                  <a:lnTo>
+                    <a:pt x="5585389" y="704323"/>
+                  </a:lnTo>
+                  <a:lnTo>
+                    <a:pt x="5507755" y="694490"/>
+                  </a:lnTo>
+                  <a:lnTo>
+                    <a:pt x="5430121" y="684049"/>
+                  </a:lnTo>
+                  <a:lnTo>
+                    <a:pt x="5352487" y="672963"/>
+                  </a:lnTo>
+                  <a:lnTo>
+                    <a:pt x="5274853" y="661192"/>
+                  </a:lnTo>
+                  <a:lnTo>
+                    <a:pt x="5197219" y="648695"/>
+                  </a:lnTo>
+                  <a:lnTo>
+                    <a:pt x="5119585" y="635425"/>
+                  </a:lnTo>
+                  <a:lnTo>
+                    <a:pt x="5041951" y="621335"/>
+                  </a:lnTo>
+                  <a:lnTo>
+                    <a:pt x="4964317" y="606375"/>
+                  </a:lnTo>
+                  <a:lnTo>
+                    <a:pt x="4886683" y="590491"/>
+                  </a:lnTo>
+                  <a:lnTo>
+                    <a:pt x="4809049" y="573625"/>
+                  </a:lnTo>
+                  <a:lnTo>
+                    <a:pt x="4731415" y="555717"/>
+                  </a:lnTo>
+                  <a:lnTo>
+                    <a:pt x="4653781" y="536703"/>
+                  </a:lnTo>
+                  <a:lnTo>
+                    <a:pt x="4576147" y="516514"/>
+                  </a:lnTo>
+                  <a:lnTo>
+                    <a:pt x="4498513" y="495079"/>
+                  </a:lnTo>
+                  <a:lnTo>
+                    <a:pt x="4420879" y="472318"/>
+                  </a:lnTo>
+                  <a:lnTo>
+                    <a:pt x="4343244" y="448152"/>
+                  </a:lnTo>
+                  <a:lnTo>
+                    <a:pt x="4265610" y="422493"/>
+                  </a:lnTo>
+                  <a:lnTo>
+                    <a:pt x="4187976" y="395248"/>
+                  </a:lnTo>
+                  <a:lnTo>
+                    <a:pt x="4110342" y="366320"/>
+                  </a:lnTo>
+                  <a:lnTo>
+                    <a:pt x="4032708" y="335605"/>
+                  </a:lnTo>
+                  <a:lnTo>
+                    <a:pt x="3955074" y="302993"/>
+                  </a:lnTo>
+                  <a:lnTo>
+                    <a:pt x="3877440" y="268366"/>
+                  </a:lnTo>
+                  <a:lnTo>
+                    <a:pt x="3799806" y="231599"/>
+                  </a:lnTo>
+                  <a:lnTo>
+                    <a:pt x="3722172" y="192562"/>
+                  </a:lnTo>
+                  <a:lnTo>
+                    <a:pt x="3644538" y="151112"/>
+                  </a:lnTo>
+                  <a:lnTo>
+                    <a:pt x="3566904" y="107102"/>
+                  </a:lnTo>
+                  <a:lnTo>
+                    <a:pt x="3489270" y="60372"/>
+                  </a:lnTo>
+                  <a:lnTo>
+                    <a:pt x="3411636" y="10756"/>
                   </a:lnTo>
                   <a:lnTo>
                     <a:pt x="3334002" y="0"/>
                   </a:lnTo>
                   <a:lnTo>
-                    <a:pt x="3256368" y="13876"/>
-                  </a:lnTo>
-                  <a:lnTo>
-                    <a:pt x="3178734" y="27529"/>
-                  </a:lnTo>
-                  <a:lnTo>
-                    <a:pt x="3101100" y="40961"/>
-                  </a:lnTo>
-                  <a:lnTo>
-                    <a:pt x="3023466" y="54177"/>
-                  </a:lnTo>
-                  <a:lnTo>
-                    <a:pt x="2945832" y="67179"/>
-                  </a:lnTo>
-                  <a:lnTo>
-                    <a:pt x="2868198" y="79972"/>
-                  </a:lnTo>
-                  <a:lnTo>
-                    <a:pt x="2790564" y="92559"/>
-                  </a:lnTo>
-                  <a:lnTo>
-                    <a:pt x="2712930" y="104942"/>
-                  </a:lnTo>
-                  <a:lnTo>
-                    <a:pt x="2635295" y="117126"/>
-                  </a:lnTo>
-                  <a:lnTo>
-                    <a:pt x="2557661" y="129113"/>
-                  </a:lnTo>
-                  <a:lnTo>
-                    <a:pt x="2480027" y="140906"/>
-                  </a:lnTo>
-                  <a:lnTo>
-                    <a:pt x="2402393" y="152510"/>
-                  </a:lnTo>
-                  <a:lnTo>
-                    <a:pt x="2324759" y="163926"/>
-                  </a:lnTo>
-                  <a:lnTo>
-                    <a:pt x="2247125" y="175158"/>
-                  </a:lnTo>
-                  <a:lnTo>
-                    <a:pt x="2169491" y="186209"/>
-                  </a:lnTo>
-                  <a:lnTo>
-                    <a:pt x="2091857" y="197082"/>
-                  </a:lnTo>
-                  <a:lnTo>
-                    <a:pt x="2014223" y="207779"/>
-                  </a:lnTo>
-                  <a:lnTo>
-                    <a:pt x="1936589" y="218304"/>
-                  </a:lnTo>
-                  <a:lnTo>
-                    <a:pt x="1858955" y="228659"/>
-                  </a:lnTo>
-                  <a:lnTo>
-                    <a:pt x="1781321" y="238847"/>
-                  </a:lnTo>
-                  <a:lnTo>
-                    <a:pt x="1703687" y="248871"/>
-                  </a:lnTo>
-                  <a:lnTo>
-                    <a:pt x="1626053" y="258733"/>
-                  </a:lnTo>
-                  <a:lnTo>
-                    <a:pt x="1548419" y="268435"/>
-                  </a:lnTo>
-                  <a:lnTo>
-                    <a:pt x="1470785" y="277982"/>
-                  </a:lnTo>
-                  <a:lnTo>
-                    <a:pt x="1393151" y="287374"/>
-                  </a:lnTo>
-                  <a:lnTo>
-                    <a:pt x="1315517" y="296615"/>
-                  </a:lnTo>
-                  <a:lnTo>
-                    <a:pt x="1237883" y="305707"/>
-                  </a:lnTo>
-                  <a:lnTo>
-                    <a:pt x="1160249" y="314652"/>
-                  </a:lnTo>
-                  <a:lnTo>
-                    <a:pt x="1082615" y="323452"/>
-                  </a:lnTo>
-                  <a:lnTo>
-                    <a:pt x="1004981" y="332111"/>
-                  </a:lnTo>
-                  <a:lnTo>
-                    <a:pt x="927346" y="340630"/>
-                  </a:lnTo>
-                  <a:lnTo>
-                    <a:pt x="849712" y="349012"/>
-                  </a:lnTo>
-                  <a:lnTo>
-                    <a:pt x="772078" y="357259"/>
-                  </a:lnTo>
-                  <a:lnTo>
-                    <a:pt x="694444" y="365372"/>
-                  </a:lnTo>
-                  <a:lnTo>
-                    <a:pt x="616810" y="373355"/>
-                  </a:lnTo>
-                  <a:lnTo>
-                    <a:pt x="539176" y="381209"/>
-                  </a:lnTo>
-                  <a:lnTo>
-                    <a:pt x="461542" y="388936"/>
-                  </a:lnTo>
-                  <a:lnTo>
-                    <a:pt x="383908" y="396538"/>
-                  </a:lnTo>
-                  <a:lnTo>
-                    <a:pt x="306274" y="404018"/>
-                  </a:lnTo>
-                  <a:lnTo>
-                    <a:pt x="228640" y="411377"/>
-                  </a:lnTo>
-                  <a:lnTo>
-                    <a:pt x="151006" y="418618"/>
-                  </a:lnTo>
-                  <a:lnTo>
-                    <a:pt x="73372" y="425741"/>
-                  </a:lnTo>
-                  <a:lnTo>
-                    <a:pt x="0" y="432365"/>
+                    <a:pt x="3256368" y="9129"/>
+                  </a:lnTo>
+                  <a:lnTo>
+                    <a:pt x="3178734" y="18161"/>
+                  </a:lnTo>
+                  <a:lnTo>
+                    <a:pt x="3101100" y="27098"/>
+                  </a:lnTo>
+                  <a:lnTo>
+                    <a:pt x="3023466" y="35941"/>
+                  </a:lnTo>
+                  <a:lnTo>
+                    <a:pt x="2945832" y="44690"/>
+                  </a:lnTo>
+                  <a:lnTo>
+                    <a:pt x="2868198" y="53347"/>
+                  </a:lnTo>
+                  <a:lnTo>
+                    <a:pt x="2790564" y="61912"/>
+                  </a:lnTo>
+                  <a:lnTo>
+                    <a:pt x="2712930" y="70387"/>
+                  </a:lnTo>
+                  <a:lnTo>
+                    <a:pt x="2635295" y="78772"/>
+                  </a:lnTo>
+                  <a:lnTo>
+                    <a:pt x="2557661" y="87068"/>
+                  </a:lnTo>
+                  <a:lnTo>
+                    <a:pt x="2480027" y="95277"/>
+                  </a:lnTo>
+                  <a:lnTo>
+                    <a:pt x="2402393" y="103399"/>
+                  </a:lnTo>
+                  <a:lnTo>
+                    <a:pt x="2324759" y="111435"/>
+                  </a:lnTo>
+                  <a:lnTo>
+                    <a:pt x="2247125" y="119386"/>
+                  </a:lnTo>
+                  <a:lnTo>
+                    <a:pt x="2169491" y="127253"/>
+                  </a:lnTo>
+                  <a:lnTo>
+                    <a:pt x="2091857" y="135036"/>
+                  </a:lnTo>
+                  <a:lnTo>
+                    <a:pt x="2014223" y="142738"/>
+                  </a:lnTo>
+                  <a:lnTo>
+                    <a:pt x="1936589" y="150358"/>
+                  </a:lnTo>
+                  <a:lnTo>
+                    <a:pt x="1858955" y="157898"/>
+                  </a:lnTo>
+                  <a:lnTo>
+                    <a:pt x="1781321" y="165357"/>
+                  </a:lnTo>
+                  <a:lnTo>
+                    <a:pt x="1703687" y="172738"/>
+                  </a:lnTo>
+                  <a:lnTo>
+                    <a:pt x="1626053" y="180041"/>
+                  </a:lnTo>
+                  <a:lnTo>
+                    <a:pt x="1548419" y="187267"/>
+                  </a:lnTo>
+                  <a:lnTo>
+                    <a:pt x="1470785" y="194416"/>
+                  </a:lnTo>
+                  <a:lnTo>
+                    <a:pt x="1393151" y="201490"/>
+                  </a:lnTo>
+                  <a:lnTo>
+                    <a:pt x="1315517" y="208489"/>
+                  </a:lnTo>
+                  <a:lnTo>
+                    <a:pt x="1237883" y="215414"/>
+                  </a:lnTo>
+                  <a:lnTo>
+                    <a:pt x="1160249" y="222266"/>
+                  </a:lnTo>
+                  <a:lnTo>
+                    <a:pt x="1082615" y="229045"/>
+                  </a:lnTo>
+                  <a:lnTo>
+                    <a:pt x="1004981" y="235752"/>
+                  </a:lnTo>
+                  <a:lnTo>
+                    <a:pt x="927346" y="242389"/>
+                  </a:lnTo>
+                  <a:lnTo>
+                    <a:pt x="849712" y="248956"/>
+                  </a:lnTo>
+                  <a:lnTo>
+                    <a:pt x="772078" y="255453"/>
+                  </a:lnTo>
+                  <a:lnTo>
+                    <a:pt x="694444" y="261881"/>
+                  </a:lnTo>
+                  <a:lnTo>
+                    <a:pt x="616810" y="268242"/>
+                  </a:lnTo>
+                  <a:lnTo>
+                    <a:pt x="539176" y="274535"/>
+                  </a:lnTo>
+                  <a:lnTo>
+                    <a:pt x="461542" y="280762"/>
+                  </a:lnTo>
+                  <a:lnTo>
+                    <a:pt x="383908" y="286922"/>
+                  </a:lnTo>
+                  <a:lnTo>
+                    <a:pt x="306274" y="293018"/>
+                  </a:lnTo>
+                  <a:lnTo>
+                    <a:pt x="228640" y="299049"/>
+                  </a:lnTo>
+                  <a:lnTo>
+                    <a:pt x="151006" y="305017"/>
+                  </a:lnTo>
+                  <a:lnTo>
+                    <a:pt x="73372" y="310921"/>
+                  </a:lnTo>
+                  <a:lnTo>
+                    <a:pt x="0" y="316443"/>
                   </a:lnTo>
                 </a:path>
               </a:pathLst>
@@ -4121,300 +4121,300 @@
           </p:nvSpPr>
           <p:spPr>
             <a:xfrm>
-              <a:off x="817517" y="3375187"/>
-              <a:ext cx="7370972" cy="1878143"/>
+              <a:off x="817517" y="2999642"/>
+              <a:ext cx="7370972" cy="2304277"/>
             </a:xfrm>
             <a:custGeom>
               <a:avLst/>
               <a:pathLst>
-                <a:path w="7370972" h="1878143">
+                <a:path w="7370972" h="2304277">
                   <a:moveTo>
                     <a:pt x="0" y="0"/>
                   </a:moveTo>
                   <a:lnTo>
-                    <a:pt x="73372" y="42758"/>
-                  </a:lnTo>
-                  <a:lnTo>
-                    <a:pt x="151006" y="87060"/>
-                  </a:lnTo>
-                  <a:lnTo>
-                    <a:pt x="228640" y="130440"/>
-                  </a:lnTo>
-                  <a:lnTo>
-                    <a:pt x="306274" y="172919"/>
-                  </a:lnTo>
-                  <a:lnTo>
-                    <a:pt x="383908" y="214515"/>
-                  </a:lnTo>
-                  <a:lnTo>
-                    <a:pt x="461542" y="255246"/>
-                  </a:lnTo>
-                  <a:lnTo>
-                    <a:pt x="539176" y="295131"/>
-                  </a:lnTo>
-                  <a:lnTo>
-                    <a:pt x="616810" y="334187"/>
-                  </a:lnTo>
-                  <a:lnTo>
-                    <a:pt x="694444" y="372430"/>
-                  </a:lnTo>
-                  <a:lnTo>
-                    <a:pt x="772078" y="409879"/>
-                  </a:lnTo>
-                  <a:lnTo>
-                    <a:pt x="849712" y="446549"/>
-                  </a:lnTo>
-                  <a:lnTo>
-                    <a:pt x="927346" y="482457"/>
-                  </a:lnTo>
-                  <a:lnTo>
-                    <a:pt x="1004981" y="517619"/>
-                  </a:lnTo>
-                  <a:lnTo>
-                    <a:pt x="1082615" y="552050"/>
-                  </a:lnTo>
-                  <a:lnTo>
-                    <a:pt x="1160249" y="585765"/>
-                  </a:lnTo>
-                  <a:lnTo>
-                    <a:pt x="1237883" y="618779"/>
-                  </a:lnTo>
-                  <a:lnTo>
-                    <a:pt x="1315517" y="651107"/>
-                  </a:lnTo>
-                  <a:lnTo>
-                    <a:pt x="1393151" y="682763"/>
-                  </a:lnTo>
-                  <a:lnTo>
-                    <a:pt x="1470785" y="713762"/>
-                  </a:lnTo>
-                  <a:lnTo>
-                    <a:pt x="1548419" y="744115"/>
-                  </a:lnTo>
-                  <a:lnTo>
-                    <a:pt x="1626053" y="773838"/>
-                  </a:lnTo>
-                  <a:lnTo>
-                    <a:pt x="1703687" y="802943"/>
-                  </a:lnTo>
-                  <a:lnTo>
-                    <a:pt x="1781321" y="831443"/>
-                  </a:lnTo>
-                  <a:lnTo>
-                    <a:pt x="1858955" y="859350"/>
-                  </a:lnTo>
-                  <a:lnTo>
-                    <a:pt x="1936589" y="886678"/>
-                  </a:lnTo>
-                  <a:lnTo>
-                    <a:pt x="2014223" y="913437"/>
-                  </a:lnTo>
-                  <a:lnTo>
-                    <a:pt x="2091857" y="939640"/>
-                  </a:lnTo>
-                  <a:lnTo>
-                    <a:pt x="2169491" y="965299"/>
-                  </a:lnTo>
-                  <a:lnTo>
-                    <a:pt x="2247125" y="990424"/>
-                  </a:lnTo>
-                  <a:lnTo>
-                    <a:pt x="2324759" y="1015027"/>
-                  </a:lnTo>
-                  <a:lnTo>
-                    <a:pt x="2402393" y="1039118"/>
-                  </a:lnTo>
-                  <a:lnTo>
-                    <a:pt x="2480027" y="1062709"/>
-                  </a:lnTo>
-                  <a:lnTo>
-                    <a:pt x="2557661" y="1085809"/>
-                  </a:lnTo>
-                  <a:lnTo>
-                    <a:pt x="2635295" y="1108429"/>
-                  </a:lnTo>
-                  <a:lnTo>
-                    <a:pt x="2712930" y="1130579"/>
-                  </a:lnTo>
-                  <a:lnTo>
-                    <a:pt x="2790564" y="1152268"/>
-                  </a:lnTo>
-                  <a:lnTo>
-                    <a:pt x="2868198" y="1173507"/>
-                  </a:lnTo>
-                  <a:lnTo>
-                    <a:pt x="2945832" y="1194304"/>
-                  </a:lnTo>
-                  <a:lnTo>
-                    <a:pt x="3023466" y="1214669"/>
-                  </a:lnTo>
-                  <a:lnTo>
-                    <a:pt x="3101100" y="1234611"/>
-                  </a:lnTo>
-                  <a:lnTo>
-                    <a:pt x="3178734" y="1254138"/>
-                  </a:lnTo>
-                  <a:lnTo>
-                    <a:pt x="3256368" y="1273259"/>
-                  </a:lnTo>
-                  <a:lnTo>
-                    <a:pt x="3334002" y="1291983"/>
-                  </a:lnTo>
-                  <a:lnTo>
-                    <a:pt x="3411636" y="1310317"/>
-                  </a:lnTo>
-                  <a:lnTo>
-                    <a:pt x="3489270" y="1328270"/>
-                  </a:lnTo>
-                  <a:lnTo>
-                    <a:pt x="3566904" y="1345851"/>
-                  </a:lnTo>
-                  <a:lnTo>
-                    <a:pt x="3644538" y="1363065"/>
-                  </a:lnTo>
-                  <a:lnTo>
-                    <a:pt x="3722172" y="1379922"/>
-                  </a:lnTo>
-                  <a:lnTo>
-                    <a:pt x="3799806" y="1396429"/>
-                  </a:lnTo>
-                  <a:lnTo>
-                    <a:pt x="3877440" y="1412592"/>
-                  </a:lnTo>
-                  <a:lnTo>
-                    <a:pt x="3955074" y="1428420"/>
-                  </a:lnTo>
-                  <a:lnTo>
-                    <a:pt x="4032708" y="1443918"/>
-                  </a:lnTo>
-                  <a:lnTo>
-                    <a:pt x="4110342" y="1459094"/>
-                  </a:lnTo>
-                  <a:lnTo>
-                    <a:pt x="4187976" y="1473955"/>
-                  </a:lnTo>
-                  <a:lnTo>
-                    <a:pt x="4265610" y="1488507"/>
-                  </a:lnTo>
-                  <a:lnTo>
-                    <a:pt x="4343244" y="1502756"/>
-                  </a:lnTo>
-                  <a:lnTo>
-                    <a:pt x="4420879" y="1516710"/>
-                  </a:lnTo>
-                  <a:lnTo>
-                    <a:pt x="4498513" y="1530373"/>
-                  </a:lnTo>
-                  <a:lnTo>
-                    <a:pt x="4576147" y="1543752"/>
-                  </a:lnTo>
-                  <a:lnTo>
-                    <a:pt x="4653781" y="1556853"/>
-                  </a:lnTo>
-                  <a:lnTo>
-                    <a:pt x="4731415" y="1569682"/>
-                  </a:lnTo>
-                  <a:lnTo>
-                    <a:pt x="4809049" y="1582244"/>
-                  </a:lnTo>
-                  <a:lnTo>
-                    <a:pt x="4886683" y="1594545"/>
-                  </a:lnTo>
-                  <a:lnTo>
-                    <a:pt x="4964317" y="1606590"/>
-                  </a:lnTo>
-                  <a:lnTo>
-                    <a:pt x="5041951" y="1618385"/>
-                  </a:lnTo>
-                  <a:lnTo>
-                    <a:pt x="5119585" y="1629935"/>
-                  </a:lnTo>
-                  <a:lnTo>
-                    <a:pt x="5197219" y="1641244"/>
-                  </a:lnTo>
-                  <a:lnTo>
-                    <a:pt x="5274853" y="1652319"/>
-                  </a:lnTo>
-                  <a:lnTo>
-                    <a:pt x="5352487" y="1663163"/>
-                  </a:lnTo>
-                  <a:lnTo>
-                    <a:pt x="5430121" y="1673782"/>
-                  </a:lnTo>
-                  <a:lnTo>
-                    <a:pt x="5507755" y="1684180"/>
-                  </a:lnTo>
-                  <a:lnTo>
-                    <a:pt x="5585389" y="1694362"/>
-                  </a:lnTo>
-                  <a:lnTo>
-                    <a:pt x="5663023" y="1704333"/>
-                  </a:lnTo>
-                  <a:lnTo>
-                    <a:pt x="5740657" y="1714096"/>
-                  </a:lnTo>
-                  <a:lnTo>
-                    <a:pt x="5818291" y="1723656"/>
-                  </a:lnTo>
-                  <a:lnTo>
-                    <a:pt x="5895925" y="1733018"/>
-                  </a:lnTo>
-                  <a:lnTo>
-                    <a:pt x="5973559" y="1742184"/>
-                  </a:lnTo>
-                  <a:lnTo>
-                    <a:pt x="6051193" y="1751161"/>
-                  </a:lnTo>
-                  <a:lnTo>
-                    <a:pt x="6128827" y="1759951"/>
-                  </a:lnTo>
-                  <a:lnTo>
-                    <a:pt x="6206462" y="1768558"/>
-                  </a:lnTo>
-                  <a:lnTo>
-                    <a:pt x="6284096" y="1776986"/>
-                  </a:lnTo>
-                  <a:lnTo>
-                    <a:pt x="6361730" y="1785239"/>
-                  </a:lnTo>
-                  <a:lnTo>
-                    <a:pt x="6439364" y="1793320"/>
-                  </a:lnTo>
-                  <a:lnTo>
-                    <a:pt x="6516998" y="1801233"/>
-                  </a:lnTo>
-                  <a:lnTo>
-                    <a:pt x="6594632" y="1808982"/>
-                  </a:lnTo>
-                  <a:lnTo>
-                    <a:pt x="6672266" y="1816570"/>
-                  </a:lnTo>
-                  <a:lnTo>
-                    <a:pt x="6749900" y="1824000"/>
-                  </a:lnTo>
-                  <a:lnTo>
-                    <a:pt x="6827534" y="1831276"/>
-                  </a:lnTo>
-                  <a:lnTo>
-                    <a:pt x="6905168" y="1838400"/>
-                  </a:lnTo>
-                  <a:lnTo>
-                    <a:pt x="6982802" y="1845377"/>
-                  </a:lnTo>
-                  <a:lnTo>
-                    <a:pt x="7060436" y="1852208"/>
-                  </a:lnTo>
-                  <a:lnTo>
-                    <a:pt x="7138070" y="1858897"/>
-                  </a:lnTo>
-                  <a:lnTo>
-                    <a:pt x="7215704" y="1865448"/>
-                  </a:lnTo>
-                  <a:lnTo>
-                    <a:pt x="7293338" y="1871862"/>
-                  </a:lnTo>
-                  <a:lnTo>
-                    <a:pt x="7370972" y="1878143"/>
+                    <a:pt x="73372" y="58770"/>
+                  </a:lnTo>
+                  <a:lnTo>
+                    <a:pt x="151006" y="119439"/>
+                  </a:lnTo>
+                  <a:lnTo>
+                    <a:pt x="228640" y="178630"/>
+                  </a:lnTo>
+                  <a:lnTo>
+                    <a:pt x="306274" y="236379"/>
+                  </a:lnTo>
+                  <a:lnTo>
+                    <a:pt x="383908" y="292722"/>
+                  </a:lnTo>
+                  <a:lnTo>
+                    <a:pt x="461542" y="347692"/>
+                  </a:lnTo>
+                  <a:lnTo>
+                    <a:pt x="539176" y="401324"/>
+                  </a:lnTo>
+                  <a:lnTo>
+                    <a:pt x="616810" y="453649"/>
+                  </a:lnTo>
+                  <a:lnTo>
+                    <a:pt x="694444" y="504700"/>
+                  </a:lnTo>
+                  <a:lnTo>
+                    <a:pt x="772078" y="554507"/>
+                  </a:lnTo>
+                  <a:lnTo>
+                    <a:pt x="849712" y="603101"/>
+                  </a:lnTo>
+                  <a:lnTo>
+                    <a:pt x="927346" y="650512"/>
+                  </a:lnTo>
+                  <a:lnTo>
+                    <a:pt x="1004981" y="696768"/>
+                  </a:lnTo>
+                  <a:lnTo>
+                    <a:pt x="1082615" y="741897"/>
+                  </a:lnTo>
+                  <a:lnTo>
+                    <a:pt x="1160249" y="785926"/>
+                  </a:lnTo>
+                  <a:lnTo>
+                    <a:pt x="1237883" y="828884"/>
+                  </a:lnTo>
+                  <a:lnTo>
+                    <a:pt x="1315517" y="870795"/>
+                  </a:lnTo>
+                  <a:lnTo>
+                    <a:pt x="1393151" y="911685"/>
+                  </a:lnTo>
+                  <a:lnTo>
+                    <a:pt x="1470785" y="951579"/>
+                  </a:lnTo>
+                  <a:lnTo>
+                    <a:pt x="1548419" y="990502"/>
+                  </a:lnTo>
+                  <a:lnTo>
+                    <a:pt x="1626053" y="1028476"/>
+                  </a:lnTo>
+                  <a:lnTo>
+                    <a:pt x="1703687" y="1065526"/>
+                  </a:lnTo>
+                  <a:lnTo>
+                    <a:pt x="1781321" y="1101673"/>
+                  </a:lnTo>
+                  <a:lnTo>
+                    <a:pt x="1858955" y="1136939"/>
+                  </a:lnTo>
+                  <a:lnTo>
+                    <a:pt x="1936589" y="1171347"/>
+                  </a:lnTo>
+                  <a:lnTo>
+                    <a:pt x="2014223" y="1204917"/>
+                  </a:lnTo>
+                  <a:lnTo>
+                    <a:pt x="2091857" y="1237669"/>
+                  </a:lnTo>
+                  <a:lnTo>
+                    <a:pt x="2169491" y="1269623"/>
+                  </a:lnTo>
+                  <a:lnTo>
+                    <a:pt x="2247125" y="1300799"/>
+                  </a:lnTo>
+                  <a:lnTo>
+                    <a:pt x="2324759" y="1331215"/>
+                  </a:lnTo>
+                  <a:lnTo>
+                    <a:pt x="2402393" y="1360891"/>
+                  </a:lnTo>
+                  <a:lnTo>
+                    <a:pt x="2480027" y="1389844"/>
+                  </a:lnTo>
+                  <a:lnTo>
+                    <a:pt x="2557661" y="1418091"/>
+                  </a:lnTo>
+                  <a:lnTo>
+                    <a:pt x="2635295" y="1445651"/>
+                  </a:lnTo>
+                  <a:lnTo>
+                    <a:pt x="2712930" y="1472539"/>
+                  </a:lnTo>
+                  <a:lnTo>
+                    <a:pt x="2790564" y="1498772"/>
+                  </a:lnTo>
+                  <a:lnTo>
+                    <a:pt x="2868198" y="1524367"/>
+                  </a:lnTo>
+                  <a:lnTo>
+                    <a:pt x="2945832" y="1549338"/>
+                  </a:lnTo>
+                  <a:lnTo>
+                    <a:pt x="3023466" y="1573701"/>
+                  </a:lnTo>
+                  <a:lnTo>
+                    <a:pt x="3101100" y="1597470"/>
+                  </a:lnTo>
+                  <a:lnTo>
+                    <a:pt x="3178734" y="1620660"/>
+                  </a:lnTo>
+                  <a:lnTo>
+                    <a:pt x="3256368" y="1643286"/>
+                  </a:lnTo>
+                  <a:lnTo>
+                    <a:pt x="3334002" y="1665360"/>
+                  </a:lnTo>
+                  <a:lnTo>
+                    <a:pt x="3411636" y="1686897"/>
+                  </a:lnTo>
+                  <a:lnTo>
+                    <a:pt x="3489270" y="1707909"/>
+                  </a:lnTo>
+                  <a:lnTo>
+                    <a:pt x="3566904" y="1728410"/>
+                  </a:lnTo>
+                  <a:lnTo>
+                    <a:pt x="3644538" y="1748411"/>
+                  </a:lnTo>
+                  <a:lnTo>
+                    <a:pt x="3722172" y="1767925"/>
+                  </a:lnTo>
+                  <a:lnTo>
+                    <a:pt x="3799806" y="1786963"/>
+                  </a:lnTo>
+                  <a:lnTo>
+                    <a:pt x="3877440" y="1805538"/>
+                  </a:lnTo>
+                  <a:lnTo>
+                    <a:pt x="3955074" y="1823660"/>
+                  </a:lnTo>
+                  <a:lnTo>
+                    <a:pt x="4032708" y="1841341"/>
+                  </a:lnTo>
+                  <a:lnTo>
+                    <a:pt x="4110342" y="1858592"/>
+                  </a:lnTo>
+                  <a:lnTo>
+                    <a:pt x="4187976" y="1875422"/>
+                  </a:lnTo>
+                  <a:lnTo>
+                    <a:pt x="4265610" y="1891842"/>
+                  </a:lnTo>
+                  <a:lnTo>
+                    <a:pt x="4343244" y="1907863"/>
+                  </a:lnTo>
+                  <a:lnTo>
+                    <a:pt x="4420879" y="1923493"/>
+                  </a:lnTo>
+                  <a:lnTo>
+                    <a:pt x="4498513" y="1938742"/>
+                  </a:lnTo>
+                  <a:lnTo>
+                    <a:pt x="4576147" y="1953620"/>
+                  </a:lnTo>
+                  <a:lnTo>
+                    <a:pt x="4653781" y="1968136"/>
+                  </a:lnTo>
+                  <a:lnTo>
+                    <a:pt x="4731415" y="1982298"/>
+                  </a:lnTo>
+                  <a:lnTo>
+                    <a:pt x="4809049" y="1996115"/>
+                  </a:lnTo>
+                  <a:lnTo>
+                    <a:pt x="4886683" y="2009595"/>
+                  </a:lnTo>
+                  <a:lnTo>
+                    <a:pt x="4964317" y="2022747"/>
+                  </a:lnTo>
+                  <a:lnTo>
+                    <a:pt x="5041951" y="2035579"/>
+                  </a:lnTo>
+                  <a:lnTo>
+                    <a:pt x="5119585" y="2048098"/>
+                  </a:lnTo>
+                  <a:lnTo>
+                    <a:pt x="5197219" y="2060313"/>
+                  </a:lnTo>
+                  <a:lnTo>
+                    <a:pt x="5274853" y="2072229"/>
+                  </a:lnTo>
+                  <a:lnTo>
+                    <a:pt x="5352487" y="2083856"/>
+                  </a:lnTo>
+                  <a:lnTo>
+                    <a:pt x="5430121" y="2095199"/>
+                  </a:lnTo>
+                  <a:lnTo>
+                    <a:pt x="5507755" y="2106266"/>
+                  </a:lnTo>
+                  <a:lnTo>
+                    <a:pt x="5585389" y="2117064"/>
+                  </a:lnTo>
+                  <a:lnTo>
+                    <a:pt x="5663023" y="2127598"/>
+                  </a:lnTo>
+                  <a:lnTo>
+                    <a:pt x="5740657" y="2137876"/>
+                  </a:lnTo>
+                  <a:lnTo>
+                    <a:pt x="5818291" y="2147904"/>
+                  </a:lnTo>
+                  <a:lnTo>
+                    <a:pt x="5895925" y="2157687"/>
+                  </a:lnTo>
+                  <a:lnTo>
+                    <a:pt x="5973559" y="2167232"/>
+                  </a:lnTo>
+                  <a:lnTo>
+                    <a:pt x="6051193" y="2176545"/>
+                  </a:lnTo>
+                  <a:lnTo>
+                    <a:pt x="6128827" y="2185631"/>
+                  </a:lnTo>
+                  <a:lnTo>
+                    <a:pt x="6206462" y="2194495"/>
+                  </a:lnTo>
+                  <a:lnTo>
+                    <a:pt x="6284096" y="2203143"/>
+                  </a:lnTo>
+                  <a:lnTo>
+                    <a:pt x="6361730" y="2211581"/>
+                  </a:lnTo>
+                  <a:lnTo>
+                    <a:pt x="6439364" y="2219814"/>
+                  </a:lnTo>
+                  <a:lnTo>
+                    <a:pt x="6516998" y="2227845"/>
+                  </a:lnTo>
+                  <a:lnTo>
+                    <a:pt x="6594632" y="2235682"/>
+                  </a:lnTo>
+                  <a:lnTo>
+                    <a:pt x="6672266" y="2243327"/>
+                  </a:lnTo>
+                  <a:lnTo>
+                    <a:pt x="6749900" y="2250786"/>
+                  </a:lnTo>
+                  <a:lnTo>
+                    <a:pt x="6827534" y="2258063"/>
+                  </a:lnTo>
+                  <a:lnTo>
+                    <a:pt x="6905168" y="2265164"/>
+                  </a:lnTo>
+                  <a:lnTo>
+                    <a:pt x="6982802" y="2272091"/>
+                  </a:lnTo>
+                  <a:lnTo>
+                    <a:pt x="7060436" y="2278849"/>
+                  </a:lnTo>
+                  <a:lnTo>
+                    <a:pt x="7138070" y="2285443"/>
+                  </a:lnTo>
+                  <a:lnTo>
+                    <a:pt x="7215704" y="2291876"/>
+                  </a:lnTo>
+                  <a:lnTo>
+                    <a:pt x="7293338" y="2298153"/>
+                  </a:lnTo>
+                  <a:lnTo>
+                    <a:pt x="7370972" y="2304277"/>
                   </a:lnTo>
                 </a:path>
               </a:pathLst>

--- a/docs/plots/carbo/jx_carbo_linsubhr_ratio_hosp1.pptx
+++ b/docs/plots/carbo/jx_carbo_linsubhr_ratio_hosp1.pptx
@@ -3469,7 +3469,7 @@
                     <a:pt x="1548419" y="2976421"/>
                   </a:lnTo>
                   <a:lnTo>
-                    <a:pt x="1470785" y="2983570"/>
+                    <a:pt x="1470785" y="2983571"/>
                   </a:lnTo>
                   <a:lnTo>
                     <a:pt x="1393151" y="2990644"/>
@@ -3626,7 +3626,7 @@
                     <a:pt x="1573010" y="2568840"/>
                   </a:lnTo>
                   <a:lnTo>
-                    <a:pt x="1650645" y="2631901"/>
+                    <a:pt x="1650644" y="2631901"/>
                   </a:lnTo>
                   <a:lnTo>
                     <a:pt x="1728279" y="2691293"/>
@@ -3692,7 +3692,7 @@
                     <a:pt x="3280959" y="2595921"/>
                   </a:lnTo>
                   <a:lnTo>
-                    <a:pt x="3358594" y="2584629"/>
+                    <a:pt x="3358593" y="2584629"/>
                   </a:lnTo>
                   <a:lnTo>
                     <a:pt x="3436228" y="2573217"/>
@@ -4020,7 +4020,7 @@
                     <a:pt x="2169491" y="127253"/>
                   </a:lnTo>
                   <a:lnTo>
-                    <a:pt x="2091857" y="135036"/>
+                    <a:pt x="2091857" y="135037"/>
                   </a:lnTo>
                   <a:lnTo>
                     <a:pt x="2014223" y="142738"/>
@@ -4062,7 +4062,7 @@
                     <a:pt x="1082615" y="229045"/>
                   </a:lnTo>
                   <a:lnTo>
-                    <a:pt x="1004981" y="235752"/>
+                    <a:pt x="1004981" y="235753"/>
                   </a:lnTo>
                   <a:lnTo>
                     <a:pt x="927346" y="242389"/>
@@ -4309,10 +4309,10 @@
                     <a:pt x="4576147" y="1953620"/>
                   </a:lnTo>
                   <a:lnTo>
-                    <a:pt x="4653781" y="1968136"/>
-                  </a:lnTo>
-                  <a:lnTo>
-                    <a:pt x="4731415" y="1982298"/>
+                    <a:pt x="4653781" y="1968135"/>
+                  </a:lnTo>
+                  <a:lnTo>
+                    <a:pt x="4731415" y="1982297"/>
                   </a:lnTo>
                   <a:lnTo>
                     <a:pt x="4809049" y="1996115"/>

--- a/docs/plots/carbo/jx_carbo_linsubhr_ratio_hosp1.pptx
+++ b/docs/plots/carbo/jx_carbo_linsubhr_ratio_hosp1.pptx
@@ -2271,7 +2271,7 @@
           </p:nvSpPr>
           <p:spPr>
             <a:xfrm>
-              <a:off x="817517" y="5114368"/>
+              <a:off x="817517" y="5142518"/>
               <a:ext cx="7799693" cy="0"/>
             </a:xfrm>
             <a:custGeom>
@@ -2314,7 +2314,7 @@
           </p:nvSpPr>
           <p:spPr>
             <a:xfrm>
-              <a:off x="817517" y="4244691"/>
+              <a:off x="817517" y="4313054"/>
               <a:ext cx="7799693" cy="0"/>
             </a:xfrm>
             <a:custGeom>
@@ -2357,7 +2357,7 @@
           </p:nvSpPr>
           <p:spPr>
             <a:xfrm>
-              <a:off x="817517" y="3375014"/>
+              <a:off x="817517" y="3483591"/>
               <a:ext cx="7799693" cy="0"/>
             </a:xfrm>
             <a:custGeom>
@@ -2400,7 +2400,7 @@
           </p:nvSpPr>
           <p:spPr>
             <a:xfrm>
-              <a:off x="817517" y="2505337"/>
+              <a:off x="817517" y="2654127"/>
               <a:ext cx="7799693" cy="0"/>
             </a:xfrm>
             <a:custGeom>
@@ -2443,15 +2443,15 @@
           </p:nvSpPr>
           <p:spPr>
             <a:xfrm>
-              <a:off x="1615213" y="1896563"/>
-              <a:ext cx="0" cy="3826579"/>
+              <a:off x="1615213" y="2073503"/>
+              <a:ext cx="0" cy="3649639"/>
             </a:xfrm>
             <a:custGeom>
               <a:avLst/>
               <a:pathLst>
-                <a:path w="0" h="3826579">
+                <a:path w="0" h="3649639">
                   <a:moveTo>
-                    <a:pt x="0" y="3826579"/>
+                    <a:pt x="0" y="3649639"/>
                   </a:moveTo>
                   <a:lnTo>
                     <a:pt x="0" y="0"/>
@@ -2486,15 +2486,15 @@
           </p:nvSpPr>
           <p:spPr>
             <a:xfrm>
-              <a:off x="3387871" y="1896563"/>
-              <a:ext cx="0" cy="3826579"/>
+              <a:off x="3387871" y="2073503"/>
+              <a:ext cx="0" cy="3649639"/>
             </a:xfrm>
             <a:custGeom>
               <a:avLst/>
               <a:pathLst>
-                <a:path w="0" h="3826579">
+                <a:path w="0" h="3649639">
                   <a:moveTo>
-                    <a:pt x="0" y="3826579"/>
+                    <a:pt x="0" y="3649639"/>
                   </a:moveTo>
                   <a:lnTo>
                     <a:pt x="0" y="0"/>
@@ -2529,15 +2529,15 @@
           </p:nvSpPr>
           <p:spPr>
             <a:xfrm>
-              <a:off x="5160528" y="1896563"/>
-              <a:ext cx="0" cy="3826579"/>
+              <a:off x="5160528" y="2073503"/>
+              <a:ext cx="0" cy="3649639"/>
             </a:xfrm>
             <a:custGeom>
               <a:avLst/>
               <a:pathLst>
-                <a:path w="0" h="3826579">
+                <a:path w="0" h="3649639">
                   <a:moveTo>
-                    <a:pt x="0" y="3826579"/>
+                    <a:pt x="0" y="3649639"/>
                   </a:moveTo>
                   <a:lnTo>
                     <a:pt x="0" y="0"/>
@@ -2572,15 +2572,15 @@
           </p:nvSpPr>
           <p:spPr>
             <a:xfrm>
-              <a:off x="6933186" y="1896563"/>
-              <a:ext cx="0" cy="3826579"/>
+              <a:off x="6933186" y="2073503"/>
+              <a:ext cx="0" cy="3649639"/>
             </a:xfrm>
             <a:custGeom>
               <a:avLst/>
               <a:pathLst>
-                <a:path w="0" h="3826579">
+                <a:path w="0" h="3649639">
                   <a:moveTo>
-                    <a:pt x="0" y="3826579"/>
+                    <a:pt x="0" y="3649639"/>
                   </a:moveTo>
                   <a:lnTo>
                     <a:pt x="0" y="0"/>
@@ -2615,7 +2615,7 @@
           </p:nvSpPr>
           <p:spPr>
             <a:xfrm>
-              <a:off x="817517" y="5549207"/>
+              <a:off x="817517" y="5557249"/>
               <a:ext cx="7799693" cy="0"/>
             </a:xfrm>
             <a:custGeom>
@@ -2658,7 +2658,7 @@
           </p:nvSpPr>
           <p:spPr>
             <a:xfrm>
-              <a:off x="817517" y="4679530"/>
+              <a:off x="817517" y="4727786"/>
               <a:ext cx="7799693" cy="0"/>
             </a:xfrm>
             <a:custGeom>
@@ -2701,7 +2701,7 @@
           </p:nvSpPr>
           <p:spPr>
             <a:xfrm>
-              <a:off x="817517" y="3809853"/>
+              <a:off x="817517" y="3898322"/>
               <a:ext cx="7799693" cy="0"/>
             </a:xfrm>
             <a:custGeom>
@@ -2744,7 +2744,7 @@
           </p:nvSpPr>
           <p:spPr>
             <a:xfrm>
-              <a:off x="817517" y="2940175"/>
+              <a:off x="817517" y="3068859"/>
               <a:ext cx="7799693" cy="0"/>
             </a:xfrm>
             <a:custGeom>
@@ -2787,7 +2787,7 @@
           </p:nvSpPr>
           <p:spPr>
             <a:xfrm>
-              <a:off x="817517" y="2070498"/>
+              <a:off x="817517" y="2239395"/>
               <a:ext cx="7799693" cy="0"/>
             </a:xfrm>
             <a:custGeom>
@@ -2830,15 +2830,15 @@
           </p:nvSpPr>
           <p:spPr>
             <a:xfrm>
-              <a:off x="2501542" y="1896563"/>
-              <a:ext cx="0" cy="3826579"/>
+              <a:off x="2501542" y="2073503"/>
+              <a:ext cx="0" cy="3649639"/>
             </a:xfrm>
             <a:custGeom>
               <a:avLst/>
               <a:pathLst>
-                <a:path w="0" h="3826579">
+                <a:path w="0" h="3649639">
                   <a:moveTo>
-                    <a:pt x="0" y="3826579"/>
+                    <a:pt x="0" y="3649639"/>
                   </a:moveTo>
                   <a:lnTo>
                     <a:pt x="0" y="0"/>
@@ -2873,15 +2873,15 @@
           </p:nvSpPr>
           <p:spPr>
             <a:xfrm>
-              <a:off x="4274200" y="1896563"/>
-              <a:ext cx="0" cy="3826579"/>
+              <a:off x="4274200" y="2073503"/>
+              <a:ext cx="0" cy="3649639"/>
             </a:xfrm>
             <a:custGeom>
               <a:avLst/>
               <a:pathLst>
-                <a:path w="0" h="3826579">
+                <a:path w="0" h="3649639">
                   <a:moveTo>
-                    <a:pt x="0" y="3826579"/>
+                    <a:pt x="0" y="3649639"/>
                   </a:moveTo>
                   <a:lnTo>
                     <a:pt x="0" y="0"/>
@@ -2916,15 +2916,15 @@
           </p:nvSpPr>
           <p:spPr>
             <a:xfrm>
-              <a:off x="6046857" y="1896563"/>
-              <a:ext cx="0" cy="3826579"/>
+              <a:off x="6046857" y="2073503"/>
+              <a:ext cx="0" cy="3649639"/>
             </a:xfrm>
             <a:custGeom>
               <a:avLst/>
               <a:pathLst>
-                <a:path w="0" h="3826579">
+                <a:path w="0" h="3649639">
                   <a:moveTo>
-                    <a:pt x="0" y="3826579"/>
+                    <a:pt x="0" y="3649639"/>
                   </a:moveTo>
                   <a:lnTo>
                     <a:pt x="0" y="0"/>
@@ -2959,15 +2959,15 @@
           </p:nvSpPr>
           <p:spPr>
             <a:xfrm>
-              <a:off x="7819515" y="1896563"/>
-              <a:ext cx="0" cy="3826579"/>
+              <a:off x="7819515" y="2073503"/>
+              <a:ext cx="0" cy="3649639"/>
             </a:xfrm>
             <a:custGeom>
               <a:avLst/>
               <a:pathLst>
-                <a:path w="0" h="3826579">
+                <a:path w="0" h="3649639">
                   <a:moveTo>
-                    <a:pt x="0" y="3826579"/>
+                    <a:pt x="0" y="3649639"/>
                   </a:moveTo>
                   <a:lnTo>
                     <a:pt x="0" y="0"/>
@@ -3002,531 +3002,531 @@
           </p:nvSpPr>
           <p:spPr>
             <a:xfrm>
-              <a:off x="817517" y="1896563"/>
-              <a:ext cx="7370972" cy="3612551"/>
+              <a:off x="817517" y="2073503"/>
+              <a:ext cx="7370972" cy="3445508"/>
             </a:xfrm>
             <a:custGeom>
               <a:avLst/>
               <a:pathLst>
-                <a:path w="7370972" h="3612551">
+                <a:path w="7370972" h="3445508">
                   <a:moveTo>
                     <a:pt x="1528089" y="0"/>
                   </a:moveTo>
                   <a:lnTo>
-                    <a:pt x="1548419" y="58152"/>
-                  </a:lnTo>
-                  <a:lnTo>
-                    <a:pt x="1626053" y="267297"/>
-                  </a:lnTo>
-                  <a:lnTo>
-                    <a:pt x="1703687" y="464273"/>
-                  </a:lnTo>
-                  <a:lnTo>
-                    <a:pt x="1781321" y="649788"/>
-                  </a:lnTo>
-                  <a:lnTo>
-                    <a:pt x="1858955" y="824509"/>
-                  </a:lnTo>
-                  <a:lnTo>
-                    <a:pt x="1936589" y="989064"/>
-                  </a:lnTo>
-                  <a:lnTo>
-                    <a:pt x="2014223" y="1144044"/>
-                  </a:lnTo>
-                  <a:lnTo>
-                    <a:pt x="2091857" y="1290006"/>
-                  </a:lnTo>
-                  <a:lnTo>
-                    <a:pt x="2169491" y="1427476"/>
-                  </a:lnTo>
-                  <a:lnTo>
-                    <a:pt x="2247125" y="1556947"/>
-                  </a:lnTo>
-                  <a:lnTo>
-                    <a:pt x="2324759" y="1678885"/>
-                  </a:lnTo>
-                  <a:lnTo>
-                    <a:pt x="2402393" y="1793728"/>
-                  </a:lnTo>
-                  <a:lnTo>
-                    <a:pt x="2480027" y="1901889"/>
-                  </a:lnTo>
-                  <a:lnTo>
-                    <a:pt x="2557661" y="2003756"/>
-                  </a:lnTo>
-                  <a:lnTo>
-                    <a:pt x="2635295" y="2099697"/>
-                  </a:lnTo>
-                  <a:lnTo>
-                    <a:pt x="2712930" y="2190055"/>
-                  </a:lnTo>
-                  <a:lnTo>
-                    <a:pt x="2790564" y="2275155"/>
-                  </a:lnTo>
-                  <a:lnTo>
-                    <a:pt x="2868198" y="2355304"/>
-                  </a:lnTo>
-                  <a:lnTo>
-                    <a:pt x="2945832" y="2430790"/>
-                  </a:lnTo>
-                  <a:lnTo>
-                    <a:pt x="3023466" y="2501883"/>
-                  </a:lnTo>
-                  <a:lnTo>
-                    <a:pt x="3101100" y="2568840"/>
-                  </a:lnTo>
-                  <a:lnTo>
-                    <a:pt x="3178734" y="2631901"/>
-                  </a:lnTo>
-                  <a:lnTo>
-                    <a:pt x="3256368" y="2691293"/>
-                  </a:lnTo>
-                  <a:lnTo>
-                    <a:pt x="3334002" y="2747229"/>
-                  </a:lnTo>
-                  <a:lnTo>
-                    <a:pt x="3411636" y="2779927"/>
-                  </a:lnTo>
-                  <a:lnTo>
-                    <a:pt x="3489270" y="2770602"/>
-                  </a:lnTo>
-                  <a:lnTo>
-                    <a:pt x="3566904" y="2761177"/>
-                  </a:lnTo>
-                  <a:lnTo>
-                    <a:pt x="3644538" y="2751651"/>
-                  </a:lnTo>
-                  <a:lnTo>
-                    <a:pt x="3722172" y="2742024"/>
-                  </a:lnTo>
-                  <a:lnTo>
-                    <a:pt x="3799806" y="2732293"/>
-                  </a:lnTo>
-                  <a:lnTo>
-                    <a:pt x="3877440" y="2722459"/>
-                  </a:lnTo>
-                  <a:lnTo>
-                    <a:pt x="3955074" y="2712520"/>
-                  </a:lnTo>
-                  <a:lnTo>
-                    <a:pt x="4032708" y="2702474"/>
-                  </a:lnTo>
-                  <a:lnTo>
-                    <a:pt x="4110342" y="2692321"/>
-                  </a:lnTo>
-                  <a:lnTo>
-                    <a:pt x="4187976" y="2682060"/>
-                  </a:lnTo>
-                  <a:lnTo>
-                    <a:pt x="4265610" y="2671689"/>
-                  </a:lnTo>
-                  <a:lnTo>
-                    <a:pt x="4343244" y="2661207"/>
-                  </a:lnTo>
-                  <a:lnTo>
-                    <a:pt x="4420879" y="2650613"/>
-                  </a:lnTo>
-                  <a:lnTo>
-                    <a:pt x="4498513" y="2639906"/>
-                  </a:lnTo>
-                  <a:lnTo>
-                    <a:pt x="4576147" y="2629084"/>
-                  </a:lnTo>
-                  <a:lnTo>
-                    <a:pt x="4653781" y="2618147"/>
-                  </a:lnTo>
-                  <a:lnTo>
-                    <a:pt x="4731415" y="2607093"/>
-                  </a:lnTo>
-                  <a:lnTo>
-                    <a:pt x="4809049" y="2595921"/>
-                  </a:lnTo>
-                  <a:lnTo>
-                    <a:pt x="4886683" y="2584629"/>
-                  </a:lnTo>
-                  <a:lnTo>
-                    <a:pt x="4964317" y="2573217"/>
-                  </a:lnTo>
-                  <a:lnTo>
-                    <a:pt x="5041951" y="2561683"/>
-                  </a:lnTo>
-                  <a:lnTo>
-                    <a:pt x="5119585" y="2550026"/>
-                  </a:lnTo>
-                  <a:lnTo>
-                    <a:pt x="5197219" y="2538244"/>
-                  </a:lnTo>
-                  <a:lnTo>
-                    <a:pt x="5274853" y="2526336"/>
-                  </a:lnTo>
-                  <a:lnTo>
-                    <a:pt x="5352487" y="2514301"/>
-                  </a:lnTo>
-                  <a:lnTo>
-                    <a:pt x="5430121" y="2502138"/>
-                  </a:lnTo>
-                  <a:lnTo>
-                    <a:pt x="5507755" y="2489844"/>
-                  </a:lnTo>
-                  <a:lnTo>
-                    <a:pt x="5585389" y="2477419"/>
-                  </a:lnTo>
-                  <a:lnTo>
-                    <a:pt x="5663023" y="2464861"/>
-                  </a:lnTo>
-                  <a:lnTo>
-                    <a:pt x="5740657" y="2452169"/>
-                  </a:lnTo>
-                  <a:lnTo>
-                    <a:pt x="5818291" y="2439342"/>
-                  </a:lnTo>
-                  <a:lnTo>
-                    <a:pt x="5895925" y="2426377"/>
-                  </a:lnTo>
-                  <a:lnTo>
-                    <a:pt x="5973559" y="2413274"/>
-                  </a:lnTo>
-                  <a:lnTo>
-                    <a:pt x="6051193" y="2400031"/>
-                  </a:lnTo>
-                  <a:lnTo>
-                    <a:pt x="6128827" y="2386646"/>
-                  </a:lnTo>
-                  <a:lnTo>
-                    <a:pt x="6206462" y="2373119"/>
-                  </a:lnTo>
-                  <a:lnTo>
-                    <a:pt x="6284096" y="2359446"/>
-                  </a:lnTo>
-                  <a:lnTo>
-                    <a:pt x="6361730" y="2345628"/>
-                  </a:lnTo>
-                  <a:lnTo>
-                    <a:pt x="6439364" y="2331662"/>
-                  </a:lnTo>
-                  <a:lnTo>
-                    <a:pt x="6516998" y="2317547"/>
-                  </a:lnTo>
-                  <a:lnTo>
-                    <a:pt x="6594632" y="2303281"/>
-                  </a:lnTo>
-                  <a:lnTo>
-                    <a:pt x="6672266" y="2288862"/>
-                  </a:lnTo>
-                  <a:lnTo>
-                    <a:pt x="6749900" y="2274290"/>
-                  </a:lnTo>
-                  <a:lnTo>
-                    <a:pt x="6827534" y="2259562"/>
-                  </a:lnTo>
-                  <a:lnTo>
-                    <a:pt x="6905168" y="2244676"/>
-                  </a:lnTo>
-                  <a:lnTo>
-                    <a:pt x="6982802" y="2229631"/>
-                  </a:lnTo>
-                  <a:lnTo>
-                    <a:pt x="7060436" y="2214426"/>
-                  </a:lnTo>
-                  <a:lnTo>
-                    <a:pt x="7138070" y="2199058"/>
-                  </a:lnTo>
-                  <a:lnTo>
-                    <a:pt x="7215704" y="2183526"/>
-                  </a:lnTo>
-                  <a:lnTo>
-                    <a:pt x="7293338" y="2167828"/>
-                  </a:lnTo>
-                  <a:lnTo>
-                    <a:pt x="7370972" y="2151962"/>
-                  </a:lnTo>
-                  <a:lnTo>
-                    <a:pt x="7370972" y="3612551"/>
-                  </a:lnTo>
-                  <a:lnTo>
-                    <a:pt x="7293338" y="3610074"/>
-                  </a:lnTo>
-                  <a:lnTo>
-                    <a:pt x="7215704" y="3607444"/>
-                  </a:lnTo>
-                  <a:lnTo>
-                    <a:pt x="7138070" y="3604652"/>
-                  </a:lnTo>
-                  <a:lnTo>
-                    <a:pt x="7060436" y="3601687"/>
-                  </a:lnTo>
-                  <a:lnTo>
-                    <a:pt x="6982802" y="3598539"/>
-                  </a:lnTo>
-                  <a:lnTo>
-                    <a:pt x="6905168" y="3595196"/>
-                  </a:lnTo>
-                  <a:lnTo>
-                    <a:pt x="6827534" y="3591647"/>
-                  </a:lnTo>
-                  <a:lnTo>
-                    <a:pt x="6749900" y="3587879"/>
-                  </a:lnTo>
-                  <a:lnTo>
-                    <a:pt x="6672266" y="3583878"/>
-                  </a:lnTo>
-                  <a:lnTo>
-                    <a:pt x="6594632" y="3579630"/>
-                  </a:lnTo>
-                  <a:lnTo>
-                    <a:pt x="6516998" y="3575119"/>
-                  </a:lnTo>
-                  <a:lnTo>
-                    <a:pt x="6439364" y="3570329"/>
-                  </a:lnTo>
-                  <a:lnTo>
-                    <a:pt x="6361730" y="3565244"/>
-                  </a:lnTo>
-                  <a:lnTo>
-                    <a:pt x="6284096" y="3559845"/>
-                  </a:lnTo>
-                  <a:lnTo>
-                    <a:pt x="6206462" y="3554112"/>
-                  </a:lnTo>
-                  <a:lnTo>
-                    <a:pt x="6128827" y="3548024"/>
-                  </a:lnTo>
-                  <a:lnTo>
-                    <a:pt x="6051193" y="3541561"/>
-                  </a:lnTo>
-                  <a:lnTo>
-                    <a:pt x="5973559" y="3534698"/>
-                  </a:lnTo>
-                  <a:lnTo>
-                    <a:pt x="5895925" y="3527412"/>
-                  </a:lnTo>
-                  <a:lnTo>
-                    <a:pt x="5818291" y="3519675"/>
-                  </a:lnTo>
-                  <a:lnTo>
-                    <a:pt x="5740657" y="3511460"/>
-                  </a:lnTo>
-                  <a:lnTo>
-                    <a:pt x="5663023" y="3502738"/>
-                  </a:lnTo>
-                  <a:lnTo>
-                    <a:pt x="5585389" y="3493477"/>
-                  </a:lnTo>
-                  <a:lnTo>
-                    <a:pt x="5507755" y="3483644"/>
-                  </a:lnTo>
-                  <a:lnTo>
-                    <a:pt x="5430121" y="3473203"/>
-                  </a:lnTo>
-                  <a:lnTo>
-                    <a:pt x="5352487" y="3462117"/>
-                  </a:lnTo>
-                  <a:lnTo>
-                    <a:pt x="5274853" y="3450347"/>
-                  </a:lnTo>
-                  <a:lnTo>
-                    <a:pt x="5197219" y="3437849"/>
-                  </a:lnTo>
-                  <a:lnTo>
-                    <a:pt x="5119585" y="3424579"/>
-                  </a:lnTo>
-                  <a:lnTo>
-                    <a:pt x="5041951" y="3410489"/>
-                  </a:lnTo>
-                  <a:lnTo>
-                    <a:pt x="4964317" y="3395529"/>
-                  </a:lnTo>
-                  <a:lnTo>
-                    <a:pt x="4886683" y="3379645"/>
-                  </a:lnTo>
-                  <a:lnTo>
-                    <a:pt x="4809049" y="3362779"/>
-                  </a:lnTo>
-                  <a:lnTo>
-                    <a:pt x="4731415" y="3344871"/>
-                  </a:lnTo>
-                  <a:lnTo>
-                    <a:pt x="4653781" y="3325857"/>
-                  </a:lnTo>
-                  <a:lnTo>
-                    <a:pt x="4576147" y="3305669"/>
-                  </a:lnTo>
-                  <a:lnTo>
-                    <a:pt x="4498513" y="3284233"/>
-                  </a:lnTo>
-                  <a:lnTo>
-                    <a:pt x="4420879" y="3261472"/>
-                  </a:lnTo>
-                  <a:lnTo>
-                    <a:pt x="4343244" y="3237306"/>
-                  </a:lnTo>
-                  <a:lnTo>
-                    <a:pt x="4265610" y="3211647"/>
-                  </a:lnTo>
-                  <a:lnTo>
-                    <a:pt x="4187976" y="3184402"/>
-                  </a:lnTo>
-                  <a:lnTo>
-                    <a:pt x="4110342" y="3155475"/>
-                  </a:lnTo>
-                  <a:lnTo>
-                    <a:pt x="4032708" y="3124760"/>
-                  </a:lnTo>
-                  <a:lnTo>
-                    <a:pt x="3955074" y="3092147"/>
-                  </a:lnTo>
-                  <a:lnTo>
-                    <a:pt x="3877440" y="3057520"/>
-                  </a:lnTo>
-                  <a:lnTo>
-                    <a:pt x="3799806" y="3020754"/>
-                  </a:lnTo>
-                  <a:lnTo>
-                    <a:pt x="3722172" y="2981716"/>
-                  </a:lnTo>
-                  <a:lnTo>
-                    <a:pt x="3644538" y="2940266"/>
-                  </a:lnTo>
-                  <a:lnTo>
-                    <a:pt x="3566904" y="2896256"/>
-                  </a:lnTo>
-                  <a:lnTo>
-                    <a:pt x="3489270" y="2849527"/>
-                  </a:lnTo>
-                  <a:lnTo>
-                    <a:pt x="3411636" y="2799910"/>
-                  </a:lnTo>
-                  <a:lnTo>
-                    <a:pt x="3334002" y="2789154"/>
-                  </a:lnTo>
-                  <a:lnTo>
-                    <a:pt x="3256368" y="2798283"/>
-                  </a:lnTo>
-                  <a:lnTo>
-                    <a:pt x="3178734" y="2807316"/>
-                  </a:lnTo>
-                  <a:lnTo>
-                    <a:pt x="3101100" y="2816253"/>
-                  </a:lnTo>
-                  <a:lnTo>
-                    <a:pt x="3023466" y="2825095"/>
-                  </a:lnTo>
-                  <a:lnTo>
-                    <a:pt x="2945832" y="2833845"/>
-                  </a:lnTo>
-                  <a:lnTo>
-                    <a:pt x="2868198" y="2842501"/>
-                  </a:lnTo>
-                  <a:lnTo>
-                    <a:pt x="2790564" y="2851066"/>
-                  </a:lnTo>
-                  <a:lnTo>
-                    <a:pt x="2712930" y="2859541"/>
-                  </a:lnTo>
-                  <a:lnTo>
-                    <a:pt x="2635295" y="2867926"/>
-                  </a:lnTo>
-                  <a:lnTo>
-                    <a:pt x="2557661" y="2876222"/>
-                  </a:lnTo>
-                  <a:lnTo>
-                    <a:pt x="2480027" y="2884431"/>
-                  </a:lnTo>
-                  <a:lnTo>
-                    <a:pt x="2402393" y="2892553"/>
-                  </a:lnTo>
-                  <a:lnTo>
-                    <a:pt x="2324759" y="2900589"/>
-                  </a:lnTo>
-                  <a:lnTo>
-                    <a:pt x="2247125" y="2908540"/>
-                  </a:lnTo>
-                  <a:lnTo>
-                    <a:pt x="2169491" y="2916407"/>
-                  </a:lnTo>
-                  <a:lnTo>
-                    <a:pt x="2091857" y="2924191"/>
-                  </a:lnTo>
-                  <a:lnTo>
-                    <a:pt x="2014223" y="2931892"/>
-                  </a:lnTo>
-                  <a:lnTo>
-                    <a:pt x="1936589" y="2939512"/>
-                  </a:lnTo>
-                  <a:lnTo>
-                    <a:pt x="1858955" y="2947052"/>
-                  </a:lnTo>
-                  <a:lnTo>
-                    <a:pt x="1781321" y="2954512"/>
-                  </a:lnTo>
-                  <a:lnTo>
-                    <a:pt x="1703687" y="2961893"/>
-                  </a:lnTo>
-                  <a:lnTo>
-                    <a:pt x="1626053" y="2969195"/>
-                  </a:lnTo>
-                  <a:lnTo>
-                    <a:pt x="1548419" y="2976421"/>
-                  </a:lnTo>
-                  <a:lnTo>
-                    <a:pt x="1470785" y="2983571"/>
-                  </a:lnTo>
-                  <a:lnTo>
-                    <a:pt x="1393151" y="2990644"/>
-                  </a:lnTo>
-                  <a:lnTo>
-                    <a:pt x="1315517" y="2997643"/>
-                  </a:lnTo>
-                  <a:lnTo>
-                    <a:pt x="1237883" y="3004568"/>
-                  </a:lnTo>
-                  <a:lnTo>
-                    <a:pt x="1160249" y="3011420"/>
-                  </a:lnTo>
-                  <a:lnTo>
-                    <a:pt x="1082615" y="3018199"/>
-                  </a:lnTo>
-                  <a:lnTo>
-                    <a:pt x="1004981" y="3024907"/>
-                  </a:lnTo>
-                  <a:lnTo>
-                    <a:pt x="927346" y="3031543"/>
-                  </a:lnTo>
-                  <a:lnTo>
-                    <a:pt x="849712" y="3038110"/>
-                  </a:lnTo>
-                  <a:lnTo>
-                    <a:pt x="772078" y="3044607"/>
-                  </a:lnTo>
-                  <a:lnTo>
-                    <a:pt x="694444" y="3051035"/>
-                  </a:lnTo>
-                  <a:lnTo>
-                    <a:pt x="616810" y="3057396"/>
-                  </a:lnTo>
-                  <a:lnTo>
-                    <a:pt x="539176" y="3063689"/>
-                  </a:lnTo>
-                  <a:lnTo>
-                    <a:pt x="461542" y="3069916"/>
-                  </a:lnTo>
-                  <a:lnTo>
-                    <a:pt x="383908" y="3076077"/>
-                  </a:lnTo>
-                  <a:lnTo>
-                    <a:pt x="306274" y="3082172"/>
-                  </a:lnTo>
-                  <a:lnTo>
-                    <a:pt x="228640" y="3088204"/>
-                  </a:lnTo>
-                  <a:lnTo>
-                    <a:pt x="151006" y="3094171"/>
-                  </a:lnTo>
-                  <a:lnTo>
-                    <a:pt x="73372" y="3100075"/>
-                  </a:lnTo>
-                  <a:lnTo>
-                    <a:pt x="0" y="3105597"/>
+                    <a:pt x="1548419" y="55463"/>
+                  </a:lnTo>
+                  <a:lnTo>
+                    <a:pt x="1626053" y="254937"/>
+                  </a:lnTo>
+                  <a:lnTo>
+                    <a:pt x="1703687" y="442805"/>
+                  </a:lnTo>
+                  <a:lnTo>
+                    <a:pt x="1781321" y="619742"/>
+                  </a:lnTo>
+                  <a:lnTo>
+                    <a:pt x="1858955" y="786384"/>
+                  </a:lnTo>
+                  <a:lnTo>
+                    <a:pt x="1936589" y="943330"/>
+                  </a:lnTo>
+                  <a:lnTo>
+                    <a:pt x="2014223" y="1091144"/>
+                  </a:lnTo>
+                  <a:lnTo>
+                    <a:pt x="2091857" y="1230357"/>
+                  </a:lnTo>
+                  <a:lnTo>
+                    <a:pt x="2169491" y="1361470"/>
+                  </a:lnTo>
+                  <a:lnTo>
+                    <a:pt x="2247125" y="1484955"/>
+                  </a:lnTo>
+                  <a:lnTo>
+                    <a:pt x="2324759" y="1601254"/>
+                  </a:lnTo>
+                  <a:lnTo>
+                    <a:pt x="2402393" y="1710787"/>
+                  </a:lnTo>
+                  <a:lnTo>
+                    <a:pt x="2480027" y="1813946"/>
+                  </a:lnTo>
+                  <a:lnTo>
+                    <a:pt x="2557661" y="1911103"/>
+                  </a:lnTo>
+                  <a:lnTo>
+                    <a:pt x="2635295" y="2002607"/>
+                  </a:lnTo>
+                  <a:lnTo>
+                    <a:pt x="2712930" y="2088787"/>
+                  </a:lnTo>
+                  <a:lnTo>
+                    <a:pt x="2790564" y="2169953"/>
+                  </a:lnTo>
+                  <a:lnTo>
+                    <a:pt x="2868198" y="2246396"/>
+                  </a:lnTo>
+                  <a:lnTo>
+                    <a:pt x="2945832" y="2318391"/>
+                  </a:lnTo>
+                  <a:lnTo>
+                    <a:pt x="3023466" y="2386197"/>
+                  </a:lnTo>
+                  <a:lnTo>
+                    <a:pt x="3101100" y="2450058"/>
+                  </a:lnTo>
+                  <a:lnTo>
+                    <a:pt x="3178734" y="2510203"/>
+                  </a:lnTo>
+                  <a:lnTo>
+                    <a:pt x="3256368" y="2566848"/>
+                  </a:lnTo>
+                  <a:lnTo>
+                    <a:pt x="3334002" y="2620198"/>
+                  </a:lnTo>
+                  <a:lnTo>
+                    <a:pt x="3411636" y="2651384"/>
+                  </a:lnTo>
+                  <a:lnTo>
+                    <a:pt x="3489270" y="2642490"/>
+                  </a:lnTo>
+                  <a:lnTo>
+                    <a:pt x="3566904" y="2633501"/>
+                  </a:lnTo>
+                  <a:lnTo>
+                    <a:pt x="3644538" y="2624416"/>
+                  </a:lnTo>
+                  <a:lnTo>
+                    <a:pt x="3722172" y="2615233"/>
+                  </a:lnTo>
+                  <a:lnTo>
+                    <a:pt x="3799806" y="2605953"/>
+                  </a:lnTo>
+                  <a:lnTo>
+                    <a:pt x="3877440" y="2596573"/>
+                  </a:lnTo>
+                  <a:lnTo>
+                    <a:pt x="3955074" y="2587094"/>
+                  </a:lnTo>
+                  <a:lnTo>
+                    <a:pt x="4032708" y="2577513"/>
+                  </a:lnTo>
+                  <a:lnTo>
+                    <a:pt x="4110342" y="2567829"/>
+                  </a:lnTo>
+                  <a:lnTo>
+                    <a:pt x="4187976" y="2558042"/>
+                  </a:lnTo>
+                  <a:lnTo>
+                    <a:pt x="4265610" y="2548151"/>
+                  </a:lnTo>
+                  <a:lnTo>
+                    <a:pt x="4343244" y="2538153"/>
+                  </a:lnTo>
+                  <a:lnTo>
+                    <a:pt x="4420879" y="2528049"/>
+                  </a:lnTo>
+                  <a:lnTo>
+                    <a:pt x="4498513" y="2517837"/>
+                  </a:lnTo>
+                  <a:lnTo>
+                    <a:pt x="4576147" y="2507516"/>
+                  </a:lnTo>
+                  <a:lnTo>
+                    <a:pt x="4653781" y="2497085"/>
+                  </a:lnTo>
+                  <a:lnTo>
+                    <a:pt x="4731415" y="2486542"/>
+                  </a:lnTo>
+                  <a:lnTo>
+                    <a:pt x="4809049" y="2475886"/>
+                  </a:lnTo>
+                  <a:lnTo>
+                    <a:pt x="4886683" y="2465117"/>
+                  </a:lnTo>
+                  <a:lnTo>
+                    <a:pt x="4964317" y="2454233"/>
+                  </a:lnTo>
+                  <a:lnTo>
+                    <a:pt x="5041951" y="2443232"/>
+                  </a:lnTo>
+                  <a:lnTo>
+                    <a:pt x="5119585" y="2432114"/>
+                  </a:lnTo>
+                  <a:lnTo>
+                    <a:pt x="5197219" y="2420876"/>
+                  </a:lnTo>
+                  <a:lnTo>
+                    <a:pt x="5274853" y="2409519"/>
+                  </a:lnTo>
+                  <a:lnTo>
+                    <a:pt x="5352487" y="2398041"/>
+                  </a:lnTo>
+                  <a:lnTo>
+                    <a:pt x="5430121" y="2386440"/>
+                  </a:lnTo>
+                  <a:lnTo>
+                    <a:pt x="5507755" y="2374714"/>
+                  </a:lnTo>
+                  <a:lnTo>
+                    <a:pt x="5585389" y="2362864"/>
+                  </a:lnTo>
+                  <a:lnTo>
+                    <a:pt x="5663023" y="2350887"/>
+                  </a:lnTo>
+                  <a:lnTo>
+                    <a:pt x="5740657" y="2338782"/>
+                  </a:lnTo>
+                  <a:lnTo>
+                    <a:pt x="5818291" y="2326547"/>
+                  </a:lnTo>
+                  <a:lnTo>
+                    <a:pt x="5895925" y="2314182"/>
+                  </a:lnTo>
+                  <a:lnTo>
+                    <a:pt x="5973559" y="2301685"/>
+                  </a:lnTo>
+                  <a:lnTo>
+                    <a:pt x="6051193" y="2289054"/>
+                  </a:lnTo>
+                  <a:lnTo>
+                    <a:pt x="6128827" y="2276289"/>
+                  </a:lnTo>
+                  <a:lnTo>
+                    <a:pt x="6206462" y="2263386"/>
+                  </a:lnTo>
+                  <a:lnTo>
+                    <a:pt x="6284096" y="2250346"/>
+                  </a:lnTo>
+                  <a:lnTo>
+                    <a:pt x="6361730" y="2237167"/>
+                  </a:lnTo>
+                  <a:lnTo>
+                    <a:pt x="6439364" y="2223847"/>
+                  </a:lnTo>
+                  <a:lnTo>
+                    <a:pt x="6516998" y="2210384"/>
+                  </a:lnTo>
+                  <a:lnTo>
+                    <a:pt x="6594632" y="2196778"/>
+                  </a:lnTo>
+                  <a:lnTo>
+                    <a:pt x="6672266" y="2183026"/>
+                  </a:lnTo>
+                  <a:lnTo>
+                    <a:pt x="6749900" y="2169127"/>
+                  </a:lnTo>
+                  <a:lnTo>
+                    <a:pt x="6827534" y="2155080"/>
+                  </a:lnTo>
+                  <a:lnTo>
+                    <a:pt x="6905168" y="2140883"/>
+                  </a:lnTo>
+                  <a:lnTo>
+                    <a:pt x="6982802" y="2126534"/>
+                  </a:lnTo>
+                  <a:lnTo>
+                    <a:pt x="7060436" y="2112032"/>
+                  </a:lnTo>
+                  <a:lnTo>
+                    <a:pt x="7138070" y="2097374"/>
+                  </a:lnTo>
+                  <a:lnTo>
+                    <a:pt x="7215704" y="2082560"/>
+                  </a:lnTo>
+                  <a:lnTo>
+                    <a:pt x="7293338" y="2067588"/>
+                  </a:lnTo>
+                  <a:lnTo>
+                    <a:pt x="7370972" y="2052456"/>
+                  </a:lnTo>
+                  <a:lnTo>
+                    <a:pt x="7370972" y="3445508"/>
+                  </a:lnTo>
+                  <a:lnTo>
+                    <a:pt x="7293338" y="3443146"/>
+                  </a:lnTo>
+                  <a:lnTo>
+                    <a:pt x="7215704" y="3440637"/>
+                  </a:lnTo>
+                  <a:lnTo>
+                    <a:pt x="7138070" y="3437974"/>
+                  </a:lnTo>
+                  <a:lnTo>
+                    <a:pt x="7060436" y="3435146"/>
+                  </a:lnTo>
+                  <a:lnTo>
+                    <a:pt x="6982802" y="3432144"/>
+                  </a:lnTo>
+                  <a:lnTo>
+                    <a:pt x="6905168" y="3428956"/>
+                  </a:lnTo>
+                  <a:lnTo>
+                    <a:pt x="6827534" y="3425571"/>
+                  </a:lnTo>
+                  <a:lnTo>
+                    <a:pt x="6749900" y="3421977"/>
+                  </a:lnTo>
+                  <a:lnTo>
+                    <a:pt x="6672266" y="3418161"/>
+                  </a:lnTo>
+                  <a:lnTo>
+                    <a:pt x="6594632" y="3414109"/>
+                  </a:lnTo>
+                  <a:lnTo>
+                    <a:pt x="6516998" y="3409807"/>
+                  </a:lnTo>
+                  <a:lnTo>
+                    <a:pt x="6439364" y="3405239"/>
+                  </a:lnTo>
+                  <a:lnTo>
+                    <a:pt x="6361730" y="3400388"/>
+                  </a:lnTo>
+                  <a:lnTo>
+                    <a:pt x="6284096" y="3395239"/>
+                  </a:lnTo>
+                  <a:lnTo>
+                    <a:pt x="6206462" y="3389771"/>
+                  </a:lnTo>
+                  <a:lnTo>
+                    <a:pt x="6128827" y="3383965"/>
+                  </a:lnTo>
+                  <a:lnTo>
+                    <a:pt x="6051193" y="3377800"/>
+                  </a:lnTo>
+                  <a:lnTo>
+                    <a:pt x="5973559" y="3371255"/>
+                  </a:lnTo>
+                  <a:lnTo>
+                    <a:pt x="5895925" y="3364306"/>
+                  </a:lnTo>
+                  <a:lnTo>
+                    <a:pt x="5818291" y="3356927"/>
+                  </a:lnTo>
+                  <a:lnTo>
+                    <a:pt x="5740657" y="3349092"/>
+                  </a:lnTo>
+                  <a:lnTo>
+                    <a:pt x="5663023" y="3340773"/>
+                  </a:lnTo>
+                  <a:lnTo>
+                    <a:pt x="5585389" y="3331940"/>
+                  </a:lnTo>
+                  <a:lnTo>
+                    <a:pt x="5507755" y="3322561"/>
+                  </a:lnTo>
+                  <a:lnTo>
+                    <a:pt x="5430121" y="3312603"/>
+                  </a:lnTo>
+                  <a:lnTo>
+                    <a:pt x="5352487" y="3302030"/>
+                  </a:lnTo>
+                  <a:lnTo>
+                    <a:pt x="5274853" y="3290804"/>
+                  </a:lnTo>
+                  <a:lnTo>
+                    <a:pt x="5197219" y="3278884"/>
+                  </a:lnTo>
+                  <a:lnTo>
+                    <a:pt x="5119585" y="3266228"/>
+                  </a:lnTo>
+                  <a:lnTo>
+                    <a:pt x="5041951" y="3252790"/>
+                  </a:lnTo>
+                  <a:lnTo>
+                    <a:pt x="4964317" y="3238521"/>
+                  </a:lnTo>
+                  <a:lnTo>
+                    <a:pt x="4886683" y="3223371"/>
+                  </a:lnTo>
+                  <a:lnTo>
+                    <a:pt x="4809049" y="3207285"/>
+                  </a:lnTo>
+                  <a:lnTo>
+                    <a:pt x="4731415" y="3190206"/>
+                  </a:lnTo>
+                  <a:lnTo>
+                    <a:pt x="4653781" y="3172071"/>
+                  </a:lnTo>
+                  <a:lnTo>
+                    <a:pt x="4576147" y="3152816"/>
+                  </a:lnTo>
+                  <a:lnTo>
+                    <a:pt x="4498513" y="3132371"/>
+                  </a:lnTo>
+                  <a:lnTo>
+                    <a:pt x="4420879" y="3110663"/>
+                  </a:lnTo>
+                  <a:lnTo>
+                    <a:pt x="4343244" y="3087614"/>
+                  </a:lnTo>
+                  <a:lnTo>
+                    <a:pt x="4265610" y="3063141"/>
+                  </a:lnTo>
+                  <a:lnTo>
+                    <a:pt x="4187976" y="3037157"/>
+                  </a:lnTo>
+                  <a:lnTo>
+                    <a:pt x="4110342" y="3009567"/>
+                  </a:lnTo>
+                  <a:lnTo>
+                    <a:pt x="4032708" y="2980272"/>
+                  </a:lnTo>
+                  <a:lnTo>
+                    <a:pt x="3955074" y="2949167"/>
+                  </a:lnTo>
+                  <a:lnTo>
+                    <a:pt x="3877440" y="2916141"/>
+                  </a:lnTo>
+                  <a:lnTo>
+                    <a:pt x="3799806" y="2881075"/>
+                  </a:lnTo>
+                  <a:lnTo>
+                    <a:pt x="3722172" y="2843842"/>
+                  </a:lnTo>
+                  <a:lnTo>
+                    <a:pt x="3644538" y="2804309"/>
+                  </a:lnTo>
+                  <a:lnTo>
+                    <a:pt x="3566904" y="2762334"/>
+                  </a:lnTo>
+                  <a:lnTo>
+                    <a:pt x="3489270" y="2717766"/>
+                  </a:lnTo>
+                  <a:lnTo>
+                    <a:pt x="3411636" y="2670444"/>
+                  </a:lnTo>
+                  <a:lnTo>
+                    <a:pt x="3334002" y="2660184"/>
+                  </a:lnTo>
+                  <a:lnTo>
+                    <a:pt x="3256368" y="2668891"/>
+                  </a:lnTo>
+                  <a:lnTo>
+                    <a:pt x="3178734" y="2677506"/>
+                  </a:lnTo>
+                  <a:lnTo>
+                    <a:pt x="3101100" y="2686030"/>
+                  </a:lnTo>
+                  <a:lnTo>
+                    <a:pt x="3023466" y="2694464"/>
+                  </a:lnTo>
+                  <a:lnTo>
+                    <a:pt x="2945832" y="2702809"/>
+                  </a:lnTo>
+                  <a:lnTo>
+                    <a:pt x="2868198" y="2711065"/>
+                  </a:lnTo>
+                  <a:lnTo>
+                    <a:pt x="2790564" y="2719234"/>
+                  </a:lnTo>
+                  <a:lnTo>
+                    <a:pt x="2712930" y="2727317"/>
+                  </a:lnTo>
+                  <a:lnTo>
+                    <a:pt x="2635295" y="2735314"/>
+                  </a:lnTo>
+                  <a:lnTo>
+                    <a:pt x="2557661" y="2743227"/>
+                  </a:lnTo>
+                  <a:lnTo>
+                    <a:pt x="2480027" y="2751056"/>
+                  </a:lnTo>
+                  <a:lnTo>
+                    <a:pt x="2402393" y="2758802"/>
+                  </a:lnTo>
+                  <a:lnTo>
+                    <a:pt x="2324759" y="2766467"/>
+                  </a:lnTo>
+                  <a:lnTo>
+                    <a:pt x="2247125" y="2774050"/>
+                  </a:lnTo>
+                  <a:lnTo>
+                    <a:pt x="2169491" y="2781553"/>
+                  </a:lnTo>
+                  <a:lnTo>
+                    <a:pt x="2091857" y="2788977"/>
+                  </a:lnTo>
+                  <a:lnTo>
+                    <a:pt x="2014223" y="2796323"/>
+                  </a:lnTo>
+                  <a:lnTo>
+                    <a:pt x="1936589" y="2803590"/>
+                  </a:lnTo>
+                  <a:lnTo>
+                    <a:pt x="1858955" y="2810781"/>
+                  </a:lnTo>
+                  <a:lnTo>
+                    <a:pt x="1781321" y="2817896"/>
+                  </a:lnTo>
+                  <a:lnTo>
+                    <a:pt x="1703687" y="2824936"/>
+                  </a:lnTo>
+                  <a:lnTo>
+                    <a:pt x="1626053" y="2831901"/>
+                  </a:lnTo>
+                  <a:lnTo>
+                    <a:pt x="1548419" y="2838793"/>
+                  </a:lnTo>
+                  <a:lnTo>
+                    <a:pt x="1470785" y="2845611"/>
+                  </a:lnTo>
+                  <a:lnTo>
+                    <a:pt x="1393151" y="2852358"/>
+                  </a:lnTo>
+                  <a:lnTo>
+                    <a:pt x="1315517" y="2859033"/>
+                  </a:lnTo>
+                  <a:lnTo>
+                    <a:pt x="1237883" y="2865638"/>
+                  </a:lnTo>
+                  <a:lnTo>
+                    <a:pt x="1160249" y="2872173"/>
+                  </a:lnTo>
+                  <a:lnTo>
+                    <a:pt x="1082615" y="2878639"/>
+                  </a:lnTo>
+                  <a:lnTo>
+                    <a:pt x="1004981" y="2885036"/>
+                  </a:lnTo>
+                  <a:lnTo>
+                    <a:pt x="927346" y="2891366"/>
+                  </a:lnTo>
+                  <a:lnTo>
+                    <a:pt x="849712" y="2897629"/>
+                  </a:lnTo>
+                  <a:lnTo>
+                    <a:pt x="772078" y="2903826"/>
+                  </a:lnTo>
+                  <a:lnTo>
+                    <a:pt x="694444" y="2909957"/>
+                  </a:lnTo>
+                  <a:lnTo>
+                    <a:pt x="616810" y="2916023"/>
+                  </a:lnTo>
+                  <a:lnTo>
+                    <a:pt x="539176" y="2922025"/>
+                  </a:lnTo>
+                  <a:lnTo>
+                    <a:pt x="461542" y="2927964"/>
+                  </a:lnTo>
+                  <a:lnTo>
+                    <a:pt x="383908" y="2933840"/>
+                  </a:lnTo>
+                  <a:lnTo>
+                    <a:pt x="306274" y="2939654"/>
+                  </a:lnTo>
+                  <a:lnTo>
+                    <a:pt x="228640" y="2945406"/>
+                  </a:lnTo>
+                  <a:lnTo>
+                    <a:pt x="151006" y="2951098"/>
+                  </a:lnTo>
+                  <a:lnTo>
+                    <a:pt x="73372" y="2956729"/>
+                  </a:lnTo>
+                  <a:lnTo>
+                    <a:pt x="0" y="2961995"/>
                   </a:lnTo>
                   <a:close/>
                 </a:path>
@@ -3552,243 +3552,243 @@
           </p:nvSpPr>
           <p:spPr>
             <a:xfrm>
-              <a:off x="2345607" y="1896563"/>
-              <a:ext cx="5842883" cy="2779927"/>
+              <a:off x="2345607" y="2073503"/>
+              <a:ext cx="5842883" cy="2651384"/>
             </a:xfrm>
             <a:custGeom>
               <a:avLst/>
               <a:pathLst>
-                <a:path w="5842883" h="2779927">
+                <a:path w="5842883" h="2651384">
                   <a:moveTo>
                     <a:pt x="0" y="0"/>
                   </a:moveTo>
                   <a:lnTo>
-                    <a:pt x="20330" y="58152"/>
-                  </a:lnTo>
-                  <a:lnTo>
-                    <a:pt x="97964" y="267297"/>
-                  </a:lnTo>
-                  <a:lnTo>
-                    <a:pt x="175598" y="464273"/>
-                  </a:lnTo>
-                  <a:lnTo>
-                    <a:pt x="253232" y="649788"/>
-                  </a:lnTo>
-                  <a:lnTo>
-                    <a:pt x="330866" y="824509"/>
-                  </a:lnTo>
-                  <a:lnTo>
-                    <a:pt x="408500" y="989064"/>
-                  </a:lnTo>
-                  <a:lnTo>
-                    <a:pt x="486134" y="1144044"/>
-                  </a:lnTo>
-                  <a:lnTo>
-                    <a:pt x="563768" y="1290006"/>
-                  </a:lnTo>
-                  <a:lnTo>
-                    <a:pt x="641402" y="1427476"/>
-                  </a:lnTo>
-                  <a:lnTo>
-                    <a:pt x="719036" y="1556947"/>
-                  </a:lnTo>
-                  <a:lnTo>
-                    <a:pt x="796670" y="1678885"/>
-                  </a:lnTo>
-                  <a:lnTo>
-                    <a:pt x="874304" y="1793728"/>
-                  </a:lnTo>
-                  <a:lnTo>
-                    <a:pt x="951938" y="1901889"/>
-                  </a:lnTo>
-                  <a:lnTo>
-                    <a:pt x="1029572" y="2003756"/>
-                  </a:lnTo>
-                  <a:lnTo>
-                    <a:pt x="1107206" y="2099697"/>
-                  </a:lnTo>
-                  <a:lnTo>
-                    <a:pt x="1184840" y="2190055"/>
-                  </a:lnTo>
-                  <a:lnTo>
-                    <a:pt x="1262474" y="2275155"/>
-                  </a:lnTo>
-                  <a:lnTo>
-                    <a:pt x="1340108" y="2355304"/>
-                  </a:lnTo>
-                  <a:lnTo>
-                    <a:pt x="1417742" y="2430790"/>
-                  </a:lnTo>
-                  <a:lnTo>
-                    <a:pt x="1495376" y="2501883"/>
-                  </a:lnTo>
-                  <a:lnTo>
-                    <a:pt x="1573010" y="2568840"/>
-                  </a:lnTo>
-                  <a:lnTo>
-                    <a:pt x="1650644" y="2631901"/>
-                  </a:lnTo>
-                  <a:lnTo>
-                    <a:pt x="1728279" y="2691293"/>
-                  </a:lnTo>
-                  <a:lnTo>
-                    <a:pt x="1805913" y="2747229"/>
-                  </a:lnTo>
-                  <a:lnTo>
-                    <a:pt x="1883547" y="2779927"/>
-                  </a:lnTo>
-                  <a:lnTo>
-                    <a:pt x="1961181" y="2770602"/>
-                  </a:lnTo>
-                  <a:lnTo>
-                    <a:pt x="2038815" y="2761177"/>
-                  </a:lnTo>
-                  <a:lnTo>
-                    <a:pt x="2116449" y="2751651"/>
-                  </a:lnTo>
-                  <a:lnTo>
-                    <a:pt x="2194083" y="2742024"/>
-                  </a:lnTo>
-                  <a:lnTo>
-                    <a:pt x="2271717" y="2732293"/>
-                  </a:lnTo>
-                  <a:lnTo>
-                    <a:pt x="2349351" y="2722459"/>
-                  </a:lnTo>
-                  <a:lnTo>
-                    <a:pt x="2426985" y="2712520"/>
-                  </a:lnTo>
-                  <a:lnTo>
-                    <a:pt x="2504619" y="2702474"/>
-                  </a:lnTo>
-                  <a:lnTo>
-                    <a:pt x="2582253" y="2692321"/>
-                  </a:lnTo>
-                  <a:lnTo>
-                    <a:pt x="2659887" y="2682060"/>
-                  </a:lnTo>
-                  <a:lnTo>
-                    <a:pt x="2737521" y="2671689"/>
-                  </a:lnTo>
-                  <a:lnTo>
-                    <a:pt x="2815155" y="2661207"/>
-                  </a:lnTo>
-                  <a:lnTo>
-                    <a:pt x="2892789" y="2650613"/>
-                  </a:lnTo>
-                  <a:lnTo>
-                    <a:pt x="2970423" y="2639906"/>
-                  </a:lnTo>
-                  <a:lnTo>
-                    <a:pt x="3048057" y="2629084"/>
-                  </a:lnTo>
-                  <a:lnTo>
-                    <a:pt x="3125691" y="2618147"/>
-                  </a:lnTo>
-                  <a:lnTo>
-                    <a:pt x="3203325" y="2607093"/>
-                  </a:lnTo>
-                  <a:lnTo>
-                    <a:pt x="3280959" y="2595921"/>
-                  </a:lnTo>
-                  <a:lnTo>
-                    <a:pt x="3358593" y="2584629"/>
-                  </a:lnTo>
-                  <a:lnTo>
-                    <a:pt x="3436228" y="2573217"/>
-                  </a:lnTo>
-                  <a:lnTo>
-                    <a:pt x="3513862" y="2561683"/>
-                  </a:lnTo>
-                  <a:lnTo>
-                    <a:pt x="3591496" y="2550026"/>
-                  </a:lnTo>
-                  <a:lnTo>
-                    <a:pt x="3669130" y="2538244"/>
-                  </a:lnTo>
-                  <a:lnTo>
-                    <a:pt x="3746764" y="2526336"/>
-                  </a:lnTo>
-                  <a:lnTo>
-                    <a:pt x="3824398" y="2514301"/>
-                  </a:lnTo>
-                  <a:lnTo>
-                    <a:pt x="3902032" y="2502138"/>
-                  </a:lnTo>
-                  <a:lnTo>
-                    <a:pt x="3979666" y="2489844"/>
-                  </a:lnTo>
-                  <a:lnTo>
-                    <a:pt x="4057300" y="2477419"/>
-                  </a:lnTo>
-                  <a:lnTo>
-                    <a:pt x="4134934" y="2464861"/>
-                  </a:lnTo>
-                  <a:lnTo>
-                    <a:pt x="4212568" y="2452169"/>
-                  </a:lnTo>
-                  <a:lnTo>
-                    <a:pt x="4290202" y="2439342"/>
-                  </a:lnTo>
-                  <a:lnTo>
-                    <a:pt x="4367836" y="2426377"/>
-                  </a:lnTo>
-                  <a:lnTo>
-                    <a:pt x="4445470" y="2413274"/>
-                  </a:lnTo>
-                  <a:lnTo>
-                    <a:pt x="4523104" y="2400031"/>
-                  </a:lnTo>
-                  <a:lnTo>
-                    <a:pt x="4600738" y="2386646"/>
-                  </a:lnTo>
-                  <a:lnTo>
-                    <a:pt x="4678372" y="2373119"/>
-                  </a:lnTo>
-                  <a:lnTo>
-                    <a:pt x="4756006" y="2359446"/>
-                  </a:lnTo>
-                  <a:lnTo>
-                    <a:pt x="4833640" y="2345628"/>
-                  </a:lnTo>
-                  <a:lnTo>
-                    <a:pt x="4911274" y="2331662"/>
-                  </a:lnTo>
-                  <a:lnTo>
-                    <a:pt x="4988908" y="2317547"/>
-                  </a:lnTo>
-                  <a:lnTo>
-                    <a:pt x="5066542" y="2303281"/>
-                  </a:lnTo>
-                  <a:lnTo>
-                    <a:pt x="5144177" y="2288862"/>
-                  </a:lnTo>
-                  <a:lnTo>
-                    <a:pt x="5221811" y="2274290"/>
-                  </a:lnTo>
-                  <a:lnTo>
-                    <a:pt x="5299445" y="2259562"/>
-                  </a:lnTo>
-                  <a:lnTo>
-                    <a:pt x="5377079" y="2244676"/>
-                  </a:lnTo>
-                  <a:lnTo>
-                    <a:pt x="5454713" y="2229631"/>
-                  </a:lnTo>
-                  <a:lnTo>
-                    <a:pt x="5532347" y="2214426"/>
-                  </a:lnTo>
-                  <a:lnTo>
-                    <a:pt x="5609981" y="2199058"/>
-                  </a:lnTo>
-                  <a:lnTo>
-                    <a:pt x="5687615" y="2183526"/>
-                  </a:lnTo>
-                  <a:lnTo>
-                    <a:pt x="5765249" y="2167828"/>
-                  </a:lnTo>
-                  <a:lnTo>
-                    <a:pt x="5842883" y="2151962"/>
+                    <a:pt x="20330" y="55463"/>
+                  </a:lnTo>
+                  <a:lnTo>
+                    <a:pt x="97964" y="254937"/>
+                  </a:lnTo>
+                  <a:lnTo>
+                    <a:pt x="175598" y="442805"/>
+                  </a:lnTo>
+                  <a:lnTo>
+                    <a:pt x="253232" y="619742"/>
+                  </a:lnTo>
+                  <a:lnTo>
+                    <a:pt x="330866" y="786384"/>
+                  </a:lnTo>
+                  <a:lnTo>
+                    <a:pt x="408500" y="943330"/>
+                  </a:lnTo>
+                  <a:lnTo>
+                    <a:pt x="486134" y="1091144"/>
+                  </a:lnTo>
+                  <a:lnTo>
+                    <a:pt x="563768" y="1230357"/>
+                  </a:lnTo>
+                  <a:lnTo>
+                    <a:pt x="641402" y="1361470"/>
+                  </a:lnTo>
+                  <a:lnTo>
+                    <a:pt x="719036" y="1484955"/>
+                  </a:lnTo>
+                  <a:lnTo>
+                    <a:pt x="796670" y="1601254"/>
+                  </a:lnTo>
+                  <a:lnTo>
+                    <a:pt x="874304" y="1710787"/>
+                  </a:lnTo>
+                  <a:lnTo>
+                    <a:pt x="951938" y="1813946"/>
+                  </a:lnTo>
+                  <a:lnTo>
+                    <a:pt x="1029572" y="1911103"/>
+                  </a:lnTo>
+                  <a:lnTo>
+                    <a:pt x="1107206" y="2002607"/>
+                  </a:lnTo>
+                  <a:lnTo>
+                    <a:pt x="1184840" y="2088787"/>
+                  </a:lnTo>
+                  <a:lnTo>
+                    <a:pt x="1262474" y="2169953"/>
+                  </a:lnTo>
+                  <a:lnTo>
+                    <a:pt x="1340108" y="2246396"/>
+                  </a:lnTo>
+                  <a:lnTo>
+                    <a:pt x="1417742" y="2318391"/>
+                  </a:lnTo>
+                  <a:lnTo>
+                    <a:pt x="1495376" y="2386197"/>
+                  </a:lnTo>
+                  <a:lnTo>
+                    <a:pt x="1573010" y="2450058"/>
+                  </a:lnTo>
+                  <a:lnTo>
+                    <a:pt x="1650644" y="2510203"/>
+                  </a:lnTo>
+                  <a:lnTo>
+                    <a:pt x="1728279" y="2566848"/>
+                  </a:lnTo>
+                  <a:lnTo>
+                    <a:pt x="1805913" y="2620198"/>
+                  </a:lnTo>
+                  <a:lnTo>
+                    <a:pt x="1883547" y="2651384"/>
+                  </a:lnTo>
+                  <a:lnTo>
+                    <a:pt x="1961181" y="2642490"/>
+                  </a:lnTo>
+                  <a:lnTo>
+                    <a:pt x="2038815" y="2633501"/>
+                  </a:lnTo>
+                  <a:lnTo>
+                    <a:pt x="2116449" y="2624416"/>
+                  </a:lnTo>
+                  <a:lnTo>
+                    <a:pt x="2194083" y="2615233"/>
+                  </a:lnTo>
+                  <a:lnTo>
+                    <a:pt x="2271717" y="2605953"/>
+                  </a:lnTo>
+                  <a:lnTo>
+                    <a:pt x="2349351" y="2596573"/>
+                  </a:lnTo>
+                  <a:lnTo>
+                    <a:pt x="2426985" y="2587094"/>
+                  </a:lnTo>
+                  <a:lnTo>
+                    <a:pt x="2504619" y="2577513"/>
+                  </a:lnTo>
+                  <a:lnTo>
+                    <a:pt x="2582253" y="2567829"/>
+                  </a:lnTo>
+                  <a:lnTo>
+                    <a:pt x="2659887" y="2558042"/>
+                  </a:lnTo>
+                  <a:lnTo>
+                    <a:pt x="2737521" y="2548151"/>
+                  </a:lnTo>
+                  <a:lnTo>
+                    <a:pt x="2815155" y="2538153"/>
+                  </a:lnTo>
+                  <a:lnTo>
+                    <a:pt x="2892789" y="2528049"/>
+                  </a:lnTo>
+                  <a:lnTo>
+                    <a:pt x="2970423" y="2517837"/>
+                  </a:lnTo>
+                  <a:lnTo>
+                    <a:pt x="3048057" y="2507516"/>
+                  </a:lnTo>
+                  <a:lnTo>
+                    <a:pt x="3125691" y="2497085"/>
+                  </a:lnTo>
+                  <a:lnTo>
+                    <a:pt x="3203325" y="2486542"/>
+                  </a:lnTo>
+                  <a:lnTo>
+                    <a:pt x="3280959" y="2475886"/>
+                  </a:lnTo>
+                  <a:lnTo>
+                    <a:pt x="3358593" y="2465117"/>
+                  </a:lnTo>
+                  <a:lnTo>
+                    <a:pt x="3436228" y="2454233"/>
+                  </a:lnTo>
+                  <a:lnTo>
+                    <a:pt x="3513862" y="2443232"/>
+                  </a:lnTo>
+                  <a:lnTo>
+                    <a:pt x="3591496" y="2432114"/>
+                  </a:lnTo>
+                  <a:lnTo>
+                    <a:pt x="3669130" y="2420876"/>
+                  </a:lnTo>
+                  <a:lnTo>
+                    <a:pt x="3746764" y="2409519"/>
+                  </a:lnTo>
+                  <a:lnTo>
+                    <a:pt x="3824398" y="2398041"/>
+                  </a:lnTo>
+                  <a:lnTo>
+                    <a:pt x="3902032" y="2386440"/>
+                  </a:lnTo>
+                  <a:lnTo>
+                    <a:pt x="3979666" y="2374714"/>
+                  </a:lnTo>
+                  <a:lnTo>
+                    <a:pt x="4057300" y="2362864"/>
+                  </a:lnTo>
+                  <a:lnTo>
+                    <a:pt x="4134934" y="2350887"/>
+                  </a:lnTo>
+                  <a:lnTo>
+                    <a:pt x="4212568" y="2338782"/>
+                  </a:lnTo>
+                  <a:lnTo>
+                    <a:pt x="4290202" y="2326547"/>
+                  </a:lnTo>
+                  <a:lnTo>
+                    <a:pt x="4367836" y="2314182"/>
+                  </a:lnTo>
+                  <a:lnTo>
+                    <a:pt x="4445470" y="2301685"/>
+                  </a:lnTo>
+                  <a:lnTo>
+                    <a:pt x="4523104" y="2289054"/>
+                  </a:lnTo>
+                  <a:lnTo>
+                    <a:pt x="4600738" y="2276289"/>
+                  </a:lnTo>
+                  <a:lnTo>
+                    <a:pt x="4678372" y="2263386"/>
+                  </a:lnTo>
+                  <a:lnTo>
+                    <a:pt x="4756006" y="2250346"/>
+                  </a:lnTo>
+                  <a:lnTo>
+                    <a:pt x="4833640" y="2237167"/>
+                  </a:lnTo>
+                  <a:lnTo>
+                    <a:pt x="4911274" y="2223847"/>
+                  </a:lnTo>
+                  <a:lnTo>
+                    <a:pt x="4988908" y="2210384"/>
+                  </a:lnTo>
+                  <a:lnTo>
+                    <a:pt x="5066542" y="2196778"/>
+                  </a:lnTo>
+                  <a:lnTo>
+                    <a:pt x="5144177" y="2183026"/>
+                  </a:lnTo>
+                  <a:lnTo>
+                    <a:pt x="5221811" y="2169127"/>
+                  </a:lnTo>
+                  <a:lnTo>
+                    <a:pt x="5299445" y="2155080"/>
+                  </a:lnTo>
+                  <a:lnTo>
+                    <a:pt x="5377079" y="2140883"/>
+                  </a:lnTo>
+                  <a:lnTo>
+                    <a:pt x="5454713" y="2126534"/>
+                  </a:lnTo>
+                  <a:lnTo>
+                    <a:pt x="5532347" y="2112032"/>
+                  </a:lnTo>
+                  <a:lnTo>
+                    <a:pt x="5609981" y="2097374"/>
+                  </a:lnTo>
+                  <a:lnTo>
+                    <a:pt x="5687615" y="2082560"/>
+                  </a:lnTo>
+                  <a:lnTo>
+                    <a:pt x="5765249" y="2067588"/>
+                  </a:lnTo>
+                  <a:lnTo>
+                    <a:pt x="5842883" y="2052456"/>
                   </a:lnTo>
                 </a:path>
               </a:pathLst>
@@ -3808,300 +3808,300 @@
           </p:nvSpPr>
           <p:spPr>
             <a:xfrm>
-              <a:off x="817517" y="4685717"/>
-              <a:ext cx="7370972" cy="823397"/>
+              <a:off x="817517" y="4733687"/>
+              <a:ext cx="7370972" cy="785323"/>
             </a:xfrm>
             <a:custGeom>
               <a:avLst/>
               <a:pathLst>
-                <a:path w="7370972" h="823397">
+                <a:path w="7370972" h="785323">
                   <a:moveTo>
-                    <a:pt x="7370972" y="823397"/>
+                    <a:pt x="7370972" y="785323"/>
                   </a:moveTo>
                   <a:lnTo>
-                    <a:pt x="7293338" y="820920"/>
-                  </a:lnTo>
-                  <a:lnTo>
-                    <a:pt x="7215704" y="818290"/>
-                  </a:lnTo>
-                  <a:lnTo>
-                    <a:pt x="7138070" y="815498"/>
-                  </a:lnTo>
-                  <a:lnTo>
-                    <a:pt x="7060436" y="812533"/>
-                  </a:lnTo>
-                  <a:lnTo>
-                    <a:pt x="6982802" y="809385"/>
-                  </a:lnTo>
-                  <a:lnTo>
-                    <a:pt x="6905168" y="806042"/>
-                  </a:lnTo>
-                  <a:lnTo>
-                    <a:pt x="6827534" y="802493"/>
-                  </a:lnTo>
-                  <a:lnTo>
-                    <a:pt x="6749900" y="798725"/>
-                  </a:lnTo>
-                  <a:lnTo>
-                    <a:pt x="6672266" y="794724"/>
-                  </a:lnTo>
-                  <a:lnTo>
-                    <a:pt x="6594632" y="790475"/>
-                  </a:lnTo>
-                  <a:lnTo>
-                    <a:pt x="6516998" y="785965"/>
-                  </a:lnTo>
-                  <a:lnTo>
-                    <a:pt x="6439364" y="781175"/>
-                  </a:lnTo>
-                  <a:lnTo>
-                    <a:pt x="6361730" y="776090"/>
-                  </a:lnTo>
-                  <a:lnTo>
-                    <a:pt x="6284096" y="770690"/>
-                  </a:lnTo>
-                  <a:lnTo>
-                    <a:pt x="6206462" y="764957"/>
-                  </a:lnTo>
-                  <a:lnTo>
-                    <a:pt x="6128827" y="758870"/>
-                  </a:lnTo>
-                  <a:lnTo>
-                    <a:pt x="6051193" y="752407"/>
-                  </a:lnTo>
-                  <a:lnTo>
-                    <a:pt x="5973559" y="745544"/>
-                  </a:lnTo>
-                  <a:lnTo>
-                    <a:pt x="5895925" y="738258"/>
-                  </a:lnTo>
-                  <a:lnTo>
-                    <a:pt x="5818291" y="730521"/>
-                  </a:lnTo>
-                  <a:lnTo>
-                    <a:pt x="5740657" y="722306"/>
-                  </a:lnTo>
-                  <a:lnTo>
-                    <a:pt x="5663023" y="713584"/>
-                  </a:lnTo>
-                  <a:lnTo>
-                    <a:pt x="5585389" y="704323"/>
-                  </a:lnTo>
-                  <a:lnTo>
-                    <a:pt x="5507755" y="694490"/>
-                  </a:lnTo>
-                  <a:lnTo>
-                    <a:pt x="5430121" y="684049"/>
-                  </a:lnTo>
-                  <a:lnTo>
-                    <a:pt x="5352487" y="672963"/>
-                  </a:lnTo>
-                  <a:lnTo>
-                    <a:pt x="5274853" y="661192"/>
-                  </a:lnTo>
-                  <a:lnTo>
-                    <a:pt x="5197219" y="648695"/>
-                  </a:lnTo>
-                  <a:lnTo>
-                    <a:pt x="5119585" y="635425"/>
-                  </a:lnTo>
-                  <a:lnTo>
-                    <a:pt x="5041951" y="621335"/>
-                  </a:lnTo>
-                  <a:lnTo>
-                    <a:pt x="4964317" y="606375"/>
-                  </a:lnTo>
-                  <a:lnTo>
-                    <a:pt x="4886683" y="590491"/>
-                  </a:lnTo>
-                  <a:lnTo>
-                    <a:pt x="4809049" y="573625"/>
-                  </a:lnTo>
-                  <a:lnTo>
-                    <a:pt x="4731415" y="555717"/>
-                  </a:lnTo>
-                  <a:lnTo>
-                    <a:pt x="4653781" y="536703"/>
-                  </a:lnTo>
-                  <a:lnTo>
-                    <a:pt x="4576147" y="516514"/>
-                  </a:lnTo>
-                  <a:lnTo>
-                    <a:pt x="4498513" y="495079"/>
-                  </a:lnTo>
-                  <a:lnTo>
-                    <a:pt x="4420879" y="472318"/>
-                  </a:lnTo>
-                  <a:lnTo>
-                    <a:pt x="4343244" y="448152"/>
-                  </a:lnTo>
-                  <a:lnTo>
-                    <a:pt x="4265610" y="422493"/>
-                  </a:lnTo>
-                  <a:lnTo>
-                    <a:pt x="4187976" y="395248"/>
-                  </a:lnTo>
-                  <a:lnTo>
-                    <a:pt x="4110342" y="366320"/>
-                  </a:lnTo>
-                  <a:lnTo>
-                    <a:pt x="4032708" y="335605"/>
-                  </a:lnTo>
-                  <a:lnTo>
-                    <a:pt x="3955074" y="302993"/>
-                  </a:lnTo>
-                  <a:lnTo>
-                    <a:pt x="3877440" y="268366"/>
-                  </a:lnTo>
-                  <a:lnTo>
-                    <a:pt x="3799806" y="231599"/>
-                  </a:lnTo>
-                  <a:lnTo>
-                    <a:pt x="3722172" y="192562"/>
-                  </a:lnTo>
-                  <a:lnTo>
-                    <a:pt x="3644538" y="151112"/>
-                  </a:lnTo>
-                  <a:lnTo>
-                    <a:pt x="3566904" y="107102"/>
-                  </a:lnTo>
-                  <a:lnTo>
-                    <a:pt x="3489270" y="60372"/>
-                  </a:lnTo>
-                  <a:lnTo>
-                    <a:pt x="3411636" y="10756"/>
+                    <a:pt x="7293338" y="782961"/>
+                  </a:lnTo>
+                  <a:lnTo>
+                    <a:pt x="7215704" y="780453"/>
+                  </a:lnTo>
+                  <a:lnTo>
+                    <a:pt x="7138070" y="777789"/>
+                  </a:lnTo>
+                  <a:lnTo>
+                    <a:pt x="7060436" y="774961"/>
+                  </a:lnTo>
+                  <a:lnTo>
+                    <a:pt x="6982802" y="771959"/>
+                  </a:lnTo>
+                  <a:lnTo>
+                    <a:pt x="6905168" y="768771"/>
+                  </a:lnTo>
+                  <a:lnTo>
+                    <a:pt x="6827534" y="765386"/>
+                  </a:lnTo>
+                  <a:lnTo>
+                    <a:pt x="6749900" y="761792"/>
+                  </a:lnTo>
+                  <a:lnTo>
+                    <a:pt x="6672266" y="757976"/>
+                  </a:lnTo>
+                  <a:lnTo>
+                    <a:pt x="6594632" y="753924"/>
+                  </a:lnTo>
+                  <a:lnTo>
+                    <a:pt x="6516998" y="749622"/>
+                  </a:lnTo>
+                  <a:lnTo>
+                    <a:pt x="6439364" y="745054"/>
+                  </a:lnTo>
+                  <a:lnTo>
+                    <a:pt x="6361730" y="740204"/>
+                  </a:lnTo>
+                  <a:lnTo>
+                    <a:pt x="6284096" y="735054"/>
+                  </a:lnTo>
+                  <a:lnTo>
+                    <a:pt x="6206462" y="729586"/>
+                  </a:lnTo>
+                  <a:lnTo>
+                    <a:pt x="6128827" y="723780"/>
+                  </a:lnTo>
+                  <a:lnTo>
+                    <a:pt x="6051193" y="717616"/>
+                  </a:lnTo>
+                  <a:lnTo>
+                    <a:pt x="5973559" y="711070"/>
+                  </a:lnTo>
+                  <a:lnTo>
+                    <a:pt x="5895925" y="704121"/>
+                  </a:lnTo>
+                  <a:lnTo>
+                    <a:pt x="5818291" y="696742"/>
+                  </a:lnTo>
+                  <a:lnTo>
+                    <a:pt x="5740657" y="688907"/>
+                  </a:lnTo>
+                  <a:lnTo>
+                    <a:pt x="5663023" y="680588"/>
+                  </a:lnTo>
+                  <a:lnTo>
+                    <a:pt x="5585389" y="671755"/>
+                  </a:lnTo>
+                  <a:lnTo>
+                    <a:pt x="5507755" y="662377"/>
+                  </a:lnTo>
+                  <a:lnTo>
+                    <a:pt x="5430121" y="652419"/>
+                  </a:lnTo>
+                  <a:lnTo>
+                    <a:pt x="5352487" y="641846"/>
+                  </a:lnTo>
+                  <a:lnTo>
+                    <a:pt x="5274853" y="630619"/>
+                  </a:lnTo>
+                  <a:lnTo>
+                    <a:pt x="5197219" y="618699"/>
+                  </a:lnTo>
+                  <a:lnTo>
+                    <a:pt x="5119585" y="606043"/>
+                  </a:lnTo>
+                  <a:lnTo>
+                    <a:pt x="5041951" y="592605"/>
+                  </a:lnTo>
+                  <a:lnTo>
+                    <a:pt x="4964317" y="578336"/>
+                  </a:lnTo>
+                  <a:lnTo>
+                    <a:pt x="4886683" y="563186"/>
+                  </a:lnTo>
+                  <a:lnTo>
+                    <a:pt x="4809049" y="547101"/>
+                  </a:lnTo>
+                  <a:lnTo>
+                    <a:pt x="4731415" y="530021"/>
+                  </a:lnTo>
+                  <a:lnTo>
+                    <a:pt x="4653781" y="511886"/>
+                  </a:lnTo>
+                  <a:lnTo>
+                    <a:pt x="4576147" y="492631"/>
+                  </a:lnTo>
+                  <a:lnTo>
+                    <a:pt x="4498513" y="472186"/>
+                  </a:lnTo>
+                  <a:lnTo>
+                    <a:pt x="4420879" y="450478"/>
+                  </a:lnTo>
+                  <a:lnTo>
+                    <a:pt x="4343244" y="427430"/>
+                  </a:lnTo>
+                  <a:lnTo>
+                    <a:pt x="4265610" y="402957"/>
+                  </a:lnTo>
+                  <a:lnTo>
+                    <a:pt x="4187976" y="376972"/>
+                  </a:lnTo>
+                  <a:lnTo>
+                    <a:pt x="4110342" y="349382"/>
+                  </a:lnTo>
+                  <a:lnTo>
+                    <a:pt x="4032708" y="320087"/>
+                  </a:lnTo>
+                  <a:lnTo>
+                    <a:pt x="3955074" y="288983"/>
+                  </a:lnTo>
+                  <a:lnTo>
+                    <a:pt x="3877440" y="255957"/>
+                  </a:lnTo>
+                  <a:lnTo>
+                    <a:pt x="3799806" y="220890"/>
+                  </a:lnTo>
+                  <a:lnTo>
+                    <a:pt x="3722172" y="183658"/>
+                  </a:lnTo>
+                  <a:lnTo>
+                    <a:pt x="3644538" y="144125"/>
+                  </a:lnTo>
+                  <a:lnTo>
+                    <a:pt x="3566904" y="102149"/>
+                  </a:lnTo>
+                  <a:lnTo>
+                    <a:pt x="3489270" y="57581"/>
+                  </a:lnTo>
+                  <a:lnTo>
+                    <a:pt x="3411636" y="10259"/>
                   </a:lnTo>
                   <a:lnTo>
                     <a:pt x="3334002" y="0"/>
                   </a:lnTo>
                   <a:lnTo>
-                    <a:pt x="3256368" y="9129"/>
-                  </a:lnTo>
-                  <a:lnTo>
-                    <a:pt x="3178734" y="18161"/>
-                  </a:lnTo>
-                  <a:lnTo>
-                    <a:pt x="3101100" y="27098"/>
-                  </a:lnTo>
-                  <a:lnTo>
-                    <a:pt x="3023466" y="35941"/>
-                  </a:lnTo>
-                  <a:lnTo>
-                    <a:pt x="2945832" y="44690"/>
-                  </a:lnTo>
-                  <a:lnTo>
-                    <a:pt x="2868198" y="53347"/>
-                  </a:lnTo>
-                  <a:lnTo>
-                    <a:pt x="2790564" y="61912"/>
-                  </a:lnTo>
-                  <a:lnTo>
-                    <a:pt x="2712930" y="70387"/>
-                  </a:lnTo>
-                  <a:lnTo>
-                    <a:pt x="2635295" y="78772"/>
-                  </a:lnTo>
-                  <a:lnTo>
-                    <a:pt x="2557661" y="87068"/>
-                  </a:lnTo>
-                  <a:lnTo>
-                    <a:pt x="2480027" y="95277"/>
-                  </a:lnTo>
-                  <a:lnTo>
-                    <a:pt x="2402393" y="103399"/>
-                  </a:lnTo>
-                  <a:lnTo>
-                    <a:pt x="2324759" y="111435"/>
-                  </a:lnTo>
-                  <a:lnTo>
-                    <a:pt x="2247125" y="119386"/>
-                  </a:lnTo>
-                  <a:lnTo>
-                    <a:pt x="2169491" y="127253"/>
-                  </a:lnTo>
-                  <a:lnTo>
-                    <a:pt x="2091857" y="135037"/>
-                  </a:lnTo>
-                  <a:lnTo>
-                    <a:pt x="2014223" y="142738"/>
-                  </a:lnTo>
-                  <a:lnTo>
-                    <a:pt x="1936589" y="150358"/>
-                  </a:lnTo>
-                  <a:lnTo>
-                    <a:pt x="1858955" y="157898"/>
-                  </a:lnTo>
-                  <a:lnTo>
-                    <a:pt x="1781321" y="165357"/>
-                  </a:lnTo>
-                  <a:lnTo>
-                    <a:pt x="1703687" y="172738"/>
-                  </a:lnTo>
-                  <a:lnTo>
-                    <a:pt x="1626053" y="180041"/>
-                  </a:lnTo>
-                  <a:lnTo>
-                    <a:pt x="1548419" y="187267"/>
-                  </a:lnTo>
-                  <a:lnTo>
-                    <a:pt x="1470785" y="194416"/>
-                  </a:lnTo>
-                  <a:lnTo>
-                    <a:pt x="1393151" y="201490"/>
-                  </a:lnTo>
-                  <a:lnTo>
-                    <a:pt x="1315517" y="208489"/>
-                  </a:lnTo>
-                  <a:lnTo>
-                    <a:pt x="1237883" y="215414"/>
-                  </a:lnTo>
-                  <a:lnTo>
-                    <a:pt x="1160249" y="222266"/>
-                  </a:lnTo>
-                  <a:lnTo>
-                    <a:pt x="1082615" y="229045"/>
-                  </a:lnTo>
-                  <a:lnTo>
-                    <a:pt x="1004981" y="235753"/>
-                  </a:lnTo>
-                  <a:lnTo>
-                    <a:pt x="927346" y="242389"/>
-                  </a:lnTo>
-                  <a:lnTo>
-                    <a:pt x="849712" y="248956"/>
-                  </a:lnTo>
-                  <a:lnTo>
-                    <a:pt x="772078" y="255453"/>
-                  </a:lnTo>
-                  <a:lnTo>
-                    <a:pt x="694444" y="261881"/>
-                  </a:lnTo>
-                  <a:lnTo>
-                    <a:pt x="616810" y="268242"/>
-                  </a:lnTo>
-                  <a:lnTo>
-                    <a:pt x="539176" y="274535"/>
-                  </a:lnTo>
-                  <a:lnTo>
-                    <a:pt x="461542" y="280762"/>
-                  </a:lnTo>
-                  <a:lnTo>
-                    <a:pt x="383908" y="286922"/>
-                  </a:lnTo>
-                  <a:lnTo>
-                    <a:pt x="306274" y="293018"/>
-                  </a:lnTo>
-                  <a:lnTo>
-                    <a:pt x="228640" y="299049"/>
-                  </a:lnTo>
-                  <a:lnTo>
-                    <a:pt x="151006" y="305017"/>
-                  </a:lnTo>
-                  <a:lnTo>
-                    <a:pt x="73372" y="310921"/>
-                  </a:lnTo>
-                  <a:lnTo>
-                    <a:pt x="0" y="316443"/>
+                    <a:pt x="3256368" y="8707"/>
+                  </a:lnTo>
+                  <a:lnTo>
+                    <a:pt x="3178734" y="17322"/>
+                  </a:lnTo>
+                  <a:lnTo>
+                    <a:pt x="3101100" y="25845"/>
+                  </a:lnTo>
+                  <a:lnTo>
+                    <a:pt x="3023466" y="34279"/>
+                  </a:lnTo>
+                  <a:lnTo>
+                    <a:pt x="2945832" y="42624"/>
+                  </a:lnTo>
+                  <a:lnTo>
+                    <a:pt x="2868198" y="50880"/>
+                  </a:lnTo>
+                  <a:lnTo>
+                    <a:pt x="2790564" y="59049"/>
+                  </a:lnTo>
+                  <a:lnTo>
+                    <a:pt x="2712930" y="67132"/>
+                  </a:lnTo>
+                  <a:lnTo>
+                    <a:pt x="2635295" y="75129"/>
+                  </a:lnTo>
+                  <a:lnTo>
+                    <a:pt x="2557661" y="83042"/>
+                  </a:lnTo>
+                  <a:lnTo>
+                    <a:pt x="2480027" y="90871"/>
+                  </a:lnTo>
+                  <a:lnTo>
+                    <a:pt x="2402393" y="98618"/>
+                  </a:lnTo>
+                  <a:lnTo>
+                    <a:pt x="2324759" y="106282"/>
+                  </a:lnTo>
+                  <a:lnTo>
+                    <a:pt x="2247125" y="113865"/>
+                  </a:lnTo>
+                  <a:lnTo>
+                    <a:pt x="2169491" y="121369"/>
+                  </a:lnTo>
+                  <a:lnTo>
+                    <a:pt x="2091857" y="128792"/>
+                  </a:lnTo>
+                  <a:lnTo>
+                    <a:pt x="2014223" y="136138"/>
+                  </a:lnTo>
+                  <a:lnTo>
+                    <a:pt x="1936589" y="143406"/>
+                  </a:lnTo>
+                  <a:lnTo>
+                    <a:pt x="1858955" y="150596"/>
+                  </a:lnTo>
+                  <a:lnTo>
+                    <a:pt x="1781321" y="157711"/>
+                  </a:lnTo>
+                  <a:lnTo>
+                    <a:pt x="1703687" y="164751"/>
+                  </a:lnTo>
+                  <a:lnTo>
+                    <a:pt x="1626053" y="171716"/>
+                  </a:lnTo>
+                  <a:lnTo>
+                    <a:pt x="1548419" y="178608"/>
+                  </a:lnTo>
+                  <a:lnTo>
+                    <a:pt x="1470785" y="185427"/>
+                  </a:lnTo>
+                  <a:lnTo>
+                    <a:pt x="1393151" y="192173"/>
+                  </a:lnTo>
+                  <a:lnTo>
+                    <a:pt x="1315517" y="198848"/>
+                  </a:lnTo>
+                  <a:lnTo>
+                    <a:pt x="1237883" y="205453"/>
+                  </a:lnTo>
+                  <a:lnTo>
+                    <a:pt x="1160249" y="211988"/>
+                  </a:lnTo>
+                  <a:lnTo>
+                    <a:pt x="1082615" y="218454"/>
+                  </a:lnTo>
+                  <a:lnTo>
+                    <a:pt x="1004981" y="224851"/>
+                  </a:lnTo>
+                  <a:lnTo>
+                    <a:pt x="927346" y="231181"/>
+                  </a:lnTo>
+                  <a:lnTo>
+                    <a:pt x="849712" y="237444"/>
+                  </a:lnTo>
+                  <a:lnTo>
+                    <a:pt x="772078" y="243641"/>
+                  </a:lnTo>
+                  <a:lnTo>
+                    <a:pt x="694444" y="249772"/>
+                  </a:lnTo>
+                  <a:lnTo>
+                    <a:pt x="616810" y="255838"/>
+                  </a:lnTo>
+                  <a:lnTo>
+                    <a:pt x="539176" y="261840"/>
+                  </a:lnTo>
+                  <a:lnTo>
+                    <a:pt x="461542" y="267779"/>
+                  </a:lnTo>
+                  <a:lnTo>
+                    <a:pt x="383908" y="273655"/>
+                  </a:lnTo>
+                  <a:lnTo>
+                    <a:pt x="306274" y="279469"/>
+                  </a:lnTo>
+                  <a:lnTo>
+                    <a:pt x="228640" y="285221"/>
+                  </a:lnTo>
+                  <a:lnTo>
+                    <a:pt x="151006" y="290913"/>
+                  </a:lnTo>
+                  <a:lnTo>
+                    <a:pt x="73372" y="296544"/>
+                  </a:lnTo>
+                  <a:lnTo>
+                    <a:pt x="0" y="301810"/>
                   </a:lnTo>
                 </a:path>
               </a:pathLst>
@@ -4121,300 +4121,300 @@
           </p:nvSpPr>
           <p:spPr>
             <a:xfrm>
-              <a:off x="817517" y="2999642"/>
-              <a:ext cx="7370972" cy="2304277"/>
+              <a:off x="817517" y="3125576"/>
+              <a:ext cx="7370972" cy="2197728"/>
             </a:xfrm>
             <a:custGeom>
               <a:avLst/>
               <a:pathLst>
-                <a:path w="7370972" h="2304277">
+                <a:path w="7370972" h="2197728">
                   <a:moveTo>
                     <a:pt x="0" y="0"/>
                   </a:moveTo>
                   <a:lnTo>
-                    <a:pt x="73372" y="58770"/>
-                  </a:lnTo>
-                  <a:lnTo>
-                    <a:pt x="151006" y="119439"/>
-                  </a:lnTo>
-                  <a:lnTo>
-                    <a:pt x="228640" y="178630"/>
-                  </a:lnTo>
-                  <a:lnTo>
-                    <a:pt x="306274" y="236379"/>
-                  </a:lnTo>
-                  <a:lnTo>
-                    <a:pt x="383908" y="292722"/>
-                  </a:lnTo>
-                  <a:lnTo>
-                    <a:pt x="461542" y="347692"/>
-                  </a:lnTo>
-                  <a:lnTo>
-                    <a:pt x="539176" y="401324"/>
-                  </a:lnTo>
-                  <a:lnTo>
-                    <a:pt x="616810" y="453649"/>
-                  </a:lnTo>
-                  <a:lnTo>
-                    <a:pt x="694444" y="504700"/>
-                  </a:lnTo>
-                  <a:lnTo>
-                    <a:pt x="772078" y="554507"/>
-                  </a:lnTo>
-                  <a:lnTo>
-                    <a:pt x="849712" y="603101"/>
-                  </a:lnTo>
-                  <a:lnTo>
-                    <a:pt x="927346" y="650512"/>
-                  </a:lnTo>
-                  <a:lnTo>
-                    <a:pt x="1004981" y="696768"/>
-                  </a:lnTo>
-                  <a:lnTo>
-                    <a:pt x="1082615" y="741897"/>
-                  </a:lnTo>
-                  <a:lnTo>
-                    <a:pt x="1160249" y="785926"/>
-                  </a:lnTo>
-                  <a:lnTo>
-                    <a:pt x="1237883" y="828884"/>
-                  </a:lnTo>
-                  <a:lnTo>
-                    <a:pt x="1315517" y="870795"/>
-                  </a:lnTo>
-                  <a:lnTo>
-                    <a:pt x="1393151" y="911685"/>
-                  </a:lnTo>
-                  <a:lnTo>
-                    <a:pt x="1470785" y="951579"/>
-                  </a:lnTo>
-                  <a:lnTo>
-                    <a:pt x="1548419" y="990502"/>
-                  </a:lnTo>
-                  <a:lnTo>
-                    <a:pt x="1626053" y="1028476"/>
-                  </a:lnTo>
-                  <a:lnTo>
-                    <a:pt x="1703687" y="1065526"/>
-                  </a:lnTo>
-                  <a:lnTo>
-                    <a:pt x="1781321" y="1101673"/>
-                  </a:lnTo>
-                  <a:lnTo>
-                    <a:pt x="1858955" y="1136939"/>
-                  </a:lnTo>
-                  <a:lnTo>
-                    <a:pt x="1936589" y="1171347"/>
-                  </a:lnTo>
-                  <a:lnTo>
-                    <a:pt x="2014223" y="1204917"/>
-                  </a:lnTo>
-                  <a:lnTo>
-                    <a:pt x="2091857" y="1237669"/>
-                  </a:lnTo>
-                  <a:lnTo>
-                    <a:pt x="2169491" y="1269623"/>
-                  </a:lnTo>
-                  <a:lnTo>
-                    <a:pt x="2247125" y="1300799"/>
-                  </a:lnTo>
-                  <a:lnTo>
-                    <a:pt x="2324759" y="1331215"/>
-                  </a:lnTo>
-                  <a:lnTo>
-                    <a:pt x="2402393" y="1360891"/>
-                  </a:lnTo>
-                  <a:lnTo>
-                    <a:pt x="2480027" y="1389844"/>
-                  </a:lnTo>
-                  <a:lnTo>
-                    <a:pt x="2557661" y="1418091"/>
-                  </a:lnTo>
-                  <a:lnTo>
-                    <a:pt x="2635295" y="1445651"/>
-                  </a:lnTo>
-                  <a:lnTo>
-                    <a:pt x="2712930" y="1472539"/>
-                  </a:lnTo>
-                  <a:lnTo>
-                    <a:pt x="2790564" y="1498772"/>
-                  </a:lnTo>
-                  <a:lnTo>
-                    <a:pt x="2868198" y="1524367"/>
-                  </a:lnTo>
-                  <a:lnTo>
-                    <a:pt x="2945832" y="1549338"/>
-                  </a:lnTo>
-                  <a:lnTo>
-                    <a:pt x="3023466" y="1573701"/>
-                  </a:lnTo>
-                  <a:lnTo>
-                    <a:pt x="3101100" y="1597470"/>
-                  </a:lnTo>
-                  <a:lnTo>
-                    <a:pt x="3178734" y="1620660"/>
-                  </a:lnTo>
-                  <a:lnTo>
-                    <a:pt x="3256368" y="1643286"/>
-                  </a:lnTo>
-                  <a:lnTo>
-                    <a:pt x="3334002" y="1665360"/>
-                  </a:lnTo>
-                  <a:lnTo>
-                    <a:pt x="3411636" y="1686897"/>
-                  </a:lnTo>
-                  <a:lnTo>
-                    <a:pt x="3489270" y="1707909"/>
-                  </a:lnTo>
-                  <a:lnTo>
-                    <a:pt x="3566904" y="1728410"/>
-                  </a:lnTo>
-                  <a:lnTo>
-                    <a:pt x="3644538" y="1748411"/>
-                  </a:lnTo>
-                  <a:lnTo>
-                    <a:pt x="3722172" y="1767925"/>
-                  </a:lnTo>
-                  <a:lnTo>
-                    <a:pt x="3799806" y="1786963"/>
-                  </a:lnTo>
-                  <a:lnTo>
-                    <a:pt x="3877440" y="1805538"/>
-                  </a:lnTo>
-                  <a:lnTo>
-                    <a:pt x="3955074" y="1823660"/>
-                  </a:lnTo>
-                  <a:lnTo>
-                    <a:pt x="4032708" y="1841341"/>
-                  </a:lnTo>
-                  <a:lnTo>
-                    <a:pt x="4110342" y="1858592"/>
-                  </a:lnTo>
-                  <a:lnTo>
-                    <a:pt x="4187976" y="1875422"/>
-                  </a:lnTo>
-                  <a:lnTo>
-                    <a:pt x="4265610" y="1891842"/>
-                  </a:lnTo>
-                  <a:lnTo>
-                    <a:pt x="4343244" y="1907863"/>
-                  </a:lnTo>
-                  <a:lnTo>
-                    <a:pt x="4420879" y="1923493"/>
-                  </a:lnTo>
-                  <a:lnTo>
-                    <a:pt x="4498513" y="1938742"/>
-                  </a:lnTo>
-                  <a:lnTo>
-                    <a:pt x="4576147" y="1953620"/>
-                  </a:lnTo>
-                  <a:lnTo>
-                    <a:pt x="4653781" y="1968135"/>
-                  </a:lnTo>
-                  <a:lnTo>
-                    <a:pt x="4731415" y="1982297"/>
-                  </a:lnTo>
-                  <a:lnTo>
-                    <a:pt x="4809049" y="1996115"/>
-                  </a:lnTo>
-                  <a:lnTo>
-                    <a:pt x="4886683" y="2009595"/>
-                  </a:lnTo>
-                  <a:lnTo>
-                    <a:pt x="4964317" y="2022747"/>
-                  </a:lnTo>
-                  <a:lnTo>
-                    <a:pt x="5041951" y="2035579"/>
-                  </a:lnTo>
-                  <a:lnTo>
-                    <a:pt x="5119585" y="2048098"/>
-                  </a:lnTo>
-                  <a:lnTo>
-                    <a:pt x="5197219" y="2060313"/>
-                  </a:lnTo>
-                  <a:lnTo>
-                    <a:pt x="5274853" y="2072229"/>
-                  </a:lnTo>
-                  <a:lnTo>
-                    <a:pt x="5352487" y="2083856"/>
-                  </a:lnTo>
-                  <a:lnTo>
-                    <a:pt x="5430121" y="2095199"/>
-                  </a:lnTo>
-                  <a:lnTo>
-                    <a:pt x="5507755" y="2106266"/>
-                  </a:lnTo>
-                  <a:lnTo>
-                    <a:pt x="5585389" y="2117064"/>
-                  </a:lnTo>
-                  <a:lnTo>
-                    <a:pt x="5663023" y="2127598"/>
-                  </a:lnTo>
-                  <a:lnTo>
-                    <a:pt x="5740657" y="2137876"/>
-                  </a:lnTo>
-                  <a:lnTo>
-                    <a:pt x="5818291" y="2147904"/>
-                  </a:lnTo>
-                  <a:lnTo>
-                    <a:pt x="5895925" y="2157687"/>
-                  </a:lnTo>
-                  <a:lnTo>
-                    <a:pt x="5973559" y="2167232"/>
-                  </a:lnTo>
-                  <a:lnTo>
-                    <a:pt x="6051193" y="2176545"/>
-                  </a:lnTo>
-                  <a:lnTo>
-                    <a:pt x="6128827" y="2185631"/>
-                  </a:lnTo>
-                  <a:lnTo>
-                    <a:pt x="6206462" y="2194495"/>
-                  </a:lnTo>
-                  <a:lnTo>
-                    <a:pt x="6284096" y="2203143"/>
-                  </a:lnTo>
-                  <a:lnTo>
-                    <a:pt x="6361730" y="2211581"/>
-                  </a:lnTo>
-                  <a:lnTo>
-                    <a:pt x="6439364" y="2219814"/>
-                  </a:lnTo>
-                  <a:lnTo>
-                    <a:pt x="6516998" y="2227845"/>
-                  </a:lnTo>
-                  <a:lnTo>
-                    <a:pt x="6594632" y="2235682"/>
-                  </a:lnTo>
-                  <a:lnTo>
-                    <a:pt x="6672266" y="2243327"/>
-                  </a:lnTo>
-                  <a:lnTo>
-                    <a:pt x="6749900" y="2250786"/>
-                  </a:lnTo>
-                  <a:lnTo>
-                    <a:pt x="6827534" y="2258063"/>
-                  </a:lnTo>
-                  <a:lnTo>
-                    <a:pt x="6905168" y="2265164"/>
-                  </a:lnTo>
-                  <a:lnTo>
-                    <a:pt x="6982802" y="2272091"/>
-                  </a:lnTo>
-                  <a:lnTo>
-                    <a:pt x="7060436" y="2278849"/>
-                  </a:lnTo>
-                  <a:lnTo>
-                    <a:pt x="7138070" y="2285443"/>
-                  </a:lnTo>
-                  <a:lnTo>
-                    <a:pt x="7215704" y="2291876"/>
-                  </a:lnTo>
-                  <a:lnTo>
-                    <a:pt x="7293338" y="2298153"/>
-                  </a:lnTo>
-                  <a:lnTo>
-                    <a:pt x="7370972" y="2304277"/>
+                    <a:pt x="73372" y="56052"/>
+                  </a:lnTo>
+                  <a:lnTo>
+                    <a:pt x="151006" y="113916"/>
+                  </a:lnTo>
+                  <a:lnTo>
+                    <a:pt x="228640" y="170370"/>
+                  </a:lnTo>
+                  <a:lnTo>
+                    <a:pt x="306274" y="225449"/>
+                  </a:lnTo>
+                  <a:lnTo>
+                    <a:pt x="383908" y="279187"/>
+                  </a:lnTo>
+                  <a:lnTo>
+                    <a:pt x="461542" y="331615"/>
+                  </a:lnTo>
+                  <a:lnTo>
+                    <a:pt x="539176" y="382767"/>
+                  </a:lnTo>
+                  <a:lnTo>
+                    <a:pt x="616810" y="432673"/>
+                  </a:lnTo>
+                  <a:lnTo>
+                    <a:pt x="694444" y="481363"/>
+                  </a:lnTo>
+                  <a:lnTo>
+                    <a:pt x="772078" y="528867"/>
+                  </a:lnTo>
+                  <a:lnTo>
+                    <a:pt x="849712" y="575214"/>
+                  </a:lnTo>
+                  <a:lnTo>
+                    <a:pt x="927346" y="620432"/>
+                  </a:lnTo>
+                  <a:lnTo>
+                    <a:pt x="1004981" y="664549"/>
+                  </a:lnTo>
+                  <a:lnTo>
+                    <a:pt x="1082615" y="707591"/>
+                  </a:lnTo>
+                  <a:lnTo>
+                    <a:pt x="1160249" y="749585"/>
+                  </a:lnTo>
+                  <a:lnTo>
+                    <a:pt x="1237883" y="790556"/>
+                  </a:lnTo>
+                  <a:lnTo>
+                    <a:pt x="1315517" y="830530"/>
+                  </a:lnTo>
+                  <a:lnTo>
+                    <a:pt x="1393151" y="869529"/>
+                  </a:lnTo>
+                  <a:lnTo>
+                    <a:pt x="1470785" y="907579"/>
+                  </a:lnTo>
+                  <a:lnTo>
+                    <a:pt x="1548419" y="944701"/>
+                  </a:lnTo>
+                  <a:lnTo>
+                    <a:pt x="1626053" y="980920"/>
+                  </a:lnTo>
+                  <a:lnTo>
+                    <a:pt x="1703687" y="1016256"/>
+                  </a:lnTo>
+                  <a:lnTo>
+                    <a:pt x="1781321" y="1050732"/>
+                  </a:lnTo>
+                  <a:lnTo>
+                    <a:pt x="1858955" y="1084368"/>
+                  </a:lnTo>
+                  <a:lnTo>
+                    <a:pt x="1936589" y="1117184"/>
+                  </a:lnTo>
+                  <a:lnTo>
+                    <a:pt x="2014223" y="1149202"/>
+                  </a:lnTo>
+                  <a:lnTo>
+                    <a:pt x="2091857" y="1180439"/>
+                  </a:lnTo>
+                  <a:lnTo>
+                    <a:pt x="2169491" y="1210916"/>
+                  </a:lnTo>
+                  <a:lnTo>
+                    <a:pt x="2247125" y="1240650"/>
+                  </a:lnTo>
+                  <a:lnTo>
+                    <a:pt x="2324759" y="1269660"/>
+                  </a:lnTo>
+                  <a:lnTo>
+                    <a:pt x="2402393" y="1297964"/>
+                  </a:lnTo>
+                  <a:lnTo>
+                    <a:pt x="2480027" y="1325578"/>
+                  </a:lnTo>
+                  <a:lnTo>
+                    <a:pt x="2557661" y="1352519"/>
+                  </a:lnTo>
+                  <a:lnTo>
+                    <a:pt x="2635295" y="1378804"/>
+                  </a:lnTo>
+                  <a:lnTo>
+                    <a:pt x="2712930" y="1404449"/>
+                  </a:lnTo>
+                  <a:lnTo>
+                    <a:pt x="2790564" y="1429470"/>
+                  </a:lnTo>
+                  <a:lnTo>
+                    <a:pt x="2868198" y="1453881"/>
+                  </a:lnTo>
+                  <a:lnTo>
+                    <a:pt x="2945832" y="1477697"/>
+                  </a:lnTo>
+                  <a:lnTo>
+                    <a:pt x="3023466" y="1500933"/>
+                  </a:lnTo>
+                  <a:lnTo>
+                    <a:pt x="3101100" y="1523603"/>
+                  </a:lnTo>
+                  <a:lnTo>
+                    <a:pt x="3178734" y="1545722"/>
+                  </a:lnTo>
+                  <a:lnTo>
+                    <a:pt x="3256368" y="1567301"/>
+                  </a:lnTo>
+                  <a:lnTo>
+                    <a:pt x="3334002" y="1588355"/>
+                  </a:lnTo>
+                  <a:lnTo>
+                    <a:pt x="3411636" y="1608896"/>
+                  </a:lnTo>
+                  <a:lnTo>
+                    <a:pt x="3489270" y="1628936"/>
+                  </a:lnTo>
+                  <a:lnTo>
+                    <a:pt x="3566904" y="1648489"/>
+                  </a:lnTo>
+                  <a:lnTo>
+                    <a:pt x="3644538" y="1667565"/>
+                  </a:lnTo>
+                  <a:lnTo>
+                    <a:pt x="3722172" y="1686176"/>
+                  </a:lnTo>
+                  <a:lnTo>
+                    <a:pt x="3799806" y="1704335"/>
+                  </a:lnTo>
+                  <a:lnTo>
+                    <a:pt x="3877440" y="1722051"/>
+                  </a:lnTo>
+                  <a:lnTo>
+                    <a:pt x="3955074" y="1739335"/>
+                  </a:lnTo>
+                  <a:lnTo>
+                    <a:pt x="4032708" y="1756199"/>
+                  </a:lnTo>
+                  <a:lnTo>
+                    <a:pt x="4110342" y="1772651"/>
+                  </a:lnTo>
+                  <a:lnTo>
+                    <a:pt x="4187976" y="1788703"/>
+                  </a:lnTo>
+                  <a:lnTo>
+                    <a:pt x="4265610" y="1804364"/>
+                  </a:lnTo>
+                  <a:lnTo>
+                    <a:pt x="4343244" y="1819644"/>
+                  </a:lnTo>
+                  <a:lnTo>
+                    <a:pt x="4420879" y="1834551"/>
+                  </a:lnTo>
+                  <a:lnTo>
+                    <a:pt x="4498513" y="1849095"/>
+                  </a:lnTo>
+                  <a:lnTo>
+                    <a:pt x="4576147" y="1863285"/>
+                  </a:lnTo>
+                  <a:lnTo>
+                    <a:pt x="4653781" y="1877130"/>
+                  </a:lnTo>
+                  <a:lnTo>
+                    <a:pt x="4731415" y="1890637"/>
+                  </a:lnTo>
+                  <a:lnTo>
+                    <a:pt x="4809049" y="1903815"/>
+                  </a:lnTo>
+                  <a:lnTo>
+                    <a:pt x="4886683" y="1916672"/>
+                  </a:lnTo>
+                  <a:lnTo>
+                    <a:pt x="4964317" y="1929216"/>
+                  </a:lnTo>
+                  <a:lnTo>
+                    <a:pt x="5041951" y="1941455"/>
+                  </a:lnTo>
+                  <a:lnTo>
+                    <a:pt x="5119585" y="1953395"/>
+                  </a:lnTo>
+                  <a:lnTo>
+                    <a:pt x="5197219" y="1965044"/>
+                  </a:lnTo>
+                  <a:lnTo>
+                    <a:pt x="5274853" y="1976410"/>
+                  </a:lnTo>
+                  <a:lnTo>
+                    <a:pt x="5352487" y="1987499"/>
+                  </a:lnTo>
+                  <a:lnTo>
+                    <a:pt x="5430121" y="1998318"/>
+                  </a:lnTo>
+                  <a:lnTo>
+                    <a:pt x="5507755" y="2008873"/>
+                  </a:lnTo>
+                  <a:lnTo>
+                    <a:pt x="5585389" y="2019172"/>
+                  </a:lnTo>
+                  <a:lnTo>
+                    <a:pt x="5663023" y="2029219"/>
+                  </a:lnTo>
+                  <a:lnTo>
+                    <a:pt x="5740657" y="2039022"/>
+                  </a:lnTo>
+                  <a:lnTo>
+                    <a:pt x="5818291" y="2048586"/>
+                  </a:lnTo>
+                  <a:lnTo>
+                    <a:pt x="5895925" y="2057917"/>
+                  </a:lnTo>
+                  <a:lnTo>
+                    <a:pt x="5973559" y="2067020"/>
+                  </a:lnTo>
+                  <a:lnTo>
+                    <a:pt x="6051193" y="2075902"/>
+                  </a:lnTo>
+                  <a:lnTo>
+                    <a:pt x="6128827" y="2084568"/>
+                  </a:lnTo>
+                  <a:lnTo>
+                    <a:pt x="6206462" y="2093022"/>
+                  </a:lnTo>
+                  <a:lnTo>
+                    <a:pt x="6284096" y="2101271"/>
+                  </a:lnTo>
+                  <a:lnTo>
+                    <a:pt x="6361730" y="2109319"/>
+                  </a:lnTo>
+                  <a:lnTo>
+                    <a:pt x="6439364" y="2117170"/>
+                  </a:lnTo>
+                  <a:lnTo>
+                    <a:pt x="6516998" y="2124831"/>
+                  </a:lnTo>
+                  <a:lnTo>
+                    <a:pt x="6594632" y="2132305"/>
+                  </a:lnTo>
+                  <a:lnTo>
+                    <a:pt x="6672266" y="2139596"/>
+                  </a:lnTo>
+                  <a:lnTo>
+                    <a:pt x="6749900" y="2146710"/>
+                  </a:lnTo>
+                  <a:lnTo>
+                    <a:pt x="6827534" y="2153651"/>
+                  </a:lnTo>
+                  <a:lnTo>
+                    <a:pt x="6905168" y="2160423"/>
+                  </a:lnTo>
+                  <a:lnTo>
+                    <a:pt x="6982802" y="2167030"/>
+                  </a:lnTo>
+                  <a:lnTo>
+                    <a:pt x="7060436" y="2173476"/>
+                  </a:lnTo>
+                  <a:lnTo>
+                    <a:pt x="7138070" y="2179765"/>
+                  </a:lnTo>
+                  <a:lnTo>
+                    <a:pt x="7215704" y="2185901"/>
+                  </a:lnTo>
+                  <a:lnTo>
+                    <a:pt x="7293338" y="2191887"/>
+                  </a:lnTo>
+                  <a:lnTo>
+                    <a:pt x="7370972" y="2197728"/>
                   </a:lnTo>
                 </a:path>
               </a:pathLst>
@@ -4443,7 +4443,7 @@
           </p:nvSpPr>
           <p:spPr>
             <a:xfrm>
-              <a:off x="817517" y="4679530"/>
+              <a:off x="817517" y="4727786"/>
               <a:ext cx="7799693" cy="0"/>
             </a:xfrm>
             <a:custGeom>
@@ -4486,15 +4486,15 @@
           </p:nvSpPr>
           <p:spPr>
             <a:xfrm>
-              <a:off x="4203673" y="1896563"/>
-              <a:ext cx="0" cy="3826579"/>
+              <a:off x="4203673" y="2073503"/>
+              <a:ext cx="0" cy="3649639"/>
             </a:xfrm>
             <a:custGeom>
               <a:avLst/>
               <a:pathLst>
-                <a:path w="0" h="3826579">
+                <a:path w="0" h="3649639">
                   <a:moveTo>
-                    <a:pt x="0" y="3826579"/>
+                    <a:pt x="0" y="3649639"/>
                   </a:moveTo>
                   <a:lnTo>
                     <a:pt x="0" y="0"/>
@@ -4529,7 +4529,7 @@
           </p:nvSpPr>
           <p:spPr>
             <a:xfrm>
-              <a:off x="692708" y="5509156"/>
+              <a:off x="692708" y="5517199"/>
               <a:ext cx="62179" cy="80101"/>
             </a:xfrm>
             <a:prstGeom prst="rect">
@@ -4575,7 +4575,7 @@
           </p:nvSpPr>
           <p:spPr>
             <a:xfrm>
-              <a:off x="692708" y="4639479"/>
+              <a:off x="692708" y="4687735"/>
               <a:ext cx="62179" cy="80101"/>
             </a:xfrm>
             <a:prstGeom prst="rect">
@@ -4621,7 +4621,7 @@
           </p:nvSpPr>
           <p:spPr>
             <a:xfrm>
-              <a:off x="692708" y="3769802"/>
+              <a:off x="692708" y="3858272"/>
               <a:ext cx="62179" cy="80101"/>
             </a:xfrm>
             <a:prstGeom prst="rect">
@@ -4667,7 +4667,7 @@
           </p:nvSpPr>
           <p:spPr>
             <a:xfrm>
-              <a:off x="692708" y="2900125"/>
+              <a:off x="692708" y="3028808"/>
               <a:ext cx="62179" cy="80101"/>
             </a:xfrm>
             <a:prstGeom prst="rect">
@@ -4713,7 +4713,7 @@
           </p:nvSpPr>
           <p:spPr>
             <a:xfrm>
-              <a:off x="692708" y="2030448"/>
+              <a:off x="692708" y="2199345"/>
               <a:ext cx="62179" cy="80101"/>
             </a:xfrm>
             <a:prstGeom prst="rect">
@@ -4989,7 +4989,7 @@
           </p:nvSpPr>
           <p:spPr>
             <a:xfrm rot="-5400000">
-              <a:off x="68446" y="3759743"/>
+              <a:off x="68446" y="3848213"/>
               <a:ext cx="1016904" cy="100218"/>
             </a:xfrm>
             <a:prstGeom prst="rect">
@@ -5030,6 +5030,52 @@
         <p:sp>
           <p:nvSpPr>
             <p:cNvPr id="38" name="tx38"/>
+            <p:cNvSpPr/>
+            <p:nvPr/>
+          </p:nvSpPr>
+          <p:spPr>
+            <a:xfrm>
+              <a:off x="817517" y="1896563"/>
+              <a:ext cx="4166463" cy="82021"/>
+            </a:xfrm>
+            <a:prstGeom prst="rect">
+              <a:avLst/>
+            </a:prstGeom>
+            <a:noFill/>
+          </p:spPr>
+          <p:txBody>
+            <a:bodyPr lIns="0" rIns="0" tIns="0" bIns="0" anchorCtr="1" anchor="ctr" wrap="none"/>
+            <a:lstStyle/>
+            <a:p>
+              <a:pPr algn="l" marL="0" marR="0" indent="0">
+                <a:lnSpc>
+                  <a:spcPts val="900"/>
+                </a:lnSpc>
+                <a:spcBef>
+                  <a:spcPts val="0"/>
+                </a:spcBef>
+                <a:spcAft>
+                  <a:spcPts val="0"/>
+                </a:spcAft>
+              </a:pPr>
+              <a:r>
+                <a:rPr sz="900">
+                  <a:solidFill>
+                    <a:srgbClr val="404040">
+                      <a:alpha val="100000"/>
+                    </a:srgbClr>
+                  </a:solidFill>
+                  <a:latin typeface="Helvetica"/>
+                  <a:cs typeface="Helvetica"/>
+                </a:rPr>
+                <a:t>subHR = 0.75 (95% CI 0.50-1.13), p = 0.171   (per 0.1-unit increase in eGFR ratio)</a:t>
+              </a:r>
+            </a:p>
+          </p:txBody>
+        </p:sp>
+        <p:sp>
+          <p:nvSpPr>
+            <p:cNvPr id="39" name="tx39"/>
             <p:cNvSpPr/>
             <p:nvPr/>
           </p:nvSpPr>

--- a/docs/plots/carbo/jx_carbo_linsubhr_ratio_hosp1.pptx
+++ b/docs/plots/carbo/jx_carbo_linsubhr_ratio_hosp1.pptx
@@ -2271,26 +2271,26 @@
           </p:nvSpPr>
           <p:spPr>
             <a:xfrm>
-              <a:off x="817517" y="5142518"/>
-              <a:ext cx="7799693" cy="0"/>
+              <a:off x="915645" y="5071743"/>
+              <a:ext cx="7682587" cy="0"/>
             </a:xfrm>
             <a:custGeom>
               <a:avLst/>
               <a:pathLst>
-                <a:path w="7799693" h="0">
+                <a:path w="7682587" h="0">
                   <a:moveTo>
                     <a:pt x="0" y="0"/>
                   </a:moveTo>
                   <a:lnTo>
-                    <a:pt x="7799693" y="0"/>
-                  </a:lnTo>
-                  <a:lnTo>
-                    <a:pt x="7799693" y="0"/>
+                    <a:pt x="7682587" y="0"/>
+                  </a:lnTo>
+                  <a:lnTo>
+                    <a:pt x="7682587" y="0"/>
                   </a:lnTo>
                 </a:path>
               </a:pathLst>
             </a:custGeom>
-            <a:ln w="6775" cap="flat">
+            <a:ln w="8623" cap="flat">
               <a:solidFill>
                 <a:srgbClr val="EBEBEB">
                   <a:alpha val="100000"/>
@@ -2314,26 +2314,26 @@
           </p:nvSpPr>
           <p:spPr>
             <a:xfrm>
-              <a:off x="817517" y="4313054"/>
-              <a:ext cx="7799693" cy="0"/>
+              <a:off x="915645" y="4298074"/>
+              <a:ext cx="7682587" cy="0"/>
             </a:xfrm>
             <a:custGeom>
               <a:avLst/>
               <a:pathLst>
-                <a:path w="7799693" h="0">
+                <a:path w="7682587" h="0">
                   <a:moveTo>
                     <a:pt x="0" y="0"/>
                   </a:moveTo>
                   <a:lnTo>
-                    <a:pt x="7799693" y="0"/>
-                  </a:lnTo>
-                  <a:lnTo>
-                    <a:pt x="7799693" y="0"/>
+                    <a:pt x="7682587" y="0"/>
+                  </a:lnTo>
+                  <a:lnTo>
+                    <a:pt x="7682587" y="0"/>
                   </a:lnTo>
                 </a:path>
               </a:pathLst>
             </a:custGeom>
-            <a:ln w="6775" cap="flat">
+            <a:ln w="8623" cap="flat">
               <a:solidFill>
                 <a:srgbClr val="EBEBEB">
                   <a:alpha val="100000"/>
@@ -2357,26 +2357,26 @@
           </p:nvSpPr>
           <p:spPr>
             <a:xfrm>
-              <a:off x="817517" y="3483591"/>
-              <a:ext cx="7799693" cy="0"/>
+              <a:off x="915645" y="3524405"/>
+              <a:ext cx="7682587" cy="0"/>
             </a:xfrm>
             <a:custGeom>
               <a:avLst/>
               <a:pathLst>
-                <a:path w="7799693" h="0">
+                <a:path w="7682587" h="0">
                   <a:moveTo>
                     <a:pt x="0" y="0"/>
                   </a:moveTo>
                   <a:lnTo>
-                    <a:pt x="7799693" y="0"/>
-                  </a:lnTo>
-                  <a:lnTo>
-                    <a:pt x="7799693" y="0"/>
+                    <a:pt x="7682587" y="0"/>
+                  </a:lnTo>
+                  <a:lnTo>
+                    <a:pt x="7682587" y="0"/>
                   </a:lnTo>
                 </a:path>
               </a:pathLst>
             </a:custGeom>
-            <a:ln w="6775" cap="flat">
+            <a:ln w="8623" cap="flat">
               <a:solidFill>
                 <a:srgbClr val="EBEBEB">
                   <a:alpha val="100000"/>
@@ -2400,26 +2400,26 @@
           </p:nvSpPr>
           <p:spPr>
             <a:xfrm>
-              <a:off x="817517" y="2654127"/>
-              <a:ext cx="7799693" cy="0"/>
+              <a:off x="915645" y="2750737"/>
+              <a:ext cx="7682587" cy="0"/>
             </a:xfrm>
             <a:custGeom>
               <a:avLst/>
               <a:pathLst>
-                <a:path w="7799693" h="0">
+                <a:path w="7682587" h="0">
                   <a:moveTo>
                     <a:pt x="0" y="0"/>
                   </a:moveTo>
                   <a:lnTo>
-                    <a:pt x="7799693" y="0"/>
-                  </a:lnTo>
-                  <a:lnTo>
-                    <a:pt x="7799693" y="0"/>
+                    <a:pt x="7682587" y="0"/>
+                  </a:lnTo>
+                  <a:lnTo>
+                    <a:pt x="7682587" y="0"/>
                   </a:lnTo>
                 </a:path>
               </a:pathLst>
             </a:custGeom>
-            <a:ln w="6775" cap="flat">
+            <a:ln w="8623" cap="flat">
               <a:solidFill>
                 <a:srgbClr val="EBEBEB">
                   <a:alpha val="100000"/>
@@ -2443,15 +2443,15 @@
           </p:nvSpPr>
           <p:spPr>
             <a:xfrm>
-              <a:off x="1615213" y="2073503"/>
-              <a:ext cx="0" cy="3649639"/>
+              <a:off x="1701364" y="2209169"/>
+              <a:ext cx="0" cy="3404141"/>
             </a:xfrm>
             <a:custGeom>
               <a:avLst/>
               <a:pathLst>
-                <a:path w="0" h="3649639">
+                <a:path w="0" h="3404141">
                   <a:moveTo>
-                    <a:pt x="0" y="3649639"/>
+                    <a:pt x="0" y="3404141"/>
                   </a:moveTo>
                   <a:lnTo>
                     <a:pt x="0" y="0"/>
@@ -2462,7 +2462,7 @@
                 </a:path>
               </a:pathLst>
             </a:custGeom>
-            <a:ln w="6775" cap="flat">
+            <a:ln w="8623" cap="flat">
               <a:solidFill>
                 <a:srgbClr val="EBEBEB">
                   <a:alpha val="100000"/>
@@ -2486,15 +2486,15 @@
           </p:nvSpPr>
           <p:spPr>
             <a:xfrm>
-              <a:off x="3387871" y="2073503"/>
-              <a:ext cx="0" cy="3649639"/>
+              <a:off x="3447406" y="2209169"/>
+              <a:ext cx="0" cy="3404141"/>
             </a:xfrm>
             <a:custGeom>
               <a:avLst/>
               <a:pathLst>
-                <a:path w="0" h="3649639">
+                <a:path w="0" h="3404141">
                   <a:moveTo>
-                    <a:pt x="0" y="3649639"/>
+                    <a:pt x="0" y="3404141"/>
                   </a:moveTo>
                   <a:lnTo>
                     <a:pt x="0" y="0"/>
@@ -2505,7 +2505,7 @@
                 </a:path>
               </a:pathLst>
             </a:custGeom>
-            <a:ln w="6775" cap="flat">
+            <a:ln w="8623" cap="flat">
               <a:solidFill>
                 <a:srgbClr val="EBEBEB">
                   <a:alpha val="100000"/>
@@ -2529,15 +2529,15 @@
           </p:nvSpPr>
           <p:spPr>
             <a:xfrm>
-              <a:off x="5160528" y="2073503"/>
-              <a:ext cx="0" cy="3649639"/>
+              <a:off x="5193449" y="2209169"/>
+              <a:ext cx="0" cy="3404141"/>
             </a:xfrm>
             <a:custGeom>
               <a:avLst/>
               <a:pathLst>
-                <a:path w="0" h="3649639">
+                <a:path w="0" h="3404141">
                   <a:moveTo>
-                    <a:pt x="0" y="3649639"/>
+                    <a:pt x="0" y="3404141"/>
                   </a:moveTo>
                   <a:lnTo>
                     <a:pt x="0" y="0"/>
@@ -2548,7 +2548,7 @@
                 </a:path>
               </a:pathLst>
             </a:custGeom>
-            <a:ln w="6775" cap="flat">
+            <a:ln w="8623" cap="flat">
               <a:solidFill>
                 <a:srgbClr val="EBEBEB">
                   <a:alpha val="100000"/>
@@ -2572,15 +2572,15 @@
           </p:nvSpPr>
           <p:spPr>
             <a:xfrm>
-              <a:off x="6933186" y="2073503"/>
-              <a:ext cx="0" cy="3649639"/>
+              <a:off x="6939491" y="2209169"/>
+              <a:ext cx="0" cy="3404141"/>
             </a:xfrm>
             <a:custGeom>
               <a:avLst/>
               <a:pathLst>
-                <a:path w="0" h="3649639">
+                <a:path w="0" h="3404141">
                   <a:moveTo>
-                    <a:pt x="0" y="3649639"/>
+                    <a:pt x="0" y="3404141"/>
                   </a:moveTo>
                   <a:lnTo>
                     <a:pt x="0" y="0"/>
@@ -2591,7 +2591,7 @@
                 </a:path>
               </a:pathLst>
             </a:custGeom>
-            <a:ln w="6775" cap="flat">
+            <a:ln w="8623" cap="flat">
               <a:solidFill>
                 <a:srgbClr val="EBEBEB">
                   <a:alpha val="100000"/>
@@ -2615,26 +2615,26 @@
           </p:nvSpPr>
           <p:spPr>
             <a:xfrm>
-              <a:off x="817517" y="5557249"/>
-              <a:ext cx="7799693" cy="0"/>
+              <a:off x="915645" y="5458577"/>
+              <a:ext cx="7682587" cy="0"/>
             </a:xfrm>
             <a:custGeom>
               <a:avLst/>
               <a:pathLst>
-                <a:path w="7799693" h="0">
+                <a:path w="7682587" h="0">
                   <a:moveTo>
                     <a:pt x="0" y="0"/>
                   </a:moveTo>
                   <a:lnTo>
-                    <a:pt x="7799693" y="0"/>
-                  </a:lnTo>
-                  <a:lnTo>
-                    <a:pt x="7799693" y="0"/>
+                    <a:pt x="7682587" y="0"/>
+                  </a:lnTo>
+                  <a:lnTo>
+                    <a:pt x="7682587" y="0"/>
                   </a:lnTo>
                 </a:path>
               </a:pathLst>
             </a:custGeom>
-            <a:ln w="13550" cap="flat">
+            <a:ln w="17246" cap="flat">
               <a:solidFill>
                 <a:srgbClr val="EBEBEB">
                   <a:alpha val="100000"/>
@@ -2658,26 +2658,26 @@
           </p:nvSpPr>
           <p:spPr>
             <a:xfrm>
-              <a:off x="817517" y="4727786"/>
-              <a:ext cx="7799693" cy="0"/>
+              <a:off x="915645" y="4684908"/>
+              <a:ext cx="7682587" cy="0"/>
             </a:xfrm>
             <a:custGeom>
               <a:avLst/>
               <a:pathLst>
-                <a:path w="7799693" h="0">
+                <a:path w="7682587" h="0">
                   <a:moveTo>
                     <a:pt x="0" y="0"/>
                   </a:moveTo>
                   <a:lnTo>
-                    <a:pt x="7799693" y="0"/>
-                  </a:lnTo>
-                  <a:lnTo>
-                    <a:pt x="7799693" y="0"/>
+                    <a:pt x="7682587" y="0"/>
+                  </a:lnTo>
+                  <a:lnTo>
+                    <a:pt x="7682587" y="0"/>
                   </a:lnTo>
                 </a:path>
               </a:pathLst>
             </a:custGeom>
-            <a:ln w="13550" cap="flat">
+            <a:ln w="17246" cap="flat">
               <a:solidFill>
                 <a:srgbClr val="EBEBEB">
                   <a:alpha val="100000"/>
@@ -2701,26 +2701,26 @@
           </p:nvSpPr>
           <p:spPr>
             <a:xfrm>
-              <a:off x="817517" y="3898322"/>
-              <a:ext cx="7799693" cy="0"/>
+              <a:off x="915645" y="3911240"/>
+              <a:ext cx="7682587" cy="0"/>
             </a:xfrm>
             <a:custGeom>
               <a:avLst/>
               <a:pathLst>
-                <a:path w="7799693" h="0">
+                <a:path w="7682587" h="0">
                   <a:moveTo>
                     <a:pt x="0" y="0"/>
                   </a:moveTo>
                   <a:lnTo>
-                    <a:pt x="7799693" y="0"/>
-                  </a:lnTo>
-                  <a:lnTo>
-                    <a:pt x="7799693" y="0"/>
+                    <a:pt x="7682587" y="0"/>
+                  </a:lnTo>
+                  <a:lnTo>
+                    <a:pt x="7682587" y="0"/>
                   </a:lnTo>
                 </a:path>
               </a:pathLst>
             </a:custGeom>
-            <a:ln w="13550" cap="flat">
+            <a:ln w="17246" cap="flat">
               <a:solidFill>
                 <a:srgbClr val="EBEBEB">
                   <a:alpha val="100000"/>
@@ -2744,26 +2744,26 @@
           </p:nvSpPr>
           <p:spPr>
             <a:xfrm>
-              <a:off x="817517" y="3068859"/>
-              <a:ext cx="7799693" cy="0"/>
+              <a:off x="915645" y="3137571"/>
+              <a:ext cx="7682587" cy="0"/>
             </a:xfrm>
             <a:custGeom>
               <a:avLst/>
               <a:pathLst>
-                <a:path w="7799693" h="0">
+                <a:path w="7682587" h="0">
                   <a:moveTo>
                     <a:pt x="0" y="0"/>
                   </a:moveTo>
                   <a:lnTo>
-                    <a:pt x="7799693" y="0"/>
-                  </a:lnTo>
-                  <a:lnTo>
-                    <a:pt x="7799693" y="0"/>
+                    <a:pt x="7682587" y="0"/>
+                  </a:lnTo>
+                  <a:lnTo>
+                    <a:pt x="7682587" y="0"/>
                   </a:lnTo>
                 </a:path>
               </a:pathLst>
             </a:custGeom>
-            <a:ln w="13550" cap="flat">
+            <a:ln w="17246" cap="flat">
               <a:solidFill>
                 <a:srgbClr val="EBEBEB">
                   <a:alpha val="100000"/>
@@ -2787,26 +2787,26 @@
           </p:nvSpPr>
           <p:spPr>
             <a:xfrm>
-              <a:off x="817517" y="2239395"/>
-              <a:ext cx="7799693" cy="0"/>
+              <a:off x="915645" y="2363903"/>
+              <a:ext cx="7682587" cy="0"/>
             </a:xfrm>
             <a:custGeom>
               <a:avLst/>
               <a:pathLst>
-                <a:path w="7799693" h="0">
+                <a:path w="7682587" h="0">
                   <a:moveTo>
                     <a:pt x="0" y="0"/>
                   </a:moveTo>
                   <a:lnTo>
-                    <a:pt x="7799693" y="0"/>
-                  </a:lnTo>
-                  <a:lnTo>
-                    <a:pt x="7799693" y="0"/>
+                    <a:pt x="7682587" y="0"/>
+                  </a:lnTo>
+                  <a:lnTo>
+                    <a:pt x="7682587" y="0"/>
                   </a:lnTo>
                 </a:path>
               </a:pathLst>
             </a:custGeom>
-            <a:ln w="13550" cap="flat">
+            <a:ln w="17246" cap="flat">
               <a:solidFill>
                 <a:srgbClr val="EBEBEB">
                   <a:alpha val="100000"/>
@@ -2830,15 +2830,15 @@
           </p:nvSpPr>
           <p:spPr>
             <a:xfrm>
-              <a:off x="2501542" y="2073503"/>
-              <a:ext cx="0" cy="3649639"/>
+              <a:off x="2574385" y="2209169"/>
+              <a:ext cx="0" cy="3404141"/>
             </a:xfrm>
             <a:custGeom>
               <a:avLst/>
               <a:pathLst>
-                <a:path w="0" h="3649639">
+                <a:path w="0" h="3404141">
                   <a:moveTo>
-                    <a:pt x="0" y="3649639"/>
+                    <a:pt x="0" y="3404141"/>
                   </a:moveTo>
                   <a:lnTo>
                     <a:pt x="0" y="0"/>
@@ -2849,7 +2849,7 @@
                 </a:path>
               </a:pathLst>
             </a:custGeom>
-            <a:ln w="13550" cap="flat">
+            <a:ln w="17246" cap="flat">
               <a:solidFill>
                 <a:srgbClr val="EBEBEB">
                   <a:alpha val="100000"/>
@@ -2873,15 +2873,15 @@
           </p:nvSpPr>
           <p:spPr>
             <a:xfrm>
-              <a:off x="4274200" y="2073503"/>
-              <a:ext cx="0" cy="3649639"/>
+              <a:off x="4320427" y="2209169"/>
+              <a:ext cx="0" cy="3404141"/>
             </a:xfrm>
             <a:custGeom>
               <a:avLst/>
               <a:pathLst>
-                <a:path w="0" h="3649639">
+                <a:path w="0" h="3404141">
                   <a:moveTo>
-                    <a:pt x="0" y="3649639"/>
+                    <a:pt x="0" y="3404141"/>
                   </a:moveTo>
                   <a:lnTo>
                     <a:pt x="0" y="0"/>
@@ -2892,7 +2892,7 @@
                 </a:path>
               </a:pathLst>
             </a:custGeom>
-            <a:ln w="13550" cap="flat">
+            <a:ln w="17246" cap="flat">
               <a:solidFill>
                 <a:srgbClr val="EBEBEB">
                   <a:alpha val="100000"/>
@@ -2916,15 +2916,15 @@
           </p:nvSpPr>
           <p:spPr>
             <a:xfrm>
-              <a:off x="6046857" y="2073503"/>
-              <a:ext cx="0" cy="3649639"/>
+              <a:off x="6066470" y="2209169"/>
+              <a:ext cx="0" cy="3404141"/>
             </a:xfrm>
             <a:custGeom>
               <a:avLst/>
               <a:pathLst>
-                <a:path w="0" h="3649639">
+                <a:path w="0" h="3404141">
                   <a:moveTo>
-                    <a:pt x="0" y="3649639"/>
+                    <a:pt x="0" y="3404141"/>
                   </a:moveTo>
                   <a:lnTo>
                     <a:pt x="0" y="0"/>
@@ -2935,7 +2935,7 @@
                 </a:path>
               </a:pathLst>
             </a:custGeom>
-            <a:ln w="13550" cap="flat">
+            <a:ln w="17246" cap="flat">
               <a:solidFill>
                 <a:srgbClr val="EBEBEB">
                   <a:alpha val="100000"/>
@@ -2959,15 +2959,15 @@
           </p:nvSpPr>
           <p:spPr>
             <a:xfrm>
-              <a:off x="7819515" y="2073503"/>
-              <a:ext cx="0" cy="3649639"/>
+              <a:off x="7812512" y="2209169"/>
+              <a:ext cx="0" cy="3404141"/>
             </a:xfrm>
             <a:custGeom>
               <a:avLst/>
               <a:pathLst>
-                <a:path w="0" h="3649639">
+                <a:path w="0" h="3404141">
                   <a:moveTo>
-                    <a:pt x="0" y="3649639"/>
+                    <a:pt x="0" y="3404141"/>
                   </a:moveTo>
                   <a:lnTo>
                     <a:pt x="0" y="0"/>
@@ -2978,7 +2978,7 @@
                 </a:path>
               </a:pathLst>
             </a:custGeom>
-            <a:ln w="13550" cap="flat">
+            <a:ln w="17246" cap="flat">
               <a:solidFill>
                 <a:srgbClr val="EBEBEB">
                   <a:alpha val="100000"/>
@@ -3002,531 +3002,531 @@
           </p:nvSpPr>
           <p:spPr>
             <a:xfrm>
-              <a:off x="817517" y="2073503"/>
-              <a:ext cx="7370972" cy="3445508"/>
+              <a:off x="915645" y="2209169"/>
+              <a:ext cx="7260303" cy="3213741"/>
             </a:xfrm>
             <a:custGeom>
               <a:avLst/>
               <a:pathLst>
-                <a:path w="7370972" h="3445508">
+                <a:path w="7260303" h="3213741">
                   <a:moveTo>
-                    <a:pt x="1528089" y="0"/>
+                    <a:pt x="1505146" y="0"/>
                   </a:moveTo>
                   <a:lnTo>
-                    <a:pt x="1548419" y="55463"/>
-                  </a:lnTo>
-                  <a:lnTo>
-                    <a:pt x="1626053" y="254937"/>
-                  </a:lnTo>
-                  <a:lnTo>
-                    <a:pt x="1703687" y="442805"/>
-                  </a:lnTo>
-                  <a:lnTo>
-                    <a:pt x="1781321" y="619742"/>
-                  </a:lnTo>
-                  <a:lnTo>
-                    <a:pt x="1858955" y="786384"/>
-                  </a:lnTo>
-                  <a:lnTo>
-                    <a:pt x="1936589" y="943330"/>
-                  </a:lnTo>
-                  <a:lnTo>
-                    <a:pt x="2014223" y="1091144"/>
-                  </a:lnTo>
-                  <a:lnTo>
-                    <a:pt x="2091857" y="1230357"/>
-                  </a:lnTo>
-                  <a:lnTo>
-                    <a:pt x="2169491" y="1361470"/>
-                  </a:lnTo>
-                  <a:lnTo>
-                    <a:pt x="2247125" y="1484955"/>
-                  </a:lnTo>
-                  <a:lnTo>
-                    <a:pt x="2324759" y="1601254"/>
-                  </a:lnTo>
-                  <a:lnTo>
-                    <a:pt x="2402393" y="1710787"/>
-                  </a:lnTo>
-                  <a:lnTo>
-                    <a:pt x="2480027" y="1813946"/>
-                  </a:lnTo>
-                  <a:lnTo>
-                    <a:pt x="2557661" y="1911103"/>
-                  </a:lnTo>
-                  <a:lnTo>
-                    <a:pt x="2635295" y="2002607"/>
-                  </a:lnTo>
-                  <a:lnTo>
-                    <a:pt x="2712930" y="2088787"/>
-                  </a:lnTo>
-                  <a:lnTo>
-                    <a:pt x="2790564" y="2169953"/>
-                  </a:lnTo>
-                  <a:lnTo>
-                    <a:pt x="2868198" y="2246396"/>
-                  </a:lnTo>
-                  <a:lnTo>
-                    <a:pt x="2945832" y="2318391"/>
-                  </a:lnTo>
-                  <a:lnTo>
-                    <a:pt x="3023466" y="2386197"/>
-                  </a:lnTo>
-                  <a:lnTo>
-                    <a:pt x="3101100" y="2450058"/>
-                  </a:lnTo>
-                  <a:lnTo>
-                    <a:pt x="3178734" y="2510203"/>
-                  </a:lnTo>
-                  <a:lnTo>
-                    <a:pt x="3256368" y="2566848"/>
-                  </a:lnTo>
-                  <a:lnTo>
-                    <a:pt x="3334002" y="2620198"/>
-                  </a:lnTo>
-                  <a:lnTo>
-                    <a:pt x="3411636" y="2651384"/>
-                  </a:lnTo>
-                  <a:lnTo>
-                    <a:pt x="3489270" y="2642490"/>
-                  </a:lnTo>
-                  <a:lnTo>
-                    <a:pt x="3566904" y="2633501"/>
-                  </a:lnTo>
-                  <a:lnTo>
-                    <a:pt x="3644538" y="2624416"/>
-                  </a:lnTo>
-                  <a:lnTo>
-                    <a:pt x="3722172" y="2615233"/>
-                  </a:lnTo>
-                  <a:lnTo>
-                    <a:pt x="3799806" y="2605953"/>
-                  </a:lnTo>
-                  <a:lnTo>
-                    <a:pt x="3877440" y="2596573"/>
-                  </a:lnTo>
-                  <a:lnTo>
-                    <a:pt x="3955074" y="2587094"/>
-                  </a:lnTo>
-                  <a:lnTo>
-                    <a:pt x="4032708" y="2577513"/>
-                  </a:lnTo>
-                  <a:lnTo>
-                    <a:pt x="4110342" y="2567829"/>
-                  </a:lnTo>
-                  <a:lnTo>
-                    <a:pt x="4187976" y="2558042"/>
-                  </a:lnTo>
-                  <a:lnTo>
-                    <a:pt x="4265610" y="2548151"/>
-                  </a:lnTo>
-                  <a:lnTo>
-                    <a:pt x="4343244" y="2538153"/>
-                  </a:lnTo>
-                  <a:lnTo>
-                    <a:pt x="4420879" y="2528049"/>
-                  </a:lnTo>
-                  <a:lnTo>
-                    <a:pt x="4498513" y="2517837"/>
-                  </a:lnTo>
-                  <a:lnTo>
-                    <a:pt x="4576147" y="2507516"/>
-                  </a:lnTo>
-                  <a:lnTo>
-                    <a:pt x="4653781" y="2497085"/>
-                  </a:lnTo>
-                  <a:lnTo>
-                    <a:pt x="4731415" y="2486542"/>
-                  </a:lnTo>
-                  <a:lnTo>
-                    <a:pt x="4809049" y="2475886"/>
-                  </a:lnTo>
-                  <a:lnTo>
-                    <a:pt x="4886683" y="2465117"/>
-                  </a:lnTo>
-                  <a:lnTo>
-                    <a:pt x="4964317" y="2454233"/>
-                  </a:lnTo>
-                  <a:lnTo>
-                    <a:pt x="5041951" y="2443232"/>
-                  </a:lnTo>
-                  <a:lnTo>
-                    <a:pt x="5119585" y="2432114"/>
-                  </a:lnTo>
-                  <a:lnTo>
-                    <a:pt x="5197219" y="2420876"/>
-                  </a:lnTo>
-                  <a:lnTo>
-                    <a:pt x="5274853" y="2409519"/>
-                  </a:lnTo>
-                  <a:lnTo>
-                    <a:pt x="5352487" y="2398041"/>
-                  </a:lnTo>
-                  <a:lnTo>
-                    <a:pt x="5430121" y="2386440"/>
-                  </a:lnTo>
-                  <a:lnTo>
-                    <a:pt x="5507755" y="2374714"/>
-                  </a:lnTo>
-                  <a:lnTo>
-                    <a:pt x="5585389" y="2362864"/>
-                  </a:lnTo>
-                  <a:lnTo>
-                    <a:pt x="5663023" y="2350887"/>
-                  </a:lnTo>
-                  <a:lnTo>
-                    <a:pt x="5740657" y="2338782"/>
-                  </a:lnTo>
-                  <a:lnTo>
-                    <a:pt x="5818291" y="2326547"/>
-                  </a:lnTo>
-                  <a:lnTo>
-                    <a:pt x="5895925" y="2314182"/>
-                  </a:lnTo>
-                  <a:lnTo>
-                    <a:pt x="5973559" y="2301685"/>
-                  </a:lnTo>
-                  <a:lnTo>
-                    <a:pt x="6051193" y="2289054"/>
-                  </a:lnTo>
-                  <a:lnTo>
-                    <a:pt x="6128827" y="2276289"/>
-                  </a:lnTo>
-                  <a:lnTo>
-                    <a:pt x="6206462" y="2263386"/>
-                  </a:lnTo>
-                  <a:lnTo>
-                    <a:pt x="6284096" y="2250346"/>
-                  </a:lnTo>
-                  <a:lnTo>
-                    <a:pt x="6361730" y="2237167"/>
-                  </a:lnTo>
-                  <a:lnTo>
-                    <a:pt x="6439364" y="2223847"/>
-                  </a:lnTo>
-                  <a:lnTo>
-                    <a:pt x="6516998" y="2210384"/>
-                  </a:lnTo>
-                  <a:lnTo>
-                    <a:pt x="6594632" y="2196778"/>
-                  </a:lnTo>
-                  <a:lnTo>
-                    <a:pt x="6672266" y="2183026"/>
-                  </a:lnTo>
-                  <a:lnTo>
-                    <a:pt x="6749900" y="2169127"/>
-                  </a:lnTo>
-                  <a:lnTo>
-                    <a:pt x="6827534" y="2155080"/>
-                  </a:lnTo>
-                  <a:lnTo>
-                    <a:pt x="6905168" y="2140883"/>
-                  </a:lnTo>
-                  <a:lnTo>
-                    <a:pt x="6982802" y="2126534"/>
-                  </a:lnTo>
-                  <a:lnTo>
-                    <a:pt x="7060436" y="2112032"/>
-                  </a:lnTo>
-                  <a:lnTo>
-                    <a:pt x="7138070" y="2097374"/>
-                  </a:lnTo>
-                  <a:lnTo>
-                    <a:pt x="7215704" y="2082560"/>
-                  </a:lnTo>
-                  <a:lnTo>
-                    <a:pt x="7293338" y="2067588"/>
-                  </a:lnTo>
-                  <a:lnTo>
-                    <a:pt x="7370972" y="2052456"/>
-                  </a:lnTo>
-                  <a:lnTo>
-                    <a:pt x="7370972" y="3445508"/>
-                  </a:lnTo>
-                  <a:lnTo>
-                    <a:pt x="7293338" y="3443146"/>
-                  </a:lnTo>
-                  <a:lnTo>
-                    <a:pt x="7215704" y="3440637"/>
-                  </a:lnTo>
-                  <a:lnTo>
-                    <a:pt x="7138070" y="3437974"/>
-                  </a:lnTo>
-                  <a:lnTo>
-                    <a:pt x="7060436" y="3435146"/>
-                  </a:lnTo>
-                  <a:lnTo>
-                    <a:pt x="6982802" y="3432144"/>
-                  </a:lnTo>
-                  <a:lnTo>
-                    <a:pt x="6905168" y="3428956"/>
-                  </a:lnTo>
-                  <a:lnTo>
-                    <a:pt x="6827534" y="3425571"/>
-                  </a:lnTo>
-                  <a:lnTo>
-                    <a:pt x="6749900" y="3421977"/>
-                  </a:lnTo>
-                  <a:lnTo>
-                    <a:pt x="6672266" y="3418161"/>
-                  </a:lnTo>
-                  <a:lnTo>
-                    <a:pt x="6594632" y="3414109"/>
-                  </a:lnTo>
-                  <a:lnTo>
-                    <a:pt x="6516998" y="3409807"/>
-                  </a:lnTo>
-                  <a:lnTo>
-                    <a:pt x="6439364" y="3405239"/>
-                  </a:lnTo>
-                  <a:lnTo>
-                    <a:pt x="6361730" y="3400388"/>
-                  </a:lnTo>
-                  <a:lnTo>
-                    <a:pt x="6284096" y="3395239"/>
-                  </a:lnTo>
-                  <a:lnTo>
-                    <a:pt x="6206462" y="3389771"/>
-                  </a:lnTo>
-                  <a:lnTo>
-                    <a:pt x="6128827" y="3383965"/>
-                  </a:lnTo>
-                  <a:lnTo>
-                    <a:pt x="6051193" y="3377800"/>
-                  </a:lnTo>
-                  <a:lnTo>
-                    <a:pt x="5973559" y="3371255"/>
-                  </a:lnTo>
-                  <a:lnTo>
-                    <a:pt x="5895925" y="3364306"/>
-                  </a:lnTo>
-                  <a:lnTo>
-                    <a:pt x="5818291" y="3356927"/>
-                  </a:lnTo>
-                  <a:lnTo>
-                    <a:pt x="5740657" y="3349092"/>
-                  </a:lnTo>
-                  <a:lnTo>
-                    <a:pt x="5663023" y="3340773"/>
-                  </a:lnTo>
-                  <a:lnTo>
-                    <a:pt x="5585389" y="3331940"/>
-                  </a:lnTo>
-                  <a:lnTo>
-                    <a:pt x="5507755" y="3322561"/>
-                  </a:lnTo>
-                  <a:lnTo>
-                    <a:pt x="5430121" y="3312603"/>
-                  </a:lnTo>
-                  <a:lnTo>
-                    <a:pt x="5352487" y="3302030"/>
-                  </a:lnTo>
-                  <a:lnTo>
-                    <a:pt x="5274853" y="3290804"/>
-                  </a:lnTo>
-                  <a:lnTo>
-                    <a:pt x="5197219" y="3278884"/>
-                  </a:lnTo>
-                  <a:lnTo>
-                    <a:pt x="5119585" y="3266228"/>
-                  </a:lnTo>
-                  <a:lnTo>
-                    <a:pt x="5041951" y="3252790"/>
-                  </a:lnTo>
-                  <a:lnTo>
-                    <a:pt x="4964317" y="3238521"/>
-                  </a:lnTo>
-                  <a:lnTo>
-                    <a:pt x="4886683" y="3223371"/>
-                  </a:lnTo>
-                  <a:lnTo>
-                    <a:pt x="4809049" y="3207285"/>
-                  </a:lnTo>
-                  <a:lnTo>
-                    <a:pt x="4731415" y="3190206"/>
-                  </a:lnTo>
-                  <a:lnTo>
-                    <a:pt x="4653781" y="3172071"/>
-                  </a:lnTo>
-                  <a:lnTo>
-                    <a:pt x="4576147" y="3152816"/>
-                  </a:lnTo>
-                  <a:lnTo>
-                    <a:pt x="4498513" y="3132371"/>
-                  </a:lnTo>
-                  <a:lnTo>
-                    <a:pt x="4420879" y="3110663"/>
-                  </a:lnTo>
-                  <a:lnTo>
-                    <a:pt x="4343244" y="3087614"/>
-                  </a:lnTo>
-                  <a:lnTo>
-                    <a:pt x="4265610" y="3063141"/>
-                  </a:lnTo>
-                  <a:lnTo>
-                    <a:pt x="4187976" y="3037157"/>
-                  </a:lnTo>
-                  <a:lnTo>
-                    <a:pt x="4110342" y="3009567"/>
-                  </a:lnTo>
-                  <a:lnTo>
-                    <a:pt x="4032708" y="2980272"/>
-                  </a:lnTo>
-                  <a:lnTo>
-                    <a:pt x="3955074" y="2949167"/>
-                  </a:lnTo>
-                  <a:lnTo>
-                    <a:pt x="3877440" y="2916141"/>
-                  </a:lnTo>
-                  <a:lnTo>
-                    <a:pt x="3799806" y="2881075"/>
-                  </a:lnTo>
-                  <a:lnTo>
-                    <a:pt x="3722172" y="2843842"/>
-                  </a:lnTo>
-                  <a:lnTo>
-                    <a:pt x="3644538" y="2804309"/>
-                  </a:lnTo>
-                  <a:lnTo>
-                    <a:pt x="3566904" y="2762334"/>
-                  </a:lnTo>
-                  <a:lnTo>
-                    <a:pt x="3489270" y="2717766"/>
-                  </a:lnTo>
-                  <a:lnTo>
-                    <a:pt x="3411636" y="2670444"/>
-                  </a:lnTo>
-                  <a:lnTo>
-                    <a:pt x="3334002" y="2660184"/>
-                  </a:lnTo>
-                  <a:lnTo>
-                    <a:pt x="3256368" y="2668891"/>
-                  </a:lnTo>
-                  <a:lnTo>
-                    <a:pt x="3178734" y="2677506"/>
-                  </a:lnTo>
-                  <a:lnTo>
-                    <a:pt x="3101100" y="2686030"/>
-                  </a:lnTo>
-                  <a:lnTo>
-                    <a:pt x="3023466" y="2694464"/>
-                  </a:lnTo>
-                  <a:lnTo>
-                    <a:pt x="2945832" y="2702809"/>
-                  </a:lnTo>
-                  <a:lnTo>
-                    <a:pt x="2868198" y="2711065"/>
-                  </a:lnTo>
-                  <a:lnTo>
-                    <a:pt x="2790564" y="2719234"/>
-                  </a:lnTo>
-                  <a:lnTo>
-                    <a:pt x="2712930" y="2727317"/>
-                  </a:lnTo>
-                  <a:lnTo>
-                    <a:pt x="2635295" y="2735314"/>
-                  </a:lnTo>
-                  <a:lnTo>
-                    <a:pt x="2557661" y="2743227"/>
-                  </a:lnTo>
-                  <a:lnTo>
-                    <a:pt x="2480027" y="2751056"/>
-                  </a:lnTo>
-                  <a:lnTo>
-                    <a:pt x="2402393" y="2758802"/>
-                  </a:lnTo>
-                  <a:lnTo>
-                    <a:pt x="2324759" y="2766467"/>
-                  </a:lnTo>
-                  <a:lnTo>
-                    <a:pt x="2247125" y="2774050"/>
-                  </a:lnTo>
-                  <a:lnTo>
-                    <a:pt x="2169491" y="2781553"/>
-                  </a:lnTo>
-                  <a:lnTo>
-                    <a:pt x="2091857" y="2788977"/>
-                  </a:lnTo>
-                  <a:lnTo>
-                    <a:pt x="2014223" y="2796323"/>
-                  </a:lnTo>
-                  <a:lnTo>
-                    <a:pt x="1936589" y="2803590"/>
-                  </a:lnTo>
-                  <a:lnTo>
-                    <a:pt x="1858955" y="2810781"/>
-                  </a:lnTo>
-                  <a:lnTo>
-                    <a:pt x="1781321" y="2817896"/>
-                  </a:lnTo>
-                  <a:lnTo>
-                    <a:pt x="1703687" y="2824936"/>
-                  </a:lnTo>
-                  <a:lnTo>
-                    <a:pt x="1626053" y="2831901"/>
-                  </a:lnTo>
-                  <a:lnTo>
-                    <a:pt x="1548419" y="2838793"/>
-                  </a:lnTo>
-                  <a:lnTo>
-                    <a:pt x="1470785" y="2845611"/>
-                  </a:lnTo>
-                  <a:lnTo>
-                    <a:pt x="1393151" y="2852358"/>
-                  </a:lnTo>
-                  <a:lnTo>
-                    <a:pt x="1315517" y="2859033"/>
-                  </a:lnTo>
-                  <a:lnTo>
-                    <a:pt x="1237883" y="2865638"/>
-                  </a:lnTo>
-                  <a:lnTo>
-                    <a:pt x="1160249" y="2872173"/>
-                  </a:lnTo>
-                  <a:lnTo>
-                    <a:pt x="1082615" y="2878639"/>
-                  </a:lnTo>
-                  <a:lnTo>
-                    <a:pt x="1004981" y="2885036"/>
-                  </a:lnTo>
-                  <a:lnTo>
-                    <a:pt x="927346" y="2891366"/>
-                  </a:lnTo>
-                  <a:lnTo>
-                    <a:pt x="849712" y="2897629"/>
-                  </a:lnTo>
-                  <a:lnTo>
-                    <a:pt x="772078" y="2903826"/>
-                  </a:lnTo>
-                  <a:lnTo>
-                    <a:pt x="694444" y="2909957"/>
-                  </a:lnTo>
-                  <a:lnTo>
-                    <a:pt x="616810" y="2916023"/>
-                  </a:lnTo>
-                  <a:lnTo>
-                    <a:pt x="539176" y="2922025"/>
-                  </a:lnTo>
-                  <a:lnTo>
-                    <a:pt x="461542" y="2927964"/>
-                  </a:lnTo>
-                  <a:lnTo>
-                    <a:pt x="383908" y="2933840"/>
-                  </a:lnTo>
-                  <a:lnTo>
-                    <a:pt x="306274" y="2939654"/>
-                  </a:lnTo>
-                  <a:lnTo>
-                    <a:pt x="228640" y="2945406"/>
-                  </a:lnTo>
-                  <a:lnTo>
-                    <a:pt x="151006" y="2951098"/>
-                  </a:lnTo>
-                  <a:lnTo>
-                    <a:pt x="73372" y="2956729"/>
-                  </a:lnTo>
-                  <a:lnTo>
-                    <a:pt x="0" y="2961995"/>
+                    <a:pt x="1525171" y="51732"/>
+                  </a:lnTo>
+                  <a:lnTo>
+                    <a:pt x="1601639" y="237789"/>
+                  </a:lnTo>
+                  <a:lnTo>
+                    <a:pt x="1678107" y="413019"/>
+                  </a:lnTo>
+                  <a:lnTo>
+                    <a:pt x="1754576" y="578054"/>
+                  </a:lnTo>
+                  <a:lnTo>
+                    <a:pt x="1831044" y="733487"/>
+                  </a:lnTo>
+                  <a:lnTo>
+                    <a:pt x="1907513" y="879875"/>
+                  </a:lnTo>
+                  <a:lnTo>
+                    <a:pt x="1983981" y="1017746"/>
+                  </a:lnTo>
+                  <a:lnTo>
+                    <a:pt x="2060450" y="1147595"/>
+                  </a:lnTo>
+                  <a:lnTo>
+                    <a:pt x="2136918" y="1269889"/>
+                  </a:lnTo>
+                  <a:lnTo>
+                    <a:pt x="2213386" y="1385067"/>
+                  </a:lnTo>
+                  <a:lnTo>
+                    <a:pt x="2289855" y="1493544"/>
+                  </a:lnTo>
+                  <a:lnTo>
+                    <a:pt x="2366323" y="1595708"/>
+                  </a:lnTo>
+                  <a:lnTo>
+                    <a:pt x="2442792" y="1691929"/>
+                  </a:lnTo>
+                  <a:lnTo>
+                    <a:pt x="2519260" y="1782550"/>
+                  </a:lnTo>
+                  <a:lnTo>
+                    <a:pt x="2595729" y="1867899"/>
+                  </a:lnTo>
+                  <a:lnTo>
+                    <a:pt x="2672197" y="1948282"/>
+                  </a:lnTo>
+                  <a:lnTo>
+                    <a:pt x="2748666" y="2023988"/>
+                  </a:lnTo>
+                  <a:lnTo>
+                    <a:pt x="2825134" y="2095289"/>
+                  </a:lnTo>
+                  <a:lnTo>
+                    <a:pt x="2901602" y="2162441"/>
+                  </a:lnTo>
+                  <a:lnTo>
+                    <a:pt x="2978071" y="2225686"/>
+                  </a:lnTo>
+                  <a:lnTo>
+                    <a:pt x="3054539" y="2285251"/>
+                  </a:lnTo>
+                  <a:lnTo>
+                    <a:pt x="3131008" y="2341351"/>
+                  </a:lnTo>
+                  <a:lnTo>
+                    <a:pt x="3207476" y="2394186"/>
+                  </a:lnTo>
+                  <a:lnTo>
+                    <a:pt x="3283945" y="2443947"/>
+                  </a:lnTo>
+                  <a:lnTo>
+                    <a:pt x="3360413" y="2473035"/>
+                  </a:lnTo>
+                  <a:lnTo>
+                    <a:pt x="3436881" y="2464739"/>
+                  </a:lnTo>
+                  <a:lnTo>
+                    <a:pt x="3513350" y="2456355"/>
+                  </a:lnTo>
+                  <a:lnTo>
+                    <a:pt x="3589818" y="2447881"/>
+                  </a:lnTo>
+                  <a:lnTo>
+                    <a:pt x="3666287" y="2439316"/>
+                  </a:lnTo>
+                  <a:lnTo>
+                    <a:pt x="3742755" y="2430660"/>
+                  </a:lnTo>
+                  <a:lnTo>
+                    <a:pt x="3819224" y="2421911"/>
+                  </a:lnTo>
+                  <a:lnTo>
+                    <a:pt x="3895692" y="2413069"/>
+                  </a:lnTo>
+                  <a:lnTo>
+                    <a:pt x="3972160" y="2404133"/>
+                  </a:lnTo>
+                  <a:lnTo>
+                    <a:pt x="4048629" y="2395101"/>
+                  </a:lnTo>
+                  <a:lnTo>
+                    <a:pt x="4125097" y="2385972"/>
+                  </a:lnTo>
+                  <a:lnTo>
+                    <a:pt x="4201566" y="2376746"/>
+                  </a:lnTo>
+                  <a:lnTo>
+                    <a:pt x="4278034" y="2367421"/>
+                  </a:lnTo>
+                  <a:lnTo>
+                    <a:pt x="4354503" y="2357997"/>
+                  </a:lnTo>
+                  <a:lnTo>
+                    <a:pt x="4430971" y="2348472"/>
+                  </a:lnTo>
+                  <a:lnTo>
+                    <a:pt x="4507439" y="2338845"/>
+                  </a:lnTo>
+                  <a:lnTo>
+                    <a:pt x="4583908" y="2329115"/>
+                  </a:lnTo>
+                  <a:lnTo>
+                    <a:pt x="4660376" y="2319281"/>
+                  </a:lnTo>
+                  <a:lnTo>
+                    <a:pt x="4736845" y="2309343"/>
+                  </a:lnTo>
+                  <a:lnTo>
+                    <a:pt x="4813313" y="2299298"/>
+                  </a:lnTo>
+                  <a:lnTo>
+                    <a:pt x="4889782" y="2289145"/>
+                  </a:lnTo>
+                  <a:lnTo>
+                    <a:pt x="4966250" y="2278885"/>
+                  </a:lnTo>
+                  <a:lnTo>
+                    <a:pt x="5042719" y="2268514"/>
+                  </a:lnTo>
+                  <a:lnTo>
+                    <a:pt x="5119187" y="2258033"/>
+                  </a:lnTo>
+                  <a:lnTo>
+                    <a:pt x="5195655" y="2247440"/>
+                  </a:lnTo>
+                  <a:lnTo>
+                    <a:pt x="5272124" y="2236733"/>
+                  </a:lnTo>
+                  <a:lnTo>
+                    <a:pt x="5348592" y="2225913"/>
+                  </a:lnTo>
+                  <a:lnTo>
+                    <a:pt x="5425061" y="2214976"/>
+                  </a:lnTo>
+                  <a:lnTo>
+                    <a:pt x="5501529" y="2203923"/>
+                  </a:lnTo>
+                  <a:lnTo>
+                    <a:pt x="5577998" y="2192751"/>
+                  </a:lnTo>
+                  <a:lnTo>
+                    <a:pt x="5654466" y="2181461"/>
+                  </a:lnTo>
+                  <a:lnTo>
+                    <a:pt x="5730934" y="2170049"/>
+                  </a:lnTo>
+                  <a:lnTo>
+                    <a:pt x="5807403" y="2158516"/>
+                  </a:lnTo>
+                  <a:lnTo>
+                    <a:pt x="5883871" y="2146859"/>
+                  </a:lnTo>
+                  <a:lnTo>
+                    <a:pt x="5960340" y="2135078"/>
+                  </a:lnTo>
+                  <a:lnTo>
+                    <a:pt x="6036808" y="2123171"/>
+                  </a:lnTo>
+                  <a:lnTo>
+                    <a:pt x="6113277" y="2111137"/>
+                  </a:lnTo>
+                  <a:lnTo>
+                    <a:pt x="6189745" y="2098974"/>
+                  </a:lnTo>
+                  <a:lnTo>
+                    <a:pt x="6266213" y="2086681"/>
+                  </a:lnTo>
+                  <a:lnTo>
+                    <a:pt x="6342682" y="2074257"/>
+                  </a:lnTo>
+                  <a:lnTo>
+                    <a:pt x="6419150" y="2061700"/>
+                  </a:lnTo>
+                  <a:lnTo>
+                    <a:pt x="6495619" y="2049009"/>
+                  </a:lnTo>
+                  <a:lnTo>
+                    <a:pt x="6572087" y="2036182"/>
+                  </a:lnTo>
+                  <a:lnTo>
+                    <a:pt x="6648556" y="2023218"/>
+                  </a:lnTo>
+                  <a:lnTo>
+                    <a:pt x="6725024" y="2010116"/>
+                  </a:lnTo>
+                  <a:lnTo>
+                    <a:pt x="6801492" y="1996874"/>
+                  </a:lnTo>
+                  <a:lnTo>
+                    <a:pt x="6877961" y="1983490"/>
+                  </a:lnTo>
+                  <a:lnTo>
+                    <a:pt x="6954429" y="1969963"/>
+                  </a:lnTo>
+                  <a:lnTo>
+                    <a:pt x="7030898" y="1956292"/>
+                  </a:lnTo>
+                  <a:lnTo>
+                    <a:pt x="7107366" y="1942474"/>
+                  </a:lnTo>
+                  <a:lnTo>
+                    <a:pt x="7183835" y="1928509"/>
+                  </a:lnTo>
+                  <a:lnTo>
+                    <a:pt x="7260303" y="1914395"/>
+                  </a:lnTo>
+                  <a:lnTo>
+                    <a:pt x="7260303" y="3213741"/>
+                  </a:lnTo>
+                  <a:lnTo>
+                    <a:pt x="7183835" y="3211538"/>
+                  </a:lnTo>
+                  <a:lnTo>
+                    <a:pt x="7107366" y="3209198"/>
+                  </a:lnTo>
+                  <a:lnTo>
+                    <a:pt x="7030898" y="3206714"/>
+                  </a:lnTo>
+                  <a:lnTo>
+                    <a:pt x="6954429" y="3204077"/>
+                  </a:lnTo>
+                  <a:lnTo>
+                    <a:pt x="6877961" y="3201276"/>
+                  </a:lnTo>
+                  <a:lnTo>
+                    <a:pt x="6801492" y="3198302"/>
+                  </a:lnTo>
+                  <a:lnTo>
+                    <a:pt x="6725024" y="3195145"/>
+                  </a:lnTo>
+                  <a:lnTo>
+                    <a:pt x="6648556" y="3191793"/>
+                  </a:lnTo>
+                  <a:lnTo>
+                    <a:pt x="6572087" y="3188234"/>
+                  </a:lnTo>
+                  <a:lnTo>
+                    <a:pt x="6495619" y="3184454"/>
+                  </a:lnTo>
+                  <a:lnTo>
+                    <a:pt x="6419150" y="3180441"/>
+                  </a:lnTo>
+                  <a:lnTo>
+                    <a:pt x="6342682" y="3176181"/>
+                  </a:lnTo>
+                  <a:lnTo>
+                    <a:pt x="6266213" y="3171657"/>
+                  </a:lnTo>
+                  <a:lnTo>
+                    <a:pt x="6189745" y="3166853"/>
+                  </a:lnTo>
+                  <a:lnTo>
+                    <a:pt x="6113277" y="3161753"/>
+                  </a:lnTo>
+                  <a:lnTo>
+                    <a:pt x="6036808" y="3156338"/>
+                  </a:lnTo>
+                  <a:lnTo>
+                    <a:pt x="5960340" y="3150588"/>
+                  </a:lnTo>
+                  <a:lnTo>
+                    <a:pt x="5883871" y="3144483"/>
+                  </a:lnTo>
+                  <a:lnTo>
+                    <a:pt x="5807403" y="3138001"/>
+                  </a:lnTo>
+                  <a:lnTo>
+                    <a:pt x="5730934" y="3131118"/>
+                  </a:lnTo>
+                  <a:lnTo>
+                    <a:pt x="5654466" y="3123811"/>
+                  </a:lnTo>
+                  <a:lnTo>
+                    <a:pt x="5577998" y="3116051"/>
+                  </a:lnTo>
+                  <a:lnTo>
+                    <a:pt x="5501529" y="3107812"/>
+                  </a:lnTo>
+                  <a:lnTo>
+                    <a:pt x="5425061" y="3099065"/>
+                  </a:lnTo>
+                  <a:lnTo>
+                    <a:pt x="5348592" y="3089777"/>
+                  </a:lnTo>
+                  <a:lnTo>
+                    <a:pt x="5272124" y="3079915"/>
+                  </a:lnTo>
+                  <a:lnTo>
+                    <a:pt x="5195655" y="3069444"/>
+                  </a:lnTo>
+                  <a:lnTo>
+                    <a:pt x="5119187" y="3058326"/>
+                  </a:lnTo>
+                  <a:lnTo>
+                    <a:pt x="5042719" y="3046521"/>
+                  </a:lnTo>
+                  <a:lnTo>
+                    <a:pt x="4966250" y="3033986"/>
+                  </a:lnTo>
+                  <a:lnTo>
+                    <a:pt x="4889782" y="3020678"/>
+                  </a:lnTo>
+                  <a:lnTo>
+                    <a:pt x="4813313" y="3006547"/>
+                  </a:lnTo>
+                  <a:lnTo>
+                    <a:pt x="4736845" y="2991543"/>
+                  </a:lnTo>
+                  <a:lnTo>
+                    <a:pt x="4660376" y="2975612"/>
+                  </a:lnTo>
+                  <a:lnTo>
+                    <a:pt x="4583908" y="2958697"/>
+                  </a:lnTo>
+                  <a:lnTo>
+                    <a:pt x="4507439" y="2940737"/>
+                  </a:lnTo>
+                  <a:lnTo>
+                    <a:pt x="4430971" y="2921668"/>
+                  </a:lnTo>
+                  <a:lnTo>
+                    <a:pt x="4354503" y="2901420"/>
+                  </a:lnTo>
+                  <a:lnTo>
+                    <a:pt x="4278034" y="2879922"/>
+                  </a:lnTo>
+                  <a:lnTo>
+                    <a:pt x="4201566" y="2857095"/>
+                  </a:lnTo>
+                  <a:lnTo>
+                    <a:pt x="4125097" y="2832858"/>
+                  </a:lnTo>
+                  <a:lnTo>
+                    <a:pt x="4048629" y="2807124"/>
+                  </a:lnTo>
+                  <a:lnTo>
+                    <a:pt x="3972160" y="2779800"/>
+                  </a:lnTo>
+                  <a:lnTo>
+                    <a:pt x="3895692" y="2750788"/>
+                  </a:lnTo>
+                  <a:lnTo>
+                    <a:pt x="3819224" y="2719983"/>
+                  </a:lnTo>
+                  <a:lnTo>
+                    <a:pt x="3742755" y="2687276"/>
+                  </a:lnTo>
+                  <a:lnTo>
+                    <a:pt x="3666287" y="2652547"/>
+                  </a:lnTo>
+                  <a:lnTo>
+                    <a:pt x="3589818" y="2615674"/>
+                  </a:lnTo>
+                  <a:lnTo>
+                    <a:pt x="3513350" y="2576522"/>
+                  </a:lnTo>
+                  <a:lnTo>
+                    <a:pt x="3436881" y="2534951"/>
+                  </a:lnTo>
+                  <a:lnTo>
+                    <a:pt x="3360413" y="2490813"/>
+                  </a:lnTo>
+                  <a:lnTo>
+                    <a:pt x="3283945" y="2481243"/>
+                  </a:lnTo>
+                  <a:lnTo>
+                    <a:pt x="3207476" y="2489365"/>
+                  </a:lnTo>
+                  <a:lnTo>
+                    <a:pt x="3131008" y="2497400"/>
+                  </a:lnTo>
+                  <a:lnTo>
+                    <a:pt x="3054539" y="2505351"/>
+                  </a:lnTo>
+                  <a:lnTo>
+                    <a:pt x="2978071" y="2513217"/>
+                  </a:lnTo>
+                  <a:lnTo>
+                    <a:pt x="2901602" y="2521001"/>
+                  </a:lnTo>
+                  <a:lnTo>
+                    <a:pt x="2825134" y="2528702"/>
+                  </a:lnTo>
+                  <a:lnTo>
+                    <a:pt x="2748666" y="2536321"/>
+                  </a:lnTo>
+                  <a:lnTo>
+                    <a:pt x="2672197" y="2543860"/>
+                  </a:lnTo>
+                  <a:lnTo>
+                    <a:pt x="2595729" y="2551320"/>
+                  </a:lnTo>
+                  <a:lnTo>
+                    <a:pt x="2519260" y="2558700"/>
+                  </a:lnTo>
+                  <a:lnTo>
+                    <a:pt x="2442792" y="2566003"/>
+                  </a:lnTo>
+                  <a:lnTo>
+                    <a:pt x="2366323" y="2573228"/>
+                  </a:lnTo>
+                  <a:lnTo>
+                    <a:pt x="2289855" y="2580377"/>
+                  </a:lnTo>
+                  <a:lnTo>
+                    <a:pt x="2213386" y="2587450"/>
+                  </a:lnTo>
+                  <a:lnTo>
+                    <a:pt x="2136918" y="2594448"/>
+                  </a:lnTo>
+                  <a:lnTo>
+                    <a:pt x="2060450" y="2601373"/>
+                  </a:lnTo>
+                  <a:lnTo>
+                    <a:pt x="1983981" y="2608224"/>
+                  </a:lnTo>
+                  <a:lnTo>
+                    <a:pt x="1907513" y="2615003"/>
+                  </a:lnTo>
+                  <a:lnTo>
+                    <a:pt x="1831044" y="2621710"/>
+                  </a:lnTo>
+                  <a:lnTo>
+                    <a:pt x="1754576" y="2628347"/>
+                  </a:lnTo>
+                  <a:lnTo>
+                    <a:pt x="1678107" y="2634913"/>
+                  </a:lnTo>
+                  <a:lnTo>
+                    <a:pt x="1601639" y="2641409"/>
+                  </a:lnTo>
+                  <a:lnTo>
+                    <a:pt x="1525171" y="2647837"/>
+                  </a:lnTo>
+                  <a:lnTo>
+                    <a:pt x="1448702" y="2654197"/>
+                  </a:lnTo>
+                  <a:lnTo>
+                    <a:pt x="1372234" y="2660490"/>
+                  </a:lnTo>
+                  <a:lnTo>
+                    <a:pt x="1295765" y="2666717"/>
+                  </a:lnTo>
+                  <a:lnTo>
+                    <a:pt x="1219297" y="2672877"/>
+                  </a:lnTo>
+                  <a:lnTo>
+                    <a:pt x="1142828" y="2678972"/>
+                  </a:lnTo>
+                  <a:lnTo>
+                    <a:pt x="1066360" y="2685003"/>
+                  </a:lnTo>
+                  <a:lnTo>
+                    <a:pt x="989892" y="2690970"/>
+                  </a:lnTo>
+                  <a:lnTo>
+                    <a:pt x="913423" y="2696874"/>
+                  </a:lnTo>
+                  <a:lnTo>
+                    <a:pt x="836955" y="2702716"/>
+                  </a:lnTo>
+                  <a:lnTo>
+                    <a:pt x="760486" y="2708496"/>
+                  </a:lnTo>
+                  <a:lnTo>
+                    <a:pt x="684018" y="2714215"/>
+                  </a:lnTo>
+                  <a:lnTo>
+                    <a:pt x="607549" y="2719873"/>
+                  </a:lnTo>
+                  <a:lnTo>
+                    <a:pt x="531081" y="2725471"/>
+                  </a:lnTo>
+                  <a:lnTo>
+                    <a:pt x="454613" y="2731011"/>
+                  </a:lnTo>
+                  <a:lnTo>
+                    <a:pt x="378144" y="2736491"/>
+                  </a:lnTo>
+                  <a:lnTo>
+                    <a:pt x="301676" y="2741914"/>
+                  </a:lnTo>
+                  <a:lnTo>
+                    <a:pt x="225207" y="2747280"/>
+                  </a:lnTo>
+                  <a:lnTo>
+                    <a:pt x="148739" y="2752588"/>
+                  </a:lnTo>
+                  <a:lnTo>
+                    <a:pt x="72270" y="2757841"/>
+                  </a:lnTo>
+                  <a:lnTo>
+                    <a:pt x="0" y="2762753"/>
                   </a:lnTo>
                   <a:close/>
                 </a:path>
@@ -3552,243 +3552,243 @@
           </p:nvSpPr>
           <p:spPr>
             <a:xfrm>
-              <a:off x="2345607" y="2073503"/>
-              <a:ext cx="5842883" cy="2651384"/>
+              <a:off x="2420791" y="2209169"/>
+              <a:ext cx="5755157" cy="2473035"/>
             </a:xfrm>
             <a:custGeom>
               <a:avLst/>
               <a:pathLst>
-                <a:path w="5842883" h="2651384">
+                <a:path w="5755157" h="2473035">
                   <a:moveTo>
                     <a:pt x="0" y="0"/>
                   </a:moveTo>
                   <a:lnTo>
-                    <a:pt x="20330" y="55463"/>
-                  </a:lnTo>
-                  <a:lnTo>
-                    <a:pt x="97964" y="254937"/>
-                  </a:lnTo>
-                  <a:lnTo>
-                    <a:pt x="175598" y="442805"/>
-                  </a:lnTo>
-                  <a:lnTo>
-                    <a:pt x="253232" y="619742"/>
-                  </a:lnTo>
-                  <a:lnTo>
-                    <a:pt x="330866" y="786384"/>
-                  </a:lnTo>
-                  <a:lnTo>
-                    <a:pt x="408500" y="943330"/>
-                  </a:lnTo>
-                  <a:lnTo>
-                    <a:pt x="486134" y="1091144"/>
-                  </a:lnTo>
-                  <a:lnTo>
-                    <a:pt x="563768" y="1230357"/>
-                  </a:lnTo>
-                  <a:lnTo>
-                    <a:pt x="641402" y="1361470"/>
-                  </a:lnTo>
-                  <a:lnTo>
-                    <a:pt x="719036" y="1484955"/>
-                  </a:lnTo>
-                  <a:lnTo>
-                    <a:pt x="796670" y="1601254"/>
-                  </a:lnTo>
-                  <a:lnTo>
-                    <a:pt x="874304" y="1710787"/>
-                  </a:lnTo>
-                  <a:lnTo>
-                    <a:pt x="951938" y="1813946"/>
-                  </a:lnTo>
-                  <a:lnTo>
-                    <a:pt x="1029572" y="1911103"/>
-                  </a:lnTo>
-                  <a:lnTo>
-                    <a:pt x="1107206" y="2002607"/>
-                  </a:lnTo>
-                  <a:lnTo>
-                    <a:pt x="1184840" y="2088787"/>
-                  </a:lnTo>
-                  <a:lnTo>
-                    <a:pt x="1262474" y="2169953"/>
-                  </a:lnTo>
-                  <a:lnTo>
-                    <a:pt x="1340108" y="2246396"/>
-                  </a:lnTo>
-                  <a:lnTo>
-                    <a:pt x="1417742" y="2318391"/>
-                  </a:lnTo>
-                  <a:lnTo>
-                    <a:pt x="1495376" y="2386197"/>
-                  </a:lnTo>
-                  <a:lnTo>
-                    <a:pt x="1573010" y="2450058"/>
-                  </a:lnTo>
-                  <a:lnTo>
-                    <a:pt x="1650644" y="2510203"/>
-                  </a:lnTo>
-                  <a:lnTo>
-                    <a:pt x="1728279" y="2566848"/>
-                  </a:lnTo>
-                  <a:lnTo>
-                    <a:pt x="1805913" y="2620198"/>
-                  </a:lnTo>
-                  <a:lnTo>
-                    <a:pt x="1883547" y="2651384"/>
-                  </a:lnTo>
-                  <a:lnTo>
-                    <a:pt x="1961181" y="2642490"/>
-                  </a:lnTo>
-                  <a:lnTo>
-                    <a:pt x="2038815" y="2633501"/>
-                  </a:lnTo>
-                  <a:lnTo>
-                    <a:pt x="2116449" y="2624416"/>
-                  </a:lnTo>
-                  <a:lnTo>
-                    <a:pt x="2194083" y="2615233"/>
-                  </a:lnTo>
-                  <a:lnTo>
-                    <a:pt x="2271717" y="2605953"/>
-                  </a:lnTo>
-                  <a:lnTo>
-                    <a:pt x="2349351" y="2596573"/>
-                  </a:lnTo>
-                  <a:lnTo>
-                    <a:pt x="2426985" y="2587094"/>
-                  </a:lnTo>
-                  <a:lnTo>
-                    <a:pt x="2504619" y="2577513"/>
-                  </a:lnTo>
-                  <a:lnTo>
-                    <a:pt x="2582253" y="2567829"/>
-                  </a:lnTo>
-                  <a:lnTo>
-                    <a:pt x="2659887" y="2558042"/>
-                  </a:lnTo>
-                  <a:lnTo>
-                    <a:pt x="2737521" y="2548151"/>
-                  </a:lnTo>
-                  <a:lnTo>
-                    <a:pt x="2815155" y="2538153"/>
-                  </a:lnTo>
-                  <a:lnTo>
-                    <a:pt x="2892789" y="2528049"/>
-                  </a:lnTo>
-                  <a:lnTo>
-                    <a:pt x="2970423" y="2517837"/>
-                  </a:lnTo>
-                  <a:lnTo>
-                    <a:pt x="3048057" y="2507516"/>
-                  </a:lnTo>
-                  <a:lnTo>
-                    <a:pt x="3125691" y="2497085"/>
-                  </a:lnTo>
-                  <a:lnTo>
-                    <a:pt x="3203325" y="2486542"/>
-                  </a:lnTo>
-                  <a:lnTo>
-                    <a:pt x="3280959" y="2475886"/>
-                  </a:lnTo>
-                  <a:lnTo>
-                    <a:pt x="3358593" y="2465117"/>
-                  </a:lnTo>
-                  <a:lnTo>
-                    <a:pt x="3436228" y="2454233"/>
-                  </a:lnTo>
-                  <a:lnTo>
-                    <a:pt x="3513862" y="2443232"/>
-                  </a:lnTo>
-                  <a:lnTo>
-                    <a:pt x="3591496" y="2432114"/>
-                  </a:lnTo>
-                  <a:lnTo>
-                    <a:pt x="3669130" y="2420876"/>
-                  </a:lnTo>
-                  <a:lnTo>
-                    <a:pt x="3746764" y="2409519"/>
-                  </a:lnTo>
-                  <a:lnTo>
-                    <a:pt x="3824398" y="2398041"/>
-                  </a:lnTo>
-                  <a:lnTo>
-                    <a:pt x="3902032" y="2386440"/>
-                  </a:lnTo>
-                  <a:lnTo>
-                    <a:pt x="3979666" y="2374714"/>
-                  </a:lnTo>
-                  <a:lnTo>
-                    <a:pt x="4057300" y="2362864"/>
-                  </a:lnTo>
-                  <a:lnTo>
-                    <a:pt x="4134934" y="2350887"/>
-                  </a:lnTo>
-                  <a:lnTo>
-                    <a:pt x="4212568" y="2338782"/>
-                  </a:lnTo>
-                  <a:lnTo>
-                    <a:pt x="4290202" y="2326547"/>
-                  </a:lnTo>
-                  <a:lnTo>
-                    <a:pt x="4367836" y="2314182"/>
-                  </a:lnTo>
-                  <a:lnTo>
-                    <a:pt x="4445470" y="2301685"/>
-                  </a:lnTo>
-                  <a:lnTo>
-                    <a:pt x="4523104" y="2289054"/>
-                  </a:lnTo>
-                  <a:lnTo>
-                    <a:pt x="4600738" y="2276289"/>
-                  </a:lnTo>
-                  <a:lnTo>
-                    <a:pt x="4678372" y="2263386"/>
-                  </a:lnTo>
-                  <a:lnTo>
-                    <a:pt x="4756006" y="2250346"/>
-                  </a:lnTo>
-                  <a:lnTo>
-                    <a:pt x="4833640" y="2237167"/>
-                  </a:lnTo>
-                  <a:lnTo>
-                    <a:pt x="4911274" y="2223847"/>
-                  </a:lnTo>
-                  <a:lnTo>
-                    <a:pt x="4988908" y="2210384"/>
-                  </a:lnTo>
-                  <a:lnTo>
-                    <a:pt x="5066542" y="2196778"/>
-                  </a:lnTo>
-                  <a:lnTo>
-                    <a:pt x="5144177" y="2183026"/>
-                  </a:lnTo>
-                  <a:lnTo>
-                    <a:pt x="5221811" y="2169127"/>
-                  </a:lnTo>
-                  <a:lnTo>
-                    <a:pt x="5299445" y="2155080"/>
-                  </a:lnTo>
-                  <a:lnTo>
-                    <a:pt x="5377079" y="2140883"/>
-                  </a:lnTo>
-                  <a:lnTo>
-                    <a:pt x="5454713" y="2126534"/>
-                  </a:lnTo>
-                  <a:lnTo>
-                    <a:pt x="5532347" y="2112032"/>
-                  </a:lnTo>
-                  <a:lnTo>
-                    <a:pt x="5609981" y="2097374"/>
-                  </a:lnTo>
-                  <a:lnTo>
-                    <a:pt x="5687615" y="2082560"/>
-                  </a:lnTo>
-                  <a:lnTo>
-                    <a:pt x="5765249" y="2067588"/>
-                  </a:lnTo>
-                  <a:lnTo>
-                    <a:pt x="5842883" y="2052456"/>
+                    <a:pt x="20024" y="51732"/>
+                  </a:lnTo>
+                  <a:lnTo>
+                    <a:pt x="96493" y="237789"/>
+                  </a:lnTo>
+                  <a:lnTo>
+                    <a:pt x="172961" y="413019"/>
+                  </a:lnTo>
+                  <a:lnTo>
+                    <a:pt x="249430" y="578054"/>
+                  </a:lnTo>
+                  <a:lnTo>
+                    <a:pt x="325898" y="733487"/>
+                  </a:lnTo>
+                  <a:lnTo>
+                    <a:pt x="402366" y="879875"/>
+                  </a:lnTo>
+                  <a:lnTo>
+                    <a:pt x="478835" y="1017746"/>
+                  </a:lnTo>
+                  <a:lnTo>
+                    <a:pt x="555303" y="1147595"/>
+                  </a:lnTo>
+                  <a:lnTo>
+                    <a:pt x="631772" y="1269889"/>
+                  </a:lnTo>
+                  <a:lnTo>
+                    <a:pt x="708240" y="1385067"/>
+                  </a:lnTo>
+                  <a:lnTo>
+                    <a:pt x="784709" y="1493544"/>
+                  </a:lnTo>
+                  <a:lnTo>
+                    <a:pt x="861177" y="1595708"/>
+                  </a:lnTo>
+                  <a:lnTo>
+                    <a:pt x="937645" y="1691929"/>
+                  </a:lnTo>
+                  <a:lnTo>
+                    <a:pt x="1014114" y="1782550"/>
+                  </a:lnTo>
+                  <a:lnTo>
+                    <a:pt x="1090582" y="1867899"/>
+                  </a:lnTo>
+                  <a:lnTo>
+                    <a:pt x="1167051" y="1948282"/>
+                  </a:lnTo>
+                  <a:lnTo>
+                    <a:pt x="1243519" y="2023988"/>
+                  </a:lnTo>
+                  <a:lnTo>
+                    <a:pt x="1319988" y="2095289"/>
+                  </a:lnTo>
+                  <a:lnTo>
+                    <a:pt x="1396456" y="2162441"/>
+                  </a:lnTo>
+                  <a:lnTo>
+                    <a:pt x="1472925" y="2225686"/>
+                  </a:lnTo>
+                  <a:lnTo>
+                    <a:pt x="1549393" y="2285251"/>
+                  </a:lnTo>
+                  <a:lnTo>
+                    <a:pt x="1625861" y="2341351"/>
+                  </a:lnTo>
+                  <a:lnTo>
+                    <a:pt x="1702330" y="2394186"/>
+                  </a:lnTo>
+                  <a:lnTo>
+                    <a:pt x="1778798" y="2443947"/>
+                  </a:lnTo>
+                  <a:lnTo>
+                    <a:pt x="1855267" y="2473035"/>
+                  </a:lnTo>
+                  <a:lnTo>
+                    <a:pt x="1931735" y="2464739"/>
+                  </a:lnTo>
+                  <a:lnTo>
+                    <a:pt x="2008204" y="2456355"/>
+                  </a:lnTo>
+                  <a:lnTo>
+                    <a:pt x="2084672" y="2447881"/>
+                  </a:lnTo>
+                  <a:lnTo>
+                    <a:pt x="2161140" y="2439316"/>
+                  </a:lnTo>
+                  <a:lnTo>
+                    <a:pt x="2237609" y="2430660"/>
+                  </a:lnTo>
+                  <a:lnTo>
+                    <a:pt x="2314077" y="2421911"/>
+                  </a:lnTo>
+                  <a:lnTo>
+                    <a:pt x="2390546" y="2413069"/>
+                  </a:lnTo>
+                  <a:lnTo>
+                    <a:pt x="2467014" y="2404133"/>
+                  </a:lnTo>
+                  <a:lnTo>
+                    <a:pt x="2543483" y="2395101"/>
+                  </a:lnTo>
+                  <a:lnTo>
+                    <a:pt x="2619951" y="2385972"/>
+                  </a:lnTo>
+                  <a:lnTo>
+                    <a:pt x="2696419" y="2376746"/>
+                  </a:lnTo>
+                  <a:lnTo>
+                    <a:pt x="2772888" y="2367421"/>
+                  </a:lnTo>
+                  <a:lnTo>
+                    <a:pt x="2849356" y="2357997"/>
+                  </a:lnTo>
+                  <a:lnTo>
+                    <a:pt x="2925825" y="2348472"/>
+                  </a:lnTo>
+                  <a:lnTo>
+                    <a:pt x="3002293" y="2338845"/>
+                  </a:lnTo>
+                  <a:lnTo>
+                    <a:pt x="3078762" y="2329115"/>
+                  </a:lnTo>
+                  <a:lnTo>
+                    <a:pt x="3155230" y="2319281"/>
+                  </a:lnTo>
+                  <a:lnTo>
+                    <a:pt x="3231698" y="2309343"/>
+                  </a:lnTo>
+                  <a:lnTo>
+                    <a:pt x="3308167" y="2299298"/>
+                  </a:lnTo>
+                  <a:lnTo>
+                    <a:pt x="3384635" y="2289145"/>
+                  </a:lnTo>
+                  <a:lnTo>
+                    <a:pt x="3461104" y="2278885"/>
+                  </a:lnTo>
+                  <a:lnTo>
+                    <a:pt x="3537572" y="2268514"/>
+                  </a:lnTo>
+                  <a:lnTo>
+                    <a:pt x="3614041" y="2258033"/>
+                  </a:lnTo>
+                  <a:lnTo>
+                    <a:pt x="3690509" y="2247440"/>
+                  </a:lnTo>
+                  <a:lnTo>
+                    <a:pt x="3766978" y="2236733"/>
+                  </a:lnTo>
+                  <a:lnTo>
+                    <a:pt x="3843446" y="2225913"/>
+                  </a:lnTo>
+                  <a:lnTo>
+                    <a:pt x="3919914" y="2214976"/>
+                  </a:lnTo>
+                  <a:lnTo>
+                    <a:pt x="3996383" y="2203923"/>
+                  </a:lnTo>
+                  <a:lnTo>
+                    <a:pt x="4072851" y="2192751"/>
+                  </a:lnTo>
+                  <a:lnTo>
+                    <a:pt x="4149320" y="2181461"/>
+                  </a:lnTo>
+                  <a:lnTo>
+                    <a:pt x="4225788" y="2170049"/>
+                  </a:lnTo>
+                  <a:lnTo>
+                    <a:pt x="4302257" y="2158516"/>
+                  </a:lnTo>
+                  <a:lnTo>
+                    <a:pt x="4378725" y="2146859"/>
+                  </a:lnTo>
+                  <a:lnTo>
+                    <a:pt x="4455193" y="2135078"/>
+                  </a:lnTo>
+                  <a:lnTo>
+                    <a:pt x="4531662" y="2123171"/>
+                  </a:lnTo>
+                  <a:lnTo>
+                    <a:pt x="4608130" y="2111137"/>
+                  </a:lnTo>
+                  <a:lnTo>
+                    <a:pt x="4684599" y="2098974"/>
+                  </a:lnTo>
+                  <a:lnTo>
+                    <a:pt x="4761067" y="2086681"/>
+                  </a:lnTo>
+                  <a:lnTo>
+                    <a:pt x="4837536" y="2074257"/>
+                  </a:lnTo>
+                  <a:lnTo>
+                    <a:pt x="4914004" y="2061700"/>
+                  </a:lnTo>
+                  <a:lnTo>
+                    <a:pt x="4990472" y="2049009"/>
+                  </a:lnTo>
+                  <a:lnTo>
+                    <a:pt x="5066941" y="2036182"/>
+                  </a:lnTo>
+                  <a:lnTo>
+                    <a:pt x="5143409" y="2023218"/>
+                  </a:lnTo>
+                  <a:lnTo>
+                    <a:pt x="5219878" y="2010116"/>
+                  </a:lnTo>
+                  <a:lnTo>
+                    <a:pt x="5296346" y="1996874"/>
+                  </a:lnTo>
+                  <a:lnTo>
+                    <a:pt x="5372815" y="1983490"/>
+                  </a:lnTo>
+                  <a:lnTo>
+                    <a:pt x="5449283" y="1969963"/>
+                  </a:lnTo>
+                  <a:lnTo>
+                    <a:pt x="5525751" y="1956292"/>
+                  </a:lnTo>
+                  <a:lnTo>
+                    <a:pt x="5602220" y="1942474"/>
+                  </a:lnTo>
+                  <a:lnTo>
+                    <a:pt x="5678688" y="1928509"/>
+                  </a:lnTo>
+                  <a:lnTo>
+                    <a:pt x="5755157" y="1914395"/>
                   </a:lnTo>
                 </a:path>
               </a:pathLst>
@@ -3808,300 +3808,300 @@
           </p:nvSpPr>
           <p:spPr>
             <a:xfrm>
-              <a:off x="817517" y="4733687"/>
-              <a:ext cx="7370972" cy="785323"/>
+              <a:off x="915645" y="4690413"/>
+              <a:ext cx="7260303" cy="732497"/>
             </a:xfrm>
             <a:custGeom>
               <a:avLst/>
               <a:pathLst>
-                <a:path w="7370972" h="785323">
+                <a:path w="7260303" h="732497">
                   <a:moveTo>
-                    <a:pt x="7370972" y="785323"/>
+                    <a:pt x="7260303" y="732497"/>
                   </a:moveTo>
                   <a:lnTo>
-                    <a:pt x="7293338" y="782961"/>
-                  </a:lnTo>
-                  <a:lnTo>
-                    <a:pt x="7215704" y="780453"/>
-                  </a:lnTo>
-                  <a:lnTo>
-                    <a:pt x="7138070" y="777789"/>
-                  </a:lnTo>
-                  <a:lnTo>
-                    <a:pt x="7060436" y="774961"/>
-                  </a:lnTo>
-                  <a:lnTo>
-                    <a:pt x="6982802" y="771959"/>
-                  </a:lnTo>
-                  <a:lnTo>
-                    <a:pt x="6905168" y="768771"/>
-                  </a:lnTo>
-                  <a:lnTo>
-                    <a:pt x="6827534" y="765386"/>
-                  </a:lnTo>
-                  <a:lnTo>
-                    <a:pt x="6749900" y="761792"/>
-                  </a:lnTo>
-                  <a:lnTo>
-                    <a:pt x="6672266" y="757976"/>
-                  </a:lnTo>
-                  <a:lnTo>
-                    <a:pt x="6594632" y="753924"/>
-                  </a:lnTo>
-                  <a:lnTo>
-                    <a:pt x="6516998" y="749622"/>
-                  </a:lnTo>
-                  <a:lnTo>
-                    <a:pt x="6439364" y="745054"/>
-                  </a:lnTo>
-                  <a:lnTo>
-                    <a:pt x="6361730" y="740204"/>
-                  </a:lnTo>
-                  <a:lnTo>
-                    <a:pt x="6284096" y="735054"/>
-                  </a:lnTo>
-                  <a:lnTo>
-                    <a:pt x="6206462" y="729586"/>
-                  </a:lnTo>
-                  <a:lnTo>
-                    <a:pt x="6128827" y="723780"/>
-                  </a:lnTo>
-                  <a:lnTo>
-                    <a:pt x="6051193" y="717616"/>
-                  </a:lnTo>
-                  <a:lnTo>
-                    <a:pt x="5973559" y="711070"/>
-                  </a:lnTo>
-                  <a:lnTo>
-                    <a:pt x="5895925" y="704121"/>
-                  </a:lnTo>
-                  <a:lnTo>
-                    <a:pt x="5818291" y="696742"/>
-                  </a:lnTo>
-                  <a:lnTo>
-                    <a:pt x="5740657" y="688907"/>
-                  </a:lnTo>
-                  <a:lnTo>
-                    <a:pt x="5663023" y="680588"/>
-                  </a:lnTo>
-                  <a:lnTo>
-                    <a:pt x="5585389" y="671755"/>
-                  </a:lnTo>
-                  <a:lnTo>
-                    <a:pt x="5507755" y="662377"/>
-                  </a:lnTo>
-                  <a:lnTo>
-                    <a:pt x="5430121" y="652419"/>
-                  </a:lnTo>
-                  <a:lnTo>
-                    <a:pt x="5352487" y="641846"/>
-                  </a:lnTo>
-                  <a:lnTo>
-                    <a:pt x="5274853" y="630619"/>
-                  </a:lnTo>
-                  <a:lnTo>
-                    <a:pt x="5197219" y="618699"/>
-                  </a:lnTo>
-                  <a:lnTo>
-                    <a:pt x="5119585" y="606043"/>
-                  </a:lnTo>
-                  <a:lnTo>
-                    <a:pt x="5041951" y="592605"/>
-                  </a:lnTo>
-                  <a:lnTo>
-                    <a:pt x="4964317" y="578336"/>
-                  </a:lnTo>
-                  <a:lnTo>
-                    <a:pt x="4886683" y="563186"/>
-                  </a:lnTo>
-                  <a:lnTo>
-                    <a:pt x="4809049" y="547101"/>
-                  </a:lnTo>
-                  <a:lnTo>
-                    <a:pt x="4731415" y="530021"/>
-                  </a:lnTo>
-                  <a:lnTo>
-                    <a:pt x="4653781" y="511886"/>
-                  </a:lnTo>
-                  <a:lnTo>
-                    <a:pt x="4576147" y="492631"/>
-                  </a:lnTo>
-                  <a:lnTo>
-                    <a:pt x="4498513" y="472186"/>
-                  </a:lnTo>
-                  <a:lnTo>
-                    <a:pt x="4420879" y="450478"/>
-                  </a:lnTo>
-                  <a:lnTo>
-                    <a:pt x="4343244" y="427430"/>
-                  </a:lnTo>
-                  <a:lnTo>
-                    <a:pt x="4265610" y="402957"/>
-                  </a:lnTo>
-                  <a:lnTo>
-                    <a:pt x="4187976" y="376972"/>
-                  </a:lnTo>
-                  <a:lnTo>
-                    <a:pt x="4110342" y="349382"/>
-                  </a:lnTo>
-                  <a:lnTo>
-                    <a:pt x="4032708" y="320087"/>
-                  </a:lnTo>
-                  <a:lnTo>
-                    <a:pt x="3955074" y="288983"/>
-                  </a:lnTo>
-                  <a:lnTo>
-                    <a:pt x="3877440" y="255957"/>
-                  </a:lnTo>
-                  <a:lnTo>
-                    <a:pt x="3799806" y="220890"/>
-                  </a:lnTo>
-                  <a:lnTo>
-                    <a:pt x="3722172" y="183658"/>
-                  </a:lnTo>
-                  <a:lnTo>
-                    <a:pt x="3644538" y="144125"/>
-                  </a:lnTo>
-                  <a:lnTo>
-                    <a:pt x="3566904" y="102149"/>
-                  </a:lnTo>
-                  <a:lnTo>
-                    <a:pt x="3489270" y="57581"/>
-                  </a:lnTo>
-                  <a:lnTo>
-                    <a:pt x="3411636" y="10259"/>
-                  </a:lnTo>
-                  <a:lnTo>
-                    <a:pt x="3334002" y="0"/>
-                  </a:lnTo>
-                  <a:lnTo>
-                    <a:pt x="3256368" y="8707"/>
-                  </a:lnTo>
-                  <a:lnTo>
-                    <a:pt x="3178734" y="17322"/>
-                  </a:lnTo>
-                  <a:lnTo>
-                    <a:pt x="3101100" y="25845"/>
-                  </a:lnTo>
-                  <a:lnTo>
-                    <a:pt x="3023466" y="34279"/>
-                  </a:lnTo>
-                  <a:lnTo>
-                    <a:pt x="2945832" y="42624"/>
-                  </a:lnTo>
-                  <a:lnTo>
-                    <a:pt x="2868198" y="50880"/>
-                  </a:lnTo>
-                  <a:lnTo>
-                    <a:pt x="2790564" y="59049"/>
-                  </a:lnTo>
-                  <a:lnTo>
-                    <a:pt x="2712930" y="67132"/>
-                  </a:lnTo>
-                  <a:lnTo>
-                    <a:pt x="2635295" y="75129"/>
-                  </a:lnTo>
-                  <a:lnTo>
-                    <a:pt x="2557661" y="83042"/>
-                  </a:lnTo>
-                  <a:lnTo>
-                    <a:pt x="2480027" y="90871"/>
-                  </a:lnTo>
-                  <a:lnTo>
-                    <a:pt x="2402393" y="98618"/>
-                  </a:lnTo>
-                  <a:lnTo>
-                    <a:pt x="2324759" y="106282"/>
-                  </a:lnTo>
-                  <a:lnTo>
-                    <a:pt x="2247125" y="113865"/>
-                  </a:lnTo>
-                  <a:lnTo>
-                    <a:pt x="2169491" y="121369"/>
-                  </a:lnTo>
-                  <a:lnTo>
-                    <a:pt x="2091857" y="128792"/>
-                  </a:lnTo>
-                  <a:lnTo>
-                    <a:pt x="2014223" y="136138"/>
-                  </a:lnTo>
-                  <a:lnTo>
-                    <a:pt x="1936589" y="143406"/>
-                  </a:lnTo>
-                  <a:lnTo>
-                    <a:pt x="1858955" y="150596"/>
-                  </a:lnTo>
-                  <a:lnTo>
-                    <a:pt x="1781321" y="157711"/>
-                  </a:lnTo>
-                  <a:lnTo>
-                    <a:pt x="1703687" y="164751"/>
-                  </a:lnTo>
-                  <a:lnTo>
-                    <a:pt x="1626053" y="171716"/>
-                  </a:lnTo>
-                  <a:lnTo>
-                    <a:pt x="1548419" y="178608"/>
-                  </a:lnTo>
-                  <a:lnTo>
-                    <a:pt x="1470785" y="185427"/>
-                  </a:lnTo>
-                  <a:lnTo>
-                    <a:pt x="1393151" y="192173"/>
-                  </a:lnTo>
-                  <a:lnTo>
-                    <a:pt x="1315517" y="198848"/>
-                  </a:lnTo>
-                  <a:lnTo>
-                    <a:pt x="1237883" y="205453"/>
-                  </a:lnTo>
-                  <a:lnTo>
-                    <a:pt x="1160249" y="211988"/>
-                  </a:lnTo>
-                  <a:lnTo>
-                    <a:pt x="1082615" y="218454"/>
-                  </a:lnTo>
-                  <a:lnTo>
-                    <a:pt x="1004981" y="224851"/>
-                  </a:lnTo>
-                  <a:lnTo>
-                    <a:pt x="927346" y="231181"/>
-                  </a:lnTo>
-                  <a:lnTo>
-                    <a:pt x="849712" y="237444"/>
-                  </a:lnTo>
-                  <a:lnTo>
-                    <a:pt x="772078" y="243641"/>
-                  </a:lnTo>
-                  <a:lnTo>
-                    <a:pt x="694444" y="249772"/>
-                  </a:lnTo>
-                  <a:lnTo>
-                    <a:pt x="616810" y="255838"/>
-                  </a:lnTo>
-                  <a:lnTo>
-                    <a:pt x="539176" y="261840"/>
-                  </a:lnTo>
-                  <a:lnTo>
-                    <a:pt x="461542" y="267779"/>
-                  </a:lnTo>
-                  <a:lnTo>
-                    <a:pt x="383908" y="273655"/>
-                  </a:lnTo>
-                  <a:lnTo>
-                    <a:pt x="306274" y="279469"/>
-                  </a:lnTo>
-                  <a:lnTo>
-                    <a:pt x="228640" y="285221"/>
-                  </a:lnTo>
-                  <a:lnTo>
-                    <a:pt x="151006" y="290913"/>
-                  </a:lnTo>
-                  <a:lnTo>
-                    <a:pt x="73372" y="296544"/>
-                  </a:lnTo>
-                  <a:lnTo>
-                    <a:pt x="0" y="301810"/>
+                    <a:pt x="7183835" y="730294"/>
+                  </a:lnTo>
+                  <a:lnTo>
+                    <a:pt x="7107366" y="727954"/>
+                  </a:lnTo>
+                  <a:lnTo>
+                    <a:pt x="7030898" y="725470"/>
+                  </a:lnTo>
+                  <a:lnTo>
+                    <a:pt x="6954429" y="722833"/>
+                  </a:lnTo>
+                  <a:lnTo>
+                    <a:pt x="6877961" y="720032"/>
+                  </a:lnTo>
+                  <a:lnTo>
+                    <a:pt x="6801492" y="717059"/>
+                  </a:lnTo>
+                  <a:lnTo>
+                    <a:pt x="6725024" y="713901"/>
+                  </a:lnTo>
+                  <a:lnTo>
+                    <a:pt x="6648556" y="710549"/>
+                  </a:lnTo>
+                  <a:lnTo>
+                    <a:pt x="6572087" y="706990"/>
+                  </a:lnTo>
+                  <a:lnTo>
+                    <a:pt x="6495619" y="703210"/>
+                  </a:lnTo>
+                  <a:lnTo>
+                    <a:pt x="6419150" y="699198"/>
+                  </a:lnTo>
+                  <a:lnTo>
+                    <a:pt x="6342682" y="694937"/>
+                  </a:lnTo>
+                  <a:lnTo>
+                    <a:pt x="6266213" y="690413"/>
+                  </a:lnTo>
+                  <a:lnTo>
+                    <a:pt x="6189745" y="685609"/>
+                  </a:lnTo>
+                  <a:lnTo>
+                    <a:pt x="6113277" y="680509"/>
+                  </a:lnTo>
+                  <a:lnTo>
+                    <a:pt x="6036808" y="675094"/>
+                  </a:lnTo>
+                  <a:lnTo>
+                    <a:pt x="5960340" y="669344"/>
+                  </a:lnTo>
+                  <a:lnTo>
+                    <a:pt x="5883871" y="663239"/>
+                  </a:lnTo>
+                  <a:lnTo>
+                    <a:pt x="5807403" y="656757"/>
+                  </a:lnTo>
+                  <a:lnTo>
+                    <a:pt x="5730934" y="649874"/>
+                  </a:lnTo>
+                  <a:lnTo>
+                    <a:pt x="5654466" y="642567"/>
+                  </a:lnTo>
+                  <a:lnTo>
+                    <a:pt x="5577998" y="634807"/>
+                  </a:lnTo>
+                  <a:lnTo>
+                    <a:pt x="5501529" y="626569"/>
+                  </a:lnTo>
+                  <a:lnTo>
+                    <a:pt x="5425061" y="617821"/>
+                  </a:lnTo>
+                  <a:lnTo>
+                    <a:pt x="5348592" y="608533"/>
+                  </a:lnTo>
+                  <a:lnTo>
+                    <a:pt x="5272124" y="598671"/>
+                  </a:lnTo>
+                  <a:lnTo>
+                    <a:pt x="5195655" y="588200"/>
+                  </a:lnTo>
+                  <a:lnTo>
+                    <a:pt x="5119187" y="577082"/>
+                  </a:lnTo>
+                  <a:lnTo>
+                    <a:pt x="5042719" y="565277"/>
+                  </a:lnTo>
+                  <a:lnTo>
+                    <a:pt x="4966250" y="552742"/>
+                  </a:lnTo>
+                  <a:lnTo>
+                    <a:pt x="4889782" y="539434"/>
+                  </a:lnTo>
+                  <a:lnTo>
+                    <a:pt x="4813313" y="525303"/>
+                  </a:lnTo>
+                  <a:lnTo>
+                    <a:pt x="4736845" y="510299"/>
+                  </a:lnTo>
+                  <a:lnTo>
+                    <a:pt x="4660376" y="494368"/>
+                  </a:lnTo>
+                  <a:lnTo>
+                    <a:pt x="4583908" y="477453"/>
+                  </a:lnTo>
+                  <a:lnTo>
+                    <a:pt x="4507439" y="459493"/>
+                  </a:lnTo>
+                  <a:lnTo>
+                    <a:pt x="4430971" y="440424"/>
+                  </a:lnTo>
+                  <a:lnTo>
+                    <a:pt x="4354503" y="420176"/>
+                  </a:lnTo>
+                  <a:lnTo>
+                    <a:pt x="4278034" y="398678"/>
+                  </a:lnTo>
+                  <a:lnTo>
+                    <a:pt x="4201566" y="375851"/>
+                  </a:lnTo>
+                  <a:lnTo>
+                    <a:pt x="4125097" y="351614"/>
+                  </a:lnTo>
+                  <a:lnTo>
+                    <a:pt x="4048629" y="325880"/>
+                  </a:lnTo>
+                  <a:lnTo>
+                    <a:pt x="3972160" y="298556"/>
+                  </a:lnTo>
+                  <a:lnTo>
+                    <a:pt x="3895692" y="269544"/>
+                  </a:lnTo>
+                  <a:lnTo>
+                    <a:pt x="3819224" y="238739"/>
+                  </a:lnTo>
+                  <a:lnTo>
+                    <a:pt x="3742755" y="206032"/>
+                  </a:lnTo>
+                  <a:lnTo>
+                    <a:pt x="3666287" y="171304"/>
+                  </a:lnTo>
+                  <a:lnTo>
+                    <a:pt x="3589818" y="134430"/>
+                  </a:lnTo>
+                  <a:lnTo>
+                    <a:pt x="3513350" y="95278"/>
+                  </a:lnTo>
+                  <a:lnTo>
+                    <a:pt x="3436881" y="53707"/>
+                  </a:lnTo>
+                  <a:lnTo>
+                    <a:pt x="3360413" y="9569"/>
+                  </a:lnTo>
+                  <a:lnTo>
+                    <a:pt x="3283945" y="0"/>
+                  </a:lnTo>
+                  <a:lnTo>
+                    <a:pt x="3207476" y="8121"/>
+                  </a:lnTo>
+                  <a:lnTo>
+                    <a:pt x="3131008" y="16156"/>
+                  </a:lnTo>
+                  <a:lnTo>
+                    <a:pt x="3054539" y="24107"/>
+                  </a:lnTo>
+                  <a:lnTo>
+                    <a:pt x="2978071" y="31973"/>
+                  </a:lnTo>
+                  <a:lnTo>
+                    <a:pt x="2901602" y="39757"/>
+                  </a:lnTo>
+                  <a:lnTo>
+                    <a:pt x="2825134" y="47458"/>
+                  </a:lnTo>
+                  <a:lnTo>
+                    <a:pt x="2748666" y="55077"/>
+                  </a:lnTo>
+                  <a:lnTo>
+                    <a:pt x="2672197" y="62616"/>
+                  </a:lnTo>
+                  <a:lnTo>
+                    <a:pt x="2595729" y="70076"/>
+                  </a:lnTo>
+                  <a:lnTo>
+                    <a:pt x="2519260" y="77456"/>
+                  </a:lnTo>
+                  <a:lnTo>
+                    <a:pt x="2442792" y="84759"/>
+                  </a:lnTo>
+                  <a:lnTo>
+                    <a:pt x="2366323" y="91984"/>
+                  </a:lnTo>
+                  <a:lnTo>
+                    <a:pt x="2289855" y="99133"/>
+                  </a:lnTo>
+                  <a:lnTo>
+                    <a:pt x="2213386" y="106206"/>
+                  </a:lnTo>
+                  <a:lnTo>
+                    <a:pt x="2136918" y="113205"/>
+                  </a:lnTo>
+                  <a:lnTo>
+                    <a:pt x="2060450" y="120129"/>
+                  </a:lnTo>
+                  <a:lnTo>
+                    <a:pt x="1983981" y="126980"/>
+                  </a:lnTo>
+                  <a:lnTo>
+                    <a:pt x="1907513" y="133759"/>
+                  </a:lnTo>
+                  <a:lnTo>
+                    <a:pt x="1831044" y="140466"/>
+                  </a:lnTo>
+                  <a:lnTo>
+                    <a:pt x="1754576" y="147103"/>
+                  </a:lnTo>
+                  <a:lnTo>
+                    <a:pt x="1678107" y="153669"/>
+                  </a:lnTo>
+                  <a:lnTo>
+                    <a:pt x="1601639" y="160165"/>
+                  </a:lnTo>
+                  <a:lnTo>
+                    <a:pt x="1525171" y="166593"/>
+                  </a:lnTo>
+                  <a:lnTo>
+                    <a:pt x="1448702" y="172954"/>
+                  </a:lnTo>
+                  <a:lnTo>
+                    <a:pt x="1372234" y="179246"/>
+                  </a:lnTo>
+                  <a:lnTo>
+                    <a:pt x="1295765" y="185473"/>
+                  </a:lnTo>
+                  <a:lnTo>
+                    <a:pt x="1219297" y="191633"/>
+                  </a:lnTo>
+                  <a:lnTo>
+                    <a:pt x="1142828" y="197728"/>
+                  </a:lnTo>
+                  <a:lnTo>
+                    <a:pt x="1066360" y="203759"/>
+                  </a:lnTo>
+                  <a:lnTo>
+                    <a:pt x="989892" y="209726"/>
+                  </a:lnTo>
+                  <a:lnTo>
+                    <a:pt x="913423" y="215630"/>
+                  </a:lnTo>
+                  <a:lnTo>
+                    <a:pt x="836955" y="221472"/>
+                  </a:lnTo>
+                  <a:lnTo>
+                    <a:pt x="760486" y="227252"/>
+                  </a:lnTo>
+                  <a:lnTo>
+                    <a:pt x="684018" y="232971"/>
+                  </a:lnTo>
+                  <a:lnTo>
+                    <a:pt x="607549" y="238629"/>
+                  </a:lnTo>
+                  <a:lnTo>
+                    <a:pt x="531081" y="244227"/>
+                  </a:lnTo>
+                  <a:lnTo>
+                    <a:pt x="454613" y="249767"/>
+                  </a:lnTo>
+                  <a:lnTo>
+                    <a:pt x="378144" y="255247"/>
+                  </a:lnTo>
+                  <a:lnTo>
+                    <a:pt x="301676" y="260670"/>
+                  </a:lnTo>
+                  <a:lnTo>
+                    <a:pt x="225207" y="266036"/>
+                  </a:lnTo>
+                  <a:lnTo>
+                    <a:pt x="148739" y="271344"/>
+                  </a:lnTo>
+                  <a:lnTo>
+                    <a:pt x="72270" y="276597"/>
+                  </a:lnTo>
+                  <a:lnTo>
+                    <a:pt x="0" y="281509"/>
                   </a:lnTo>
                 </a:path>
               </a:pathLst>
@@ -4121,300 +4121,300 @@
           </p:nvSpPr>
           <p:spPr>
             <a:xfrm>
-              <a:off x="817517" y="3125576"/>
-              <a:ext cx="7370972" cy="2197728"/>
+              <a:off x="915645" y="3190473"/>
+              <a:ext cx="7260303" cy="2049895"/>
             </a:xfrm>
             <a:custGeom>
               <a:avLst/>
               <a:pathLst>
-                <a:path w="7370972" h="2197728">
+                <a:path w="7260303" h="2049895">
                   <a:moveTo>
                     <a:pt x="0" y="0"/>
                   </a:moveTo>
                   <a:lnTo>
-                    <a:pt x="73372" y="56052"/>
-                  </a:lnTo>
-                  <a:lnTo>
-                    <a:pt x="151006" y="113916"/>
-                  </a:lnTo>
-                  <a:lnTo>
-                    <a:pt x="228640" y="170370"/>
-                  </a:lnTo>
-                  <a:lnTo>
-                    <a:pt x="306274" y="225449"/>
-                  </a:lnTo>
-                  <a:lnTo>
-                    <a:pt x="383908" y="279187"/>
-                  </a:lnTo>
-                  <a:lnTo>
-                    <a:pt x="461542" y="331615"/>
-                  </a:lnTo>
-                  <a:lnTo>
-                    <a:pt x="539176" y="382767"/>
-                  </a:lnTo>
-                  <a:lnTo>
-                    <a:pt x="616810" y="432673"/>
-                  </a:lnTo>
-                  <a:lnTo>
-                    <a:pt x="694444" y="481363"/>
-                  </a:lnTo>
-                  <a:lnTo>
-                    <a:pt x="772078" y="528867"/>
-                  </a:lnTo>
-                  <a:lnTo>
-                    <a:pt x="849712" y="575214"/>
-                  </a:lnTo>
-                  <a:lnTo>
-                    <a:pt x="927346" y="620432"/>
-                  </a:lnTo>
-                  <a:lnTo>
-                    <a:pt x="1004981" y="664549"/>
-                  </a:lnTo>
-                  <a:lnTo>
-                    <a:pt x="1082615" y="707591"/>
-                  </a:lnTo>
-                  <a:lnTo>
-                    <a:pt x="1160249" y="749585"/>
-                  </a:lnTo>
-                  <a:lnTo>
-                    <a:pt x="1237883" y="790556"/>
-                  </a:lnTo>
-                  <a:lnTo>
-                    <a:pt x="1315517" y="830530"/>
-                  </a:lnTo>
-                  <a:lnTo>
-                    <a:pt x="1393151" y="869529"/>
-                  </a:lnTo>
-                  <a:lnTo>
-                    <a:pt x="1470785" y="907579"/>
-                  </a:lnTo>
-                  <a:lnTo>
-                    <a:pt x="1548419" y="944701"/>
-                  </a:lnTo>
-                  <a:lnTo>
-                    <a:pt x="1626053" y="980920"/>
-                  </a:lnTo>
-                  <a:lnTo>
-                    <a:pt x="1703687" y="1016256"/>
-                  </a:lnTo>
-                  <a:lnTo>
-                    <a:pt x="1781321" y="1050732"/>
-                  </a:lnTo>
-                  <a:lnTo>
-                    <a:pt x="1858955" y="1084368"/>
-                  </a:lnTo>
-                  <a:lnTo>
-                    <a:pt x="1936589" y="1117184"/>
-                  </a:lnTo>
-                  <a:lnTo>
-                    <a:pt x="2014223" y="1149202"/>
-                  </a:lnTo>
-                  <a:lnTo>
-                    <a:pt x="2091857" y="1180439"/>
-                  </a:lnTo>
-                  <a:lnTo>
-                    <a:pt x="2169491" y="1210916"/>
-                  </a:lnTo>
-                  <a:lnTo>
-                    <a:pt x="2247125" y="1240650"/>
-                  </a:lnTo>
-                  <a:lnTo>
-                    <a:pt x="2324759" y="1269660"/>
-                  </a:lnTo>
-                  <a:lnTo>
-                    <a:pt x="2402393" y="1297964"/>
-                  </a:lnTo>
-                  <a:lnTo>
-                    <a:pt x="2480027" y="1325578"/>
-                  </a:lnTo>
-                  <a:lnTo>
-                    <a:pt x="2557661" y="1352519"/>
-                  </a:lnTo>
-                  <a:lnTo>
-                    <a:pt x="2635295" y="1378804"/>
-                  </a:lnTo>
-                  <a:lnTo>
-                    <a:pt x="2712930" y="1404449"/>
-                  </a:lnTo>
-                  <a:lnTo>
-                    <a:pt x="2790564" y="1429470"/>
-                  </a:lnTo>
-                  <a:lnTo>
-                    <a:pt x="2868198" y="1453881"/>
-                  </a:lnTo>
-                  <a:lnTo>
-                    <a:pt x="2945832" y="1477697"/>
-                  </a:lnTo>
-                  <a:lnTo>
-                    <a:pt x="3023466" y="1500933"/>
-                  </a:lnTo>
-                  <a:lnTo>
-                    <a:pt x="3101100" y="1523603"/>
-                  </a:lnTo>
-                  <a:lnTo>
-                    <a:pt x="3178734" y="1545722"/>
-                  </a:lnTo>
-                  <a:lnTo>
-                    <a:pt x="3256368" y="1567301"/>
-                  </a:lnTo>
-                  <a:lnTo>
-                    <a:pt x="3334002" y="1588355"/>
-                  </a:lnTo>
-                  <a:lnTo>
-                    <a:pt x="3411636" y="1608896"/>
-                  </a:lnTo>
-                  <a:lnTo>
-                    <a:pt x="3489270" y="1628936"/>
-                  </a:lnTo>
-                  <a:lnTo>
-                    <a:pt x="3566904" y="1648489"/>
-                  </a:lnTo>
-                  <a:lnTo>
-                    <a:pt x="3644538" y="1667565"/>
-                  </a:lnTo>
-                  <a:lnTo>
-                    <a:pt x="3722172" y="1686176"/>
-                  </a:lnTo>
-                  <a:lnTo>
-                    <a:pt x="3799806" y="1704335"/>
-                  </a:lnTo>
-                  <a:lnTo>
-                    <a:pt x="3877440" y="1722051"/>
-                  </a:lnTo>
-                  <a:lnTo>
-                    <a:pt x="3955074" y="1739335"/>
-                  </a:lnTo>
-                  <a:lnTo>
-                    <a:pt x="4032708" y="1756199"/>
-                  </a:lnTo>
-                  <a:lnTo>
-                    <a:pt x="4110342" y="1772651"/>
-                  </a:lnTo>
-                  <a:lnTo>
-                    <a:pt x="4187976" y="1788703"/>
-                  </a:lnTo>
-                  <a:lnTo>
-                    <a:pt x="4265610" y="1804364"/>
-                  </a:lnTo>
-                  <a:lnTo>
-                    <a:pt x="4343244" y="1819644"/>
-                  </a:lnTo>
-                  <a:lnTo>
-                    <a:pt x="4420879" y="1834551"/>
-                  </a:lnTo>
-                  <a:lnTo>
-                    <a:pt x="4498513" y="1849095"/>
-                  </a:lnTo>
-                  <a:lnTo>
-                    <a:pt x="4576147" y="1863285"/>
-                  </a:lnTo>
-                  <a:lnTo>
-                    <a:pt x="4653781" y="1877130"/>
-                  </a:lnTo>
-                  <a:lnTo>
-                    <a:pt x="4731415" y="1890637"/>
-                  </a:lnTo>
-                  <a:lnTo>
-                    <a:pt x="4809049" y="1903815"/>
-                  </a:lnTo>
-                  <a:lnTo>
-                    <a:pt x="4886683" y="1916672"/>
-                  </a:lnTo>
-                  <a:lnTo>
-                    <a:pt x="4964317" y="1929216"/>
-                  </a:lnTo>
-                  <a:lnTo>
-                    <a:pt x="5041951" y="1941455"/>
-                  </a:lnTo>
-                  <a:lnTo>
-                    <a:pt x="5119585" y="1953395"/>
-                  </a:lnTo>
-                  <a:lnTo>
-                    <a:pt x="5197219" y="1965044"/>
-                  </a:lnTo>
-                  <a:lnTo>
-                    <a:pt x="5274853" y="1976410"/>
-                  </a:lnTo>
-                  <a:lnTo>
-                    <a:pt x="5352487" y="1987499"/>
-                  </a:lnTo>
-                  <a:lnTo>
-                    <a:pt x="5430121" y="1998318"/>
-                  </a:lnTo>
-                  <a:lnTo>
-                    <a:pt x="5507755" y="2008873"/>
-                  </a:lnTo>
-                  <a:lnTo>
-                    <a:pt x="5585389" y="2019172"/>
-                  </a:lnTo>
-                  <a:lnTo>
-                    <a:pt x="5663023" y="2029219"/>
-                  </a:lnTo>
-                  <a:lnTo>
-                    <a:pt x="5740657" y="2039022"/>
-                  </a:lnTo>
-                  <a:lnTo>
-                    <a:pt x="5818291" y="2048586"/>
-                  </a:lnTo>
-                  <a:lnTo>
-                    <a:pt x="5895925" y="2057917"/>
-                  </a:lnTo>
-                  <a:lnTo>
-                    <a:pt x="5973559" y="2067020"/>
-                  </a:lnTo>
-                  <a:lnTo>
-                    <a:pt x="6051193" y="2075902"/>
-                  </a:lnTo>
-                  <a:lnTo>
-                    <a:pt x="6128827" y="2084568"/>
-                  </a:lnTo>
-                  <a:lnTo>
-                    <a:pt x="6206462" y="2093022"/>
-                  </a:lnTo>
-                  <a:lnTo>
-                    <a:pt x="6284096" y="2101271"/>
-                  </a:lnTo>
-                  <a:lnTo>
-                    <a:pt x="6361730" y="2109319"/>
-                  </a:lnTo>
-                  <a:lnTo>
-                    <a:pt x="6439364" y="2117170"/>
-                  </a:lnTo>
-                  <a:lnTo>
-                    <a:pt x="6516998" y="2124831"/>
-                  </a:lnTo>
-                  <a:lnTo>
-                    <a:pt x="6594632" y="2132305"/>
-                  </a:lnTo>
-                  <a:lnTo>
-                    <a:pt x="6672266" y="2139596"/>
-                  </a:lnTo>
-                  <a:lnTo>
-                    <a:pt x="6749900" y="2146710"/>
-                  </a:lnTo>
-                  <a:lnTo>
-                    <a:pt x="6827534" y="2153651"/>
-                  </a:lnTo>
-                  <a:lnTo>
-                    <a:pt x="6905168" y="2160423"/>
-                  </a:lnTo>
-                  <a:lnTo>
-                    <a:pt x="6982802" y="2167030"/>
-                  </a:lnTo>
-                  <a:lnTo>
-                    <a:pt x="7060436" y="2173476"/>
-                  </a:lnTo>
-                  <a:lnTo>
-                    <a:pt x="7138070" y="2179765"/>
-                  </a:lnTo>
-                  <a:lnTo>
-                    <a:pt x="7215704" y="2185901"/>
-                  </a:lnTo>
-                  <a:lnTo>
-                    <a:pt x="7293338" y="2191887"/>
-                  </a:lnTo>
-                  <a:lnTo>
-                    <a:pt x="7370972" y="2197728"/>
+                    <a:pt x="72270" y="52282"/>
+                  </a:lnTo>
+                  <a:lnTo>
+                    <a:pt x="148739" y="106253"/>
+                  </a:lnTo>
+                  <a:lnTo>
+                    <a:pt x="225207" y="158910"/>
+                  </a:lnTo>
+                  <a:lnTo>
+                    <a:pt x="301676" y="210284"/>
+                  </a:lnTo>
+                  <a:lnTo>
+                    <a:pt x="378144" y="260407"/>
+                  </a:lnTo>
+                  <a:lnTo>
+                    <a:pt x="454613" y="309309"/>
+                  </a:lnTo>
+                  <a:lnTo>
+                    <a:pt x="531081" y="357020"/>
+                  </a:lnTo>
+                  <a:lnTo>
+                    <a:pt x="607549" y="403568"/>
+                  </a:lnTo>
+                  <a:lnTo>
+                    <a:pt x="684018" y="448983"/>
+                  </a:lnTo>
+                  <a:lnTo>
+                    <a:pt x="760486" y="493292"/>
+                  </a:lnTo>
+                  <a:lnTo>
+                    <a:pt x="836955" y="536522"/>
+                  </a:lnTo>
+                  <a:lnTo>
+                    <a:pt x="913423" y="578698"/>
+                  </a:lnTo>
+                  <a:lnTo>
+                    <a:pt x="989892" y="619847"/>
+                  </a:lnTo>
+                  <a:lnTo>
+                    <a:pt x="1066360" y="659994"/>
+                  </a:lnTo>
+                  <a:lnTo>
+                    <a:pt x="1142828" y="699164"/>
+                  </a:lnTo>
+                  <a:lnTo>
+                    <a:pt x="1219297" y="737379"/>
+                  </a:lnTo>
+                  <a:lnTo>
+                    <a:pt x="1295765" y="774663"/>
+                  </a:lnTo>
+                  <a:lnTo>
+                    <a:pt x="1372234" y="811039"/>
+                  </a:lnTo>
+                  <a:lnTo>
+                    <a:pt x="1448702" y="846529"/>
+                  </a:lnTo>
+                  <a:lnTo>
+                    <a:pt x="1525171" y="881155"/>
+                  </a:lnTo>
+                  <a:lnTo>
+                    <a:pt x="1601639" y="914937"/>
+                  </a:lnTo>
+                  <a:lnTo>
+                    <a:pt x="1678107" y="947896"/>
+                  </a:lnTo>
+                  <a:lnTo>
+                    <a:pt x="1754576" y="980053"/>
+                  </a:lnTo>
+                  <a:lnTo>
+                    <a:pt x="1831044" y="1011426"/>
+                  </a:lnTo>
+                  <a:lnTo>
+                    <a:pt x="1907513" y="1042036"/>
+                  </a:lnTo>
+                  <a:lnTo>
+                    <a:pt x="1983981" y="1071899"/>
+                  </a:lnTo>
+                  <a:lnTo>
+                    <a:pt x="2060450" y="1101035"/>
+                  </a:lnTo>
+                  <a:lnTo>
+                    <a:pt x="2136918" y="1129462"/>
+                  </a:lnTo>
+                  <a:lnTo>
+                    <a:pt x="2213386" y="1157196"/>
+                  </a:lnTo>
+                  <a:lnTo>
+                    <a:pt x="2289855" y="1184255"/>
+                  </a:lnTo>
+                  <a:lnTo>
+                    <a:pt x="2366323" y="1210654"/>
+                  </a:lnTo>
+                  <a:lnTo>
+                    <a:pt x="2442792" y="1236411"/>
+                  </a:lnTo>
+                  <a:lnTo>
+                    <a:pt x="2519260" y="1261540"/>
+                  </a:lnTo>
+                  <a:lnTo>
+                    <a:pt x="2595729" y="1286057"/>
+                  </a:lnTo>
+                  <a:lnTo>
+                    <a:pt x="2672197" y="1309977"/>
+                  </a:lnTo>
+                  <a:lnTo>
+                    <a:pt x="2748666" y="1333314"/>
+                  </a:lnTo>
+                  <a:lnTo>
+                    <a:pt x="2825134" y="1356083"/>
+                  </a:lnTo>
+                  <a:lnTo>
+                    <a:pt x="2901602" y="1378298"/>
+                  </a:lnTo>
+                  <a:lnTo>
+                    <a:pt x="2978071" y="1399971"/>
+                  </a:lnTo>
+                  <a:lnTo>
+                    <a:pt x="3054539" y="1421116"/>
+                  </a:lnTo>
+                  <a:lnTo>
+                    <a:pt x="3131008" y="1441746"/>
+                  </a:lnTo>
+                  <a:lnTo>
+                    <a:pt x="3207476" y="1461874"/>
+                  </a:lnTo>
+                  <a:lnTo>
+                    <a:pt x="3283945" y="1481512"/>
+                  </a:lnTo>
+                  <a:lnTo>
+                    <a:pt x="3360413" y="1500671"/>
+                  </a:lnTo>
+                  <a:lnTo>
+                    <a:pt x="3436881" y="1519364"/>
+                  </a:lnTo>
+                  <a:lnTo>
+                    <a:pt x="3513350" y="1537601"/>
+                  </a:lnTo>
+                  <a:lnTo>
+                    <a:pt x="3589818" y="1555394"/>
+                  </a:lnTo>
+                  <a:lnTo>
+                    <a:pt x="3666287" y="1572753"/>
+                  </a:lnTo>
+                  <a:lnTo>
+                    <a:pt x="3742755" y="1589690"/>
+                  </a:lnTo>
+                  <a:lnTo>
+                    <a:pt x="3819224" y="1606215"/>
+                  </a:lnTo>
+                  <a:lnTo>
+                    <a:pt x="3895692" y="1622336"/>
+                  </a:lnTo>
+                  <a:lnTo>
+                    <a:pt x="3972160" y="1638065"/>
+                  </a:lnTo>
+                  <a:lnTo>
+                    <a:pt x="4048629" y="1653411"/>
+                  </a:lnTo>
+                  <a:lnTo>
+                    <a:pt x="4125097" y="1668384"/>
+                  </a:lnTo>
+                  <a:lnTo>
+                    <a:pt x="4201566" y="1682991"/>
+                  </a:lnTo>
+                  <a:lnTo>
+                    <a:pt x="4278034" y="1697243"/>
+                  </a:lnTo>
+                  <a:lnTo>
+                    <a:pt x="4354503" y="1711147"/>
+                  </a:lnTo>
+                  <a:lnTo>
+                    <a:pt x="4430971" y="1724713"/>
+                  </a:lnTo>
+                  <a:lnTo>
+                    <a:pt x="4507439" y="1737949"/>
+                  </a:lnTo>
+                  <a:lnTo>
+                    <a:pt x="4583908" y="1750862"/>
+                  </a:lnTo>
+                  <a:lnTo>
+                    <a:pt x="4660376" y="1763461"/>
+                  </a:lnTo>
+                  <a:lnTo>
+                    <a:pt x="4736845" y="1775752"/>
+                  </a:lnTo>
+                  <a:lnTo>
+                    <a:pt x="4813313" y="1787745"/>
+                  </a:lnTo>
+                  <a:lnTo>
+                    <a:pt x="4889782" y="1799445"/>
+                  </a:lnTo>
+                  <a:lnTo>
+                    <a:pt x="4966250" y="1810860"/>
+                  </a:lnTo>
+                  <a:lnTo>
+                    <a:pt x="5042719" y="1821997"/>
+                  </a:lnTo>
+                  <a:lnTo>
+                    <a:pt x="5119187" y="1832863"/>
+                  </a:lnTo>
+                  <a:lnTo>
+                    <a:pt x="5195655" y="1843464"/>
+                  </a:lnTo>
+                  <a:lnTo>
+                    <a:pt x="5272124" y="1853807"/>
+                  </a:lnTo>
+                  <a:lnTo>
+                    <a:pt x="5348592" y="1863899"/>
+                  </a:lnTo>
+                  <a:lnTo>
+                    <a:pt x="5425061" y="1873744"/>
+                  </a:lnTo>
+                  <a:lnTo>
+                    <a:pt x="5501529" y="1883349"/>
+                  </a:lnTo>
+                  <a:lnTo>
+                    <a:pt x="5577998" y="1892721"/>
+                  </a:lnTo>
+                  <a:lnTo>
+                    <a:pt x="5654466" y="1901864"/>
+                  </a:lnTo>
+                  <a:lnTo>
+                    <a:pt x="5730934" y="1910785"/>
+                  </a:lnTo>
+                  <a:lnTo>
+                    <a:pt x="5807403" y="1919488"/>
+                  </a:lnTo>
+                  <a:lnTo>
+                    <a:pt x="5883871" y="1927979"/>
+                  </a:lnTo>
+                  <a:lnTo>
+                    <a:pt x="5960340" y="1936264"/>
+                  </a:lnTo>
+                  <a:lnTo>
+                    <a:pt x="6036808" y="1944347"/>
+                  </a:lnTo>
+                  <a:lnTo>
+                    <a:pt x="6113277" y="1952232"/>
+                  </a:lnTo>
+                  <a:lnTo>
+                    <a:pt x="6189745" y="1959926"/>
+                  </a:lnTo>
+                  <a:lnTo>
+                    <a:pt x="6266213" y="1967432"/>
+                  </a:lnTo>
+                  <a:lnTo>
+                    <a:pt x="6342682" y="1974756"/>
+                  </a:lnTo>
+                  <a:lnTo>
+                    <a:pt x="6419150" y="1981901"/>
+                  </a:lnTo>
+                  <a:lnTo>
+                    <a:pt x="6495619" y="1988872"/>
+                  </a:lnTo>
+                  <a:lnTo>
+                    <a:pt x="6572087" y="1995673"/>
+                  </a:lnTo>
+                  <a:lnTo>
+                    <a:pt x="6648556" y="2002309"/>
+                  </a:lnTo>
+                  <a:lnTo>
+                    <a:pt x="6725024" y="2008783"/>
+                  </a:lnTo>
+                  <a:lnTo>
+                    <a:pt x="6801492" y="2015099"/>
+                  </a:lnTo>
+                  <a:lnTo>
+                    <a:pt x="6877961" y="2021262"/>
+                  </a:lnTo>
+                  <a:lnTo>
+                    <a:pt x="6954429" y="2027274"/>
+                  </a:lnTo>
+                  <a:lnTo>
+                    <a:pt x="7030898" y="2033140"/>
+                  </a:lnTo>
+                  <a:lnTo>
+                    <a:pt x="7107366" y="2038863"/>
+                  </a:lnTo>
+                  <a:lnTo>
+                    <a:pt x="7183835" y="2044447"/>
+                  </a:lnTo>
+                  <a:lnTo>
+                    <a:pt x="7260303" y="2049895"/>
                   </a:lnTo>
                 </a:path>
               </a:pathLst>
@@ -4443,21 +4443,21 @@
           </p:nvSpPr>
           <p:spPr>
             <a:xfrm>
-              <a:off x="817517" y="4727786"/>
-              <a:ext cx="7799693" cy="0"/>
+              <a:off x="915645" y="4684908"/>
+              <a:ext cx="7682587" cy="0"/>
             </a:xfrm>
             <a:custGeom>
               <a:avLst/>
               <a:pathLst>
-                <a:path w="7799693" h="0">
+                <a:path w="7682587" h="0">
                   <a:moveTo>
                     <a:pt x="0" y="0"/>
                   </a:moveTo>
                   <a:lnTo>
-                    <a:pt x="7799693" y="0"/>
-                  </a:lnTo>
-                  <a:lnTo>
-                    <a:pt x="7799693" y="0"/>
+                    <a:pt x="7682587" y="0"/>
+                  </a:lnTo>
+                  <a:lnTo>
+                    <a:pt x="7682587" y="0"/>
                   </a:lnTo>
                 </a:path>
               </a:pathLst>
@@ -4486,15 +4486,15 @@
           </p:nvSpPr>
           <p:spPr>
             <a:xfrm>
-              <a:off x="4203673" y="2073503"/>
-              <a:ext cx="0" cy="3649639"/>
+              <a:off x="4250960" y="2209169"/>
+              <a:ext cx="0" cy="3404141"/>
             </a:xfrm>
             <a:custGeom>
               <a:avLst/>
               <a:pathLst>
-                <a:path w="0" h="3649639">
+                <a:path w="0" h="3404141">
                   <a:moveTo>
-                    <a:pt x="0" y="3649639"/>
+                    <a:pt x="0" y="3404141"/>
                   </a:moveTo>
                   <a:lnTo>
                     <a:pt x="0" y="0"/>
@@ -4529,8 +4529,8 @@
           </p:nvSpPr>
           <p:spPr>
             <a:xfrm>
-              <a:off x="692708" y="5517199"/>
-              <a:ext cx="62179" cy="80101"/>
+              <a:off x="756929" y="5407599"/>
+              <a:ext cx="79004" cy="101955"/>
             </a:xfrm>
             <a:prstGeom prst="rect">
               <a:avLst/>
@@ -4543,7 +4543,7 @@
             <a:p>
               <a:pPr algn="l" marL="0" marR="0" indent="0">
                 <a:lnSpc>
-                  <a:spcPts val="880"/>
+                  <a:spcPts val="1120"/>
                 </a:lnSpc>
                 <a:spcBef>
                   <a:spcPts val="0"/>
@@ -4553,7 +4553,7 @@
                 </a:spcAft>
               </a:pPr>
               <a:r>
-                <a:rPr sz="880">
+                <a:rPr sz="1120">
                   <a:solidFill>
                     <a:srgbClr val="4D4D4D">
                       <a:alpha val="100000"/>
@@ -4575,8 +4575,8 @@
           </p:nvSpPr>
           <p:spPr>
             <a:xfrm>
-              <a:off x="692708" y="4687735"/>
-              <a:ext cx="62179" cy="80101"/>
+              <a:off x="756929" y="4633931"/>
+              <a:ext cx="79004" cy="101955"/>
             </a:xfrm>
             <a:prstGeom prst="rect">
               <a:avLst/>
@@ -4589,7 +4589,7 @@
             <a:p>
               <a:pPr algn="l" marL="0" marR="0" indent="0">
                 <a:lnSpc>
-                  <a:spcPts val="880"/>
+                  <a:spcPts val="1120"/>
                 </a:lnSpc>
                 <a:spcBef>
                   <a:spcPts val="0"/>
@@ -4599,7 +4599,7 @@
                 </a:spcAft>
               </a:pPr>
               <a:r>
-                <a:rPr sz="880">
+                <a:rPr sz="1120">
                   <a:solidFill>
                     <a:srgbClr val="4D4D4D">
                       <a:alpha val="100000"/>
@@ -4621,8 +4621,8 @@
           </p:nvSpPr>
           <p:spPr>
             <a:xfrm>
-              <a:off x="692708" y="3858272"/>
-              <a:ext cx="62179" cy="80101"/>
+              <a:off x="756929" y="3860262"/>
+              <a:ext cx="79004" cy="101955"/>
             </a:xfrm>
             <a:prstGeom prst="rect">
               <a:avLst/>
@@ -4635,7 +4635,7 @@
             <a:p>
               <a:pPr algn="l" marL="0" marR="0" indent="0">
                 <a:lnSpc>
-                  <a:spcPts val="880"/>
+                  <a:spcPts val="1120"/>
                 </a:lnSpc>
                 <a:spcBef>
                   <a:spcPts val="0"/>
@@ -4645,7 +4645,7 @@
                 </a:spcAft>
               </a:pPr>
               <a:r>
-                <a:rPr sz="880">
+                <a:rPr sz="1120">
                   <a:solidFill>
                     <a:srgbClr val="4D4D4D">
                       <a:alpha val="100000"/>
@@ -4667,8 +4667,8 @@
           </p:nvSpPr>
           <p:spPr>
             <a:xfrm>
-              <a:off x="692708" y="3028808"/>
-              <a:ext cx="62179" cy="80101"/>
+              <a:off x="756929" y="3086593"/>
+              <a:ext cx="79004" cy="101955"/>
             </a:xfrm>
             <a:prstGeom prst="rect">
               <a:avLst/>
@@ -4681,7 +4681,7 @@
             <a:p>
               <a:pPr algn="l" marL="0" marR="0" indent="0">
                 <a:lnSpc>
-                  <a:spcPts val="880"/>
+                  <a:spcPts val="1120"/>
                 </a:lnSpc>
                 <a:spcBef>
                   <a:spcPts val="0"/>
@@ -4691,7 +4691,7 @@
                 </a:spcAft>
               </a:pPr>
               <a:r>
-                <a:rPr sz="880">
+                <a:rPr sz="1120">
                   <a:solidFill>
                     <a:srgbClr val="4D4D4D">
                       <a:alpha val="100000"/>
@@ -4713,8 +4713,8 @@
           </p:nvSpPr>
           <p:spPr>
             <a:xfrm>
-              <a:off x="692708" y="2199345"/>
-              <a:ext cx="62179" cy="80101"/>
+              <a:off x="756929" y="2312925"/>
+              <a:ext cx="79004" cy="101955"/>
             </a:xfrm>
             <a:prstGeom prst="rect">
               <a:avLst/>
@@ -4727,7 +4727,7 @@
             <a:p>
               <a:pPr algn="l" marL="0" marR="0" indent="0">
                 <a:lnSpc>
-                  <a:spcPts val="880"/>
+                  <a:spcPts val="1120"/>
                 </a:lnSpc>
                 <a:spcBef>
                   <a:spcPts val="0"/>
@@ -4737,7 +4737,7 @@
                 </a:spcAft>
               </a:pPr>
               <a:r>
-                <a:rPr sz="880">
+                <a:rPr sz="1120">
                   <a:solidFill>
                     <a:srgbClr val="4D4D4D">
                       <a:alpha val="100000"/>
@@ -4759,8 +4759,8 @@
           </p:nvSpPr>
           <p:spPr>
             <a:xfrm>
-              <a:off x="2423864" y="5785772"/>
-              <a:ext cx="155356" cy="80101"/>
+              <a:off x="2475630" y="5693022"/>
+              <a:ext cx="197510" cy="101955"/>
             </a:xfrm>
             <a:prstGeom prst="rect">
               <a:avLst/>
@@ -4773,7 +4773,7 @@
             <a:p>
               <a:pPr algn="l" marL="0" marR="0" indent="0">
                 <a:lnSpc>
-                  <a:spcPts val="880"/>
+                  <a:spcPts val="1120"/>
                 </a:lnSpc>
                 <a:spcBef>
                   <a:spcPts val="0"/>
@@ -4783,7 +4783,7 @@
                 </a:spcAft>
               </a:pPr>
               <a:r>
-                <a:rPr sz="880">
+                <a:rPr sz="1120">
                   <a:solidFill>
                     <a:srgbClr val="4D4D4D">
                       <a:alpha val="100000"/>
@@ -4805,8 +4805,8 @@
           </p:nvSpPr>
           <p:spPr>
             <a:xfrm>
-              <a:off x="4196521" y="5785772"/>
-              <a:ext cx="155356" cy="80101"/>
+              <a:off x="4221672" y="5693022"/>
+              <a:ext cx="197510" cy="101955"/>
             </a:xfrm>
             <a:prstGeom prst="rect">
               <a:avLst/>
@@ -4819,7 +4819,7 @@
             <a:p>
               <a:pPr algn="l" marL="0" marR="0" indent="0">
                 <a:lnSpc>
-                  <a:spcPts val="880"/>
+                  <a:spcPts val="1120"/>
                 </a:lnSpc>
                 <a:spcBef>
                   <a:spcPts val="0"/>
@@ -4829,7 +4829,7 @@
                 </a:spcAft>
               </a:pPr>
               <a:r>
-                <a:rPr sz="880">
+                <a:rPr sz="1120">
                   <a:solidFill>
                     <a:srgbClr val="4D4D4D">
                       <a:alpha val="100000"/>
@@ -4851,8 +4851,8 @@
           </p:nvSpPr>
           <p:spPr>
             <a:xfrm>
-              <a:off x="5969179" y="5785772"/>
-              <a:ext cx="155356" cy="80101"/>
+              <a:off x="5967715" y="5693022"/>
+              <a:ext cx="197510" cy="101955"/>
             </a:xfrm>
             <a:prstGeom prst="rect">
               <a:avLst/>
@@ -4865,7 +4865,7 @@
             <a:p>
               <a:pPr algn="l" marL="0" marR="0" indent="0">
                 <a:lnSpc>
-                  <a:spcPts val="880"/>
+                  <a:spcPts val="1120"/>
                 </a:lnSpc>
                 <a:spcBef>
                   <a:spcPts val="0"/>
@@ -4875,7 +4875,7 @@
                 </a:spcAft>
               </a:pPr>
               <a:r>
-                <a:rPr sz="880">
+                <a:rPr sz="1120">
                   <a:solidFill>
                     <a:srgbClr val="4D4D4D">
                       <a:alpha val="100000"/>
@@ -4897,8 +4897,8 @@
           </p:nvSpPr>
           <p:spPr>
             <a:xfrm>
-              <a:off x="7741836" y="5785772"/>
-              <a:ext cx="155356" cy="80101"/>
+              <a:off x="7713757" y="5693022"/>
+              <a:ext cx="197510" cy="101955"/>
             </a:xfrm>
             <a:prstGeom prst="rect">
               <a:avLst/>
@@ -4911,7 +4911,7 @@
             <a:p>
               <a:pPr algn="l" marL="0" marR="0" indent="0">
                 <a:lnSpc>
-                  <a:spcPts val="880"/>
+                  <a:spcPts val="1120"/>
                 </a:lnSpc>
                 <a:spcBef>
                   <a:spcPts val="0"/>
@@ -4921,7 +4921,7 @@
                 </a:spcAft>
               </a:pPr>
               <a:r>
-                <a:rPr sz="880">
+                <a:rPr sz="1120">
                   <a:solidFill>
                     <a:srgbClr val="4D4D4D">
                       <a:alpha val="100000"/>
@@ -4943,8 +4943,8 @@
           </p:nvSpPr>
           <p:spPr>
             <a:xfrm>
-              <a:off x="3879271" y="5925448"/>
-              <a:ext cx="1676186" cy="100218"/>
+              <a:off x="3690153" y="5870717"/>
+              <a:ext cx="2133569" cy="127558"/>
             </a:xfrm>
             <a:prstGeom prst="rect">
               <a:avLst/>
@@ -4957,7 +4957,7 @@
             <a:p>
               <a:pPr algn="l" marL="0" marR="0" indent="0">
                 <a:lnSpc>
-                  <a:spcPts val="1100"/>
+                  <a:spcPts val="1400"/>
                 </a:lnSpc>
                 <a:spcBef>
                   <a:spcPts val="0"/>
@@ -4967,7 +4967,7 @@
                 </a:spcAft>
               </a:pPr>
               <a:r>
-                <a:rPr sz="1100">
+                <a:rPr sz="1400">
                   <a:solidFill>
                     <a:srgbClr val="000000">
                       <a:alpha val="100000"/>
@@ -4989,8 +4989,8 @@
           </p:nvSpPr>
           <p:spPr>
             <a:xfrm rot="-5400000">
-              <a:off x="68446" y="3848213"/>
-              <a:ext cx="1016904" cy="100218"/>
+              <a:off x="-37527" y="3847460"/>
+              <a:ext cx="1294150" cy="127558"/>
             </a:xfrm>
             <a:prstGeom prst="rect">
               <a:avLst/>
@@ -5003,7 +5003,7 @@
             <a:p>
               <a:pPr algn="l" marL="0" marR="0" indent="0">
                 <a:lnSpc>
-                  <a:spcPts val="1100"/>
+                  <a:spcPts val="1400"/>
                 </a:lnSpc>
                 <a:spcBef>
                   <a:spcPts val="0"/>
@@ -5013,7 +5013,7 @@
                 </a:spcAft>
               </a:pPr>
               <a:r>
-                <a:rPr sz="1100">
+                <a:rPr sz="1400">
                   <a:solidFill>
                     <a:srgbClr val="000000">
                       <a:alpha val="100000"/>
@@ -5035,8 +5035,8 @@
           </p:nvSpPr>
           <p:spPr>
             <a:xfrm>
-              <a:off x="817517" y="1896563"/>
-              <a:ext cx="4166463" cy="82021"/>
+              <a:off x="915645" y="1977589"/>
+              <a:ext cx="5556900" cy="109362"/>
             </a:xfrm>
             <a:prstGeom prst="rect">
               <a:avLst/>
@@ -5049,7 +5049,7 @@
             <a:p>
               <a:pPr algn="l" marL="0" marR="0" indent="0">
                 <a:lnSpc>
-                  <a:spcPts val="900"/>
+                  <a:spcPts val="1200"/>
                 </a:lnSpc>
                 <a:spcBef>
                   <a:spcPts val="0"/>
@@ -5059,7 +5059,7 @@
                 </a:spcAft>
               </a:pPr>
               <a:r>
-                <a:rPr sz="900">
+                <a:rPr sz="1200">
                   <a:solidFill>
                     <a:srgbClr val="404040">
                       <a:alpha val="100000"/>
@@ -5081,8 +5081,8 @@
           </p:nvSpPr>
           <p:spPr>
             <a:xfrm>
-              <a:off x="817517" y="1669789"/>
-              <a:ext cx="2514051" cy="120152"/>
+              <a:off x="915645" y="1688767"/>
+              <a:ext cx="3200582" cy="153070"/>
             </a:xfrm>
             <a:prstGeom prst="rect">
               <a:avLst/>
@@ -5095,7 +5095,7 @@
             <a:p>
               <a:pPr algn="l" marL="0" marR="0" indent="0">
                 <a:lnSpc>
-                  <a:spcPts val="1320"/>
+                  <a:spcPts val="1680"/>
                 </a:lnSpc>
                 <a:spcBef>
                   <a:spcPts val="0"/>
@@ -5105,7 +5105,7 @@
                 </a:spcAft>
               </a:pPr>
               <a:r>
-                <a:rPr sz="1320">
+                <a:rPr sz="1680">
                   <a:solidFill>
                     <a:srgbClr val="000000">
                       <a:alpha val="100000"/>
